--- a/Presentation1.pptx
+++ b/Presentation1.pptx
@@ -7,6 +7,10 @@
   <p:sldIdLst>
     <p:sldId id="256" r:id="rId2"/>
     <p:sldId id="257" r:id="rId3"/>
+    <p:sldId id="258" r:id="rId4"/>
+    <p:sldId id="259" r:id="rId5"/>
+    <p:sldId id="261" r:id="rId6"/>
+    <p:sldId id="260" r:id="rId7"/>
   </p:sldIdLst>
   <p:sldSz cx="12192000" cy="6858000"/>
   <p:notesSz cx="6858000" cy="9144000"/>
@@ -105,6 +109,11 @@
       </a:defRPr>
     </a:lvl9pPr>
   </p:defaultTextStyle>
+  <p:extLst>
+    <p:ext uri="{EFAFB233-063F-42B5-8137-9DF3F51BA10A}">
+      <p15:sldGuideLst xmlns:p15="http://schemas.microsoft.com/office/powerpoint/2012/main"/>
+    </p:ext>
+  </p:extLst>
 </p:presentation>
 </file>
 
@@ -257,7 +266,7 @@
           <a:p>
             <a:fld id="{F7617E6C-B4C1-F64F-9F0E-38D55D0C6E24}" type="datetimeFigureOut">
               <a:rPr lang="en-GB" smtClean="0"/>
-              <a:t>08/04/2026</a:t>
+              <a:t>10/04/2026</a:t>
             </a:fld>
             <a:endParaRPr lang="en-GB"/>
           </a:p>
@@ -457,7 +466,7 @@
           <a:p>
             <a:fld id="{F7617E6C-B4C1-F64F-9F0E-38D55D0C6E24}" type="datetimeFigureOut">
               <a:rPr lang="en-GB" smtClean="0"/>
-              <a:t>08/04/2026</a:t>
+              <a:t>10/04/2026</a:t>
             </a:fld>
             <a:endParaRPr lang="en-GB"/>
           </a:p>
@@ -667,7 +676,7 @@
           <a:p>
             <a:fld id="{F7617E6C-B4C1-F64F-9F0E-38D55D0C6E24}" type="datetimeFigureOut">
               <a:rPr lang="en-GB" smtClean="0"/>
-              <a:t>08/04/2026</a:t>
+              <a:t>10/04/2026</a:t>
             </a:fld>
             <a:endParaRPr lang="en-GB"/>
           </a:p>
@@ -867,7 +876,7 @@
           <a:p>
             <a:fld id="{F7617E6C-B4C1-F64F-9F0E-38D55D0C6E24}" type="datetimeFigureOut">
               <a:rPr lang="en-GB" smtClean="0"/>
-              <a:t>08/04/2026</a:t>
+              <a:t>10/04/2026</a:t>
             </a:fld>
             <a:endParaRPr lang="en-GB"/>
           </a:p>
@@ -1143,7 +1152,7 @@
           <a:p>
             <a:fld id="{F7617E6C-B4C1-F64F-9F0E-38D55D0C6E24}" type="datetimeFigureOut">
               <a:rPr lang="en-GB" smtClean="0"/>
-              <a:t>08/04/2026</a:t>
+              <a:t>10/04/2026</a:t>
             </a:fld>
             <a:endParaRPr lang="en-GB"/>
           </a:p>
@@ -1411,7 +1420,7 @@
           <a:p>
             <a:fld id="{F7617E6C-B4C1-F64F-9F0E-38D55D0C6E24}" type="datetimeFigureOut">
               <a:rPr lang="en-GB" smtClean="0"/>
-              <a:t>08/04/2026</a:t>
+              <a:t>10/04/2026</a:t>
             </a:fld>
             <a:endParaRPr lang="en-GB"/>
           </a:p>
@@ -1826,7 +1835,7 @@
           <a:p>
             <a:fld id="{F7617E6C-B4C1-F64F-9F0E-38D55D0C6E24}" type="datetimeFigureOut">
               <a:rPr lang="en-GB" smtClean="0"/>
-              <a:t>08/04/2026</a:t>
+              <a:t>10/04/2026</a:t>
             </a:fld>
             <a:endParaRPr lang="en-GB"/>
           </a:p>
@@ -1968,7 +1977,7 @@
           <a:p>
             <a:fld id="{F7617E6C-B4C1-F64F-9F0E-38D55D0C6E24}" type="datetimeFigureOut">
               <a:rPr lang="en-GB" smtClean="0"/>
-              <a:t>08/04/2026</a:t>
+              <a:t>10/04/2026</a:t>
             </a:fld>
             <a:endParaRPr lang="en-GB"/>
           </a:p>
@@ -2081,7 +2090,7 @@
           <a:p>
             <a:fld id="{F7617E6C-B4C1-F64F-9F0E-38D55D0C6E24}" type="datetimeFigureOut">
               <a:rPr lang="en-GB" smtClean="0"/>
-              <a:t>08/04/2026</a:t>
+              <a:t>10/04/2026</a:t>
             </a:fld>
             <a:endParaRPr lang="en-GB"/>
           </a:p>
@@ -2394,7 +2403,7 @@
           <a:p>
             <a:fld id="{F7617E6C-B4C1-F64F-9F0E-38D55D0C6E24}" type="datetimeFigureOut">
               <a:rPr lang="en-GB" smtClean="0"/>
-              <a:t>08/04/2026</a:t>
+              <a:t>10/04/2026</a:t>
             </a:fld>
             <a:endParaRPr lang="en-GB"/>
           </a:p>
@@ -2683,7 +2692,7 @@
           <a:p>
             <a:fld id="{F7617E6C-B4C1-F64F-9F0E-38D55D0C6E24}" type="datetimeFigureOut">
               <a:rPr lang="en-GB" smtClean="0"/>
-              <a:t>08/04/2026</a:t>
+              <a:t>10/04/2026</a:t>
             </a:fld>
             <a:endParaRPr lang="en-GB"/>
           </a:p>
@@ -2926,7 +2935,7 @@
           <a:p>
             <a:fld id="{F7617E6C-B4C1-F64F-9F0E-38D55D0C6E24}" type="datetimeFigureOut">
               <a:rPr lang="en-GB" smtClean="0"/>
-              <a:t>08/04/2026</a:t>
+              <a:t>10/04/2026</a:t>
             </a:fld>
             <a:endParaRPr lang="en-GB"/>
           </a:p>
@@ -3551,6 +3560,1029 @@
 </p:sld>
 </file>
 
+<file path=ppt/slides/slide3.xml><?xml version="1.0" encoding="utf-8"?>
+<p:sld xmlns:a="http://schemas.openxmlformats.org/drawingml/2006/main" xmlns:r="http://schemas.openxmlformats.org/officeDocument/2006/relationships" xmlns:p="http://schemas.openxmlformats.org/presentationml/2006/main">
+  <p:cSld>
+    <p:spTree>
+      <p:nvGrpSpPr>
+        <p:cNvPr id="1" name=""/>
+        <p:cNvGrpSpPr/>
+        <p:nvPr/>
+      </p:nvGrpSpPr>
+      <p:grpSpPr>
+        <a:xfrm>
+          <a:off x="0" y="0"/>
+          <a:ext cx="0" cy="0"/>
+          <a:chOff x="0" y="0"/>
+          <a:chExt cx="0" cy="0"/>
+        </a:xfrm>
+      </p:grpSpPr>
+      <p:sp>
+        <p:nvSpPr>
+          <p:cNvPr id="20" name="Rectangle 19">
+            <a:extLst>
+              <a:ext uri="{FF2B5EF4-FFF2-40B4-BE49-F238E27FC236}">
+                <a16:creationId xmlns:a16="http://schemas.microsoft.com/office/drawing/2014/main" id="{A4C53363-07AA-9C4E-8276-2628BFA85A65}"/>
+              </a:ext>
+            </a:extLst>
+          </p:cNvPr>
+          <p:cNvSpPr/>
+          <p:nvPr/>
+        </p:nvSpPr>
+        <p:spPr>
+          <a:xfrm>
+            <a:off x="234778" y="89691"/>
+            <a:ext cx="13159946" cy="5339923"/>
+          </a:xfrm>
+          <a:prstGeom prst="rect">
+            <a:avLst/>
+          </a:prstGeom>
+        </p:spPr>
+        <p:txBody>
+          <a:bodyPr wrap="square">
+            <a:spAutoFit/>
+          </a:bodyPr>
+          <a:lstStyle/>
+          <a:p>
+            <a:r>
+              <a:rPr lang="es-ES" sz="1100" dirty="0">
+                <a:latin typeface="Menlo" panose="020B0609030804020204" pitchFamily="49" charset="0"/>
+              </a:rPr>
+              <a:t>Los cambios clave están en dos sitios del servicio</a:t>
+            </a:r>
+          </a:p>
+          <a:p>
+            <a:r>
+              <a:rPr lang="es-ES" sz="1100" dirty="0">
+                <a:latin typeface="Menlo" panose="020B0609030804020204" pitchFamily="49" charset="0"/>
+              </a:rPr>
+              <a:t>1. El </a:t>
+            </a:r>
+            <a:r>
+              <a:rPr lang="es-ES" sz="1100" dirty="0" err="1">
+                <a:latin typeface="Menlo" panose="020B0609030804020204" pitchFamily="49" charset="0"/>
+              </a:rPr>
+              <a:t>Executor</a:t>
+            </a:r>
+            <a:r>
+              <a:rPr lang="es-ES" sz="1100" dirty="0">
+                <a:latin typeface="Menlo" panose="020B0609030804020204" pitchFamily="49" charset="0"/>
+              </a:rPr>
+              <a:t> — la línea más importante de toda la demo</a:t>
+            </a:r>
+          </a:p>
+          <a:p>
+            <a:pPr lvl="1"/>
+            <a:r>
+              <a:rPr lang="es-ES" sz="1100" dirty="0" err="1">
+                <a:latin typeface="Menlo" panose="020B0609030804020204" pitchFamily="49" charset="0"/>
+              </a:rPr>
+              <a:t>Platform</a:t>
+            </a:r>
+            <a:r>
+              <a:rPr lang="es-ES" sz="1100" dirty="0">
+                <a:latin typeface="Menlo" panose="020B0609030804020204" pitchFamily="49" charset="0"/>
+              </a:rPr>
+              <a:t> </a:t>
+            </a:r>
+            <a:r>
+              <a:rPr lang="es-ES" sz="1100" dirty="0" err="1">
+                <a:latin typeface="Menlo" panose="020B0609030804020204" pitchFamily="49" charset="0"/>
+              </a:rPr>
+              <a:t>Threads</a:t>
+            </a:r>
+            <a:r>
+              <a:rPr lang="es-ES" sz="1100" dirty="0">
+                <a:latin typeface="Menlo" panose="020B0609030804020204" pitchFamily="49" charset="0"/>
+              </a:rPr>
+              <a:t> — PlatformThreadLoadGeneratorService.java:69</a:t>
+            </a:r>
+          </a:p>
+          <a:p>
+            <a:pPr lvl="1"/>
+            <a:br>
+              <a:rPr lang="es-ES" sz="1100" dirty="0">
+                <a:latin typeface="Menlo" panose="020B0609030804020204" pitchFamily="49" charset="0"/>
+              </a:rPr>
+            </a:br>
+            <a:r>
+              <a:rPr lang="es-ES" sz="1100" dirty="0" err="1">
+                <a:latin typeface="Menlo" panose="020B0609030804020204" pitchFamily="49" charset="0"/>
+              </a:rPr>
+              <a:t>ExecutorService</a:t>
+            </a:r>
+            <a:r>
+              <a:rPr lang="es-ES" sz="1100" dirty="0">
+                <a:latin typeface="Menlo" panose="020B0609030804020204" pitchFamily="49" charset="0"/>
+              </a:rPr>
+              <a:t> </a:t>
+            </a:r>
+            <a:r>
+              <a:rPr lang="es-ES" sz="1100" dirty="0" err="1">
+                <a:latin typeface="Menlo" panose="020B0609030804020204" pitchFamily="49" charset="0"/>
+              </a:rPr>
+              <a:t>executorService</a:t>
+            </a:r>
+            <a:r>
+              <a:rPr lang="es-ES" sz="1100" dirty="0">
+                <a:latin typeface="Menlo" panose="020B0609030804020204" pitchFamily="49" charset="0"/>
+              </a:rPr>
+              <a:t> = </a:t>
+            </a:r>
+            <a:r>
+              <a:rPr lang="es-ES" sz="1100" dirty="0" err="1">
+                <a:latin typeface="Menlo" panose="020B0609030804020204" pitchFamily="49" charset="0"/>
+              </a:rPr>
+              <a:t>Executors.newFixedThreadPool</a:t>
+            </a:r>
+            <a:r>
+              <a:rPr lang="es-ES" sz="1100" dirty="0">
+                <a:latin typeface="Menlo" panose="020B0609030804020204" pitchFamily="49" charset="0"/>
+              </a:rPr>
+              <a:t>(</a:t>
+            </a:r>
+            <a:r>
+              <a:rPr lang="es-ES" sz="1100" dirty="0" err="1">
+                <a:latin typeface="Menlo" panose="020B0609030804020204" pitchFamily="49" charset="0"/>
+              </a:rPr>
+              <a:t>request.getThreads</a:t>
+            </a:r>
+            <a:r>
+              <a:rPr lang="es-ES" sz="1100" dirty="0">
+                <a:latin typeface="Menlo" panose="020B0609030804020204" pitchFamily="49" charset="0"/>
+              </a:rPr>
+              <a:t>(), r -&gt; {</a:t>
+            </a:r>
+          </a:p>
+          <a:p>
+            <a:pPr lvl="1"/>
+            <a:r>
+              <a:rPr lang="es-ES" sz="1100" dirty="0" err="1">
+                <a:latin typeface="Menlo" panose="020B0609030804020204" pitchFamily="49" charset="0"/>
+              </a:rPr>
+              <a:t>Thread</a:t>
+            </a:r>
+            <a:r>
+              <a:rPr lang="es-ES" sz="1100" dirty="0">
+                <a:latin typeface="Menlo" panose="020B0609030804020204" pitchFamily="49" charset="0"/>
+              </a:rPr>
+              <a:t> </a:t>
+            </a:r>
+            <a:r>
+              <a:rPr lang="es-ES" sz="1100" dirty="0" err="1">
+                <a:latin typeface="Menlo" panose="020B0609030804020204" pitchFamily="49" charset="0"/>
+              </a:rPr>
+              <a:t>thread</a:t>
+            </a:r>
+            <a:r>
+              <a:rPr lang="es-ES" sz="1100" dirty="0">
+                <a:latin typeface="Menlo" panose="020B0609030804020204" pitchFamily="49" charset="0"/>
+              </a:rPr>
+              <a:t> = new </a:t>
+            </a:r>
+            <a:r>
+              <a:rPr lang="es-ES" sz="1100" dirty="0" err="1">
+                <a:latin typeface="Menlo" panose="020B0609030804020204" pitchFamily="49" charset="0"/>
+              </a:rPr>
+              <a:t>Thread</a:t>
+            </a:r>
+            <a:r>
+              <a:rPr lang="es-ES" sz="1100" dirty="0">
+                <a:latin typeface="Menlo" panose="020B0609030804020204" pitchFamily="49" charset="0"/>
+              </a:rPr>
+              <a:t>(r);</a:t>
+            </a:r>
+          </a:p>
+          <a:p>
+            <a:pPr lvl="1"/>
+            <a:r>
+              <a:rPr lang="es-ES" sz="1100" dirty="0" err="1">
+                <a:latin typeface="Menlo" panose="020B0609030804020204" pitchFamily="49" charset="0"/>
+              </a:rPr>
+              <a:t>thread.setName</a:t>
+            </a:r>
+            <a:r>
+              <a:rPr lang="es-ES" sz="1100" dirty="0">
+                <a:latin typeface="Menlo" panose="020B0609030804020204" pitchFamily="49" charset="0"/>
+              </a:rPr>
+              <a:t>("</a:t>
+            </a:r>
+            <a:r>
+              <a:rPr lang="es-ES" sz="1100" dirty="0" err="1">
+                <a:latin typeface="Menlo" panose="020B0609030804020204" pitchFamily="49" charset="0"/>
+              </a:rPr>
+              <a:t>platform-thread</a:t>
+            </a:r>
+            <a:r>
+              <a:rPr lang="es-ES" sz="1100" dirty="0">
+                <a:latin typeface="Menlo" panose="020B0609030804020204" pitchFamily="49" charset="0"/>
+              </a:rPr>
+              <a:t>-" + </a:t>
+            </a:r>
+            <a:r>
+              <a:rPr lang="es-ES" sz="1100" dirty="0" err="1">
+                <a:latin typeface="Menlo" panose="020B0609030804020204" pitchFamily="49" charset="0"/>
+              </a:rPr>
+              <a:t>System.currentTimeMillis</a:t>
+            </a:r>
+            <a:r>
+              <a:rPr lang="es-ES" sz="1100" dirty="0">
+                <a:latin typeface="Menlo" panose="020B0609030804020204" pitchFamily="49" charset="0"/>
+              </a:rPr>
+              <a:t>());</a:t>
+            </a:r>
+          </a:p>
+          <a:p>
+            <a:pPr lvl="1"/>
+            <a:r>
+              <a:rPr lang="es-ES" sz="1100" dirty="0" err="1">
+                <a:latin typeface="Menlo" panose="020B0609030804020204" pitchFamily="49" charset="0"/>
+              </a:rPr>
+              <a:t>return</a:t>
+            </a:r>
+            <a:r>
+              <a:rPr lang="es-ES" sz="1100" dirty="0">
+                <a:latin typeface="Menlo" panose="020B0609030804020204" pitchFamily="49" charset="0"/>
+              </a:rPr>
+              <a:t> </a:t>
+            </a:r>
+            <a:r>
+              <a:rPr lang="es-ES" sz="1100" dirty="0" err="1">
+                <a:latin typeface="Menlo" panose="020B0609030804020204" pitchFamily="49" charset="0"/>
+              </a:rPr>
+              <a:t>thread</a:t>
+            </a:r>
+            <a:r>
+              <a:rPr lang="es-ES" sz="1100" dirty="0">
+                <a:latin typeface="Menlo" panose="020B0609030804020204" pitchFamily="49" charset="0"/>
+              </a:rPr>
+              <a:t>;</a:t>
+            </a:r>
+          </a:p>
+          <a:p>
+            <a:pPr lvl="1"/>
+            <a:r>
+              <a:rPr lang="es-ES" sz="1100" dirty="0">
+                <a:latin typeface="Menlo" panose="020B0609030804020204" pitchFamily="49" charset="0"/>
+              </a:rPr>
+              <a:t>});</a:t>
+            </a:r>
+          </a:p>
+          <a:p>
+            <a:pPr lvl="1"/>
+            <a:r>
+              <a:rPr lang="es-ES" sz="1100" dirty="0">
+                <a:latin typeface="Menlo" panose="020B0609030804020204" pitchFamily="49" charset="0"/>
+              </a:rPr>
+              <a:t>Pool fijo. Si pides 1000 peticiones con 50 hilos, las 950 restantes esperan en cola.</a:t>
+            </a:r>
+          </a:p>
+          <a:p>
+            <a:pPr lvl="1"/>
+            <a:br>
+              <a:rPr lang="es-ES" sz="1100" dirty="0">
+                <a:latin typeface="Menlo" panose="020B0609030804020204" pitchFamily="49" charset="0"/>
+              </a:rPr>
+            </a:br>
+            <a:r>
+              <a:rPr lang="es-ES" sz="1100" dirty="0">
+                <a:latin typeface="Menlo" panose="020B0609030804020204" pitchFamily="49" charset="0"/>
+              </a:rPr>
+              <a:t>Virtual </a:t>
+            </a:r>
+            <a:r>
+              <a:rPr lang="es-ES" sz="1100" dirty="0" err="1">
+                <a:latin typeface="Menlo" panose="020B0609030804020204" pitchFamily="49" charset="0"/>
+              </a:rPr>
+              <a:t>Threads</a:t>
+            </a:r>
+            <a:r>
+              <a:rPr lang="es-ES" sz="1100" dirty="0">
+                <a:latin typeface="Menlo" panose="020B0609030804020204" pitchFamily="49" charset="0"/>
+              </a:rPr>
+              <a:t> — VirtualThreadLoadGeneratorService.java:69</a:t>
+            </a:r>
+          </a:p>
+          <a:p>
+            <a:pPr lvl="1"/>
+            <a:br>
+              <a:rPr lang="es-ES" sz="1100" dirty="0">
+                <a:latin typeface="Menlo" panose="020B0609030804020204" pitchFamily="49" charset="0"/>
+              </a:rPr>
+            </a:br>
+            <a:r>
+              <a:rPr lang="es-ES" sz="1100" dirty="0" err="1">
+                <a:latin typeface="Menlo" panose="020B0609030804020204" pitchFamily="49" charset="0"/>
+              </a:rPr>
+              <a:t>ExecutorService</a:t>
+            </a:r>
+            <a:r>
+              <a:rPr lang="es-ES" sz="1100" dirty="0">
+                <a:latin typeface="Menlo" panose="020B0609030804020204" pitchFamily="49" charset="0"/>
+              </a:rPr>
+              <a:t> </a:t>
+            </a:r>
+            <a:r>
+              <a:rPr lang="es-ES" sz="1100" dirty="0" err="1">
+                <a:latin typeface="Menlo" panose="020B0609030804020204" pitchFamily="49" charset="0"/>
+              </a:rPr>
+              <a:t>executorService</a:t>
+            </a:r>
+            <a:r>
+              <a:rPr lang="es-ES" sz="1100" dirty="0">
+                <a:latin typeface="Menlo" panose="020B0609030804020204" pitchFamily="49" charset="0"/>
+              </a:rPr>
+              <a:t> = </a:t>
+            </a:r>
+            <a:r>
+              <a:rPr lang="es-ES" sz="1100" dirty="0" err="1">
+                <a:latin typeface="Menlo" panose="020B0609030804020204" pitchFamily="49" charset="0"/>
+              </a:rPr>
+              <a:t>Executors.newVirtualThreadPerTaskExecutor</a:t>
+            </a:r>
+            <a:r>
+              <a:rPr lang="es-ES" sz="1100" dirty="0">
+                <a:latin typeface="Menlo" panose="020B0609030804020204" pitchFamily="49" charset="0"/>
+              </a:rPr>
+              <a:t>();</a:t>
+            </a:r>
+          </a:p>
+          <a:p>
+            <a:pPr lvl="1"/>
+            <a:r>
+              <a:rPr lang="es-ES" sz="1100" dirty="0">
+                <a:latin typeface="Menlo" panose="020B0609030804020204" pitchFamily="49" charset="0"/>
+              </a:rPr>
+              <a:t>Una sola línea distinta. Sin límite de hilos, sin pool. El resto del servicio es idéntico al </a:t>
+            </a:r>
+            <a:r>
+              <a:rPr lang="es-ES" sz="1100" dirty="0" err="1">
+                <a:latin typeface="Menlo" panose="020B0609030804020204" pitchFamily="49" charset="0"/>
+              </a:rPr>
+              <a:t>blocking</a:t>
+            </a:r>
+            <a:r>
+              <a:rPr lang="es-ES" sz="1100" dirty="0">
+                <a:latin typeface="Menlo" panose="020B0609030804020204" pitchFamily="49" charset="0"/>
+              </a:rPr>
+              <a:t>.</a:t>
+            </a:r>
+          </a:p>
+          <a:p>
+            <a:br>
+              <a:rPr lang="es-ES" sz="1100" dirty="0">
+                <a:latin typeface="Menlo" panose="020B0609030804020204" pitchFamily="49" charset="0"/>
+              </a:rPr>
+            </a:br>
+            <a:r>
+              <a:rPr lang="es-ES" sz="1100" dirty="0">
+                <a:latin typeface="Menlo" panose="020B0609030804020204" pitchFamily="49" charset="0"/>
+              </a:rPr>
+              <a:t>2. El modelo de programación — Reactive es el que rompe el molde</a:t>
+            </a:r>
+          </a:p>
+          <a:p>
+            <a:r>
+              <a:rPr lang="es-ES" sz="1100" dirty="0">
+                <a:latin typeface="Menlo" panose="020B0609030804020204" pitchFamily="49" charset="0"/>
+              </a:rPr>
+              <a:t>Reactive — ReactiveLoadGeneratorService.java:60</a:t>
+            </a:r>
+            <a:br>
+              <a:rPr lang="es-ES" sz="1100" dirty="0">
+                <a:latin typeface="Menlo" panose="020B0609030804020204" pitchFamily="49" charset="0"/>
+              </a:rPr>
+            </a:br>
+            <a:br>
+              <a:rPr lang="es-ES" sz="1100" dirty="0">
+                <a:latin typeface="Menlo" panose="020B0609030804020204" pitchFamily="49" charset="0"/>
+              </a:rPr>
+            </a:br>
+            <a:r>
+              <a:rPr lang="es-ES" sz="1100" dirty="0">
+                <a:latin typeface="Menlo" panose="020B0609030804020204" pitchFamily="49" charset="0"/>
+              </a:rPr>
+              <a:t>// Firma del método: devuelve Mono, no </a:t>
+            </a:r>
+            <a:r>
+              <a:rPr lang="es-ES" sz="1100" dirty="0" err="1">
+                <a:latin typeface="Menlo" panose="020B0609030804020204" pitchFamily="49" charset="0"/>
+              </a:rPr>
+              <a:t>LoadResponse</a:t>
+            </a:r>
+            <a:endParaRPr lang="es-ES" sz="1100" dirty="0">
+              <a:latin typeface="Menlo" panose="020B0609030804020204" pitchFamily="49" charset="0"/>
+            </a:endParaRPr>
+          </a:p>
+          <a:p>
+            <a:pPr lvl="1"/>
+            <a:r>
+              <a:rPr lang="es-ES" sz="1100" dirty="0" err="1">
+                <a:latin typeface="Menlo" panose="020B0609030804020204" pitchFamily="49" charset="0"/>
+              </a:rPr>
+              <a:t>public</a:t>
+            </a:r>
+            <a:r>
+              <a:rPr lang="es-ES" sz="1100" dirty="0">
+                <a:latin typeface="Menlo" panose="020B0609030804020204" pitchFamily="49" charset="0"/>
+              </a:rPr>
+              <a:t> Mono&lt;</a:t>
+            </a:r>
+            <a:r>
+              <a:rPr lang="es-ES" sz="1100" dirty="0" err="1">
+                <a:latin typeface="Menlo" panose="020B0609030804020204" pitchFamily="49" charset="0"/>
+              </a:rPr>
+              <a:t>LoadResponse</a:t>
+            </a:r>
+            <a:r>
+              <a:rPr lang="es-ES" sz="1100" dirty="0">
+                <a:latin typeface="Menlo" panose="020B0609030804020204" pitchFamily="49" charset="0"/>
+              </a:rPr>
+              <a:t>&gt; </a:t>
+            </a:r>
+            <a:r>
+              <a:rPr lang="es-ES" sz="1100" dirty="0" err="1">
+                <a:latin typeface="Menlo" panose="020B0609030804020204" pitchFamily="49" charset="0"/>
+              </a:rPr>
+              <a:t>executeLoad</a:t>
+            </a:r>
+            <a:r>
+              <a:rPr lang="es-ES" sz="1100" dirty="0">
+                <a:latin typeface="Menlo" panose="020B0609030804020204" pitchFamily="49" charset="0"/>
+              </a:rPr>
+              <a:t>(</a:t>
+            </a:r>
+            <a:r>
+              <a:rPr lang="es-ES" sz="1100" dirty="0" err="1">
+                <a:latin typeface="Menlo" panose="020B0609030804020204" pitchFamily="49" charset="0"/>
+              </a:rPr>
+              <a:t>LoadRequest</a:t>
+            </a:r>
+            <a:r>
+              <a:rPr lang="es-ES" sz="1100" dirty="0">
+                <a:latin typeface="Menlo" panose="020B0609030804020204" pitchFamily="49" charset="0"/>
+              </a:rPr>
+              <a:t> </a:t>
+            </a:r>
+            <a:r>
+              <a:rPr lang="es-ES" sz="1100" dirty="0" err="1">
+                <a:latin typeface="Menlo" panose="020B0609030804020204" pitchFamily="49" charset="0"/>
+              </a:rPr>
+              <a:t>request</a:t>
+            </a:r>
+            <a:r>
+              <a:rPr lang="es-ES" sz="1100" dirty="0">
+                <a:latin typeface="Menlo" panose="020B0609030804020204" pitchFamily="49" charset="0"/>
+              </a:rPr>
+              <a:t>) {</a:t>
+            </a:r>
+          </a:p>
+          <a:p>
+            <a:pPr lvl="1"/>
+            <a:br>
+              <a:rPr lang="es-ES" sz="1100" dirty="0">
+                <a:latin typeface="Menlo" panose="020B0609030804020204" pitchFamily="49" charset="0"/>
+              </a:rPr>
+            </a:br>
+            <a:r>
+              <a:rPr lang="es-ES" sz="1100" dirty="0">
+                <a:latin typeface="Menlo" panose="020B0609030804020204" pitchFamily="49" charset="0"/>
+              </a:rPr>
+              <a:t>// HTTP </a:t>
+            </a:r>
+            <a:r>
+              <a:rPr lang="es-ES" sz="1100" dirty="0" err="1">
+                <a:latin typeface="Menlo" panose="020B0609030804020204" pitchFamily="49" charset="0"/>
+              </a:rPr>
+              <a:t>client</a:t>
+            </a:r>
+            <a:r>
+              <a:rPr lang="es-ES" sz="1100" dirty="0">
+                <a:latin typeface="Menlo" panose="020B0609030804020204" pitchFamily="49" charset="0"/>
+              </a:rPr>
+              <a:t>: </a:t>
+            </a:r>
+            <a:r>
+              <a:rPr lang="es-ES" sz="1100" dirty="0" err="1">
+                <a:latin typeface="Menlo" panose="020B0609030804020204" pitchFamily="49" charset="0"/>
+              </a:rPr>
+              <a:t>WebClient</a:t>
+            </a:r>
+            <a:r>
+              <a:rPr lang="es-ES" sz="1100" dirty="0">
+                <a:latin typeface="Menlo" panose="020B0609030804020204" pitchFamily="49" charset="0"/>
+              </a:rPr>
+              <a:t> en vez de </a:t>
+            </a:r>
+            <a:r>
+              <a:rPr lang="es-ES" sz="1100" dirty="0" err="1">
+                <a:latin typeface="Menlo" panose="020B0609030804020204" pitchFamily="49" charset="0"/>
+              </a:rPr>
+              <a:t>RestTemplate</a:t>
+            </a:r>
+            <a:endParaRPr lang="es-ES" sz="1100" dirty="0">
+              <a:latin typeface="Menlo" panose="020B0609030804020204" pitchFamily="49" charset="0"/>
+            </a:endParaRPr>
+          </a:p>
+          <a:p>
+            <a:pPr lvl="1"/>
+            <a:r>
+              <a:rPr lang="es-ES" sz="1100" dirty="0" err="1">
+                <a:latin typeface="Menlo" panose="020B0609030804020204" pitchFamily="49" charset="0"/>
+              </a:rPr>
+              <a:t>private</a:t>
+            </a:r>
+            <a:r>
+              <a:rPr lang="es-ES" sz="1100" dirty="0">
+                <a:latin typeface="Menlo" panose="020B0609030804020204" pitchFamily="49" charset="0"/>
+              </a:rPr>
+              <a:t> final </a:t>
+            </a:r>
+            <a:r>
+              <a:rPr lang="es-ES" sz="1100" dirty="0" err="1">
+                <a:latin typeface="Menlo" panose="020B0609030804020204" pitchFamily="49" charset="0"/>
+              </a:rPr>
+              <a:t>WebClient</a:t>
+            </a:r>
+            <a:r>
+              <a:rPr lang="es-ES" sz="1100" dirty="0">
+                <a:latin typeface="Menlo" panose="020B0609030804020204" pitchFamily="49" charset="0"/>
+              </a:rPr>
+              <a:t> </a:t>
+            </a:r>
+            <a:r>
+              <a:rPr lang="es-ES" sz="1100" dirty="0" err="1">
+                <a:latin typeface="Menlo" panose="020B0609030804020204" pitchFamily="49" charset="0"/>
+              </a:rPr>
+              <a:t>webClient</a:t>
+            </a:r>
+            <a:r>
+              <a:rPr lang="es-ES" sz="1100" dirty="0">
+                <a:latin typeface="Menlo" panose="020B0609030804020204" pitchFamily="49" charset="0"/>
+              </a:rPr>
+              <a:t>;</a:t>
+            </a:r>
+          </a:p>
+          <a:p>
+            <a:pPr lvl="1"/>
+            <a:br>
+              <a:rPr lang="es-ES" sz="1100" dirty="0">
+                <a:latin typeface="Menlo" panose="020B0609030804020204" pitchFamily="49" charset="0"/>
+              </a:rPr>
+            </a:br>
+            <a:r>
+              <a:rPr lang="es-ES" sz="1100" dirty="0">
+                <a:latin typeface="Menlo" panose="020B0609030804020204" pitchFamily="49" charset="0"/>
+              </a:rPr>
+              <a:t>// En lugar de un </a:t>
+            </a:r>
+            <a:r>
+              <a:rPr lang="es-ES" sz="1100" dirty="0" err="1">
+                <a:latin typeface="Menlo" panose="020B0609030804020204" pitchFamily="49" charset="0"/>
+              </a:rPr>
+              <a:t>for</a:t>
+            </a:r>
+            <a:r>
+              <a:rPr lang="es-ES" sz="1100" dirty="0">
+                <a:latin typeface="Menlo" panose="020B0609030804020204" pitchFamily="49" charset="0"/>
+              </a:rPr>
+              <a:t> </a:t>
+            </a:r>
+            <a:r>
+              <a:rPr lang="es-ES" sz="1100" dirty="0" err="1">
+                <a:latin typeface="Menlo" panose="020B0609030804020204" pitchFamily="49" charset="0"/>
+              </a:rPr>
+              <a:t>loop</a:t>
+            </a:r>
+            <a:r>
+              <a:rPr lang="es-ES" sz="1100" dirty="0">
+                <a:latin typeface="Menlo" panose="020B0609030804020204" pitchFamily="49" charset="0"/>
+              </a:rPr>
+              <a:t> bloqueante, un pipeline reactivo</a:t>
+            </a:r>
+          </a:p>
+          <a:p>
+            <a:pPr lvl="1"/>
+            <a:r>
+              <a:rPr lang="es-ES" sz="1100" dirty="0" err="1">
+                <a:latin typeface="Menlo" panose="020B0609030804020204" pitchFamily="49" charset="0"/>
+              </a:rPr>
+              <a:t>return</a:t>
+            </a:r>
+            <a:r>
+              <a:rPr lang="es-ES" sz="1100" dirty="0">
+                <a:latin typeface="Menlo" panose="020B0609030804020204" pitchFamily="49" charset="0"/>
+              </a:rPr>
+              <a:t> </a:t>
+            </a:r>
+            <a:r>
+              <a:rPr lang="es-ES" sz="1100" dirty="0" err="1">
+                <a:latin typeface="Menlo" panose="020B0609030804020204" pitchFamily="49" charset="0"/>
+              </a:rPr>
+              <a:t>Flux.range</a:t>
+            </a:r>
+            <a:r>
+              <a:rPr lang="es-ES" sz="1100" dirty="0">
+                <a:latin typeface="Menlo" panose="020B0609030804020204" pitchFamily="49" charset="0"/>
+              </a:rPr>
+              <a:t>(0, </a:t>
+            </a:r>
+            <a:r>
+              <a:rPr lang="es-ES" sz="1100" dirty="0" err="1">
+                <a:latin typeface="Menlo" panose="020B0609030804020204" pitchFamily="49" charset="0"/>
+              </a:rPr>
+              <a:t>request.getRequests</a:t>
+            </a:r>
+            <a:r>
+              <a:rPr lang="es-ES" sz="1100" dirty="0">
+                <a:latin typeface="Menlo" panose="020B0609030804020204" pitchFamily="49" charset="0"/>
+              </a:rPr>
+              <a:t>())</a:t>
+            </a:r>
+          </a:p>
+          <a:p>
+            <a:pPr lvl="1"/>
+            <a:r>
+              <a:rPr lang="es-ES" sz="1100" dirty="0">
+                <a:latin typeface="Menlo" panose="020B0609030804020204" pitchFamily="49" charset="0"/>
+              </a:rPr>
+              <a:t>.</a:t>
+            </a:r>
+            <a:r>
+              <a:rPr lang="es-ES" sz="1100" dirty="0" err="1">
+                <a:latin typeface="Menlo" panose="020B0609030804020204" pitchFamily="49" charset="0"/>
+              </a:rPr>
+              <a:t>flatMap</a:t>
+            </a:r>
+            <a:r>
+              <a:rPr lang="es-ES" sz="1100" dirty="0">
+                <a:latin typeface="Menlo" panose="020B0609030804020204" pitchFamily="49" charset="0"/>
+              </a:rPr>
+              <a:t>(i -&gt; </a:t>
+            </a:r>
+            <a:r>
+              <a:rPr lang="es-ES" sz="1100" dirty="0" err="1">
+                <a:latin typeface="Menlo" panose="020B0609030804020204" pitchFamily="49" charset="0"/>
+              </a:rPr>
+              <a:t>executeReactiveRequest</a:t>
+            </a:r>
+            <a:r>
+              <a:rPr lang="es-ES" sz="1100" dirty="0">
+                <a:latin typeface="Menlo" panose="020B0609030804020204" pitchFamily="49" charset="0"/>
+              </a:rPr>
+              <a:t>(...), </a:t>
+            </a:r>
+            <a:r>
+              <a:rPr lang="es-ES" sz="1100" dirty="0" err="1">
+                <a:latin typeface="Menlo" panose="020B0609030804020204" pitchFamily="49" charset="0"/>
+              </a:rPr>
+              <a:t>request.getThreads</a:t>
+            </a:r>
+            <a:r>
+              <a:rPr lang="es-ES" sz="1100" dirty="0">
+                <a:latin typeface="Menlo" panose="020B0609030804020204" pitchFamily="49" charset="0"/>
+              </a:rPr>
+              <a:t>()) // concurrencia controlada</a:t>
+            </a:r>
+          </a:p>
+          <a:p>
+            <a:pPr lvl="1"/>
+            <a:r>
+              <a:rPr lang="es-ES" sz="1100" dirty="0">
+                <a:latin typeface="Menlo" panose="020B0609030804020204" pitchFamily="49" charset="0"/>
+              </a:rPr>
+              <a:t>.</a:t>
+            </a:r>
+            <a:r>
+              <a:rPr lang="es-ES" sz="1100" dirty="0" err="1">
+                <a:latin typeface="Menlo" panose="020B0609030804020204" pitchFamily="49" charset="0"/>
+              </a:rPr>
+              <a:t>collectList</a:t>
+            </a:r>
+            <a:r>
+              <a:rPr lang="es-ES" sz="1100" dirty="0">
+                <a:latin typeface="Menlo" panose="020B0609030804020204" pitchFamily="49" charset="0"/>
+              </a:rPr>
+              <a:t>()</a:t>
+            </a:r>
+          </a:p>
+          <a:p>
+            <a:pPr lvl="1"/>
+            <a:r>
+              <a:rPr lang="es-ES" sz="1100" dirty="0">
+                <a:latin typeface="Menlo" panose="020B0609030804020204" pitchFamily="49" charset="0"/>
+              </a:rPr>
+              <a:t>.</a:t>
+            </a:r>
+            <a:r>
+              <a:rPr lang="es-ES" sz="1100" dirty="0" err="1">
+                <a:latin typeface="Menlo" panose="020B0609030804020204" pitchFamily="49" charset="0"/>
+              </a:rPr>
+              <a:t>map</a:t>
+            </a:r>
+            <a:r>
+              <a:rPr lang="es-ES" sz="1100" dirty="0">
+                <a:latin typeface="Menlo" panose="020B0609030804020204" pitchFamily="49" charset="0"/>
+              </a:rPr>
+              <a:t>(</a:t>
+            </a:r>
+            <a:r>
+              <a:rPr lang="es-ES" sz="1100" dirty="0" err="1">
+                <a:latin typeface="Menlo" panose="020B0609030804020204" pitchFamily="49" charset="0"/>
+              </a:rPr>
+              <a:t>responseTimes</a:t>
+            </a:r>
+            <a:r>
+              <a:rPr lang="es-ES" sz="1100" dirty="0">
+                <a:latin typeface="Menlo" panose="020B0609030804020204" pitchFamily="49" charset="0"/>
+              </a:rPr>
+              <a:t> -&gt; { ... });</a:t>
+            </a:r>
+          </a:p>
+          <a:p>
+            <a:pPr lvl="1"/>
+            <a:r>
+              <a:rPr lang="es-ES" sz="1100" dirty="0">
+                <a:latin typeface="Menlo" panose="020B0609030804020204" pitchFamily="49" charset="0"/>
+              </a:rPr>
+              <a:t>}</a:t>
+            </a:r>
+          </a:p>
+        </p:txBody>
+      </p:sp>
+    </p:spTree>
+    <p:extLst>
+      <p:ext uri="{BB962C8B-B14F-4D97-AF65-F5344CB8AC3E}">
+        <p14:creationId xmlns:p14="http://schemas.microsoft.com/office/powerpoint/2010/main" val="3781947358"/>
+      </p:ext>
+    </p:extLst>
+  </p:cSld>
+  <p:clrMapOvr>
+    <a:masterClrMapping/>
+  </p:clrMapOvr>
+</p:sld>
+</file>
+
+<file path=ppt/slides/slide4.xml><?xml version="1.0" encoding="utf-8"?>
+<p:sld xmlns:a="http://schemas.openxmlformats.org/drawingml/2006/main" xmlns:r="http://schemas.openxmlformats.org/officeDocument/2006/relationships" xmlns:p="http://schemas.openxmlformats.org/presentationml/2006/main">
+  <p:cSld>
+    <p:spTree>
+      <p:nvGrpSpPr>
+        <p:cNvPr id="1" name=""/>
+        <p:cNvGrpSpPr/>
+        <p:nvPr/>
+      </p:nvGrpSpPr>
+      <p:grpSpPr>
+        <a:xfrm>
+          <a:off x="0" y="0"/>
+          <a:ext cx="0" cy="0"/>
+          <a:chOff x="0" y="0"/>
+          <a:chExt cx="0" cy="0"/>
+        </a:xfrm>
+      </p:grpSpPr>
+      <p:pic>
+        <p:nvPicPr>
+          <p:cNvPr id="4" name="Picture 3">
+            <a:extLst>
+              <a:ext uri="{FF2B5EF4-FFF2-40B4-BE49-F238E27FC236}">
+                <a16:creationId xmlns:a16="http://schemas.microsoft.com/office/drawing/2014/main" id="{93E96E42-6062-4A47-9C78-96947A71069D}"/>
+              </a:ext>
+            </a:extLst>
+          </p:cNvPr>
+          <p:cNvPicPr>
+            <a:picLocks noChangeAspect="1"/>
+          </p:cNvPicPr>
+          <p:nvPr/>
+        </p:nvPicPr>
+        <p:blipFill>
+          <a:blip r:embed="rId2"/>
+          <a:stretch>
+            <a:fillRect/>
+          </a:stretch>
+        </p:blipFill>
+        <p:spPr>
+          <a:xfrm>
+            <a:off x="222422" y="285078"/>
+            <a:ext cx="10919254" cy="3984343"/>
+          </a:xfrm>
+          <a:prstGeom prst="rect">
+            <a:avLst/>
+          </a:prstGeom>
+        </p:spPr>
+      </p:pic>
+    </p:spTree>
+    <p:extLst>
+      <p:ext uri="{BB962C8B-B14F-4D97-AF65-F5344CB8AC3E}">
+        <p14:creationId xmlns:p14="http://schemas.microsoft.com/office/powerpoint/2010/main" val="3397801922"/>
+      </p:ext>
+    </p:extLst>
+  </p:cSld>
+  <p:clrMapOvr>
+    <a:masterClrMapping/>
+  </p:clrMapOvr>
+</p:sld>
+</file>
+
+<file path=ppt/slides/slide5.xml><?xml version="1.0" encoding="utf-8"?>
+<p:sld xmlns:a="http://schemas.openxmlformats.org/drawingml/2006/main" xmlns:r="http://schemas.openxmlformats.org/officeDocument/2006/relationships" xmlns:p="http://schemas.openxmlformats.org/presentationml/2006/main">
+  <p:cSld>
+    <p:spTree>
+      <p:nvGrpSpPr>
+        <p:cNvPr id="1" name=""/>
+        <p:cNvGrpSpPr/>
+        <p:nvPr/>
+      </p:nvGrpSpPr>
+      <p:grpSpPr>
+        <a:xfrm>
+          <a:off x="0" y="0"/>
+          <a:ext cx="0" cy="0"/>
+          <a:chOff x="0" y="0"/>
+          <a:chExt cx="0" cy="0"/>
+        </a:xfrm>
+      </p:grpSpPr>
+      <p:pic>
+        <p:nvPicPr>
+          <p:cNvPr id="4" name="Picture 3">
+            <a:extLst>
+              <a:ext uri="{FF2B5EF4-FFF2-40B4-BE49-F238E27FC236}">
+                <a16:creationId xmlns:a16="http://schemas.microsoft.com/office/drawing/2014/main" id="{99D026DE-7B75-6446-B342-A1052F86CA87}"/>
+              </a:ext>
+            </a:extLst>
+          </p:cNvPr>
+          <p:cNvPicPr>
+            <a:picLocks noChangeAspect="1"/>
+          </p:cNvPicPr>
+          <p:nvPr/>
+        </p:nvPicPr>
+        <p:blipFill>
+          <a:blip r:embed="rId2"/>
+          <a:stretch>
+            <a:fillRect/>
+          </a:stretch>
+        </p:blipFill>
+        <p:spPr>
+          <a:xfrm>
+            <a:off x="469557" y="137339"/>
+            <a:ext cx="11438238" cy="2894012"/>
+          </a:xfrm>
+          <a:prstGeom prst="rect">
+            <a:avLst/>
+          </a:prstGeom>
+        </p:spPr>
+      </p:pic>
+      <p:pic>
+        <p:nvPicPr>
+          <p:cNvPr id="5" name="Picture 4">
+            <a:extLst>
+              <a:ext uri="{FF2B5EF4-FFF2-40B4-BE49-F238E27FC236}">
+                <a16:creationId xmlns:a16="http://schemas.microsoft.com/office/drawing/2014/main" id="{5932C01C-78DC-824D-9F78-4B58D1F95A9F}"/>
+              </a:ext>
+            </a:extLst>
+          </p:cNvPr>
+          <p:cNvPicPr>
+            <a:picLocks noChangeAspect="1"/>
+          </p:cNvPicPr>
+          <p:nvPr/>
+        </p:nvPicPr>
+        <p:blipFill>
+          <a:blip r:embed="rId3"/>
+          <a:stretch>
+            <a:fillRect/>
+          </a:stretch>
+        </p:blipFill>
+        <p:spPr>
+          <a:xfrm>
+            <a:off x="1121376" y="3153547"/>
+            <a:ext cx="10134600" cy="3467100"/>
+          </a:xfrm>
+          <a:prstGeom prst="rect">
+            <a:avLst/>
+          </a:prstGeom>
+        </p:spPr>
+      </p:pic>
+    </p:spTree>
+    <p:extLst>
+      <p:ext uri="{BB962C8B-B14F-4D97-AF65-F5344CB8AC3E}">
+        <p14:creationId xmlns:p14="http://schemas.microsoft.com/office/powerpoint/2010/main" val="1069101230"/>
+      </p:ext>
+    </p:extLst>
+  </p:cSld>
+  <p:clrMapOvr>
+    <a:masterClrMapping/>
+  </p:clrMapOvr>
+</p:sld>
+</file>
+
+<file path=ppt/slides/slide6.xml><?xml version="1.0" encoding="utf-8"?>
+<p:sld xmlns:a="http://schemas.openxmlformats.org/drawingml/2006/main" xmlns:r="http://schemas.openxmlformats.org/officeDocument/2006/relationships" xmlns:p="http://schemas.openxmlformats.org/presentationml/2006/main">
+  <p:cSld>
+    <p:spTree>
+      <p:nvGrpSpPr>
+        <p:cNvPr id="1" name=""/>
+        <p:cNvGrpSpPr/>
+        <p:nvPr/>
+      </p:nvGrpSpPr>
+      <p:grpSpPr>
+        <a:xfrm>
+          <a:off x="0" y="0"/>
+          <a:ext cx="0" cy="0"/>
+          <a:chOff x="0" y="0"/>
+          <a:chExt cx="0" cy="0"/>
+        </a:xfrm>
+      </p:grpSpPr>
+      <p:sp>
+        <p:nvSpPr>
+          <p:cNvPr id="4" name="Rectangle 3">
+            <a:extLst>
+              <a:ext uri="{FF2B5EF4-FFF2-40B4-BE49-F238E27FC236}">
+                <a16:creationId xmlns:a16="http://schemas.microsoft.com/office/drawing/2014/main" id="{AE06F4A9-5F41-B649-9DA2-D7350D0612A6}"/>
+              </a:ext>
+            </a:extLst>
+          </p:cNvPr>
+          <p:cNvSpPr/>
+          <p:nvPr/>
+        </p:nvSpPr>
+        <p:spPr>
+          <a:xfrm>
+            <a:off x="514864" y="315264"/>
+            <a:ext cx="8480854" cy="1200329"/>
+          </a:xfrm>
+          <a:prstGeom prst="rect">
+            <a:avLst/>
+          </a:prstGeom>
+        </p:spPr>
+        <p:txBody>
+          <a:bodyPr wrap="square">
+            <a:spAutoFit/>
+          </a:bodyPr>
+          <a:lstStyle/>
+          <a:p>
+            <a:pPr>
+              <a:buFont typeface="Arial" panose="020B0604020202020204" pitchFamily="34" charset="0"/>
+              <a:buChar char="•"/>
+            </a:pPr>
+            <a:r>
+              <a:rPr lang="es-ES" dirty="0">
+                <a:hlinkClick r:id="rId2" tooltip="https://wiki.openjdk.org/spaces/loom/pages/56525302/getting+started"/>
+              </a:rPr>
+              <a:t>https://wiki.openjdk.org/spaces/loom/pages/56525302/Getting+started</a:t>
+            </a:r>
+            <a:endParaRPr lang="es-ES" dirty="0"/>
+          </a:p>
+          <a:p>
+            <a:pPr>
+              <a:buFont typeface="Arial" panose="020B0604020202020204" pitchFamily="34" charset="0"/>
+              <a:buChar char="•"/>
+            </a:pPr>
+            <a:r>
+              <a:rPr lang="es-ES" dirty="0">
+                <a:hlinkClick r:id="rId3" tooltip="https://openjdk.org/jeps/425"/>
+              </a:rPr>
+              <a:t>https://openjdk.org/jeps/425</a:t>
+            </a:r>
+            <a:endParaRPr lang="es-ES" dirty="0"/>
+          </a:p>
+          <a:p>
+            <a:pPr>
+              <a:buFont typeface="Arial" panose="020B0604020202020204" pitchFamily="34" charset="0"/>
+              <a:buChar char="•"/>
+            </a:pPr>
+            <a:r>
+              <a:rPr lang="es-ES" dirty="0">
+                <a:hlinkClick r:id="rId4" tooltip="https://openjdk.org/jeps/444"/>
+              </a:rPr>
+              <a:t>https://openjdk.org/jeps/444</a:t>
+            </a:r>
+            <a:endParaRPr lang="es-ES" dirty="0"/>
+          </a:p>
+          <a:p>
+            <a:pPr>
+              <a:buFont typeface="Arial" panose="020B0604020202020204" pitchFamily="34" charset="0"/>
+              <a:buChar char="•"/>
+            </a:pPr>
+            <a:r>
+              <a:rPr lang="es-ES" dirty="0">
+                <a:hlinkClick r:id="rId5" tooltip="https://www.paradigmadigital.com/dev/ventajas-virtual-threads-java-21/"/>
+              </a:rPr>
+              <a:t>https://www.paradigmadigital.com/dev/ventajas-virtual-threads-java-21/</a:t>
+            </a:r>
+            <a:endParaRPr lang="es-ES" dirty="0"/>
+          </a:p>
+        </p:txBody>
+      </p:sp>
+    </p:spTree>
+    <p:extLst>
+      <p:ext uri="{BB962C8B-B14F-4D97-AF65-F5344CB8AC3E}">
+        <p14:creationId xmlns:p14="http://schemas.microsoft.com/office/powerpoint/2010/main" val="2050454444"/>
+      </p:ext>
+    </p:extLst>
+  </p:cSld>
+  <p:clrMapOvr>
+    <a:masterClrMapping/>
+  </p:clrMapOvr>
+</p:sld>
+</file>
+
 <file path=ppt/theme/theme1.xml><?xml version="1.0" encoding="utf-8"?>
 <a:theme xmlns:a="http://schemas.openxmlformats.org/drawingml/2006/main" name="Office Theme">
   <a:themeElements>

--- a/Presentation1.pptx
+++ b/Presentation1.pptx
@@ -5,12 +5,13 @@
     <p:sldMasterId id="2147483648" r:id="rId1"/>
   </p:sldMasterIdLst>
   <p:sldIdLst>
-    <p:sldId id="256" r:id="rId2"/>
-    <p:sldId id="257" r:id="rId3"/>
-    <p:sldId id="258" r:id="rId4"/>
-    <p:sldId id="259" r:id="rId5"/>
-    <p:sldId id="261" r:id="rId6"/>
-    <p:sldId id="260" r:id="rId7"/>
+    <p:sldId id="262" r:id="rId2"/>
+    <p:sldId id="256" r:id="rId3"/>
+    <p:sldId id="257" r:id="rId4"/>
+    <p:sldId id="258" r:id="rId5"/>
+    <p:sldId id="259" r:id="rId6"/>
+    <p:sldId id="261" r:id="rId7"/>
+    <p:sldId id="260" r:id="rId8"/>
   </p:sldIdLst>
   <p:sldSz cx="12192000" cy="6858000"/>
   <p:notesSz cx="6858000" cy="9144000"/>
@@ -266,7 +267,7 @@
           <a:p>
             <a:fld id="{F7617E6C-B4C1-F64F-9F0E-38D55D0C6E24}" type="datetimeFigureOut">
               <a:rPr lang="en-GB" smtClean="0"/>
-              <a:t>10/04/2026</a:t>
+              <a:t>19/04/2026</a:t>
             </a:fld>
             <a:endParaRPr lang="en-GB"/>
           </a:p>
@@ -466,7 +467,7 @@
           <a:p>
             <a:fld id="{F7617E6C-B4C1-F64F-9F0E-38D55D0C6E24}" type="datetimeFigureOut">
               <a:rPr lang="en-GB" smtClean="0"/>
-              <a:t>10/04/2026</a:t>
+              <a:t>19/04/2026</a:t>
             </a:fld>
             <a:endParaRPr lang="en-GB"/>
           </a:p>
@@ -676,7 +677,7 @@
           <a:p>
             <a:fld id="{F7617E6C-B4C1-F64F-9F0E-38D55D0C6E24}" type="datetimeFigureOut">
               <a:rPr lang="en-GB" smtClean="0"/>
-              <a:t>10/04/2026</a:t>
+              <a:t>19/04/2026</a:t>
             </a:fld>
             <a:endParaRPr lang="en-GB"/>
           </a:p>
@@ -876,7 +877,7 @@
           <a:p>
             <a:fld id="{F7617E6C-B4C1-F64F-9F0E-38D55D0C6E24}" type="datetimeFigureOut">
               <a:rPr lang="en-GB" smtClean="0"/>
-              <a:t>10/04/2026</a:t>
+              <a:t>19/04/2026</a:t>
             </a:fld>
             <a:endParaRPr lang="en-GB"/>
           </a:p>
@@ -1152,7 +1153,7 @@
           <a:p>
             <a:fld id="{F7617E6C-B4C1-F64F-9F0E-38D55D0C6E24}" type="datetimeFigureOut">
               <a:rPr lang="en-GB" smtClean="0"/>
-              <a:t>10/04/2026</a:t>
+              <a:t>19/04/2026</a:t>
             </a:fld>
             <a:endParaRPr lang="en-GB"/>
           </a:p>
@@ -1420,7 +1421,7 @@
           <a:p>
             <a:fld id="{F7617E6C-B4C1-F64F-9F0E-38D55D0C6E24}" type="datetimeFigureOut">
               <a:rPr lang="en-GB" smtClean="0"/>
-              <a:t>10/04/2026</a:t>
+              <a:t>19/04/2026</a:t>
             </a:fld>
             <a:endParaRPr lang="en-GB"/>
           </a:p>
@@ -1835,7 +1836,7 @@
           <a:p>
             <a:fld id="{F7617E6C-B4C1-F64F-9F0E-38D55D0C6E24}" type="datetimeFigureOut">
               <a:rPr lang="en-GB" smtClean="0"/>
-              <a:t>10/04/2026</a:t>
+              <a:t>19/04/2026</a:t>
             </a:fld>
             <a:endParaRPr lang="en-GB"/>
           </a:p>
@@ -1977,7 +1978,7 @@
           <a:p>
             <a:fld id="{F7617E6C-B4C1-F64F-9F0E-38D55D0C6E24}" type="datetimeFigureOut">
               <a:rPr lang="en-GB" smtClean="0"/>
-              <a:t>10/04/2026</a:t>
+              <a:t>19/04/2026</a:t>
             </a:fld>
             <a:endParaRPr lang="en-GB"/>
           </a:p>
@@ -2090,7 +2091,7 @@
           <a:p>
             <a:fld id="{F7617E6C-B4C1-F64F-9F0E-38D55D0C6E24}" type="datetimeFigureOut">
               <a:rPr lang="en-GB" smtClean="0"/>
-              <a:t>10/04/2026</a:t>
+              <a:t>19/04/2026</a:t>
             </a:fld>
             <a:endParaRPr lang="en-GB"/>
           </a:p>
@@ -2403,7 +2404,7 @@
           <a:p>
             <a:fld id="{F7617E6C-B4C1-F64F-9F0E-38D55D0C6E24}" type="datetimeFigureOut">
               <a:rPr lang="en-GB" smtClean="0"/>
-              <a:t>10/04/2026</a:t>
+              <a:t>19/04/2026</a:t>
             </a:fld>
             <a:endParaRPr lang="en-GB"/>
           </a:p>
@@ -2692,7 +2693,7 @@
           <a:p>
             <a:fld id="{F7617E6C-B4C1-F64F-9F0E-38D55D0C6E24}" type="datetimeFigureOut">
               <a:rPr lang="en-GB" smtClean="0"/>
-              <a:t>10/04/2026</a:t>
+              <a:t>19/04/2026</a:t>
             </a:fld>
             <a:endParaRPr lang="en-GB"/>
           </a:p>
@@ -2935,7 +2936,7 @@
           <a:p>
             <a:fld id="{F7617E6C-B4C1-F64F-9F0E-38D55D0C6E24}" type="datetimeFigureOut">
               <a:rPr lang="en-GB" smtClean="0"/>
-              <a:t>10/04/2026</a:t>
+              <a:t>19/04/2026</a:t>
             </a:fld>
             <a:endParaRPr lang="en-GB"/>
           </a:p>
@@ -3357,7 +3358,7 @@
           <p:cNvPr id="4" name="Picture 3">
             <a:extLst>
               <a:ext uri="{FF2B5EF4-FFF2-40B4-BE49-F238E27FC236}">
-                <a16:creationId xmlns:a16="http://schemas.microsoft.com/office/drawing/2014/main" id="{49ED8BBA-8805-684D-8E67-0A3807E9FD3A}"/>
+                <a16:creationId xmlns:a16="http://schemas.microsoft.com/office/drawing/2014/main" id="{4F86DCC4-F23A-7843-9246-2250D4374020}"/>
               </a:ext>
             </a:extLst>
           </p:cNvPr>
@@ -3374,8 +3375,8 @@
         </p:blipFill>
         <p:spPr>
           <a:xfrm>
-            <a:off x="1737360" y="3811477"/>
-            <a:ext cx="8008620" cy="2688745"/>
+            <a:off x="186317" y="544087"/>
+            <a:ext cx="4838700" cy="1866900"/>
           </a:xfrm>
           <a:prstGeom prst="rect">
             <a:avLst/>
@@ -3387,7 +3388,7 @@
           <p:cNvPr id="5" name="Picture 4">
             <a:extLst>
               <a:ext uri="{FF2B5EF4-FFF2-40B4-BE49-F238E27FC236}">
-                <a16:creationId xmlns:a16="http://schemas.microsoft.com/office/drawing/2014/main" id="{D786BED2-0DF3-664B-A788-52B9B5756061}"/>
+                <a16:creationId xmlns:a16="http://schemas.microsoft.com/office/drawing/2014/main" id="{8B87CC40-CC2C-E44F-9AF7-B2380D9ED99B}"/>
               </a:ext>
             </a:extLst>
           </p:cNvPr>
@@ -3404,14 +3405,872 @@
         </p:blipFill>
         <p:spPr>
           <a:xfrm>
-            <a:off x="1118870" y="562610"/>
-            <a:ext cx="9245600" cy="1892300"/>
+            <a:off x="5127857" y="544087"/>
+            <a:ext cx="4813300" cy="1828800"/>
           </a:xfrm>
           <a:prstGeom prst="rect">
             <a:avLst/>
           </a:prstGeom>
         </p:spPr>
       </p:pic>
+      <p:pic>
+        <p:nvPicPr>
+          <p:cNvPr id="6" name="Picture 5">
+            <a:extLst>
+              <a:ext uri="{FF2B5EF4-FFF2-40B4-BE49-F238E27FC236}">
+                <a16:creationId xmlns:a16="http://schemas.microsoft.com/office/drawing/2014/main" id="{BA1B7D0A-9E9A-2948-9075-4729B109BD36}"/>
+              </a:ext>
+            </a:extLst>
+          </p:cNvPr>
+          <p:cNvPicPr>
+            <a:picLocks noChangeAspect="1"/>
+          </p:cNvPicPr>
+          <p:nvPr/>
+        </p:nvPicPr>
+        <p:blipFill>
+          <a:blip r:embed="rId4"/>
+          <a:stretch>
+            <a:fillRect/>
+          </a:stretch>
+        </p:blipFill>
+        <p:spPr>
+          <a:xfrm>
+            <a:off x="186317" y="2541859"/>
+            <a:ext cx="4851400" cy="1930400"/>
+          </a:xfrm>
+          <a:prstGeom prst="rect">
+            <a:avLst/>
+          </a:prstGeom>
+        </p:spPr>
+      </p:pic>
+      <p:pic>
+        <p:nvPicPr>
+          <p:cNvPr id="7" name="Picture 6">
+            <a:extLst>
+              <a:ext uri="{FF2B5EF4-FFF2-40B4-BE49-F238E27FC236}">
+                <a16:creationId xmlns:a16="http://schemas.microsoft.com/office/drawing/2014/main" id="{834323C9-7ACE-2B49-A614-0A041EF6B957}"/>
+              </a:ext>
+            </a:extLst>
+          </p:cNvPr>
+          <p:cNvPicPr>
+            <a:picLocks noChangeAspect="1"/>
+          </p:cNvPicPr>
+          <p:nvPr/>
+        </p:nvPicPr>
+        <p:blipFill>
+          <a:blip r:embed="rId5"/>
+          <a:stretch>
+            <a:fillRect/>
+          </a:stretch>
+        </p:blipFill>
+        <p:spPr>
+          <a:xfrm>
+            <a:off x="186317" y="4603131"/>
+            <a:ext cx="9715500" cy="1930400"/>
+          </a:xfrm>
+          <a:prstGeom prst="rect">
+            <a:avLst/>
+          </a:prstGeom>
+        </p:spPr>
+      </p:pic>
+      <p:pic>
+        <p:nvPicPr>
+          <p:cNvPr id="9" name="Picture 8">
+            <a:extLst>
+              <a:ext uri="{FF2B5EF4-FFF2-40B4-BE49-F238E27FC236}">
+                <a16:creationId xmlns:a16="http://schemas.microsoft.com/office/drawing/2014/main" id="{2F391477-4510-0641-A5E0-118C80E6559E}"/>
+              </a:ext>
+            </a:extLst>
+          </p:cNvPr>
+          <p:cNvPicPr>
+            <a:picLocks noChangeAspect="1"/>
+          </p:cNvPicPr>
+          <p:nvPr/>
+        </p:nvPicPr>
+        <p:blipFill>
+          <a:blip r:embed="rId6"/>
+          <a:stretch>
+            <a:fillRect/>
+          </a:stretch>
+        </p:blipFill>
+        <p:spPr>
+          <a:xfrm>
+            <a:off x="5127857" y="2541859"/>
+            <a:ext cx="6705600" cy="1854200"/>
+          </a:xfrm>
+          <a:prstGeom prst="rect">
+            <a:avLst/>
+          </a:prstGeom>
+        </p:spPr>
+      </p:pic>
+      <p:pic>
+        <p:nvPicPr>
+          <p:cNvPr id="10" name="Picture 9">
+            <a:extLst>
+              <a:ext uri="{FF2B5EF4-FFF2-40B4-BE49-F238E27FC236}">
+                <a16:creationId xmlns:a16="http://schemas.microsoft.com/office/drawing/2014/main" id="{892ADCC5-C28B-514B-AD28-744FED987AAC}"/>
+              </a:ext>
+            </a:extLst>
+          </p:cNvPr>
+          <p:cNvPicPr>
+            <a:picLocks noChangeAspect="1"/>
+          </p:cNvPicPr>
+          <p:nvPr/>
+        </p:nvPicPr>
+        <p:blipFill>
+          <a:blip r:embed="rId7"/>
+          <a:stretch>
+            <a:fillRect/>
+          </a:stretch>
+        </p:blipFill>
+        <p:spPr>
+          <a:xfrm>
+            <a:off x="3603858" y="0"/>
+            <a:ext cx="4203700" cy="419100"/>
+          </a:xfrm>
+          <a:prstGeom prst="rect">
+            <a:avLst/>
+          </a:prstGeom>
+        </p:spPr>
+      </p:pic>
+    </p:spTree>
+    <p:extLst>
+      <p:ext uri="{BB962C8B-B14F-4D97-AF65-F5344CB8AC3E}">
+        <p14:creationId xmlns:p14="http://schemas.microsoft.com/office/powerpoint/2010/main" val="1811275226"/>
+      </p:ext>
+    </p:extLst>
+  </p:cSld>
+  <p:clrMapOvr>
+    <a:masterClrMapping/>
+  </p:clrMapOvr>
+</p:sld>
+</file>
+
+<file path=ppt/slides/slide2.xml><?xml version="1.0" encoding="utf-8"?>
+<p:sld xmlns:a="http://schemas.openxmlformats.org/drawingml/2006/main" xmlns:r="http://schemas.openxmlformats.org/officeDocument/2006/relationships" xmlns:p="http://schemas.openxmlformats.org/presentationml/2006/main">
+  <p:cSld>
+    <p:spTree>
+      <p:nvGrpSpPr>
+        <p:cNvPr id="1" name=""/>
+        <p:cNvGrpSpPr/>
+        <p:nvPr/>
+      </p:nvGrpSpPr>
+      <p:grpSpPr>
+        <a:xfrm>
+          <a:off x="0" y="0"/>
+          <a:ext cx="0" cy="0"/>
+          <a:chOff x="0" y="0"/>
+          <a:chExt cx="0" cy="0"/>
+        </a:xfrm>
+      </p:grpSpPr>
+      <p:sp>
+        <p:nvSpPr>
+          <p:cNvPr id="2" name="TextBox 1">
+            <a:extLst>
+              <a:ext uri="{FF2B5EF4-FFF2-40B4-BE49-F238E27FC236}">
+                <a16:creationId xmlns:a16="http://schemas.microsoft.com/office/drawing/2014/main" id="{27039B50-FC3E-1B49-A3EB-FE6A2DD22EED}"/>
+              </a:ext>
+            </a:extLst>
+          </p:cNvPr>
+          <p:cNvSpPr txBox="1"/>
+          <p:nvPr/>
+        </p:nvSpPr>
+        <p:spPr>
+          <a:xfrm>
+            <a:off x="535258" y="4614365"/>
+            <a:ext cx="9918036" cy="2031325"/>
+          </a:xfrm>
+          <a:prstGeom prst="rect">
+            <a:avLst/>
+          </a:prstGeom>
+          <a:noFill/>
+        </p:spPr>
+        <p:txBody>
+          <a:bodyPr wrap="none" rtlCol="0">
+            <a:spAutoFit/>
+          </a:bodyPr>
+          <a:lstStyle/>
+          <a:p>
+            <a:r>
+              <a:rPr lang="es-ES" u="sng" dirty="0"/>
+              <a:t>Ventajas de Virtual </a:t>
+            </a:r>
+            <a:r>
+              <a:rPr lang="es-ES" u="sng" dirty="0" err="1"/>
+              <a:t>Threads</a:t>
+            </a:r>
+            <a:r>
+              <a:rPr lang="es-ES" u="sng" dirty="0"/>
+              <a:t> en el servidor</a:t>
+            </a:r>
+          </a:p>
+          <a:p>
+            <a:pPr marL="319088" indent="-131763">
+              <a:buFont typeface="Arial" panose="020B0604020202020204" pitchFamily="34" charset="0"/>
+              <a:buChar char="•"/>
+            </a:pPr>
+            <a:r>
+              <a:rPr lang="es-ES" dirty="0"/>
+              <a:t>Escalabilidad: </a:t>
+            </a:r>
+            <a:r>
+              <a:rPr lang="es-ES" dirty="0" err="1"/>
+              <a:t>Tomcat</a:t>
+            </a:r>
+            <a:r>
+              <a:rPr lang="es-ES" dirty="0"/>
+              <a:t> puede manejar miles de </a:t>
+            </a:r>
+            <a:r>
+              <a:rPr lang="es-ES" dirty="0" err="1"/>
+              <a:t>requests</a:t>
+            </a:r>
+            <a:r>
+              <a:rPr lang="es-ES" dirty="0"/>
+              <a:t> concurrentes (vs ~200 con </a:t>
+            </a:r>
+            <a:r>
+              <a:rPr lang="es-ES" dirty="0" err="1"/>
+              <a:t>platform</a:t>
+            </a:r>
+            <a:r>
+              <a:rPr lang="es-ES" dirty="0"/>
+              <a:t> </a:t>
+            </a:r>
+            <a:r>
+              <a:rPr lang="es-ES" dirty="0" err="1"/>
+              <a:t>threads</a:t>
+            </a:r>
+            <a:r>
+              <a:rPr lang="es-ES" dirty="0"/>
+              <a:t>) </a:t>
+            </a:r>
+          </a:p>
+          <a:p>
+            <a:pPr marL="319088" indent="-131763">
+              <a:buFont typeface="Arial" panose="020B0604020202020204" pitchFamily="34" charset="0"/>
+              <a:buChar char="•"/>
+            </a:pPr>
+            <a:r>
+              <a:rPr lang="es-ES" dirty="0"/>
+              <a:t>Memoria eficiente: Cada virtual </a:t>
+            </a:r>
+            <a:r>
+              <a:rPr lang="es-ES" dirty="0" err="1"/>
+              <a:t>thread</a:t>
+            </a:r>
+            <a:r>
+              <a:rPr lang="es-ES" dirty="0"/>
+              <a:t> consume ~1KB (vs ~1MB de </a:t>
+            </a:r>
+            <a:r>
+              <a:rPr lang="es-ES" dirty="0" err="1"/>
+              <a:t>platform</a:t>
+            </a:r>
+            <a:r>
+              <a:rPr lang="es-ES" dirty="0"/>
+              <a:t> </a:t>
+            </a:r>
+            <a:r>
+              <a:rPr lang="es-ES" dirty="0" err="1"/>
+              <a:t>threads</a:t>
+            </a:r>
+            <a:r>
+              <a:rPr lang="es-ES" dirty="0"/>
+              <a:t>) </a:t>
+            </a:r>
+          </a:p>
+          <a:p>
+            <a:pPr marL="319088" indent="-131763">
+              <a:buFont typeface="Arial" panose="020B0604020202020204" pitchFamily="34" charset="0"/>
+              <a:buChar char="•"/>
+            </a:pPr>
+            <a:r>
+              <a:rPr lang="es-ES" dirty="0"/>
+              <a:t>Sin límite de </a:t>
+            </a:r>
+            <a:r>
+              <a:rPr lang="es-ES" dirty="0" err="1"/>
+              <a:t>threads</a:t>
+            </a:r>
+            <a:r>
+              <a:rPr lang="es-ES" dirty="0"/>
+              <a:t>: No hay pool </a:t>
+            </a:r>
+            <a:r>
+              <a:rPr lang="es-ES" dirty="0" err="1"/>
+              <a:t>size</a:t>
+            </a:r>
+            <a:r>
+              <a:rPr lang="es-ES" dirty="0"/>
+              <a:t> que configurar </a:t>
+            </a:r>
+          </a:p>
+          <a:p>
+            <a:pPr marL="319088" indent="-131763">
+              <a:buFont typeface="Arial" panose="020B0604020202020204" pitchFamily="34" charset="0"/>
+              <a:buChar char="•"/>
+            </a:pPr>
+            <a:r>
+              <a:rPr lang="es-ES" dirty="0"/>
+              <a:t>CPU eficiente: Mejor utilización en escenarios I/O-</a:t>
+            </a:r>
+            <a:r>
+              <a:rPr lang="es-ES" dirty="0" err="1"/>
+              <a:t>bound</a:t>
+            </a:r>
+            <a:r>
+              <a:rPr lang="es-ES" dirty="0"/>
+              <a:t> </a:t>
+            </a:r>
+          </a:p>
+          <a:p>
+            <a:pPr marL="319088" indent="-131763">
+              <a:buFont typeface="Arial" panose="020B0604020202020204" pitchFamily="34" charset="0"/>
+              <a:buChar char="•"/>
+            </a:pPr>
+            <a:r>
+              <a:rPr lang="es-ES" dirty="0"/>
+              <a:t>Código simple: Sin cambios en el código del servicio</a:t>
+            </a:r>
+          </a:p>
+          <a:p>
+            <a:endParaRPr lang="en-GB" dirty="0"/>
+          </a:p>
+        </p:txBody>
+      </p:sp>
+      <p:graphicFrame>
+        <p:nvGraphicFramePr>
+          <p:cNvPr id="3" name="Table 2">
+            <a:extLst>
+              <a:ext uri="{FF2B5EF4-FFF2-40B4-BE49-F238E27FC236}">
+                <a16:creationId xmlns:a16="http://schemas.microsoft.com/office/drawing/2014/main" id="{BD1C99F3-D3FE-6A4D-BA5C-9DB89D6BB052}"/>
+              </a:ext>
+            </a:extLst>
+          </p:cNvPr>
+          <p:cNvGraphicFramePr>
+            <a:graphicFrameLocks noGrp="1"/>
+          </p:cNvGraphicFramePr>
+          <p:nvPr>
+            <p:extLst>
+              <p:ext uri="{D42A27DB-BD31-4B8C-83A1-F6EECF244321}">
+                <p14:modId xmlns:p14="http://schemas.microsoft.com/office/powerpoint/2010/main" val="2816363617"/>
+              </p:ext>
+            </p:extLst>
+          </p:nvPr>
+        </p:nvGraphicFramePr>
+        <p:xfrm>
+          <a:off x="367989" y="429734"/>
+          <a:ext cx="11162372" cy="2743200"/>
+        </p:xfrm>
+        <a:graphic>
+          <a:graphicData uri="http://schemas.openxmlformats.org/drawingml/2006/table">
+            <a:tbl>
+              <a:tblPr firstRow="1" bandRow="1">
+                <a:tableStyleId>{5940675A-B579-460E-94D1-54222C63F5DA}</a:tableStyleId>
+              </a:tblPr>
+              <a:tblGrid>
+                <a:gridCol w="3401123">
+                  <a:extLst>
+                    <a:ext uri="{9D8B030D-6E8A-4147-A177-3AD203B41FA5}">
+                      <a16:colId xmlns:a16="http://schemas.microsoft.com/office/drawing/2014/main" val="1398259254"/>
+                    </a:ext>
+                  </a:extLst>
+                </a:gridCol>
+                <a:gridCol w="2180063">
+                  <a:extLst>
+                    <a:ext uri="{9D8B030D-6E8A-4147-A177-3AD203B41FA5}">
+                      <a16:colId xmlns:a16="http://schemas.microsoft.com/office/drawing/2014/main" val="649460588"/>
+                    </a:ext>
+                  </a:extLst>
+                </a:gridCol>
+                <a:gridCol w="2790593">
+                  <a:extLst>
+                    <a:ext uri="{9D8B030D-6E8A-4147-A177-3AD203B41FA5}">
+                      <a16:colId xmlns:a16="http://schemas.microsoft.com/office/drawing/2014/main" val="2932413447"/>
+                    </a:ext>
+                  </a:extLst>
+                </a:gridCol>
+                <a:gridCol w="2790593">
+                  <a:extLst>
+                    <a:ext uri="{9D8B030D-6E8A-4147-A177-3AD203B41FA5}">
+                      <a16:colId xmlns:a16="http://schemas.microsoft.com/office/drawing/2014/main" val="3024441236"/>
+                    </a:ext>
+                  </a:extLst>
+                </a:gridCol>
+              </a:tblGrid>
+              <a:tr h="370840">
+                <a:tc>
+                  <a:txBody>
+                    <a:bodyPr/>
+                    <a:lstStyle/>
+                    <a:p>
+                      <a:r>
+                        <a:rPr lang="en-GB" sz="1400" dirty="0" err="1"/>
+                        <a:t>Características</a:t>
+                      </a:r>
+                      <a:endParaRPr lang="en-GB" sz="1400" dirty="0"/>
+                    </a:p>
+                  </a:txBody>
+                  <a:tcPr/>
+                </a:tc>
+                <a:tc>
+                  <a:txBody>
+                    <a:bodyPr/>
+                    <a:lstStyle/>
+                    <a:p>
+                      <a:r>
+                        <a:rPr lang="en-GB" sz="1400" dirty="0"/>
+                        <a:t>web-server </a:t>
+                      </a:r>
+                      <a:r>
+                        <a:rPr lang="en-GB" sz="1400" b="1" dirty="0"/>
+                        <a:t>Blocking</a:t>
+                      </a:r>
+                    </a:p>
+                  </a:txBody>
+                  <a:tcPr/>
+                </a:tc>
+                <a:tc>
+                  <a:txBody>
+                    <a:bodyPr/>
+                    <a:lstStyle/>
+                    <a:p>
+                      <a:r>
+                        <a:rPr lang="en-GB" sz="1400" dirty="0"/>
+                        <a:t>web-server Reactive</a:t>
+                      </a:r>
+                    </a:p>
+                  </a:txBody>
+                  <a:tcPr/>
+                </a:tc>
+                <a:tc>
+                  <a:txBody>
+                    <a:bodyPr/>
+                    <a:lstStyle/>
+                    <a:p>
+                      <a:r>
+                        <a:rPr lang="en-GB" sz="1400" dirty="0"/>
+                        <a:t>web-server  Virtual-threads</a:t>
+                      </a:r>
+                    </a:p>
+                  </a:txBody>
+                  <a:tcPr/>
+                </a:tc>
+                <a:extLst>
+                  <a:ext uri="{0D108BD9-81ED-4DB2-BD59-A6C34878D82A}">
+                    <a16:rowId xmlns:a16="http://schemas.microsoft.com/office/drawing/2014/main" val="1484350126"/>
+                  </a:ext>
+                </a:extLst>
+              </a:tr>
+              <a:tr h="370840">
+                <a:tc>
+                  <a:txBody>
+                    <a:bodyPr/>
+                    <a:lstStyle/>
+                    <a:p>
+                      <a:r>
+                        <a:rPr lang="en-GB" sz="1400" dirty="0" err="1"/>
+                        <a:t>Modelo</a:t>
+                      </a:r>
+                      <a:endParaRPr lang="en-GB" sz="1400" dirty="0"/>
+                    </a:p>
+                  </a:txBody>
+                  <a:tcPr/>
+                </a:tc>
+                <a:tc>
+                  <a:txBody>
+                    <a:bodyPr/>
+                    <a:lstStyle/>
+                    <a:p>
+                      <a:r>
+                        <a:rPr lang="en-GB" sz="1400" dirty="0" err="1"/>
+                        <a:t>Plataforma</a:t>
+                      </a:r>
+                      <a:r>
+                        <a:rPr lang="en-GB" sz="1400" dirty="0"/>
+                        <a:t> (</a:t>
+                      </a:r>
+                      <a:r>
+                        <a:rPr lang="en-GB" sz="1400" dirty="0" err="1"/>
+                        <a:t>pesados</a:t>
+                      </a:r>
+                      <a:r>
+                        <a:rPr lang="en-GB" sz="1400" dirty="0"/>
+                        <a:t>) </a:t>
+                      </a:r>
+                    </a:p>
+                  </a:txBody>
+                  <a:tcPr/>
+                </a:tc>
+                <a:tc>
+                  <a:txBody>
+                    <a:bodyPr/>
+                    <a:lstStyle/>
+                    <a:p>
+                      <a:r>
+                        <a:rPr lang="en-GB" sz="1400" dirty="0" err="1"/>
+                        <a:t>Bucle</a:t>
+                      </a:r>
+                      <a:r>
+                        <a:rPr lang="en-GB" sz="1400" dirty="0"/>
+                        <a:t> de </a:t>
+                      </a:r>
+                      <a:r>
+                        <a:rPr lang="en-GB" sz="1400" dirty="0" err="1"/>
+                        <a:t>eventos</a:t>
+                      </a:r>
+                      <a:r>
+                        <a:rPr lang="en-GB" sz="1400" dirty="0"/>
+                        <a:t> no </a:t>
+                      </a:r>
+                      <a:r>
+                        <a:rPr lang="en-GB" sz="1400" dirty="0" err="1"/>
+                        <a:t>bloqueantes</a:t>
+                      </a:r>
+                      <a:endParaRPr lang="en-GB" sz="1400" dirty="0"/>
+                    </a:p>
+                    <a:p>
+                      <a:r>
+                        <a:rPr lang="en-GB" sz="1400" dirty="0"/>
+                        <a:t>(</a:t>
+                      </a:r>
+                      <a:r>
+                        <a:rPr lang="en-GB" sz="1400" dirty="0" err="1"/>
+                        <a:t>pocos</a:t>
+                      </a:r>
+                      <a:r>
+                        <a:rPr lang="en-GB" sz="1400" dirty="0"/>
+                        <a:t> </a:t>
+                      </a:r>
+                      <a:r>
+                        <a:rPr lang="en-GB" sz="1400" dirty="0" err="1"/>
+                        <a:t>hilos</a:t>
+                      </a:r>
+                      <a:r>
+                        <a:rPr lang="en-GB" sz="1400" dirty="0"/>
+                        <a:t>) </a:t>
+                      </a:r>
+                    </a:p>
+                  </a:txBody>
+                  <a:tcPr/>
+                </a:tc>
+                <a:tc>
+                  <a:txBody>
+                    <a:bodyPr/>
+                    <a:lstStyle/>
+                    <a:p>
+                      <a:pPr marL="0" marR="0" lvl="0" indent="0" algn="l" defTabSz="914400" rtl="0" eaLnBrk="1" fontAlgn="auto" latinLnBrk="0" hangingPunct="1">
+                        <a:lnSpc>
+                          <a:spcPct val="100000"/>
+                        </a:lnSpc>
+                        <a:spcBef>
+                          <a:spcPts val="0"/>
+                        </a:spcBef>
+                        <a:spcAft>
+                          <a:spcPts val="0"/>
+                        </a:spcAft>
+                        <a:buClrTx/>
+                        <a:buSzTx/>
+                        <a:buFontTx/>
+                        <a:buNone/>
+                        <a:tabLst/>
+                        <a:defRPr/>
+                      </a:pPr>
+                      <a:r>
+                        <a:rPr lang="en-GB" sz="1400" dirty="0" err="1"/>
+                        <a:t>Ligeros</a:t>
+                      </a:r>
+                      <a:r>
+                        <a:rPr lang="en-GB" sz="1400" dirty="0"/>
+                        <a:t> 1KB</a:t>
+                      </a:r>
+                    </a:p>
+                  </a:txBody>
+                  <a:tcPr/>
+                </a:tc>
+                <a:extLst>
+                  <a:ext uri="{0D108BD9-81ED-4DB2-BD59-A6C34878D82A}">
+                    <a16:rowId xmlns:a16="http://schemas.microsoft.com/office/drawing/2014/main" val="1193660571"/>
+                  </a:ext>
+                </a:extLst>
+              </a:tr>
+              <a:tr h="370840">
+                <a:tc>
+                  <a:txBody>
+                    <a:bodyPr/>
+                    <a:lstStyle/>
+                    <a:p>
+                      <a:r>
+                        <a:rPr lang="en-GB" sz="1400" dirty="0" err="1"/>
+                        <a:t>Peticiones</a:t>
+                      </a:r>
+                      <a:r>
+                        <a:rPr lang="en-GB" sz="1400" dirty="0"/>
+                        <a:t> </a:t>
+                      </a:r>
+                      <a:r>
+                        <a:rPr lang="en-GB" sz="1400" dirty="0" err="1"/>
+                        <a:t>concurrentes</a:t>
+                      </a:r>
+                      <a:r>
+                        <a:rPr lang="en-GB" sz="1400" dirty="0"/>
+                        <a:t> </a:t>
+                      </a:r>
+                      <a:r>
+                        <a:rPr lang="en-GB" sz="1400" dirty="0" err="1"/>
+                        <a:t>máx</a:t>
+                      </a:r>
+                      <a:r>
+                        <a:rPr lang="en-GB" sz="1400" dirty="0"/>
+                        <a:t> (by default)</a:t>
+                      </a:r>
+                    </a:p>
+                  </a:txBody>
+                  <a:tcPr/>
+                </a:tc>
+                <a:tc>
+                  <a:txBody>
+                    <a:bodyPr/>
+                    <a:lstStyle/>
+                    <a:p>
+                      <a:r>
+                        <a:rPr lang="en-GB" sz="1400" dirty="0"/>
+                        <a:t>200</a:t>
+                      </a:r>
+                    </a:p>
+                  </a:txBody>
+                  <a:tcPr/>
+                </a:tc>
+                <a:tc>
+                  <a:txBody>
+                    <a:bodyPr/>
+                    <a:lstStyle/>
+                    <a:p>
+                      <a:r>
+                        <a:rPr lang="en-GB" sz="1400" dirty="0" err="1"/>
+                        <a:t>Muy</a:t>
+                      </a:r>
+                      <a:r>
+                        <a:rPr lang="en-GB" sz="1400" dirty="0"/>
+                        <a:t> alto</a:t>
+                      </a:r>
+                    </a:p>
+                  </a:txBody>
+                  <a:tcPr/>
+                </a:tc>
+                <a:tc>
+                  <a:txBody>
+                    <a:bodyPr/>
+                    <a:lstStyle/>
+                    <a:p>
+                      <a:r>
+                        <a:rPr lang="en-GB" sz="1400"/>
+                        <a:t>+10.000</a:t>
+                      </a:r>
+                      <a:endParaRPr lang="en-GB" sz="1400" dirty="0"/>
+                    </a:p>
+                  </a:txBody>
+                  <a:tcPr/>
+                </a:tc>
+                <a:extLst>
+                  <a:ext uri="{0D108BD9-81ED-4DB2-BD59-A6C34878D82A}">
+                    <a16:rowId xmlns:a16="http://schemas.microsoft.com/office/drawing/2014/main" val="2735513668"/>
+                  </a:ext>
+                </a:extLst>
+              </a:tr>
+              <a:tr h="370840">
+                <a:tc>
+                  <a:txBody>
+                    <a:bodyPr/>
+                    <a:lstStyle/>
+                    <a:p>
+                      <a:endParaRPr lang="en-GB" sz="1400" dirty="0"/>
+                    </a:p>
+                  </a:txBody>
+                  <a:tcPr/>
+                </a:tc>
+                <a:tc>
+                  <a:txBody>
+                    <a:bodyPr/>
+                    <a:lstStyle/>
+                    <a:p>
+                      <a:endParaRPr lang="en-GB" sz="1400"/>
+                    </a:p>
+                  </a:txBody>
+                  <a:tcPr/>
+                </a:tc>
+                <a:tc>
+                  <a:txBody>
+                    <a:bodyPr/>
+                    <a:lstStyle/>
+                    <a:p>
+                      <a:endParaRPr lang="en-GB" sz="1400"/>
+                    </a:p>
+                  </a:txBody>
+                  <a:tcPr/>
+                </a:tc>
+                <a:tc>
+                  <a:txBody>
+                    <a:bodyPr/>
+                    <a:lstStyle/>
+                    <a:p>
+                      <a:endParaRPr lang="en-GB" sz="1400"/>
+                    </a:p>
+                  </a:txBody>
+                  <a:tcPr/>
+                </a:tc>
+                <a:extLst>
+                  <a:ext uri="{0D108BD9-81ED-4DB2-BD59-A6C34878D82A}">
+                    <a16:rowId xmlns:a16="http://schemas.microsoft.com/office/drawing/2014/main" val="3914010841"/>
+                  </a:ext>
+                </a:extLst>
+              </a:tr>
+              <a:tr h="370840">
+                <a:tc>
+                  <a:txBody>
+                    <a:bodyPr/>
+                    <a:lstStyle/>
+                    <a:p>
+                      <a:endParaRPr lang="en-GB" sz="1400"/>
+                    </a:p>
+                  </a:txBody>
+                  <a:tcPr/>
+                </a:tc>
+                <a:tc>
+                  <a:txBody>
+                    <a:bodyPr/>
+                    <a:lstStyle/>
+                    <a:p>
+                      <a:endParaRPr lang="en-GB" sz="1400"/>
+                    </a:p>
+                  </a:txBody>
+                  <a:tcPr/>
+                </a:tc>
+                <a:tc>
+                  <a:txBody>
+                    <a:bodyPr/>
+                    <a:lstStyle/>
+                    <a:p>
+                      <a:endParaRPr lang="en-GB" sz="1400"/>
+                    </a:p>
+                  </a:txBody>
+                  <a:tcPr/>
+                </a:tc>
+                <a:tc>
+                  <a:txBody>
+                    <a:bodyPr/>
+                    <a:lstStyle/>
+                    <a:p>
+                      <a:endParaRPr lang="en-GB" sz="1400"/>
+                    </a:p>
+                  </a:txBody>
+                  <a:tcPr/>
+                </a:tc>
+                <a:extLst>
+                  <a:ext uri="{0D108BD9-81ED-4DB2-BD59-A6C34878D82A}">
+                    <a16:rowId xmlns:a16="http://schemas.microsoft.com/office/drawing/2014/main" val="515737917"/>
+                  </a:ext>
+                </a:extLst>
+              </a:tr>
+              <a:tr h="370840">
+                <a:tc>
+                  <a:txBody>
+                    <a:bodyPr/>
+                    <a:lstStyle/>
+                    <a:p>
+                      <a:endParaRPr lang="en-GB" sz="1400"/>
+                    </a:p>
+                  </a:txBody>
+                  <a:tcPr/>
+                </a:tc>
+                <a:tc>
+                  <a:txBody>
+                    <a:bodyPr/>
+                    <a:lstStyle/>
+                    <a:p>
+                      <a:endParaRPr lang="en-GB" sz="1400"/>
+                    </a:p>
+                  </a:txBody>
+                  <a:tcPr/>
+                </a:tc>
+                <a:tc>
+                  <a:txBody>
+                    <a:bodyPr/>
+                    <a:lstStyle/>
+                    <a:p>
+                      <a:endParaRPr lang="en-GB" sz="1400"/>
+                    </a:p>
+                  </a:txBody>
+                  <a:tcPr/>
+                </a:tc>
+                <a:tc>
+                  <a:txBody>
+                    <a:bodyPr/>
+                    <a:lstStyle/>
+                    <a:p>
+                      <a:endParaRPr lang="en-GB" sz="1400"/>
+                    </a:p>
+                  </a:txBody>
+                  <a:tcPr/>
+                </a:tc>
+                <a:extLst>
+                  <a:ext uri="{0D108BD9-81ED-4DB2-BD59-A6C34878D82A}">
+                    <a16:rowId xmlns:a16="http://schemas.microsoft.com/office/drawing/2014/main" val="1260258068"/>
+                  </a:ext>
+                </a:extLst>
+              </a:tr>
+              <a:tr h="370840">
+                <a:tc>
+                  <a:txBody>
+                    <a:bodyPr/>
+                    <a:lstStyle/>
+                    <a:p>
+                      <a:endParaRPr lang="en-GB" sz="1400"/>
+                    </a:p>
+                  </a:txBody>
+                  <a:tcPr/>
+                </a:tc>
+                <a:tc>
+                  <a:txBody>
+                    <a:bodyPr/>
+                    <a:lstStyle/>
+                    <a:p>
+                      <a:endParaRPr lang="en-GB" sz="1400"/>
+                    </a:p>
+                  </a:txBody>
+                  <a:tcPr/>
+                </a:tc>
+                <a:tc>
+                  <a:txBody>
+                    <a:bodyPr/>
+                    <a:lstStyle/>
+                    <a:p>
+                      <a:endParaRPr lang="en-GB" sz="1400"/>
+                    </a:p>
+                  </a:txBody>
+                  <a:tcPr/>
+                </a:tc>
+                <a:tc>
+                  <a:txBody>
+                    <a:bodyPr/>
+                    <a:lstStyle/>
+                    <a:p>
+                      <a:endParaRPr lang="en-GB" sz="1400" dirty="0"/>
+                    </a:p>
+                  </a:txBody>
+                  <a:tcPr/>
+                </a:tc>
+                <a:extLst>
+                  <a:ext uri="{0D108BD9-81ED-4DB2-BD59-A6C34878D82A}">
+                    <a16:rowId xmlns:a16="http://schemas.microsoft.com/office/drawing/2014/main" val="3659055273"/>
+                  </a:ext>
+                </a:extLst>
+              </a:tr>
+            </a:tbl>
+          </a:graphicData>
+        </a:graphic>
+      </p:graphicFrame>
     </p:spTree>
     <p:extLst>
       <p:ext uri="{BB962C8B-B14F-4D97-AF65-F5344CB8AC3E}">
@@ -3425,7 +4284,7 @@
 </p:sld>
 </file>
 
-<file path=ppt/slides/slide2.xml><?xml version="1.0" encoding="utf-8"?>
+<file path=ppt/slides/slide3.xml><?xml version="1.0" encoding="utf-8"?>
 <p:sld xmlns:a="http://schemas.openxmlformats.org/drawingml/2006/main" xmlns:r="http://schemas.openxmlformats.org/officeDocument/2006/relationships" xmlns:p="http://schemas.openxmlformats.org/presentationml/2006/main">
   <p:cSld>
     <p:spTree>
@@ -3560,7 +4419,7 @@
 </p:sld>
 </file>
 
-<file path=ppt/slides/slide3.xml><?xml version="1.0" encoding="utf-8"?>
+<file path=ppt/slides/slide4.xml><?xml version="1.0" encoding="utf-8"?>
 <p:sld xmlns:a="http://schemas.openxmlformats.org/drawingml/2006/main" xmlns:r="http://schemas.openxmlformats.org/officeDocument/2006/relationships" xmlns:p="http://schemas.openxmlformats.org/presentationml/2006/main">
   <p:cSld>
     <p:spTree>
@@ -4323,7 +5182,7 @@
 </p:sld>
 </file>
 
-<file path=ppt/slides/slide4.xml><?xml version="1.0" encoding="utf-8"?>
+<file path=ppt/slides/slide5.xml><?xml version="1.0" encoding="utf-8"?>
 <p:sld xmlns:a="http://schemas.openxmlformats.org/drawingml/2006/main" xmlns:r="http://schemas.openxmlformats.org/officeDocument/2006/relationships" xmlns:p="http://schemas.openxmlformats.org/presentationml/2006/main">
   <p:cSld>
     <p:spTree>
@@ -4383,7 +5242,7 @@
 </p:sld>
 </file>
 
-<file path=ppt/slides/slide5.xml><?xml version="1.0" encoding="utf-8"?>
+<file path=ppt/slides/slide6.xml><?xml version="1.0" encoding="utf-8"?>
 <p:sld xmlns:a="http://schemas.openxmlformats.org/drawingml/2006/main" xmlns:r="http://schemas.openxmlformats.org/officeDocument/2006/relationships" xmlns:p="http://schemas.openxmlformats.org/presentationml/2006/main">
   <p:cSld>
     <p:spTree>
@@ -4473,7 +5332,7 @@
 </p:sld>
 </file>
 
-<file path=ppt/slides/slide6.xml><?xml version="1.0" encoding="utf-8"?>
+<file path=ppt/slides/slide7.xml><?xml version="1.0" encoding="utf-8"?>
 <p:sld xmlns:a="http://schemas.openxmlformats.org/drawingml/2006/main" xmlns:r="http://schemas.openxmlformats.org/officeDocument/2006/relationships" xmlns:p="http://schemas.openxmlformats.org/presentationml/2006/main">
   <p:cSld>
     <p:spTree>

--- a/Presentation1.pptx
+++ b/Presentation1.pptx
@@ -4,14 +4,21 @@
   <p:sldMasterIdLst>
     <p:sldMasterId id="2147483648" r:id="rId1"/>
   </p:sldMasterIdLst>
+  <p:notesMasterIdLst>
+    <p:notesMasterId r:id="rId13"/>
+  </p:notesMasterIdLst>
   <p:sldIdLst>
-    <p:sldId id="262" r:id="rId2"/>
-    <p:sldId id="256" r:id="rId3"/>
-    <p:sldId id="257" r:id="rId4"/>
-    <p:sldId id="258" r:id="rId5"/>
-    <p:sldId id="259" r:id="rId6"/>
-    <p:sldId id="261" r:id="rId7"/>
-    <p:sldId id="260" r:id="rId8"/>
+    <p:sldId id="264" r:id="rId2"/>
+    <p:sldId id="263" r:id="rId3"/>
+    <p:sldId id="265" r:id="rId4"/>
+    <p:sldId id="259" r:id="rId5"/>
+    <p:sldId id="257" r:id="rId6"/>
+    <p:sldId id="262" r:id="rId7"/>
+    <p:sldId id="266" r:id="rId8"/>
+    <p:sldId id="267" r:id="rId9"/>
+    <p:sldId id="256" r:id="rId10"/>
+    <p:sldId id="261" r:id="rId11"/>
+    <p:sldId id="260" r:id="rId12"/>
   </p:sldIdLst>
   <p:sldSz cx="12192000" cy="6858000"/>
   <p:notesSz cx="6858000" cy="9144000"/>
@@ -118,6 +125,508 @@
 </p:presentation>
 </file>
 
+<file path=ppt/notesMasters/notesMaster1.xml><?xml version="1.0" encoding="utf-8"?>
+<p:notesMaster xmlns:a="http://schemas.openxmlformats.org/drawingml/2006/main" xmlns:r="http://schemas.openxmlformats.org/officeDocument/2006/relationships" xmlns:p="http://schemas.openxmlformats.org/presentationml/2006/main">
+  <p:cSld>
+    <p:bg>
+      <p:bgRef idx="1001">
+        <a:schemeClr val="bg1"/>
+      </p:bgRef>
+    </p:bg>
+    <p:spTree>
+      <p:nvGrpSpPr>
+        <p:cNvPr id="1" name=""/>
+        <p:cNvGrpSpPr/>
+        <p:nvPr/>
+      </p:nvGrpSpPr>
+      <p:grpSpPr>
+        <a:xfrm>
+          <a:off x="0" y="0"/>
+          <a:ext cx="0" cy="0"/>
+          <a:chOff x="0" y="0"/>
+          <a:chExt cx="0" cy="0"/>
+        </a:xfrm>
+      </p:grpSpPr>
+      <p:sp>
+        <p:nvSpPr>
+          <p:cNvPr id="2" name="Header Placeholder 1"/>
+          <p:cNvSpPr>
+            <a:spLocks noGrp="1"/>
+          </p:cNvSpPr>
+          <p:nvPr>
+            <p:ph type="hdr" sz="quarter"/>
+          </p:nvPr>
+        </p:nvSpPr>
+        <p:spPr>
+          <a:xfrm>
+            <a:off x="0" y="0"/>
+            <a:ext cx="2971800" cy="458788"/>
+          </a:xfrm>
+          <a:prstGeom prst="rect">
+            <a:avLst/>
+          </a:prstGeom>
+        </p:spPr>
+        <p:txBody>
+          <a:bodyPr vert="horz" lIns="91440" tIns="45720" rIns="91440" bIns="45720" rtlCol="0"/>
+          <a:lstStyle>
+            <a:lvl1pPr algn="l">
+              <a:defRPr sz="1200"/>
+            </a:lvl1pPr>
+          </a:lstStyle>
+          <a:p>
+            <a:endParaRPr lang="en-GB"/>
+          </a:p>
+        </p:txBody>
+      </p:sp>
+      <p:sp>
+        <p:nvSpPr>
+          <p:cNvPr id="3" name="Date Placeholder 2"/>
+          <p:cNvSpPr>
+            <a:spLocks noGrp="1"/>
+          </p:cNvSpPr>
+          <p:nvPr>
+            <p:ph type="dt" idx="1"/>
+          </p:nvPr>
+        </p:nvSpPr>
+        <p:spPr>
+          <a:xfrm>
+            <a:off x="3884613" y="0"/>
+            <a:ext cx="2971800" cy="458788"/>
+          </a:xfrm>
+          <a:prstGeom prst="rect">
+            <a:avLst/>
+          </a:prstGeom>
+        </p:spPr>
+        <p:txBody>
+          <a:bodyPr vert="horz" lIns="91440" tIns="45720" rIns="91440" bIns="45720" rtlCol="0"/>
+          <a:lstStyle>
+            <a:lvl1pPr algn="r">
+              <a:defRPr sz="1200"/>
+            </a:lvl1pPr>
+          </a:lstStyle>
+          <a:p>
+            <a:fld id="{BA49F0EC-F0EF-9D4D-980C-F71BB2A13588}" type="datetimeFigureOut">
+              <a:rPr lang="en-GB" smtClean="0"/>
+              <a:t>20/04/2026</a:t>
+            </a:fld>
+            <a:endParaRPr lang="en-GB"/>
+          </a:p>
+        </p:txBody>
+      </p:sp>
+      <p:sp>
+        <p:nvSpPr>
+          <p:cNvPr id="4" name="Slide Image Placeholder 3"/>
+          <p:cNvSpPr>
+            <a:spLocks noGrp="1" noRot="1" noChangeAspect="1"/>
+          </p:cNvSpPr>
+          <p:nvPr>
+            <p:ph type="sldImg" idx="2"/>
+          </p:nvPr>
+        </p:nvSpPr>
+        <p:spPr>
+          <a:xfrm>
+            <a:off x="685800" y="1143000"/>
+            <a:ext cx="5486400" cy="3086100"/>
+          </a:xfrm>
+          <a:prstGeom prst="rect">
+            <a:avLst/>
+          </a:prstGeom>
+          <a:noFill/>
+          <a:ln w="12700">
+            <a:solidFill>
+              <a:prstClr val="black"/>
+            </a:solidFill>
+          </a:ln>
+        </p:spPr>
+        <p:txBody>
+          <a:bodyPr vert="horz" lIns="91440" tIns="45720" rIns="91440" bIns="45720" rtlCol="0" anchor="ctr"/>
+          <a:lstStyle/>
+          <a:p>
+            <a:endParaRPr lang="en-GB"/>
+          </a:p>
+        </p:txBody>
+      </p:sp>
+      <p:sp>
+        <p:nvSpPr>
+          <p:cNvPr id="5" name="Notes Placeholder 4"/>
+          <p:cNvSpPr>
+            <a:spLocks noGrp="1"/>
+          </p:cNvSpPr>
+          <p:nvPr>
+            <p:ph type="body" sz="quarter" idx="3"/>
+          </p:nvPr>
+        </p:nvSpPr>
+        <p:spPr>
+          <a:xfrm>
+            <a:off x="685800" y="4400550"/>
+            <a:ext cx="5486400" cy="3600450"/>
+          </a:xfrm>
+          <a:prstGeom prst="rect">
+            <a:avLst/>
+          </a:prstGeom>
+        </p:spPr>
+        <p:txBody>
+          <a:bodyPr vert="horz" lIns="91440" tIns="45720" rIns="91440" bIns="45720" rtlCol="0"/>
+          <a:lstStyle/>
+          <a:p>
+            <a:pPr lvl="0"/>
+            <a:r>
+              <a:rPr lang="en-US"/>
+              <a:t>Edit Master text styles</a:t>
+            </a:r>
+          </a:p>
+          <a:p>
+            <a:pPr lvl="1"/>
+            <a:r>
+              <a:rPr lang="en-US"/>
+              <a:t>Second level</a:t>
+            </a:r>
+          </a:p>
+          <a:p>
+            <a:pPr lvl="2"/>
+            <a:r>
+              <a:rPr lang="en-US"/>
+              <a:t>Third level</a:t>
+            </a:r>
+          </a:p>
+          <a:p>
+            <a:pPr lvl="3"/>
+            <a:r>
+              <a:rPr lang="en-US"/>
+              <a:t>Fourth level</a:t>
+            </a:r>
+          </a:p>
+          <a:p>
+            <a:pPr lvl="4"/>
+            <a:r>
+              <a:rPr lang="en-US"/>
+              <a:t>Fifth level</a:t>
+            </a:r>
+            <a:endParaRPr lang="en-GB"/>
+          </a:p>
+        </p:txBody>
+      </p:sp>
+      <p:sp>
+        <p:nvSpPr>
+          <p:cNvPr id="6" name="Footer Placeholder 5"/>
+          <p:cNvSpPr>
+            <a:spLocks noGrp="1"/>
+          </p:cNvSpPr>
+          <p:nvPr>
+            <p:ph type="ftr" sz="quarter" idx="4"/>
+          </p:nvPr>
+        </p:nvSpPr>
+        <p:spPr>
+          <a:xfrm>
+            <a:off x="0" y="8685213"/>
+            <a:ext cx="2971800" cy="458787"/>
+          </a:xfrm>
+          <a:prstGeom prst="rect">
+            <a:avLst/>
+          </a:prstGeom>
+        </p:spPr>
+        <p:txBody>
+          <a:bodyPr vert="horz" lIns="91440" tIns="45720" rIns="91440" bIns="45720" rtlCol="0" anchor="b"/>
+          <a:lstStyle>
+            <a:lvl1pPr algn="l">
+              <a:defRPr sz="1200"/>
+            </a:lvl1pPr>
+          </a:lstStyle>
+          <a:p>
+            <a:endParaRPr lang="en-GB"/>
+          </a:p>
+        </p:txBody>
+      </p:sp>
+      <p:sp>
+        <p:nvSpPr>
+          <p:cNvPr id="7" name="Slide Number Placeholder 6"/>
+          <p:cNvSpPr>
+            <a:spLocks noGrp="1"/>
+          </p:cNvSpPr>
+          <p:nvPr>
+            <p:ph type="sldNum" sz="quarter" idx="5"/>
+          </p:nvPr>
+        </p:nvSpPr>
+        <p:spPr>
+          <a:xfrm>
+            <a:off x="3884613" y="8685213"/>
+            <a:ext cx="2971800" cy="458787"/>
+          </a:xfrm>
+          <a:prstGeom prst="rect">
+            <a:avLst/>
+          </a:prstGeom>
+        </p:spPr>
+        <p:txBody>
+          <a:bodyPr vert="horz" lIns="91440" tIns="45720" rIns="91440" bIns="45720" rtlCol="0" anchor="b"/>
+          <a:lstStyle>
+            <a:lvl1pPr algn="r">
+              <a:defRPr sz="1200"/>
+            </a:lvl1pPr>
+          </a:lstStyle>
+          <a:p>
+            <a:fld id="{40EDBA48-FC82-C141-A3E2-4707AEA1C46D}" type="slidenum">
+              <a:rPr lang="en-GB" smtClean="0"/>
+              <a:t>‹#›</a:t>
+            </a:fld>
+            <a:endParaRPr lang="en-GB"/>
+          </a:p>
+        </p:txBody>
+      </p:sp>
+    </p:spTree>
+    <p:extLst>
+      <p:ext uri="{BB962C8B-B14F-4D97-AF65-F5344CB8AC3E}">
+        <p14:creationId xmlns:p14="http://schemas.microsoft.com/office/powerpoint/2010/main" val="152750912"/>
+      </p:ext>
+    </p:extLst>
+  </p:cSld>
+  <p:clrMap bg1="lt1" tx1="dk1" bg2="lt2" tx2="dk2" accent1="accent1" accent2="accent2" accent3="accent3" accent4="accent4" accent5="accent5" accent6="accent6" hlink="hlink" folHlink="folHlink"/>
+  <p:notesStyle>
+    <a:lvl1pPr marL="0" algn="l" defTabSz="914400" rtl="0" eaLnBrk="1" latinLnBrk="0" hangingPunct="1">
+      <a:defRPr sz="1200" kern="1200">
+        <a:solidFill>
+          <a:schemeClr val="tx1"/>
+        </a:solidFill>
+        <a:latin typeface="+mn-lt"/>
+        <a:ea typeface="+mn-ea"/>
+        <a:cs typeface="+mn-cs"/>
+      </a:defRPr>
+    </a:lvl1pPr>
+    <a:lvl2pPr marL="457200" algn="l" defTabSz="914400" rtl="0" eaLnBrk="1" latinLnBrk="0" hangingPunct="1">
+      <a:defRPr sz="1200" kern="1200">
+        <a:solidFill>
+          <a:schemeClr val="tx1"/>
+        </a:solidFill>
+        <a:latin typeface="+mn-lt"/>
+        <a:ea typeface="+mn-ea"/>
+        <a:cs typeface="+mn-cs"/>
+      </a:defRPr>
+    </a:lvl2pPr>
+    <a:lvl3pPr marL="914400" algn="l" defTabSz="914400" rtl="0" eaLnBrk="1" latinLnBrk="0" hangingPunct="1">
+      <a:defRPr sz="1200" kern="1200">
+        <a:solidFill>
+          <a:schemeClr val="tx1"/>
+        </a:solidFill>
+        <a:latin typeface="+mn-lt"/>
+        <a:ea typeface="+mn-ea"/>
+        <a:cs typeface="+mn-cs"/>
+      </a:defRPr>
+    </a:lvl3pPr>
+    <a:lvl4pPr marL="1371600" algn="l" defTabSz="914400" rtl="0" eaLnBrk="1" latinLnBrk="0" hangingPunct="1">
+      <a:defRPr sz="1200" kern="1200">
+        <a:solidFill>
+          <a:schemeClr val="tx1"/>
+        </a:solidFill>
+        <a:latin typeface="+mn-lt"/>
+        <a:ea typeface="+mn-ea"/>
+        <a:cs typeface="+mn-cs"/>
+      </a:defRPr>
+    </a:lvl4pPr>
+    <a:lvl5pPr marL="1828800" algn="l" defTabSz="914400" rtl="0" eaLnBrk="1" latinLnBrk="0" hangingPunct="1">
+      <a:defRPr sz="1200" kern="1200">
+        <a:solidFill>
+          <a:schemeClr val="tx1"/>
+        </a:solidFill>
+        <a:latin typeface="+mn-lt"/>
+        <a:ea typeface="+mn-ea"/>
+        <a:cs typeface="+mn-cs"/>
+      </a:defRPr>
+    </a:lvl5pPr>
+    <a:lvl6pPr marL="2286000" algn="l" defTabSz="914400" rtl="0" eaLnBrk="1" latinLnBrk="0" hangingPunct="1">
+      <a:defRPr sz="1200" kern="1200">
+        <a:solidFill>
+          <a:schemeClr val="tx1"/>
+        </a:solidFill>
+        <a:latin typeface="+mn-lt"/>
+        <a:ea typeface="+mn-ea"/>
+        <a:cs typeface="+mn-cs"/>
+      </a:defRPr>
+    </a:lvl6pPr>
+    <a:lvl7pPr marL="2743200" algn="l" defTabSz="914400" rtl="0" eaLnBrk="1" latinLnBrk="0" hangingPunct="1">
+      <a:defRPr sz="1200" kern="1200">
+        <a:solidFill>
+          <a:schemeClr val="tx1"/>
+        </a:solidFill>
+        <a:latin typeface="+mn-lt"/>
+        <a:ea typeface="+mn-ea"/>
+        <a:cs typeface="+mn-cs"/>
+      </a:defRPr>
+    </a:lvl7pPr>
+    <a:lvl8pPr marL="3200400" algn="l" defTabSz="914400" rtl="0" eaLnBrk="1" latinLnBrk="0" hangingPunct="1">
+      <a:defRPr sz="1200" kern="1200">
+        <a:solidFill>
+          <a:schemeClr val="tx1"/>
+        </a:solidFill>
+        <a:latin typeface="+mn-lt"/>
+        <a:ea typeface="+mn-ea"/>
+        <a:cs typeface="+mn-cs"/>
+      </a:defRPr>
+    </a:lvl8pPr>
+    <a:lvl9pPr marL="3657600" algn="l" defTabSz="914400" rtl="0" eaLnBrk="1" latinLnBrk="0" hangingPunct="1">
+      <a:defRPr sz="1200" kern="1200">
+        <a:solidFill>
+          <a:schemeClr val="tx1"/>
+        </a:solidFill>
+        <a:latin typeface="+mn-lt"/>
+        <a:ea typeface="+mn-ea"/>
+        <a:cs typeface="+mn-cs"/>
+      </a:defRPr>
+    </a:lvl9pPr>
+  </p:notesStyle>
+</p:notesMaster>
+</file>
+
+<file path=ppt/notesSlides/notesSlide1.xml><?xml version="1.0" encoding="utf-8"?>
+<p:notes xmlns:a="http://schemas.openxmlformats.org/drawingml/2006/main" xmlns:r="http://schemas.openxmlformats.org/officeDocument/2006/relationships" xmlns:p="http://schemas.openxmlformats.org/presentationml/2006/main">
+  <p:cSld>
+    <p:spTree>
+      <p:nvGrpSpPr>
+        <p:cNvPr id="1" name=""/>
+        <p:cNvGrpSpPr/>
+        <p:nvPr/>
+      </p:nvGrpSpPr>
+      <p:grpSpPr>
+        <a:xfrm>
+          <a:off x="0" y="0"/>
+          <a:ext cx="0" cy="0"/>
+          <a:chOff x="0" y="0"/>
+          <a:chExt cx="0" cy="0"/>
+        </a:xfrm>
+      </p:grpSpPr>
+      <p:sp>
+        <p:nvSpPr>
+          <p:cNvPr id="2" name="Slide Image Placeholder 1"/>
+          <p:cNvSpPr>
+            <a:spLocks noGrp="1" noRot="1" noChangeAspect="1"/>
+          </p:cNvSpPr>
+          <p:nvPr>
+            <p:ph type="sldImg"/>
+          </p:nvPr>
+        </p:nvSpPr>
+        <p:spPr/>
+      </p:sp>
+      <p:sp>
+        <p:nvSpPr>
+          <p:cNvPr id="3" name="Notes Placeholder 2"/>
+          <p:cNvSpPr>
+            <a:spLocks noGrp="1"/>
+          </p:cNvSpPr>
+          <p:nvPr>
+            <p:ph type="body" idx="1"/>
+          </p:nvPr>
+        </p:nvSpPr>
+        <p:spPr/>
+        <p:txBody>
+          <a:bodyPr/>
+          <a:lstStyle/>
+          <a:p>
+            <a:r>
+              <a:rPr lang="en-GB" dirty="0" err="1"/>
+              <a:t>Remarcar</a:t>
+            </a:r>
+            <a:r>
+              <a:rPr lang="en-GB" dirty="0"/>
+              <a:t> que </a:t>
+            </a:r>
+            <a:r>
+              <a:rPr lang="en-GB" dirty="0" err="1"/>
+              <a:t>pasar</a:t>
+            </a:r>
+            <a:r>
+              <a:rPr lang="en-GB" dirty="0"/>
+              <a:t> de blocking a reactive </a:t>
+            </a:r>
+            <a:r>
+              <a:rPr lang="en-GB" dirty="0" err="1"/>
+              <a:t>implica</a:t>
+            </a:r>
+            <a:r>
+              <a:rPr lang="en-GB" dirty="0"/>
+              <a:t> </a:t>
+            </a:r>
+            <a:r>
+              <a:rPr lang="en-GB" dirty="0" err="1"/>
+              <a:t>reescribir</a:t>
+            </a:r>
+            <a:r>
+              <a:rPr lang="en-GB" dirty="0"/>
+              <a:t> </a:t>
+            </a:r>
+            <a:r>
+              <a:rPr lang="en-GB" dirty="0" err="1"/>
+              <a:t>toda</a:t>
+            </a:r>
+            <a:r>
+              <a:rPr lang="en-GB" dirty="0"/>
+              <a:t> la </a:t>
+            </a:r>
+            <a:r>
+              <a:rPr lang="en-GB" dirty="0" err="1"/>
+              <a:t>logica</a:t>
+            </a:r>
+            <a:r>
+              <a:rPr lang="en-GB" dirty="0"/>
+              <a:t> con Mono / Flux / </a:t>
+            </a:r>
+            <a:r>
+              <a:rPr lang="en-GB" dirty="0" err="1"/>
+              <a:t>Webclinet</a:t>
+            </a:r>
+            <a:r>
+              <a:rPr lang="en-GB" dirty="0"/>
+              <a:t> y el </a:t>
+            </a:r>
+            <a:r>
+              <a:rPr lang="en-GB" dirty="0" err="1"/>
+              <a:t>paso</a:t>
+            </a:r>
+            <a:r>
+              <a:rPr lang="en-GB" dirty="0"/>
+              <a:t> a VT son 2 </a:t>
+            </a:r>
+            <a:r>
+              <a:rPr lang="en-GB" dirty="0" err="1"/>
+              <a:t>líneas</a:t>
+            </a:r>
+            <a:endParaRPr lang="en-GB" dirty="0"/>
+          </a:p>
+        </p:txBody>
+      </p:sp>
+      <p:sp>
+        <p:nvSpPr>
+          <p:cNvPr id="4" name="Slide Number Placeholder 3"/>
+          <p:cNvSpPr>
+            <a:spLocks noGrp="1"/>
+          </p:cNvSpPr>
+          <p:nvPr>
+            <p:ph type="sldNum" sz="quarter" idx="5"/>
+          </p:nvPr>
+        </p:nvSpPr>
+        <p:spPr/>
+        <p:txBody>
+          <a:bodyPr/>
+          <a:lstStyle/>
+          <a:p>
+            <a:fld id="{40EDBA48-FC82-C141-A3E2-4707AEA1C46D}" type="slidenum">
+              <a:rPr lang="en-GB" smtClean="0"/>
+              <a:t>4</a:t>
+            </a:fld>
+            <a:endParaRPr lang="en-GB"/>
+          </a:p>
+        </p:txBody>
+      </p:sp>
+    </p:spTree>
+    <p:extLst>
+      <p:ext uri="{BB962C8B-B14F-4D97-AF65-F5344CB8AC3E}">
+        <p14:creationId xmlns:p14="http://schemas.microsoft.com/office/powerpoint/2010/main" val="796446622"/>
+      </p:ext>
+    </p:extLst>
+  </p:cSld>
+  <p:clrMapOvr>
+    <a:masterClrMapping/>
+  </p:clrMapOvr>
+</p:notes>
+</file>
+
 <file path=ppt/slideLayouts/slideLayout1.xml><?xml version="1.0" encoding="utf-8"?>
 <p:sldLayout xmlns:a="http://schemas.openxmlformats.org/drawingml/2006/main" xmlns:r="http://schemas.openxmlformats.org/officeDocument/2006/relationships" xmlns:p="http://schemas.openxmlformats.org/presentationml/2006/main" type="title" preserve="1">
   <p:cSld name="Title Slide">
@@ -267,7 +776,7 @@
           <a:p>
             <a:fld id="{F7617E6C-B4C1-F64F-9F0E-38D55D0C6E24}" type="datetimeFigureOut">
               <a:rPr lang="en-GB" smtClean="0"/>
-              <a:t>19/04/2026</a:t>
+              <a:t>20/04/2026</a:t>
             </a:fld>
             <a:endParaRPr lang="en-GB"/>
           </a:p>
@@ -467,7 +976,7 @@
           <a:p>
             <a:fld id="{F7617E6C-B4C1-F64F-9F0E-38D55D0C6E24}" type="datetimeFigureOut">
               <a:rPr lang="en-GB" smtClean="0"/>
-              <a:t>19/04/2026</a:t>
+              <a:t>20/04/2026</a:t>
             </a:fld>
             <a:endParaRPr lang="en-GB"/>
           </a:p>
@@ -677,7 +1186,7 @@
           <a:p>
             <a:fld id="{F7617E6C-B4C1-F64F-9F0E-38D55D0C6E24}" type="datetimeFigureOut">
               <a:rPr lang="en-GB" smtClean="0"/>
-              <a:t>19/04/2026</a:t>
+              <a:t>20/04/2026</a:t>
             </a:fld>
             <a:endParaRPr lang="en-GB"/>
           </a:p>
@@ -877,7 +1386,7 @@
           <a:p>
             <a:fld id="{F7617E6C-B4C1-F64F-9F0E-38D55D0C6E24}" type="datetimeFigureOut">
               <a:rPr lang="en-GB" smtClean="0"/>
-              <a:t>19/04/2026</a:t>
+              <a:t>20/04/2026</a:t>
             </a:fld>
             <a:endParaRPr lang="en-GB"/>
           </a:p>
@@ -1153,7 +1662,7 @@
           <a:p>
             <a:fld id="{F7617E6C-B4C1-F64F-9F0E-38D55D0C6E24}" type="datetimeFigureOut">
               <a:rPr lang="en-GB" smtClean="0"/>
-              <a:t>19/04/2026</a:t>
+              <a:t>20/04/2026</a:t>
             </a:fld>
             <a:endParaRPr lang="en-GB"/>
           </a:p>
@@ -1421,7 +1930,7 @@
           <a:p>
             <a:fld id="{F7617E6C-B4C1-F64F-9F0E-38D55D0C6E24}" type="datetimeFigureOut">
               <a:rPr lang="en-GB" smtClean="0"/>
-              <a:t>19/04/2026</a:t>
+              <a:t>20/04/2026</a:t>
             </a:fld>
             <a:endParaRPr lang="en-GB"/>
           </a:p>
@@ -1836,7 +2345,7 @@
           <a:p>
             <a:fld id="{F7617E6C-B4C1-F64F-9F0E-38D55D0C6E24}" type="datetimeFigureOut">
               <a:rPr lang="en-GB" smtClean="0"/>
-              <a:t>19/04/2026</a:t>
+              <a:t>20/04/2026</a:t>
             </a:fld>
             <a:endParaRPr lang="en-GB"/>
           </a:p>
@@ -1978,7 +2487,7 @@
           <a:p>
             <a:fld id="{F7617E6C-B4C1-F64F-9F0E-38D55D0C6E24}" type="datetimeFigureOut">
               <a:rPr lang="en-GB" smtClean="0"/>
-              <a:t>19/04/2026</a:t>
+              <a:t>20/04/2026</a:t>
             </a:fld>
             <a:endParaRPr lang="en-GB"/>
           </a:p>
@@ -2091,7 +2600,7 @@
           <a:p>
             <a:fld id="{F7617E6C-B4C1-F64F-9F0E-38D55D0C6E24}" type="datetimeFigureOut">
               <a:rPr lang="en-GB" smtClean="0"/>
-              <a:t>19/04/2026</a:t>
+              <a:t>20/04/2026</a:t>
             </a:fld>
             <a:endParaRPr lang="en-GB"/>
           </a:p>
@@ -2404,7 +2913,7 @@
           <a:p>
             <a:fld id="{F7617E6C-B4C1-F64F-9F0E-38D55D0C6E24}" type="datetimeFigureOut">
               <a:rPr lang="en-GB" smtClean="0"/>
-              <a:t>19/04/2026</a:t>
+              <a:t>20/04/2026</a:t>
             </a:fld>
             <a:endParaRPr lang="en-GB"/>
           </a:p>
@@ -2693,7 +3202,7 @@
           <a:p>
             <a:fld id="{F7617E6C-B4C1-F64F-9F0E-38D55D0C6E24}" type="datetimeFigureOut">
               <a:rPr lang="en-GB" smtClean="0"/>
-              <a:t>19/04/2026</a:t>
+              <a:t>20/04/2026</a:t>
             </a:fld>
             <a:endParaRPr lang="en-GB"/>
           </a:p>
@@ -2936,7 +3445,7 @@
           <a:p>
             <a:fld id="{F7617E6C-B4C1-F64F-9F0E-38D55D0C6E24}" type="datetimeFigureOut">
               <a:rPr lang="en-GB" smtClean="0"/>
-              <a:t>19/04/2026</a:t>
+              <a:t>20/04/2026</a:t>
             </a:fld>
             <a:endParaRPr lang="en-GB"/>
           </a:p>
@@ -3358,7 +3867,7 @@
           <p:cNvPr id="4" name="Picture 3">
             <a:extLst>
               <a:ext uri="{FF2B5EF4-FFF2-40B4-BE49-F238E27FC236}">
-                <a16:creationId xmlns:a16="http://schemas.microsoft.com/office/drawing/2014/main" id="{4F86DCC4-F23A-7843-9246-2250D4374020}"/>
+                <a16:creationId xmlns:a16="http://schemas.microsoft.com/office/drawing/2014/main" id="{F6C0E4CA-52B3-DA48-A922-69037FBE2965}"/>
               </a:ext>
             </a:extLst>
           </p:cNvPr>
@@ -3375,158 +3884,8 @@
         </p:blipFill>
         <p:spPr>
           <a:xfrm>
-            <a:off x="186317" y="544087"/>
-            <a:ext cx="4838700" cy="1866900"/>
-          </a:xfrm>
-          <a:prstGeom prst="rect">
-            <a:avLst/>
-          </a:prstGeom>
-        </p:spPr>
-      </p:pic>
-      <p:pic>
-        <p:nvPicPr>
-          <p:cNvPr id="5" name="Picture 4">
-            <a:extLst>
-              <a:ext uri="{FF2B5EF4-FFF2-40B4-BE49-F238E27FC236}">
-                <a16:creationId xmlns:a16="http://schemas.microsoft.com/office/drawing/2014/main" id="{8B87CC40-CC2C-E44F-9AF7-B2380D9ED99B}"/>
-              </a:ext>
-            </a:extLst>
-          </p:cNvPr>
-          <p:cNvPicPr>
-            <a:picLocks noChangeAspect="1"/>
-          </p:cNvPicPr>
-          <p:nvPr/>
-        </p:nvPicPr>
-        <p:blipFill>
-          <a:blip r:embed="rId3"/>
-          <a:stretch>
-            <a:fillRect/>
-          </a:stretch>
-        </p:blipFill>
-        <p:spPr>
-          <a:xfrm>
-            <a:off x="5127857" y="544087"/>
-            <a:ext cx="4813300" cy="1828800"/>
-          </a:xfrm>
-          <a:prstGeom prst="rect">
-            <a:avLst/>
-          </a:prstGeom>
-        </p:spPr>
-      </p:pic>
-      <p:pic>
-        <p:nvPicPr>
-          <p:cNvPr id="6" name="Picture 5">
-            <a:extLst>
-              <a:ext uri="{FF2B5EF4-FFF2-40B4-BE49-F238E27FC236}">
-                <a16:creationId xmlns:a16="http://schemas.microsoft.com/office/drawing/2014/main" id="{BA1B7D0A-9E9A-2948-9075-4729B109BD36}"/>
-              </a:ext>
-            </a:extLst>
-          </p:cNvPr>
-          <p:cNvPicPr>
-            <a:picLocks noChangeAspect="1"/>
-          </p:cNvPicPr>
-          <p:nvPr/>
-        </p:nvPicPr>
-        <p:blipFill>
-          <a:blip r:embed="rId4"/>
-          <a:stretch>
-            <a:fillRect/>
-          </a:stretch>
-        </p:blipFill>
-        <p:spPr>
-          <a:xfrm>
-            <a:off x="186317" y="2541859"/>
-            <a:ext cx="4851400" cy="1930400"/>
-          </a:xfrm>
-          <a:prstGeom prst="rect">
-            <a:avLst/>
-          </a:prstGeom>
-        </p:spPr>
-      </p:pic>
-      <p:pic>
-        <p:nvPicPr>
-          <p:cNvPr id="7" name="Picture 6">
-            <a:extLst>
-              <a:ext uri="{FF2B5EF4-FFF2-40B4-BE49-F238E27FC236}">
-                <a16:creationId xmlns:a16="http://schemas.microsoft.com/office/drawing/2014/main" id="{834323C9-7ACE-2B49-A614-0A041EF6B957}"/>
-              </a:ext>
-            </a:extLst>
-          </p:cNvPr>
-          <p:cNvPicPr>
-            <a:picLocks noChangeAspect="1"/>
-          </p:cNvPicPr>
-          <p:nvPr/>
-        </p:nvPicPr>
-        <p:blipFill>
-          <a:blip r:embed="rId5"/>
-          <a:stretch>
-            <a:fillRect/>
-          </a:stretch>
-        </p:blipFill>
-        <p:spPr>
-          <a:xfrm>
-            <a:off x="186317" y="4603131"/>
-            <a:ext cx="9715500" cy="1930400"/>
-          </a:xfrm>
-          <a:prstGeom prst="rect">
-            <a:avLst/>
-          </a:prstGeom>
-        </p:spPr>
-      </p:pic>
-      <p:pic>
-        <p:nvPicPr>
-          <p:cNvPr id="9" name="Picture 8">
-            <a:extLst>
-              <a:ext uri="{FF2B5EF4-FFF2-40B4-BE49-F238E27FC236}">
-                <a16:creationId xmlns:a16="http://schemas.microsoft.com/office/drawing/2014/main" id="{2F391477-4510-0641-A5E0-118C80E6559E}"/>
-              </a:ext>
-            </a:extLst>
-          </p:cNvPr>
-          <p:cNvPicPr>
-            <a:picLocks noChangeAspect="1"/>
-          </p:cNvPicPr>
-          <p:nvPr/>
-        </p:nvPicPr>
-        <p:blipFill>
-          <a:blip r:embed="rId6"/>
-          <a:stretch>
-            <a:fillRect/>
-          </a:stretch>
-        </p:blipFill>
-        <p:spPr>
-          <a:xfrm>
-            <a:off x="5127857" y="2541859"/>
-            <a:ext cx="6705600" cy="1854200"/>
-          </a:xfrm>
-          <a:prstGeom prst="rect">
-            <a:avLst/>
-          </a:prstGeom>
-        </p:spPr>
-      </p:pic>
-      <p:pic>
-        <p:nvPicPr>
-          <p:cNvPr id="10" name="Picture 9">
-            <a:extLst>
-              <a:ext uri="{FF2B5EF4-FFF2-40B4-BE49-F238E27FC236}">
-                <a16:creationId xmlns:a16="http://schemas.microsoft.com/office/drawing/2014/main" id="{892ADCC5-C28B-514B-AD28-744FED987AAC}"/>
-              </a:ext>
-            </a:extLst>
-          </p:cNvPr>
-          <p:cNvPicPr>
-            <a:picLocks noChangeAspect="1"/>
-          </p:cNvPicPr>
-          <p:nvPr/>
-        </p:nvPicPr>
-        <p:blipFill>
-          <a:blip r:embed="rId7"/>
-          <a:stretch>
-            <a:fillRect/>
-          </a:stretch>
-        </p:blipFill>
-        <p:spPr>
-          <a:xfrm>
-            <a:off x="3603858" y="0"/>
-            <a:ext cx="4203700" cy="419100"/>
+            <a:off x="1016000" y="1149350"/>
+            <a:ext cx="10160000" cy="4559300"/>
           </a:xfrm>
           <a:prstGeom prst="rect">
             <a:avLst/>
@@ -3536,7 +3895,7 @@
     </p:spTree>
     <p:extLst>
       <p:ext uri="{BB962C8B-B14F-4D97-AF65-F5344CB8AC3E}">
-        <p14:creationId xmlns:p14="http://schemas.microsoft.com/office/powerpoint/2010/main" val="1811275226"/>
+        <p14:creationId xmlns:p14="http://schemas.microsoft.com/office/powerpoint/2010/main" val="1181042508"/>
       </p:ext>
     </p:extLst>
   </p:cSld>
@@ -3546,1703 +3905,7 @@
 </p:sld>
 </file>
 
-<file path=ppt/slides/slide2.xml><?xml version="1.0" encoding="utf-8"?>
-<p:sld xmlns:a="http://schemas.openxmlformats.org/drawingml/2006/main" xmlns:r="http://schemas.openxmlformats.org/officeDocument/2006/relationships" xmlns:p="http://schemas.openxmlformats.org/presentationml/2006/main">
-  <p:cSld>
-    <p:spTree>
-      <p:nvGrpSpPr>
-        <p:cNvPr id="1" name=""/>
-        <p:cNvGrpSpPr/>
-        <p:nvPr/>
-      </p:nvGrpSpPr>
-      <p:grpSpPr>
-        <a:xfrm>
-          <a:off x="0" y="0"/>
-          <a:ext cx="0" cy="0"/>
-          <a:chOff x="0" y="0"/>
-          <a:chExt cx="0" cy="0"/>
-        </a:xfrm>
-      </p:grpSpPr>
-      <p:sp>
-        <p:nvSpPr>
-          <p:cNvPr id="2" name="TextBox 1">
-            <a:extLst>
-              <a:ext uri="{FF2B5EF4-FFF2-40B4-BE49-F238E27FC236}">
-                <a16:creationId xmlns:a16="http://schemas.microsoft.com/office/drawing/2014/main" id="{27039B50-FC3E-1B49-A3EB-FE6A2DD22EED}"/>
-              </a:ext>
-            </a:extLst>
-          </p:cNvPr>
-          <p:cNvSpPr txBox="1"/>
-          <p:nvPr/>
-        </p:nvSpPr>
-        <p:spPr>
-          <a:xfrm>
-            <a:off x="535258" y="4614365"/>
-            <a:ext cx="9918036" cy="2031325"/>
-          </a:xfrm>
-          <a:prstGeom prst="rect">
-            <a:avLst/>
-          </a:prstGeom>
-          <a:noFill/>
-        </p:spPr>
-        <p:txBody>
-          <a:bodyPr wrap="none" rtlCol="0">
-            <a:spAutoFit/>
-          </a:bodyPr>
-          <a:lstStyle/>
-          <a:p>
-            <a:r>
-              <a:rPr lang="es-ES" u="sng" dirty="0"/>
-              <a:t>Ventajas de Virtual </a:t>
-            </a:r>
-            <a:r>
-              <a:rPr lang="es-ES" u="sng" dirty="0" err="1"/>
-              <a:t>Threads</a:t>
-            </a:r>
-            <a:r>
-              <a:rPr lang="es-ES" u="sng" dirty="0"/>
-              <a:t> en el servidor</a:t>
-            </a:r>
-          </a:p>
-          <a:p>
-            <a:pPr marL="319088" indent="-131763">
-              <a:buFont typeface="Arial" panose="020B0604020202020204" pitchFamily="34" charset="0"/>
-              <a:buChar char="•"/>
-            </a:pPr>
-            <a:r>
-              <a:rPr lang="es-ES" dirty="0"/>
-              <a:t>Escalabilidad: </a:t>
-            </a:r>
-            <a:r>
-              <a:rPr lang="es-ES" dirty="0" err="1"/>
-              <a:t>Tomcat</a:t>
-            </a:r>
-            <a:r>
-              <a:rPr lang="es-ES" dirty="0"/>
-              <a:t> puede manejar miles de </a:t>
-            </a:r>
-            <a:r>
-              <a:rPr lang="es-ES" dirty="0" err="1"/>
-              <a:t>requests</a:t>
-            </a:r>
-            <a:r>
-              <a:rPr lang="es-ES" dirty="0"/>
-              <a:t> concurrentes (vs ~200 con </a:t>
-            </a:r>
-            <a:r>
-              <a:rPr lang="es-ES" dirty="0" err="1"/>
-              <a:t>platform</a:t>
-            </a:r>
-            <a:r>
-              <a:rPr lang="es-ES" dirty="0"/>
-              <a:t> </a:t>
-            </a:r>
-            <a:r>
-              <a:rPr lang="es-ES" dirty="0" err="1"/>
-              <a:t>threads</a:t>
-            </a:r>
-            <a:r>
-              <a:rPr lang="es-ES" dirty="0"/>
-              <a:t>) </a:t>
-            </a:r>
-          </a:p>
-          <a:p>
-            <a:pPr marL="319088" indent="-131763">
-              <a:buFont typeface="Arial" panose="020B0604020202020204" pitchFamily="34" charset="0"/>
-              <a:buChar char="•"/>
-            </a:pPr>
-            <a:r>
-              <a:rPr lang="es-ES" dirty="0"/>
-              <a:t>Memoria eficiente: Cada virtual </a:t>
-            </a:r>
-            <a:r>
-              <a:rPr lang="es-ES" dirty="0" err="1"/>
-              <a:t>thread</a:t>
-            </a:r>
-            <a:r>
-              <a:rPr lang="es-ES" dirty="0"/>
-              <a:t> consume ~1KB (vs ~1MB de </a:t>
-            </a:r>
-            <a:r>
-              <a:rPr lang="es-ES" dirty="0" err="1"/>
-              <a:t>platform</a:t>
-            </a:r>
-            <a:r>
-              <a:rPr lang="es-ES" dirty="0"/>
-              <a:t> </a:t>
-            </a:r>
-            <a:r>
-              <a:rPr lang="es-ES" dirty="0" err="1"/>
-              <a:t>threads</a:t>
-            </a:r>
-            <a:r>
-              <a:rPr lang="es-ES" dirty="0"/>
-              <a:t>) </a:t>
-            </a:r>
-          </a:p>
-          <a:p>
-            <a:pPr marL="319088" indent="-131763">
-              <a:buFont typeface="Arial" panose="020B0604020202020204" pitchFamily="34" charset="0"/>
-              <a:buChar char="•"/>
-            </a:pPr>
-            <a:r>
-              <a:rPr lang="es-ES" dirty="0"/>
-              <a:t>Sin límite de </a:t>
-            </a:r>
-            <a:r>
-              <a:rPr lang="es-ES" dirty="0" err="1"/>
-              <a:t>threads</a:t>
-            </a:r>
-            <a:r>
-              <a:rPr lang="es-ES" dirty="0"/>
-              <a:t>: No hay pool </a:t>
-            </a:r>
-            <a:r>
-              <a:rPr lang="es-ES" dirty="0" err="1"/>
-              <a:t>size</a:t>
-            </a:r>
-            <a:r>
-              <a:rPr lang="es-ES" dirty="0"/>
-              <a:t> que configurar </a:t>
-            </a:r>
-          </a:p>
-          <a:p>
-            <a:pPr marL="319088" indent="-131763">
-              <a:buFont typeface="Arial" panose="020B0604020202020204" pitchFamily="34" charset="0"/>
-              <a:buChar char="•"/>
-            </a:pPr>
-            <a:r>
-              <a:rPr lang="es-ES" dirty="0"/>
-              <a:t>CPU eficiente: Mejor utilización en escenarios I/O-</a:t>
-            </a:r>
-            <a:r>
-              <a:rPr lang="es-ES" dirty="0" err="1"/>
-              <a:t>bound</a:t>
-            </a:r>
-            <a:r>
-              <a:rPr lang="es-ES" dirty="0"/>
-              <a:t> </a:t>
-            </a:r>
-          </a:p>
-          <a:p>
-            <a:pPr marL="319088" indent="-131763">
-              <a:buFont typeface="Arial" panose="020B0604020202020204" pitchFamily="34" charset="0"/>
-              <a:buChar char="•"/>
-            </a:pPr>
-            <a:r>
-              <a:rPr lang="es-ES" dirty="0"/>
-              <a:t>Código simple: Sin cambios en el código del servicio</a:t>
-            </a:r>
-          </a:p>
-          <a:p>
-            <a:endParaRPr lang="en-GB" dirty="0"/>
-          </a:p>
-        </p:txBody>
-      </p:sp>
-      <p:graphicFrame>
-        <p:nvGraphicFramePr>
-          <p:cNvPr id="3" name="Table 2">
-            <a:extLst>
-              <a:ext uri="{FF2B5EF4-FFF2-40B4-BE49-F238E27FC236}">
-                <a16:creationId xmlns:a16="http://schemas.microsoft.com/office/drawing/2014/main" id="{BD1C99F3-D3FE-6A4D-BA5C-9DB89D6BB052}"/>
-              </a:ext>
-            </a:extLst>
-          </p:cNvPr>
-          <p:cNvGraphicFramePr>
-            <a:graphicFrameLocks noGrp="1"/>
-          </p:cNvGraphicFramePr>
-          <p:nvPr>
-            <p:extLst>
-              <p:ext uri="{D42A27DB-BD31-4B8C-83A1-F6EECF244321}">
-                <p14:modId xmlns:p14="http://schemas.microsoft.com/office/powerpoint/2010/main" val="2816363617"/>
-              </p:ext>
-            </p:extLst>
-          </p:nvPr>
-        </p:nvGraphicFramePr>
-        <p:xfrm>
-          <a:off x="367989" y="429734"/>
-          <a:ext cx="11162372" cy="2743200"/>
-        </p:xfrm>
-        <a:graphic>
-          <a:graphicData uri="http://schemas.openxmlformats.org/drawingml/2006/table">
-            <a:tbl>
-              <a:tblPr firstRow="1" bandRow="1">
-                <a:tableStyleId>{5940675A-B579-460E-94D1-54222C63F5DA}</a:tableStyleId>
-              </a:tblPr>
-              <a:tblGrid>
-                <a:gridCol w="3401123">
-                  <a:extLst>
-                    <a:ext uri="{9D8B030D-6E8A-4147-A177-3AD203B41FA5}">
-                      <a16:colId xmlns:a16="http://schemas.microsoft.com/office/drawing/2014/main" val="1398259254"/>
-                    </a:ext>
-                  </a:extLst>
-                </a:gridCol>
-                <a:gridCol w="2180063">
-                  <a:extLst>
-                    <a:ext uri="{9D8B030D-6E8A-4147-A177-3AD203B41FA5}">
-                      <a16:colId xmlns:a16="http://schemas.microsoft.com/office/drawing/2014/main" val="649460588"/>
-                    </a:ext>
-                  </a:extLst>
-                </a:gridCol>
-                <a:gridCol w="2790593">
-                  <a:extLst>
-                    <a:ext uri="{9D8B030D-6E8A-4147-A177-3AD203B41FA5}">
-                      <a16:colId xmlns:a16="http://schemas.microsoft.com/office/drawing/2014/main" val="2932413447"/>
-                    </a:ext>
-                  </a:extLst>
-                </a:gridCol>
-                <a:gridCol w="2790593">
-                  <a:extLst>
-                    <a:ext uri="{9D8B030D-6E8A-4147-A177-3AD203B41FA5}">
-                      <a16:colId xmlns:a16="http://schemas.microsoft.com/office/drawing/2014/main" val="3024441236"/>
-                    </a:ext>
-                  </a:extLst>
-                </a:gridCol>
-              </a:tblGrid>
-              <a:tr h="370840">
-                <a:tc>
-                  <a:txBody>
-                    <a:bodyPr/>
-                    <a:lstStyle/>
-                    <a:p>
-                      <a:r>
-                        <a:rPr lang="en-GB" sz="1400" dirty="0" err="1"/>
-                        <a:t>Características</a:t>
-                      </a:r>
-                      <a:endParaRPr lang="en-GB" sz="1400" dirty="0"/>
-                    </a:p>
-                  </a:txBody>
-                  <a:tcPr/>
-                </a:tc>
-                <a:tc>
-                  <a:txBody>
-                    <a:bodyPr/>
-                    <a:lstStyle/>
-                    <a:p>
-                      <a:r>
-                        <a:rPr lang="en-GB" sz="1400" dirty="0"/>
-                        <a:t>web-server </a:t>
-                      </a:r>
-                      <a:r>
-                        <a:rPr lang="en-GB" sz="1400" b="1" dirty="0"/>
-                        <a:t>Blocking</a:t>
-                      </a:r>
-                    </a:p>
-                  </a:txBody>
-                  <a:tcPr/>
-                </a:tc>
-                <a:tc>
-                  <a:txBody>
-                    <a:bodyPr/>
-                    <a:lstStyle/>
-                    <a:p>
-                      <a:r>
-                        <a:rPr lang="en-GB" sz="1400" dirty="0"/>
-                        <a:t>web-server Reactive</a:t>
-                      </a:r>
-                    </a:p>
-                  </a:txBody>
-                  <a:tcPr/>
-                </a:tc>
-                <a:tc>
-                  <a:txBody>
-                    <a:bodyPr/>
-                    <a:lstStyle/>
-                    <a:p>
-                      <a:r>
-                        <a:rPr lang="en-GB" sz="1400" dirty="0"/>
-                        <a:t>web-server  Virtual-threads</a:t>
-                      </a:r>
-                    </a:p>
-                  </a:txBody>
-                  <a:tcPr/>
-                </a:tc>
-                <a:extLst>
-                  <a:ext uri="{0D108BD9-81ED-4DB2-BD59-A6C34878D82A}">
-                    <a16:rowId xmlns:a16="http://schemas.microsoft.com/office/drawing/2014/main" val="1484350126"/>
-                  </a:ext>
-                </a:extLst>
-              </a:tr>
-              <a:tr h="370840">
-                <a:tc>
-                  <a:txBody>
-                    <a:bodyPr/>
-                    <a:lstStyle/>
-                    <a:p>
-                      <a:r>
-                        <a:rPr lang="en-GB" sz="1400" dirty="0" err="1"/>
-                        <a:t>Modelo</a:t>
-                      </a:r>
-                      <a:endParaRPr lang="en-GB" sz="1400" dirty="0"/>
-                    </a:p>
-                  </a:txBody>
-                  <a:tcPr/>
-                </a:tc>
-                <a:tc>
-                  <a:txBody>
-                    <a:bodyPr/>
-                    <a:lstStyle/>
-                    <a:p>
-                      <a:r>
-                        <a:rPr lang="en-GB" sz="1400" dirty="0" err="1"/>
-                        <a:t>Plataforma</a:t>
-                      </a:r>
-                      <a:r>
-                        <a:rPr lang="en-GB" sz="1400" dirty="0"/>
-                        <a:t> (</a:t>
-                      </a:r>
-                      <a:r>
-                        <a:rPr lang="en-GB" sz="1400" dirty="0" err="1"/>
-                        <a:t>pesados</a:t>
-                      </a:r>
-                      <a:r>
-                        <a:rPr lang="en-GB" sz="1400" dirty="0"/>
-                        <a:t>) </a:t>
-                      </a:r>
-                    </a:p>
-                  </a:txBody>
-                  <a:tcPr/>
-                </a:tc>
-                <a:tc>
-                  <a:txBody>
-                    <a:bodyPr/>
-                    <a:lstStyle/>
-                    <a:p>
-                      <a:r>
-                        <a:rPr lang="en-GB" sz="1400" dirty="0" err="1"/>
-                        <a:t>Bucle</a:t>
-                      </a:r>
-                      <a:r>
-                        <a:rPr lang="en-GB" sz="1400" dirty="0"/>
-                        <a:t> de </a:t>
-                      </a:r>
-                      <a:r>
-                        <a:rPr lang="en-GB" sz="1400" dirty="0" err="1"/>
-                        <a:t>eventos</a:t>
-                      </a:r>
-                      <a:r>
-                        <a:rPr lang="en-GB" sz="1400" dirty="0"/>
-                        <a:t> no </a:t>
-                      </a:r>
-                      <a:r>
-                        <a:rPr lang="en-GB" sz="1400" dirty="0" err="1"/>
-                        <a:t>bloqueantes</a:t>
-                      </a:r>
-                      <a:endParaRPr lang="en-GB" sz="1400" dirty="0"/>
-                    </a:p>
-                    <a:p>
-                      <a:r>
-                        <a:rPr lang="en-GB" sz="1400" dirty="0"/>
-                        <a:t>(</a:t>
-                      </a:r>
-                      <a:r>
-                        <a:rPr lang="en-GB" sz="1400" dirty="0" err="1"/>
-                        <a:t>pocos</a:t>
-                      </a:r>
-                      <a:r>
-                        <a:rPr lang="en-GB" sz="1400" dirty="0"/>
-                        <a:t> </a:t>
-                      </a:r>
-                      <a:r>
-                        <a:rPr lang="en-GB" sz="1400" dirty="0" err="1"/>
-                        <a:t>hilos</a:t>
-                      </a:r>
-                      <a:r>
-                        <a:rPr lang="en-GB" sz="1400" dirty="0"/>
-                        <a:t>) </a:t>
-                      </a:r>
-                    </a:p>
-                  </a:txBody>
-                  <a:tcPr/>
-                </a:tc>
-                <a:tc>
-                  <a:txBody>
-                    <a:bodyPr/>
-                    <a:lstStyle/>
-                    <a:p>
-                      <a:pPr marL="0" marR="0" lvl="0" indent="0" algn="l" defTabSz="914400" rtl="0" eaLnBrk="1" fontAlgn="auto" latinLnBrk="0" hangingPunct="1">
-                        <a:lnSpc>
-                          <a:spcPct val="100000"/>
-                        </a:lnSpc>
-                        <a:spcBef>
-                          <a:spcPts val="0"/>
-                        </a:spcBef>
-                        <a:spcAft>
-                          <a:spcPts val="0"/>
-                        </a:spcAft>
-                        <a:buClrTx/>
-                        <a:buSzTx/>
-                        <a:buFontTx/>
-                        <a:buNone/>
-                        <a:tabLst/>
-                        <a:defRPr/>
-                      </a:pPr>
-                      <a:r>
-                        <a:rPr lang="en-GB" sz="1400" dirty="0" err="1"/>
-                        <a:t>Ligeros</a:t>
-                      </a:r>
-                      <a:r>
-                        <a:rPr lang="en-GB" sz="1400" dirty="0"/>
-                        <a:t> 1KB</a:t>
-                      </a:r>
-                    </a:p>
-                  </a:txBody>
-                  <a:tcPr/>
-                </a:tc>
-                <a:extLst>
-                  <a:ext uri="{0D108BD9-81ED-4DB2-BD59-A6C34878D82A}">
-                    <a16:rowId xmlns:a16="http://schemas.microsoft.com/office/drawing/2014/main" val="1193660571"/>
-                  </a:ext>
-                </a:extLst>
-              </a:tr>
-              <a:tr h="370840">
-                <a:tc>
-                  <a:txBody>
-                    <a:bodyPr/>
-                    <a:lstStyle/>
-                    <a:p>
-                      <a:r>
-                        <a:rPr lang="en-GB" sz="1400" dirty="0" err="1"/>
-                        <a:t>Peticiones</a:t>
-                      </a:r>
-                      <a:r>
-                        <a:rPr lang="en-GB" sz="1400" dirty="0"/>
-                        <a:t> </a:t>
-                      </a:r>
-                      <a:r>
-                        <a:rPr lang="en-GB" sz="1400" dirty="0" err="1"/>
-                        <a:t>concurrentes</a:t>
-                      </a:r>
-                      <a:r>
-                        <a:rPr lang="en-GB" sz="1400" dirty="0"/>
-                        <a:t> </a:t>
-                      </a:r>
-                      <a:r>
-                        <a:rPr lang="en-GB" sz="1400" dirty="0" err="1"/>
-                        <a:t>máx</a:t>
-                      </a:r>
-                      <a:r>
-                        <a:rPr lang="en-GB" sz="1400" dirty="0"/>
-                        <a:t> (by default)</a:t>
-                      </a:r>
-                    </a:p>
-                  </a:txBody>
-                  <a:tcPr/>
-                </a:tc>
-                <a:tc>
-                  <a:txBody>
-                    <a:bodyPr/>
-                    <a:lstStyle/>
-                    <a:p>
-                      <a:r>
-                        <a:rPr lang="en-GB" sz="1400" dirty="0"/>
-                        <a:t>200</a:t>
-                      </a:r>
-                    </a:p>
-                  </a:txBody>
-                  <a:tcPr/>
-                </a:tc>
-                <a:tc>
-                  <a:txBody>
-                    <a:bodyPr/>
-                    <a:lstStyle/>
-                    <a:p>
-                      <a:r>
-                        <a:rPr lang="en-GB" sz="1400" dirty="0" err="1"/>
-                        <a:t>Muy</a:t>
-                      </a:r>
-                      <a:r>
-                        <a:rPr lang="en-GB" sz="1400" dirty="0"/>
-                        <a:t> alto</a:t>
-                      </a:r>
-                    </a:p>
-                  </a:txBody>
-                  <a:tcPr/>
-                </a:tc>
-                <a:tc>
-                  <a:txBody>
-                    <a:bodyPr/>
-                    <a:lstStyle/>
-                    <a:p>
-                      <a:r>
-                        <a:rPr lang="en-GB" sz="1400"/>
-                        <a:t>+10.000</a:t>
-                      </a:r>
-                      <a:endParaRPr lang="en-GB" sz="1400" dirty="0"/>
-                    </a:p>
-                  </a:txBody>
-                  <a:tcPr/>
-                </a:tc>
-                <a:extLst>
-                  <a:ext uri="{0D108BD9-81ED-4DB2-BD59-A6C34878D82A}">
-                    <a16:rowId xmlns:a16="http://schemas.microsoft.com/office/drawing/2014/main" val="2735513668"/>
-                  </a:ext>
-                </a:extLst>
-              </a:tr>
-              <a:tr h="370840">
-                <a:tc>
-                  <a:txBody>
-                    <a:bodyPr/>
-                    <a:lstStyle/>
-                    <a:p>
-                      <a:endParaRPr lang="en-GB" sz="1400" dirty="0"/>
-                    </a:p>
-                  </a:txBody>
-                  <a:tcPr/>
-                </a:tc>
-                <a:tc>
-                  <a:txBody>
-                    <a:bodyPr/>
-                    <a:lstStyle/>
-                    <a:p>
-                      <a:endParaRPr lang="en-GB" sz="1400"/>
-                    </a:p>
-                  </a:txBody>
-                  <a:tcPr/>
-                </a:tc>
-                <a:tc>
-                  <a:txBody>
-                    <a:bodyPr/>
-                    <a:lstStyle/>
-                    <a:p>
-                      <a:endParaRPr lang="en-GB" sz="1400"/>
-                    </a:p>
-                  </a:txBody>
-                  <a:tcPr/>
-                </a:tc>
-                <a:tc>
-                  <a:txBody>
-                    <a:bodyPr/>
-                    <a:lstStyle/>
-                    <a:p>
-                      <a:endParaRPr lang="en-GB" sz="1400"/>
-                    </a:p>
-                  </a:txBody>
-                  <a:tcPr/>
-                </a:tc>
-                <a:extLst>
-                  <a:ext uri="{0D108BD9-81ED-4DB2-BD59-A6C34878D82A}">
-                    <a16:rowId xmlns:a16="http://schemas.microsoft.com/office/drawing/2014/main" val="3914010841"/>
-                  </a:ext>
-                </a:extLst>
-              </a:tr>
-              <a:tr h="370840">
-                <a:tc>
-                  <a:txBody>
-                    <a:bodyPr/>
-                    <a:lstStyle/>
-                    <a:p>
-                      <a:endParaRPr lang="en-GB" sz="1400"/>
-                    </a:p>
-                  </a:txBody>
-                  <a:tcPr/>
-                </a:tc>
-                <a:tc>
-                  <a:txBody>
-                    <a:bodyPr/>
-                    <a:lstStyle/>
-                    <a:p>
-                      <a:endParaRPr lang="en-GB" sz="1400"/>
-                    </a:p>
-                  </a:txBody>
-                  <a:tcPr/>
-                </a:tc>
-                <a:tc>
-                  <a:txBody>
-                    <a:bodyPr/>
-                    <a:lstStyle/>
-                    <a:p>
-                      <a:endParaRPr lang="en-GB" sz="1400"/>
-                    </a:p>
-                  </a:txBody>
-                  <a:tcPr/>
-                </a:tc>
-                <a:tc>
-                  <a:txBody>
-                    <a:bodyPr/>
-                    <a:lstStyle/>
-                    <a:p>
-                      <a:endParaRPr lang="en-GB" sz="1400"/>
-                    </a:p>
-                  </a:txBody>
-                  <a:tcPr/>
-                </a:tc>
-                <a:extLst>
-                  <a:ext uri="{0D108BD9-81ED-4DB2-BD59-A6C34878D82A}">
-                    <a16:rowId xmlns:a16="http://schemas.microsoft.com/office/drawing/2014/main" val="515737917"/>
-                  </a:ext>
-                </a:extLst>
-              </a:tr>
-              <a:tr h="370840">
-                <a:tc>
-                  <a:txBody>
-                    <a:bodyPr/>
-                    <a:lstStyle/>
-                    <a:p>
-                      <a:endParaRPr lang="en-GB" sz="1400"/>
-                    </a:p>
-                  </a:txBody>
-                  <a:tcPr/>
-                </a:tc>
-                <a:tc>
-                  <a:txBody>
-                    <a:bodyPr/>
-                    <a:lstStyle/>
-                    <a:p>
-                      <a:endParaRPr lang="en-GB" sz="1400"/>
-                    </a:p>
-                  </a:txBody>
-                  <a:tcPr/>
-                </a:tc>
-                <a:tc>
-                  <a:txBody>
-                    <a:bodyPr/>
-                    <a:lstStyle/>
-                    <a:p>
-                      <a:endParaRPr lang="en-GB" sz="1400"/>
-                    </a:p>
-                  </a:txBody>
-                  <a:tcPr/>
-                </a:tc>
-                <a:tc>
-                  <a:txBody>
-                    <a:bodyPr/>
-                    <a:lstStyle/>
-                    <a:p>
-                      <a:endParaRPr lang="en-GB" sz="1400"/>
-                    </a:p>
-                  </a:txBody>
-                  <a:tcPr/>
-                </a:tc>
-                <a:extLst>
-                  <a:ext uri="{0D108BD9-81ED-4DB2-BD59-A6C34878D82A}">
-                    <a16:rowId xmlns:a16="http://schemas.microsoft.com/office/drawing/2014/main" val="1260258068"/>
-                  </a:ext>
-                </a:extLst>
-              </a:tr>
-              <a:tr h="370840">
-                <a:tc>
-                  <a:txBody>
-                    <a:bodyPr/>
-                    <a:lstStyle/>
-                    <a:p>
-                      <a:endParaRPr lang="en-GB" sz="1400"/>
-                    </a:p>
-                  </a:txBody>
-                  <a:tcPr/>
-                </a:tc>
-                <a:tc>
-                  <a:txBody>
-                    <a:bodyPr/>
-                    <a:lstStyle/>
-                    <a:p>
-                      <a:endParaRPr lang="en-GB" sz="1400"/>
-                    </a:p>
-                  </a:txBody>
-                  <a:tcPr/>
-                </a:tc>
-                <a:tc>
-                  <a:txBody>
-                    <a:bodyPr/>
-                    <a:lstStyle/>
-                    <a:p>
-                      <a:endParaRPr lang="en-GB" sz="1400"/>
-                    </a:p>
-                  </a:txBody>
-                  <a:tcPr/>
-                </a:tc>
-                <a:tc>
-                  <a:txBody>
-                    <a:bodyPr/>
-                    <a:lstStyle/>
-                    <a:p>
-                      <a:endParaRPr lang="en-GB" sz="1400" dirty="0"/>
-                    </a:p>
-                  </a:txBody>
-                  <a:tcPr/>
-                </a:tc>
-                <a:extLst>
-                  <a:ext uri="{0D108BD9-81ED-4DB2-BD59-A6C34878D82A}">
-                    <a16:rowId xmlns:a16="http://schemas.microsoft.com/office/drawing/2014/main" val="3659055273"/>
-                  </a:ext>
-                </a:extLst>
-              </a:tr>
-            </a:tbl>
-          </a:graphicData>
-        </a:graphic>
-      </p:graphicFrame>
-    </p:spTree>
-    <p:extLst>
-      <p:ext uri="{BB962C8B-B14F-4D97-AF65-F5344CB8AC3E}">
-        <p14:creationId xmlns:p14="http://schemas.microsoft.com/office/powerpoint/2010/main" val="2757578057"/>
-      </p:ext>
-    </p:extLst>
-  </p:cSld>
-  <p:clrMapOvr>
-    <a:masterClrMapping/>
-  </p:clrMapOvr>
-</p:sld>
-</file>
-
-<file path=ppt/slides/slide3.xml><?xml version="1.0" encoding="utf-8"?>
-<p:sld xmlns:a="http://schemas.openxmlformats.org/drawingml/2006/main" xmlns:r="http://schemas.openxmlformats.org/officeDocument/2006/relationships" xmlns:p="http://schemas.openxmlformats.org/presentationml/2006/main">
-  <p:cSld>
-    <p:spTree>
-      <p:nvGrpSpPr>
-        <p:cNvPr id="1" name=""/>
-        <p:cNvGrpSpPr/>
-        <p:nvPr/>
-      </p:nvGrpSpPr>
-      <p:grpSpPr>
-        <a:xfrm>
-          <a:off x="0" y="0"/>
-          <a:ext cx="0" cy="0"/>
-          <a:chOff x="0" y="0"/>
-          <a:chExt cx="0" cy="0"/>
-        </a:xfrm>
-      </p:grpSpPr>
-      <p:pic>
-        <p:nvPicPr>
-          <p:cNvPr id="5" name="Picture 4">
-            <a:extLst>
-              <a:ext uri="{FF2B5EF4-FFF2-40B4-BE49-F238E27FC236}">
-                <a16:creationId xmlns:a16="http://schemas.microsoft.com/office/drawing/2014/main" id="{164AB24B-DBD0-CB42-8E08-EAADF5B82FB4}"/>
-              </a:ext>
-            </a:extLst>
-          </p:cNvPr>
-          <p:cNvPicPr>
-            <a:picLocks noChangeAspect="1"/>
-          </p:cNvPicPr>
-          <p:nvPr/>
-        </p:nvPicPr>
-        <p:blipFill>
-          <a:blip r:embed="rId2"/>
-          <a:stretch>
-            <a:fillRect/>
-          </a:stretch>
-        </p:blipFill>
-        <p:spPr>
-          <a:xfrm>
-            <a:off x="0" y="0"/>
-            <a:ext cx="5846899" cy="4250810"/>
-          </a:xfrm>
-          <a:prstGeom prst="rect">
-            <a:avLst/>
-          </a:prstGeom>
-        </p:spPr>
-      </p:pic>
-      <p:pic>
-        <p:nvPicPr>
-          <p:cNvPr id="6" name="Picture 5">
-            <a:extLst>
-              <a:ext uri="{FF2B5EF4-FFF2-40B4-BE49-F238E27FC236}">
-                <a16:creationId xmlns:a16="http://schemas.microsoft.com/office/drawing/2014/main" id="{07237684-87D9-6543-B5ED-A9B6B76AC39B}"/>
-              </a:ext>
-            </a:extLst>
-          </p:cNvPr>
-          <p:cNvPicPr>
-            <a:picLocks noChangeAspect="1"/>
-          </p:cNvPicPr>
-          <p:nvPr/>
-        </p:nvPicPr>
-        <p:blipFill>
-          <a:blip r:embed="rId3"/>
-          <a:stretch>
-            <a:fillRect/>
-          </a:stretch>
-        </p:blipFill>
-        <p:spPr>
-          <a:xfrm>
-            <a:off x="2599509" y="4250810"/>
-            <a:ext cx="9592491" cy="2607190"/>
-          </a:xfrm>
-          <a:prstGeom prst="rect">
-            <a:avLst/>
-          </a:prstGeom>
-        </p:spPr>
-      </p:pic>
-      <p:pic>
-        <p:nvPicPr>
-          <p:cNvPr id="7" name="Picture 6">
-            <a:extLst>
-              <a:ext uri="{FF2B5EF4-FFF2-40B4-BE49-F238E27FC236}">
-                <a16:creationId xmlns:a16="http://schemas.microsoft.com/office/drawing/2014/main" id="{E1EA37B9-67E9-4D41-97DF-CBB8EC2E24ED}"/>
-              </a:ext>
-            </a:extLst>
-          </p:cNvPr>
-          <p:cNvPicPr>
-            <a:picLocks noChangeAspect="1"/>
-          </p:cNvPicPr>
-          <p:nvPr/>
-        </p:nvPicPr>
-        <p:blipFill>
-          <a:blip r:embed="rId4"/>
-          <a:stretch>
-            <a:fillRect/>
-          </a:stretch>
-        </p:blipFill>
-        <p:spPr>
-          <a:xfrm>
-            <a:off x="6781074" y="2241520"/>
-            <a:ext cx="5138057" cy="895268"/>
-          </a:xfrm>
-          <a:prstGeom prst="rect">
-            <a:avLst/>
-          </a:prstGeom>
-          <a:ln w="88900" cap="sq" cmpd="thickThin">
-            <a:solidFill>
-              <a:schemeClr val="accent1"/>
-            </a:solidFill>
-            <a:prstDash val="solid"/>
-            <a:miter lim="800000"/>
-          </a:ln>
-          <a:effectLst>
-            <a:innerShdw blurRad="76200">
-              <a:schemeClr val="accent5">
-                <a:lumMod val="60000"/>
-                <a:lumOff val="40000"/>
-              </a:schemeClr>
-            </a:innerShdw>
-          </a:effectLst>
-        </p:spPr>
-      </p:pic>
-    </p:spTree>
-    <p:extLst>
-      <p:ext uri="{BB962C8B-B14F-4D97-AF65-F5344CB8AC3E}">
-        <p14:creationId xmlns:p14="http://schemas.microsoft.com/office/powerpoint/2010/main" val="2622259384"/>
-      </p:ext>
-    </p:extLst>
-  </p:cSld>
-  <p:clrMapOvr>
-    <a:masterClrMapping/>
-  </p:clrMapOvr>
-</p:sld>
-</file>
-
-<file path=ppt/slides/slide4.xml><?xml version="1.0" encoding="utf-8"?>
-<p:sld xmlns:a="http://schemas.openxmlformats.org/drawingml/2006/main" xmlns:r="http://schemas.openxmlformats.org/officeDocument/2006/relationships" xmlns:p="http://schemas.openxmlformats.org/presentationml/2006/main">
-  <p:cSld>
-    <p:spTree>
-      <p:nvGrpSpPr>
-        <p:cNvPr id="1" name=""/>
-        <p:cNvGrpSpPr/>
-        <p:nvPr/>
-      </p:nvGrpSpPr>
-      <p:grpSpPr>
-        <a:xfrm>
-          <a:off x="0" y="0"/>
-          <a:ext cx="0" cy="0"/>
-          <a:chOff x="0" y="0"/>
-          <a:chExt cx="0" cy="0"/>
-        </a:xfrm>
-      </p:grpSpPr>
-      <p:sp>
-        <p:nvSpPr>
-          <p:cNvPr id="20" name="Rectangle 19">
-            <a:extLst>
-              <a:ext uri="{FF2B5EF4-FFF2-40B4-BE49-F238E27FC236}">
-                <a16:creationId xmlns:a16="http://schemas.microsoft.com/office/drawing/2014/main" id="{A4C53363-07AA-9C4E-8276-2628BFA85A65}"/>
-              </a:ext>
-            </a:extLst>
-          </p:cNvPr>
-          <p:cNvSpPr/>
-          <p:nvPr/>
-        </p:nvSpPr>
-        <p:spPr>
-          <a:xfrm>
-            <a:off x="234778" y="89691"/>
-            <a:ext cx="13159946" cy="5339923"/>
-          </a:xfrm>
-          <a:prstGeom prst="rect">
-            <a:avLst/>
-          </a:prstGeom>
-        </p:spPr>
-        <p:txBody>
-          <a:bodyPr wrap="square">
-            <a:spAutoFit/>
-          </a:bodyPr>
-          <a:lstStyle/>
-          <a:p>
-            <a:r>
-              <a:rPr lang="es-ES" sz="1100" dirty="0">
-                <a:latin typeface="Menlo" panose="020B0609030804020204" pitchFamily="49" charset="0"/>
-              </a:rPr>
-              <a:t>Los cambios clave están en dos sitios del servicio</a:t>
-            </a:r>
-          </a:p>
-          <a:p>
-            <a:r>
-              <a:rPr lang="es-ES" sz="1100" dirty="0">
-                <a:latin typeface="Menlo" panose="020B0609030804020204" pitchFamily="49" charset="0"/>
-              </a:rPr>
-              <a:t>1. El </a:t>
-            </a:r>
-            <a:r>
-              <a:rPr lang="es-ES" sz="1100" dirty="0" err="1">
-                <a:latin typeface="Menlo" panose="020B0609030804020204" pitchFamily="49" charset="0"/>
-              </a:rPr>
-              <a:t>Executor</a:t>
-            </a:r>
-            <a:r>
-              <a:rPr lang="es-ES" sz="1100" dirty="0">
-                <a:latin typeface="Menlo" panose="020B0609030804020204" pitchFamily="49" charset="0"/>
-              </a:rPr>
-              <a:t> — la línea más importante de toda la demo</a:t>
-            </a:r>
-          </a:p>
-          <a:p>
-            <a:pPr lvl="1"/>
-            <a:r>
-              <a:rPr lang="es-ES" sz="1100" dirty="0" err="1">
-                <a:latin typeface="Menlo" panose="020B0609030804020204" pitchFamily="49" charset="0"/>
-              </a:rPr>
-              <a:t>Platform</a:t>
-            </a:r>
-            <a:r>
-              <a:rPr lang="es-ES" sz="1100" dirty="0">
-                <a:latin typeface="Menlo" panose="020B0609030804020204" pitchFamily="49" charset="0"/>
-              </a:rPr>
-              <a:t> </a:t>
-            </a:r>
-            <a:r>
-              <a:rPr lang="es-ES" sz="1100" dirty="0" err="1">
-                <a:latin typeface="Menlo" panose="020B0609030804020204" pitchFamily="49" charset="0"/>
-              </a:rPr>
-              <a:t>Threads</a:t>
-            </a:r>
-            <a:r>
-              <a:rPr lang="es-ES" sz="1100" dirty="0">
-                <a:latin typeface="Menlo" panose="020B0609030804020204" pitchFamily="49" charset="0"/>
-              </a:rPr>
-              <a:t> — PlatformThreadLoadGeneratorService.java:69</a:t>
-            </a:r>
-          </a:p>
-          <a:p>
-            <a:pPr lvl="1"/>
-            <a:br>
-              <a:rPr lang="es-ES" sz="1100" dirty="0">
-                <a:latin typeface="Menlo" panose="020B0609030804020204" pitchFamily="49" charset="0"/>
-              </a:rPr>
-            </a:br>
-            <a:r>
-              <a:rPr lang="es-ES" sz="1100" dirty="0" err="1">
-                <a:latin typeface="Menlo" panose="020B0609030804020204" pitchFamily="49" charset="0"/>
-              </a:rPr>
-              <a:t>ExecutorService</a:t>
-            </a:r>
-            <a:r>
-              <a:rPr lang="es-ES" sz="1100" dirty="0">
-                <a:latin typeface="Menlo" panose="020B0609030804020204" pitchFamily="49" charset="0"/>
-              </a:rPr>
-              <a:t> </a:t>
-            </a:r>
-            <a:r>
-              <a:rPr lang="es-ES" sz="1100" dirty="0" err="1">
-                <a:latin typeface="Menlo" panose="020B0609030804020204" pitchFamily="49" charset="0"/>
-              </a:rPr>
-              <a:t>executorService</a:t>
-            </a:r>
-            <a:r>
-              <a:rPr lang="es-ES" sz="1100" dirty="0">
-                <a:latin typeface="Menlo" panose="020B0609030804020204" pitchFamily="49" charset="0"/>
-              </a:rPr>
-              <a:t> = </a:t>
-            </a:r>
-            <a:r>
-              <a:rPr lang="es-ES" sz="1100" dirty="0" err="1">
-                <a:latin typeface="Menlo" panose="020B0609030804020204" pitchFamily="49" charset="0"/>
-              </a:rPr>
-              <a:t>Executors.newFixedThreadPool</a:t>
-            </a:r>
-            <a:r>
-              <a:rPr lang="es-ES" sz="1100" dirty="0">
-                <a:latin typeface="Menlo" panose="020B0609030804020204" pitchFamily="49" charset="0"/>
-              </a:rPr>
-              <a:t>(</a:t>
-            </a:r>
-            <a:r>
-              <a:rPr lang="es-ES" sz="1100" dirty="0" err="1">
-                <a:latin typeface="Menlo" panose="020B0609030804020204" pitchFamily="49" charset="0"/>
-              </a:rPr>
-              <a:t>request.getThreads</a:t>
-            </a:r>
-            <a:r>
-              <a:rPr lang="es-ES" sz="1100" dirty="0">
-                <a:latin typeface="Menlo" panose="020B0609030804020204" pitchFamily="49" charset="0"/>
-              </a:rPr>
-              <a:t>(), r -&gt; {</a:t>
-            </a:r>
-          </a:p>
-          <a:p>
-            <a:pPr lvl="1"/>
-            <a:r>
-              <a:rPr lang="es-ES" sz="1100" dirty="0" err="1">
-                <a:latin typeface="Menlo" panose="020B0609030804020204" pitchFamily="49" charset="0"/>
-              </a:rPr>
-              <a:t>Thread</a:t>
-            </a:r>
-            <a:r>
-              <a:rPr lang="es-ES" sz="1100" dirty="0">
-                <a:latin typeface="Menlo" panose="020B0609030804020204" pitchFamily="49" charset="0"/>
-              </a:rPr>
-              <a:t> </a:t>
-            </a:r>
-            <a:r>
-              <a:rPr lang="es-ES" sz="1100" dirty="0" err="1">
-                <a:latin typeface="Menlo" panose="020B0609030804020204" pitchFamily="49" charset="0"/>
-              </a:rPr>
-              <a:t>thread</a:t>
-            </a:r>
-            <a:r>
-              <a:rPr lang="es-ES" sz="1100" dirty="0">
-                <a:latin typeface="Menlo" panose="020B0609030804020204" pitchFamily="49" charset="0"/>
-              </a:rPr>
-              <a:t> = new </a:t>
-            </a:r>
-            <a:r>
-              <a:rPr lang="es-ES" sz="1100" dirty="0" err="1">
-                <a:latin typeface="Menlo" panose="020B0609030804020204" pitchFamily="49" charset="0"/>
-              </a:rPr>
-              <a:t>Thread</a:t>
-            </a:r>
-            <a:r>
-              <a:rPr lang="es-ES" sz="1100" dirty="0">
-                <a:latin typeface="Menlo" panose="020B0609030804020204" pitchFamily="49" charset="0"/>
-              </a:rPr>
-              <a:t>(r);</a:t>
-            </a:r>
-          </a:p>
-          <a:p>
-            <a:pPr lvl="1"/>
-            <a:r>
-              <a:rPr lang="es-ES" sz="1100" dirty="0" err="1">
-                <a:latin typeface="Menlo" panose="020B0609030804020204" pitchFamily="49" charset="0"/>
-              </a:rPr>
-              <a:t>thread.setName</a:t>
-            </a:r>
-            <a:r>
-              <a:rPr lang="es-ES" sz="1100" dirty="0">
-                <a:latin typeface="Menlo" panose="020B0609030804020204" pitchFamily="49" charset="0"/>
-              </a:rPr>
-              <a:t>("</a:t>
-            </a:r>
-            <a:r>
-              <a:rPr lang="es-ES" sz="1100" dirty="0" err="1">
-                <a:latin typeface="Menlo" panose="020B0609030804020204" pitchFamily="49" charset="0"/>
-              </a:rPr>
-              <a:t>platform-thread</a:t>
-            </a:r>
-            <a:r>
-              <a:rPr lang="es-ES" sz="1100" dirty="0">
-                <a:latin typeface="Menlo" panose="020B0609030804020204" pitchFamily="49" charset="0"/>
-              </a:rPr>
-              <a:t>-" + </a:t>
-            </a:r>
-            <a:r>
-              <a:rPr lang="es-ES" sz="1100" dirty="0" err="1">
-                <a:latin typeface="Menlo" panose="020B0609030804020204" pitchFamily="49" charset="0"/>
-              </a:rPr>
-              <a:t>System.currentTimeMillis</a:t>
-            </a:r>
-            <a:r>
-              <a:rPr lang="es-ES" sz="1100" dirty="0">
-                <a:latin typeface="Menlo" panose="020B0609030804020204" pitchFamily="49" charset="0"/>
-              </a:rPr>
-              <a:t>());</a:t>
-            </a:r>
-          </a:p>
-          <a:p>
-            <a:pPr lvl="1"/>
-            <a:r>
-              <a:rPr lang="es-ES" sz="1100" dirty="0" err="1">
-                <a:latin typeface="Menlo" panose="020B0609030804020204" pitchFamily="49" charset="0"/>
-              </a:rPr>
-              <a:t>return</a:t>
-            </a:r>
-            <a:r>
-              <a:rPr lang="es-ES" sz="1100" dirty="0">
-                <a:latin typeface="Menlo" panose="020B0609030804020204" pitchFamily="49" charset="0"/>
-              </a:rPr>
-              <a:t> </a:t>
-            </a:r>
-            <a:r>
-              <a:rPr lang="es-ES" sz="1100" dirty="0" err="1">
-                <a:latin typeface="Menlo" panose="020B0609030804020204" pitchFamily="49" charset="0"/>
-              </a:rPr>
-              <a:t>thread</a:t>
-            </a:r>
-            <a:r>
-              <a:rPr lang="es-ES" sz="1100" dirty="0">
-                <a:latin typeface="Menlo" panose="020B0609030804020204" pitchFamily="49" charset="0"/>
-              </a:rPr>
-              <a:t>;</a:t>
-            </a:r>
-          </a:p>
-          <a:p>
-            <a:pPr lvl="1"/>
-            <a:r>
-              <a:rPr lang="es-ES" sz="1100" dirty="0">
-                <a:latin typeface="Menlo" panose="020B0609030804020204" pitchFamily="49" charset="0"/>
-              </a:rPr>
-              <a:t>});</a:t>
-            </a:r>
-          </a:p>
-          <a:p>
-            <a:pPr lvl="1"/>
-            <a:r>
-              <a:rPr lang="es-ES" sz="1100" dirty="0">
-                <a:latin typeface="Menlo" panose="020B0609030804020204" pitchFamily="49" charset="0"/>
-              </a:rPr>
-              <a:t>Pool fijo. Si pides 1000 peticiones con 50 hilos, las 950 restantes esperan en cola.</a:t>
-            </a:r>
-          </a:p>
-          <a:p>
-            <a:pPr lvl="1"/>
-            <a:br>
-              <a:rPr lang="es-ES" sz="1100" dirty="0">
-                <a:latin typeface="Menlo" panose="020B0609030804020204" pitchFamily="49" charset="0"/>
-              </a:rPr>
-            </a:br>
-            <a:r>
-              <a:rPr lang="es-ES" sz="1100" dirty="0">
-                <a:latin typeface="Menlo" panose="020B0609030804020204" pitchFamily="49" charset="0"/>
-              </a:rPr>
-              <a:t>Virtual </a:t>
-            </a:r>
-            <a:r>
-              <a:rPr lang="es-ES" sz="1100" dirty="0" err="1">
-                <a:latin typeface="Menlo" panose="020B0609030804020204" pitchFamily="49" charset="0"/>
-              </a:rPr>
-              <a:t>Threads</a:t>
-            </a:r>
-            <a:r>
-              <a:rPr lang="es-ES" sz="1100" dirty="0">
-                <a:latin typeface="Menlo" panose="020B0609030804020204" pitchFamily="49" charset="0"/>
-              </a:rPr>
-              <a:t> — VirtualThreadLoadGeneratorService.java:69</a:t>
-            </a:r>
-          </a:p>
-          <a:p>
-            <a:pPr lvl="1"/>
-            <a:br>
-              <a:rPr lang="es-ES" sz="1100" dirty="0">
-                <a:latin typeface="Menlo" panose="020B0609030804020204" pitchFamily="49" charset="0"/>
-              </a:rPr>
-            </a:br>
-            <a:r>
-              <a:rPr lang="es-ES" sz="1100" dirty="0" err="1">
-                <a:latin typeface="Menlo" panose="020B0609030804020204" pitchFamily="49" charset="0"/>
-              </a:rPr>
-              <a:t>ExecutorService</a:t>
-            </a:r>
-            <a:r>
-              <a:rPr lang="es-ES" sz="1100" dirty="0">
-                <a:latin typeface="Menlo" panose="020B0609030804020204" pitchFamily="49" charset="0"/>
-              </a:rPr>
-              <a:t> </a:t>
-            </a:r>
-            <a:r>
-              <a:rPr lang="es-ES" sz="1100" dirty="0" err="1">
-                <a:latin typeface="Menlo" panose="020B0609030804020204" pitchFamily="49" charset="0"/>
-              </a:rPr>
-              <a:t>executorService</a:t>
-            </a:r>
-            <a:r>
-              <a:rPr lang="es-ES" sz="1100" dirty="0">
-                <a:latin typeface="Menlo" panose="020B0609030804020204" pitchFamily="49" charset="0"/>
-              </a:rPr>
-              <a:t> = </a:t>
-            </a:r>
-            <a:r>
-              <a:rPr lang="es-ES" sz="1100" dirty="0" err="1">
-                <a:latin typeface="Menlo" panose="020B0609030804020204" pitchFamily="49" charset="0"/>
-              </a:rPr>
-              <a:t>Executors.newVirtualThreadPerTaskExecutor</a:t>
-            </a:r>
-            <a:r>
-              <a:rPr lang="es-ES" sz="1100" dirty="0">
-                <a:latin typeface="Menlo" panose="020B0609030804020204" pitchFamily="49" charset="0"/>
-              </a:rPr>
-              <a:t>();</a:t>
-            </a:r>
-          </a:p>
-          <a:p>
-            <a:pPr lvl="1"/>
-            <a:r>
-              <a:rPr lang="es-ES" sz="1100" dirty="0">
-                <a:latin typeface="Menlo" panose="020B0609030804020204" pitchFamily="49" charset="0"/>
-              </a:rPr>
-              <a:t>Una sola línea distinta. Sin límite de hilos, sin pool. El resto del servicio es idéntico al </a:t>
-            </a:r>
-            <a:r>
-              <a:rPr lang="es-ES" sz="1100" dirty="0" err="1">
-                <a:latin typeface="Menlo" panose="020B0609030804020204" pitchFamily="49" charset="0"/>
-              </a:rPr>
-              <a:t>blocking</a:t>
-            </a:r>
-            <a:r>
-              <a:rPr lang="es-ES" sz="1100" dirty="0">
-                <a:latin typeface="Menlo" panose="020B0609030804020204" pitchFamily="49" charset="0"/>
-              </a:rPr>
-              <a:t>.</a:t>
-            </a:r>
-          </a:p>
-          <a:p>
-            <a:br>
-              <a:rPr lang="es-ES" sz="1100" dirty="0">
-                <a:latin typeface="Menlo" panose="020B0609030804020204" pitchFamily="49" charset="0"/>
-              </a:rPr>
-            </a:br>
-            <a:r>
-              <a:rPr lang="es-ES" sz="1100" dirty="0">
-                <a:latin typeface="Menlo" panose="020B0609030804020204" pitchFamily="49" charset="0"/>
-              </a:rPr>
-              <a:t>2. El modelo de programación — Reactive es el que rompe el molde</a:t>
-            </a:r>
-          </a:p>
-          <a:p>
-            <a:r>
-              <a:rPr lang="es-ES" sz="1100" dirty="0">
-                <a:latin typeface="Menlo" panose="020B0609030804020204" pitchFamily="49" charset="0"/>
-              </a:rPr>
-              <a:t>Reactive — ReactiveLoadGeneratorService.java:60</a:t>
-            </a:r>
-            <a:br>
-              <a:rPr lang="es-ES" sz="1100" dirty="0">
-                <a:latin typeface="Menlo" panose="020B0609030804020204" pitchFamily="49" charset="0"/>
-              </a:rPr>
-            </a:br>
-            <a:br>
-              <a:rPr lang="es-ES" sz="1100" dirty="0">
-                <a:latin typeface="Menlo" panose="020B0609030804020204" pitchFamily="49" charset="0"/>
-              </a:rPr>
-            </a:br>
-            <a:r>
-              <a:rPr lang="es-ES" sz="1100" dirty="0">
-                <a:latin typeface="Menlo" panose="020B0609030804020204" pitchFamily="49" charset="0"/>
-              </a:rPr>
-              <a:t>// Firma del método: devuelve Mono, no </a:t>
-            </a:r>
-            <a:r>
-              <a:rPr lang="es-ES" sz="1100" dirty="0" err="1">
-                <a:latin typeface="Menlo" panose="020B0609030804020204" pitchFamily="49" charset="0"/>
-              </a:rPr>
-              <a:t>LoadResponse</a:t>
-            </a:r>
-            <a:endParaRPr lang="es-ES" sz="1100" dirty="0">
-              <a:latin typeface="Menlo" panose="020B0609030804020204" pitchFamily="49" charset="0"/>
-            </a:endParaRPr>
-          </a:p>
-          <a:p>
-            <a:pPr lvl="1"/>
-            <a:r>
-              <a:rPr lang="es-ES" sz="1100" dirty="0" err="1">
-                <a:latin typeface="Menlo" panose="020B0609030804020204" pitchFamily="49" charset="0"/>
-              </a:rPr>
-              <a:t>public</a:t>
-            </a:r>
-            <a:r>
-              <a:rPr lang="es-ES" sz="1100" dirty="0">
-                <a:latin typeface="Menlo" panose="020B0609030804020204" pitchFamily="49" charset="0"/>
-              </a:rPr>
-              <a:t> Mono&lt;</a:t>
-            </a:r>
-            <a:r>
-              <a:rPr lang="es-ES" sz="1100" dirty="0" err="1">
-                <a:latin typeface="Menlo" panose="020B0609030804020204" pitchFamily="49" charset="0"/>
-              </a:rPr>
-              <a:t>LoadResponse</a:t>
-            </a:r>
-            <a:r>
-              <a:rPr lang="es-ES" sz="1100" dirty="0">
-                <a:latin typeface="Menlo" panose="020B0609030804020204" pitchFamily="49" charset="0"/>
-              </a:rPr>
-              <a:t>&gt; </a:t>
-            </a:r>
-            <a:r>
-              <a:rPr lang="es-ES" sz="1100" dirty="0" err="1">
-                <a:latin typeface="Menlo" panose="020B0609030804020204" pitchFamily="49" charset="0"/>
-              </a:rPr>
-              <a:t>executeLoad</a:t>
-            </a:r>
-            <a:r>
-              <a:rPr lang="es-ES" sz="1100" dirty="0">
-                <a:latin typeface="Menlo" panose="020B0609030804020204" pitchFamily="49" charset="0"/>
-              </a:rPr>
-              <a:t>(</a:t>
-            </a:r>
-            <a:r>
-              <a:rPr lang="es-ES" sz="1100" dirty="0" err="1">
-                <a:latin typeface="Menlo" panose="020B0609030804020204" pitchFamily="49" charset="0"/>
-              </a:rPr>
-              <a:t>LoadRequest</a:t>
-            </a:r>
-            <a:r>
-              <a:rPr lang="es-ES" sz="1100" dirty="0">
-                <a:latin typeface="Menlo" panose="020B0609030804020204" pitchFamily="49" charset="0"/>
-              </a:rPr>
-              <a:t> </a:t>
-            </a:r>
-            <a:r>
-              <a:rPr lang="es-ES" sz="1100" dirty="0" err="1">
-                <a:latin typeface="Menlo" panose="020B0609030804020204" pitchFamily="49" charset="0"/>
-              </a:rPr>
-              <a:t>request</a:t>
-            </a:r>
-            <a:r>
-              <a:rPr lang="es-ES" sz="1100" dirty="0">
-                <a:latin typeface="Menlo" panose="020B0609030804020204" pitchFamily="49" charset="0"/>
-              </a:rPr>
-              <a:t>) {</a:t>
-            </a:r>
-          </a:p>
-          <a:p>
-            <a:pPr lvl="1"/>
-            <a:br>
-              <a:rPr lang="es-ES" sz="1100" dirty="0">
-                <a:latin typeface="Menlo" panose="020B0609030804020204" pitchFamily="49" charset="0"/>
-              </a:rPr>
-            </a:br>
-            <a:r>
-              <a:rPr lang="es-ES" sz="1100" dirty="0">
-                <a:latin typeface="Menlo" panose="020B0609030804020204" pitchFamily="49" charset="0"/>
-              </a:rPr>
-              <a:t>// HTTP </a:t>
-            </a:r>
-            <a:r>
-              <a:rPr lang="es-ES" sz="1100" dirty="0" err="1">
-                <a:latin typeface="Menlo" panose="020B0609030804020204" pitchFamily="49" charset="0"/>
-              </a:rPr>
-              <a:t>client</a:t>
-            </a:r>
-            <a:r>
-              <a:rPr lang="es-ES" sz="1100" dirty="0">
-                <a:latin typeface="Menlo" panose="020B0609030804020204" pitchFamily="49" charset="0"/>
-              </a:rPr>
-              <a:t>: </a:t>
-            </a:r>
-            <a:r>
-              <a:rPr lang="es-ES" sz="1100" dirty="0" err="1">
-                <a:latin typeface="Menlo" panose="020B0609030804020204" pitchFamily="49" charset="0"/>
-              </a:rPr>
-              <a:t>WebClient</a:t>
-            </a:r>
-            <a:r>
-              <a:rPr lang="es-ES" sz="1100" dirty="0">
-                <a:latin typeface="Menlo" panose="020B0609030804020204" pitchFamily="49" charset="0"/>
-              </a:rPr>
-              <a:t> en vez de </a:t>
-            </a:r>
-            <a:r>
-              <a:rPr lang="es-ES" sz="1100" dirty="0" err="1">
-                <a:latin typeface="Menlo" panose="020B0609030804020204" pitchFamily="49" charset="0"/>
-              </a:rPr>
-              <a:t>RestTemplate</a:t>
-            </a:r>
-            <a:endParaRPr lang="es-ES" sz="1100" dirty="0">
-              <a:latin typeface="Menlo" panose="020B0609030804020204" pitchFamily="49" charset="0"/>
-            </a:endParaRPr>
-          </a:p>
-          <a:p>
-            <a:pPr lvl="1"/>
-            <a:r>
-              <a:rPr lang="es-ES" sz="1100" dirty="0" err="1">
-                <a:latin typeface="Menlo" panose="020B0609030804020204" pitchFamily="49" charset="0"/>
-              </a:rPr>
-              <a:t>private</a:t>
-            </a:r>
-            <a:r>
-              <a:rPr lang="es-ES" sz="1100" dirty="0">
-                <a:latin typeface="Menlo" panose="020B0609030804020204" pitchFamily="49" charset="0"/>
-              </a:rPr>
-              <a:t> final </a:t>
-            </a:r>
-            <a:r>
-              <a:rPr lang="es-ES" sz="1100" dirty="0" err="1">
-                <a:latin typeface="Menlo" panose="020B0609030804020204" pitchFamily="49" charset="0"/>
-              </a:rPr>
-              <a:t>WebClient</a:t>
-            </a:r>
-            <a:r>
-              <a:rPr lang="es-ES" sz="1100" dirty="0">
-                <a:latin typeface="Menlo" panose="020B0609030804020204" pitchFamily="49" charset="0"/>
-              </a:rPr>
-              <a:t> </a:t>
-            </a:r>
-            <a:r>
-              <a:rPr lang="es-ES" sz="1100" dirty="0" err="1">
-                <a:latin typeface="Menlo" panose="020B0609030804020204" pitchFamily="49" charset="0"/>
-              </a:rPr>
-              <a:t>webClient</a:t>
-            </a:r>
-            <a:r>
-              <a:rPr lang="es-ES" sz="1100" dirty="0">
-                <a:latin typeface="Menlo" panose="020B0609030804020204" pitchFamily="49" charset="0"/>
-              </a:rPr>
-              <a:t>;</a:t>
-            </a:r>
-          </a:p>
-          <a:p>
-            <a:pPr lvl="1"/>
-            <a:br>
-              <a:rPr lang="es-ES" sz="1100" dirty="0">
-                <a:latin typeface="Menlo" panose="020B0609030804020204" pitchFamily="49" charset="0"/>
-              </a:rPr>
-            </a:br>
-            <a:r>
-              <a:rPr lang="es-ES" sz="1100" dirty="0">
-                <a:latin typeface="Menlo" panose="020B0609030804020204" pitchFamily="49" charset="0"/>
-              </a:rPr>
-              <a:t>// En lugar de un </a:t>
-            </a:r>
-            <a:r>
-              <a:rPr lang="es-ES" sz="1100" dirty="0" err="1">
-                <a:latin typeface="Menlo" panose="020B0609030804020204" pitchFamily="49" charset="0"/>
-              </a:rPr>
-              <a:t>for</a:t>
-            </a:r>
-            <a:r>
-              <a:rPr lang="es-ES" sz="1100" dirty="0">
-                <a:latin typeface="Menlo" panose="020B0609030804020204" pitchFamily="49" charset="0"/>
-              </a:rPr>
-              <a:t> </a:t>
-            </a:r>
-            <a:r>
-              <a:rPr lang="es-ES" sz="1100" dirty="0" err="1">
-                <a:latin typeface="Menlo" panose="020B0609030804020204" pitchFamily="49" charset="0"/>
-              </a:rPr>
-              <a:t>loop</a:t>
-            </a:r>
-            <a:r>
-              <a:rPr lang="es-ES" sz="1100" dirty="0">
-                <a:latin typeface="Menlo" panose="020B0609030804020204" pitchFamily="49" charset="0"/>
-              </a:rPr>
-              <a:t> bloqueante, un pipeline reactivo</a:t>
-            </a:r>
-          </a:p>
-          <a:p>
-            <a:pPr lvl="1"/>
-            <a:r>
-              <a:rPr lang="es-ES" sz="1100" dirty="0" err="1">
-                <a:latin typeface="Menlo" panose="020B0609030804020204" pitchFamily="49" charset="0"/>
-              </a:rPr>
-              <a:t>return</a:t>
-            </a:r>
-            <a:r>
-              <a:rPr lang="es-ES" sz="1100" dirty="0">
-                <a:latin typeface="Menlo" panose="020B0609030804020204" pitchFamily="49" charset="0"/>
-              </a:rPr>
-              <a:t> </a:t>
-            </a:r>
-            <a:r>
-              <a:rPr lang="es-ES" sz="1100" dirty="0" err="1">
-                <a:latin typeface="Menlo" panose="020B0609030804020204" pitchFamily="49" charset="0"/>
-              </a:rPr>
-              <a:t>Flux.range</a:t>
-            </a:r>
-            <a:r>
-              <a:rPr lang="es-ES" sz="1100" dirty="0">
-                <a:latin typeface="Menlo" panose="020B0609030804020204" pitchFamily="49" charset="0"/>
-              </a:rPr>
-              <a:t>(0, </a:t>
-            </a:r>
-            <a:r>
-              <a:rPr lang="es-ES" sz="1100" dirty="0" err="1">
-                <a:latin typeface="Menlo" panose="020B0609030804020204" pitchFamily="49" charset="0"/>
-              </a:rPr>
-              <a:t>request.getRequests</a:t>
-            </a:r>
-            <a:r>
-              <a:rPr lang="es-ES" sz="1100" dirty="0">
-                <a:latin typeface="Menlo" panose="020B0609030804020204" pitchFamily="49" charset="0"/>
-              </a:rPr>
-              <a:t>())</a:t>
-            </a:r>
-          </a:p>
-          <a:p>
-            <a:pPr lvl="1"/>
-            <a:r>
-              <a:rPr lang="es-ES" sz="1100" dirty="0">
-                <a:latin typeface="Menlo" panose="020B0609030804020204" pitchFamily="49" charset="0"/>
-              </a:rPr>
-              <a:t>.</a:t>
-            </a:r>
-            <a:r>
-              <a:rPr lang="es-ES" sz="1100" dirty="0" err="1">
-                <a:latin typeface="Menlo" panose="020B0609030804020204" pitchFamily="49" charset="0"/>
-              </a:rPr>
-              <a:t>flatMap</a:t>
-            </a:r>
-            <a:r>
-              <a:rPr lang="es-ES" sz="1100" dirty="0">
-                <a:latin typeface="Menlo" panose="020B0609030804020204" pitchFamily="49" charset="0"/>
-              </a:rPr>
-              <a:t>(i -&gt; </a:t>
-            </a:r>
-            <a:r>
-              <a:rPr lang="es-ES" sz="1100" dirty="0" err="1">
-                <a:latin typeface="Menlo" panose="020B0609030804020204" pitchFamily="49" charset="0"/>
-              </a:rPr>
-              <a:t>executeReactiveRequest</a:t>
-            </a:r>
-            <a:r>
-              <a:rPr lang="es-ES" sz="1100" dirty="0">
-                <a:latin typeface="Menlo" panose="020B0609030804020204" pitchFamily="49" charset="0"/>
-              </a:rPr>
-              <a:t>(...), </a:t>
-            </a:r>
-            <a:r>
-              <a:rPr lang="es-ES" sz="1100" dirty="0" err="1">
-                <a:latin typeface="Menlo" panose="020B0609030804020204" pitchFamily="49" charset="0"/>
-              </a:rPr>
-              <a:t>request.getThreads</a:t>
-            </a:r>
-            <a:r>
-              <a:rPr lang="es-ES" sz="1100" dirty="0">
-                <a:latin typeface="Menlo" panose="020B0609030804020204" pitchFamily="49" charset="0"/>
-              </a:rPr>
-              <a:t>()) // concurrencia controlada</a:t>
-            </a:r>
-          </a:p>
-          <a:p>
-            <a:pPr lvl="1"/>
-            <a:r>
-              <a:rPr lang="es-ES" sz="1100" dirty="0">
-                <a:latin typeface="Menlo" panose="020B0609030804020204" pitchFamily="49" charset="0"/>
-              </a:rPr>
-              <a:t>.</a:t>
-            </a:r>
-            <a:r>
-              <a:rPr lang="es-ES" sz="1100" dirty="0" err="1">
-                <a:latin typeface="Menlo" panose="020B0609030804020204" pitchFamily="49" charset="0"/>
-              </a:rPr>
-              <a:t>collectList</a:t>
-            </a:r>
-            <a:r>
-              <a:rPr lang="es-ES" sz="1100" dirty="0">
-                <a:latin typeface="Menlo" panose="020B0609030804020204" pitchFamily="49" charset="0"/>
-              </a:rPr>
-              <a:t>()</a:t>
-            </a:r>
-          </a:p>
-          <a:p>
-            <a:pPr lvl="1"/>
-            <a:r>
-              <a:rPr lang="es-ES" sz="1100" dirty="0">
-                <a:latin typeface="Menlo" panose="020B0609030804020204" pitchFamily="49" charset="0"/>
-              </a:rPr>
-              <a:t>.</a:t>
-            </a:r>
-            <a:r>
-              <a:rPr lang="es-ES" sz="1100" dirty="0" err="1">
-                <a:latin typeface="Menlo" panose="020B0609030804020204" pitchFamily="49" charset="0"/>
-              </a:rPr>
-              <a:t>map</a:t>
-            </a:r>
-            <a:r>
-              <a:rPr lang="es-ES" sz="1100" dirty="0">
-                <a:latin typeface="Menlo" panose="020B0609030804020204" pitchFamily="49" charset="0"/>
-              </a:rPr>
-              <a:t>(</a:t>
-            </a:r>
-            <a:r>
-              <a:rPr lang="es-ES" sz="1100" dirty="0" err="1">
-                <a:latin typeface="Menlo" panose="020B0609030804020204" pitchFamily="49" charset="0"/>
-              </a:rPr>
-              <a:t>responseTimes</a:t>
-            </a:r>
-            <a:r>
-              <a:rPr lang="es-ES" sz="1100" dirty="0">
-                <a:latin typeface="Menlo" panose="020B0609030804020204" pitchFamily="49" charset="0"/>
-              </a:rPr>
-              <a:t> -&gt; { ... });</a:t>
-            </a:r>
-          </a:p>
-          <a:p>
-            <a:pPr lvl="1"/>
-            <a:r>
-              <a:rPr lang="es-ES" sz="1100" dirty="0">
-                <a:latin typeface="Menlo" panose="020B0609030804020204" pitchFamily="49" charset="0"/>
-              </a:rPr>
-              <a:t>}</a:t>
-            </a:r>
-          </a:p>
-        </p:txBody>
-      </p:sp>
-    </p:spTree>
-    <p:extLst>
-      <p:ext uri="{BB962C8B-B14F-4D97-AF65-F5344CB8AC3E}">
-        <p14:creationId xmlns:p14="http://schemas.microsoft.com/office/powerpoint/2010/main" val="3781947358"/>
-      </p:ext>
-    </p:extLst>
-  </p:cSld>
-  <p:clrMapOvr>
-    <a:masterClrMapping/>
-  </p:clrMapOvr>
-</p:sld>
-</file>
-
-<file path=ppt/slides/slide5.xml><?xml version="1.0" encoding="utf-8"?>
-<p:sld xmlns:a="http://schemas.openxmlformats.org/drawingml/2006/main" xmlns:r="http://schemas.openxmlformats.org/officeDocument/2006/relationships" xmlns:p="http://schemas.openxmlformats.org/presentationml/2006/main">
-  <p:cSld>
-    <p:spTree>
-      <p:nvGrpSpPr>
-        <p:cNvPr id="1" name=""/>
-        <p:cNvGrpSpPr/>
-        <p:nvPr/>
-      </p:nvGrpSpPr>
-      <p:grpSpPr>
-        <a:xfrm>
-          <a:off x="0" y="0"/>
-          <a:ext cx="0" cy="0"/>
-          <a:chOff x="0" y="0"/>
-          <a:chExt cx="0" cy="0"/>
-        </a:xfrm>
-      </p:grpSpPr>
-      <p:pic>
-        <p:nvPicPr>
-          <p:cNvPr id="4" name="Picture 3">
-            <a:extLst>
-              <a:ext uri="{FF2B5EF4-FFF2-40B4-BE49-F238E27FC236}">
-                <a16:creationId xmlns:a16="http://schemas.microsoft.com/office/drawing/2014/main" id="{93E96E42-6062-4A47-9C78-96947A71069D}"/>
-              </a:ext>
-            </a:extLst>
-          </p:cNvPr>
-          <p:cNvPicPr>
-            <a:picLocks noChangeAspect="1"/>
-          </p:cNvPicPr>
-          <p:nvPr/>
-        </p:nvPicPr>
-        <p:blipFill>
-          <a:blip r:embed="rId2"/>
-          <a:stretch>
-            <a:fillRect/>
-          </a:stretch>
-        </p:blipFill>
-        <p:spPr>
-          <a:xfrm>
-            <a:off x="222422" y="285078"/>
-            <a:ext cx="10919254" cy="3984343"/>
-          </a:xfrm>
-          <a:prstGeom prst="rect">
-            <a:avLst/>
-          </a:prstGeom>
-        </p:spPr>
-      </p:pic>
-    </p:spTree>
-    <p:extLst>
-      <p:ext uri="{BB962C8B-B14F-4D97-AF65-F5344CB8AC3E}">
-        <p14:creationId xmlns:p14="http://schemas.microsoft.com/office/powerpoint/2010/main" val="3397801922"/>
-      </p:ext>
-    </p:extLst>
-  </p:cSld>
-  <p:clrMapOvr>
-    <a:masterClrMapping/>
-  </p:clrMapOvr>
-</p:sld>
-</file>
-
-<file path=ppt/slides/slide6.xml><?xml version="1.0" encoding="utf-8"?>
+<file path=ppt/slides/slide10.xml><?xml version="1.0" encoding="utf-8"?>
 <p:sld xmlns:a="http://schemas.openxmlformats.org/drawingml/2006/main" xmlns:r="http://schemas.openxmlformats.org/officeDocument/2006/relationships" xmlns:p="http://schemas.openxmlformats.org/presentationml/2006/main">
   <p:cSld>
     <p:spTree>
@@ -5332,7 +3995,7 @@
 </p:sld>
 </file>
 
-<file path=ppt/slides/slide7.xml><?xml version="1.0" encoding="utf-8"?>
+<file path=ppt/slides/slide11.xml><?xml version="1.0" encoding="utf-8"?>
 <p:sld xmlns:a="http://schemas.openxmlformats.org/drawingml/2006/main" xmlns:r="http://schemas.openxmlformats.org/officeDocument/2006/relationships" xmlns:p="http://schemas.openxmlformats.org/presentationml/2006/main">
   <p:cSld>
     <p:spTree>
@@ -5364,7 +4027,7 @@
         <p:spPr>
           <a:xfrm>
             <a:off x="514864" y="315264"/>
-            <a:ext cx="8480854" cy="1200329"/>
+            <a:ext cx="8480854" cy="1754326"/>
           </a:xfrm>
           <a:prstGeom prst="rect">
             <a:avLst/>
@@ -5427,12 +4090,4097 @@
             </a:r>
             <a:endParaRPr lang="es-ES" dirty="0"/>
           </a:p>
+          <a:p>
+            <a:pPr>
+              <a:buFont typeface="Arial" panose="020B0604020202020204" pitchFamily="34" charset="0"/>
+              <a:buChar char="•"/>
+            </a:pPr>
+            <a:r>
+              <a:rPr lang="es-ES" dirty="0">
+                <a:hlinkClick r:id="rId6"/>
+              </a:rPr>
+              <a:t>https://www.happycoders.eu/java/virtual-threads/</a:t>
+            </a:r>
+            <a:endParaRPr lang="es-ES" dirty="0"/>
+          </a:p>
+          <a:p>
+            <a:pPr>
+              <a:buFont typeface="Arial" panose="020B0604020202020204" pitchFamily="34" charset="0"/>
+              <a:buChar char="•"/>
+            </a:pPr>
+            <a:endParaRPr lang="es-ES" dirty="0"/>
+          </a:p>
         </p:txBody>
       </p:sp>
     </p:spTree>
     <p:extLst>
       <p:ext uri="{BB962C8B-B14F-4D97-AF65-F5344CB8AC3E}">
         <p14:creationId xmlns:p14="http://schemas.microsoft.com/office/powerpoint/2010/main" val="2050454444"/>
+      </p:ext>
+    </p:extLst>
+  </p:cSld>
+  <p:clrMapOvr>
+    <a:masterClrMapping/>
+  </p:clrMapOvr>
+</p:sld>
+</file>
+
+<file path=ppt/slides/slide2.xml><?xml version="1.0" encoding="utf-8"?>
+<p:sld xmlns:a="http://schemas.openxmlformats.org/drawingml/2006/main" xmlns:r="http://schemas.openxmlformats.org/officeDocument/2006/relationships" xmlns:p="http://schemas.openxmlformats.org/presentationml/2006/main">
+  <p:cSld>
+    <p:spTree>
+      <p:nvGrpSpPr>
+        <p:cNvPr id="1" name=""/>
+        <p:cNvGrpSpPr/>
+        <p:nvPr/>
+      </p:nvGrpSpPr>
+      <p:grpSpPr>
+        <a:xfrm>
+          <a:off x="0" y="0"/>
+          <a:ext cx="0" cy="0"/>
+          <a:chOff x="0" y="0"/>
+          <a:chExt cx="0" cy="0"/>
+        </a:xfrm>
+      </p:grpSpPr>
+      <p:pic>
+        <p:nvPicPr>
+          <p:cNvPr id="4" name="Picture 3">
+            <a:extLst>
+              <a:ext uri="{FF2B5EF4-FFF2-40B4-BE49-F238E27FC236}">
+                <a16:creationId xmlns:a16="http://schemas.microsoft.com/office/drawing/2014/main" id="{C8AFA5A4-138F-4A46-BA0C-4D57D3EE4C25}"/>
+              </a:ext>
+            </a:extLst>
+          </p:cNvPr>
+          <p:cNvPicPr>
+            <a:picLocks noChangeAspect="1"/>
+          </p:cNvPicPr>
+          <p:nvPr/>
+        </p:nvPicPr>
+        <p:blipFill>
+          <a:blip r:embed="rId2"/>
+          <a:stretch>
+            <a:fillRect/>
+          </a:stretch>
+        </p:blipFill>
+        <p:spPr>
+          <a:xfrm>
+            <a:off x="728363" y="479339"/>
+            <a:ext cx="10414000" cy="2019300"/>
+          </a:xfrm>
+          <a:prstGeom prst="rect">
+            <a:avLst/>
+          </a:prstGeom>
+        </p:spPr>
+      </p:pic>
+      <p:pic>
+        <p:nvPicPr>
+          <p:cNvPr id="5" name="Picture 4">
+            <a:extLst>
+              <a:ext uri="{FF2B5EF4-FFF2-40B4-BE49-F238E27FC236}">
+                <a16:creationId xmlns:a16="http://schemas.microsoft.com/office/drawing/2014/main" id="{5AB36F07-7C9B-014C-AB3F-B032DC0ADE1B}"/>
+              </a:ext>
+            </a:extLst>
+          </p:cNvPr>
+          <p:cNvPicPr>
+            <a:picLocks noChangeAspect="1"/>
+          </p:cNvPicPr>
+          <p:nvPr/>
+        </p:nvPicPr>
+        <p:blipFill>
+          <a:blip r:embed="rId3"/>
+          <a:stretch>
+            <a:fillRect/>
+          </a:stretch>
+        </p:blipFill>
+        <p:spPr>
+          <a:xfrm>
+            <a:off x="728363" y="4253128"/>
+            <a:ext cx="8775700" cy="2108200"/>
+          </a:xfrm>
+          <a:prstGeom prst="rect">
+            <a:avLst/>
+          </a:prstGeom>
+        </p:spPr>
+      </p:pic>
+      <p:sp>
+        <p:nvSpPr>
+          <p:cNvPr id="6" name="TextBox 5">
+            <a:extLst>
+              <a:ext uri="{FF2B5EF4-FFF2-40B4-BE49-F238E27FC236}">
+                <a16:creationId xmlns:a16="http://schemas.microsoft.com/office/drawing/2014/main" id="{E2EDDC79-8B5E-9644-88FA-3C768D3B9CBD}"/>
+              </a:ext>
+            </a:extLst>
+          </p:cNvPr>
+          <p:cNvSpPr txBox="1"/>
+          <p:nvPr/>
+        </p:nvSpPr>
+        <p:spPr>
+          <a:xfrm>
+            <a:off x="728363" y="3064475"/>
+            <a:ext cx="1909625" cy="369332"/>
+          </a:xfrm>
+          <a:prstGeom prst="rect">
+            <a:avLst/>
+          </a:prstGeom>
+          <a:noFill/>
+        </p:spPr>
+        <p:txBody>
+          <a:bodyPr wrap="none" rtlCol="0">
+            <a:spAutoFit/>
+          </a:bodyPr>
+          <a:lstStyle>
+            <a:defPPr>
+              <a:defRPr lang="es-ES"/>
+            </a:defPPr>
+            <a:lvl1pPr>
+              <a:defRPr sz="2400"/>
+            </a:lvl1pPr>
+          </a:lstStyle>
+          <a:p>
+            <a:r>
+              <a:rPr lang="en-GB" dirty="0"/>
+              <a:t>Reactive Style ;) ;) </a:t>
+            </a:r>
+          </a:p>
+        </p:txBody>
+      </p:sp>
+      <p:sp>
+        <p:nvSpPr>
+          <p:cNvPr id="7" name="TextBox 6">
+            <a:extLst>
+              <a:ext uri="{FF2B5EF4-FFF2-40B4-BE49-F238E27FC236}">
+                <a16:creationId xmlns:a16="http://schemas.microsoft.com/office/drawing/2014/main" id="{6CC465C3-2C00-024B-87BE-E8995813F92A}"/>
+              </a:ext>
+            </a:extLst>
+          </p:cNvPr>
+          <p:cNvSpPr txBox="1"/>
+          <p:nvPr/>
+        </p:nvSpPr>
+        <p:spPr>
+          <a:xfrm>
+            <a:off x="610479" y="47719"/>
+            <a:ext cx="3050259" cy="461665"/>
+          </a:xfrm>
+          <a:prstGeom prst="rect">
+            <a:avLst/>
+          </a:prstGeom>
+          <a:noFill/>
+        </p:spPr>
+        <p:txBody>
+          <a:bodyPr wrap="none" rtlCol="0">
+            <a:spAutoFit/>
+          </a:bodyPr>
+          <a:lstStyle/>
+          <a:p>
+            <a:r>
+              <a:rPr lang="en-GB" sz="2400" dirty="0"/>
+              <a:t>Using platform threads</a:t>
+            </a:r>
+          </a:p>
+        </p:txBody>
+      </p:sp>
+      <p:pic>
+        <p:nvPicPr>
+          <p:cNvPr id="8" name="Picture 7">
+            <a:extLst>
+              <a:ext uri="{FF2B5EF4-FFF2-40B4-BE49-F238E27FC236}">
+                <a16:creationId xmlns:a16="http://schemas.microsoft.com/office/drawing/2014/main" id="{946A13D5-D299-F144-BAFE-33FE869F7417}"/>
+              </a:ext>
+            </a:extLst>
+          </p:cNvPr>
+          <p:cNvPicPr>
+            <a:picLocks noChangeAspect="1"/>
+          </p:cNvPicPr>
+          <p:nvPr/>
+        </p:nvPicPr>
+        <p:blipFill>
+          <a:blip r:embed="rId4"/>
+          <a:stretch>
+            <a:fillRect/>
+          </a:stretch>
+        </p:blipFill>
+        <p:spPr>
+          <a:xfrm>
+            <a:off x="728363" y="3488899"/>
+            <a:ext cx="9575800" cy="558800"/>
+          </a:xfrm>
+          <a:prstGeom prst="rect">
+            <a:avLst/>
+          </a:prstGeom>
+        </p:spPr>
+      </p:pic>
+      <p:pic>
+        <p:nvPicPr>
+          <p:cNvPr id="9" name="Picture 8">
+            <a:extLst>
+              <a:ext uri="{FF2B5EF4-FFF2-40B4-BE49-F238E27FC236}">
+                <a16:creationId xmlns:a16="http://schemas.microsoft.com/office/drawing/2014/main" id="{24146B7A-2CD1-1C44-AA7A-956959DCB856}"/>
+              </a:ext>
+            </a:extLst>
+          </p:cNvPr>
+          <p:cNvPicPr>
+            <a:picLocks noChangeAspect="1"/>
+          </p:cNvPicPr>
+          <p:nvPr/>
+        </p:nvPicPr>
+        <p:blipFill>
+          <a:blip r:embed="rId5"/>
+          <a:stretch>
+            <a:fillRect/>
+          </a:stretch>
+        </p:blipFill>
+        <p:spPr>
+          <a:xfrm>
+            <a:off x="10905699" y="5421228"/>
+            <a:ext cx="1286301" cy="1286301"/>
+          </a:xfrm>
+          <a:prstGeom prst="rect">
+            <a:avLst/>
+          </a:prstGeom>
+        </p:spPr>
+      </p:pic>
+    </p:spTree>
+    <p:extLst>
+      <p:ext uri="{BB962C8B-B14F-4D97-AF65-F5344CB8AC3E}">
+        <p14:creationId xmlns:p14="http://schemas.microsoft.com/office/powerpoint/2010/main" val="2167579309"/>
+      </p:ext>
+    </p:extLst>
+  </p:cSld>
+  <p:clrMapOvr>
+    <a:masterClrMapping/>
+  </p:clrMapOvr>
+</p:sld>
+</file>
+
+<file path=ppt/slides/slide3.xml><?xml version="1.0" encoding="utf-8"?>
+<p:sld xmlns:a="http://schemas.openxmlformats.org/drawingml/2006/main" xmlns:r="http://schemas.openxmlformats.org/officeDocument/2006/relationships" xmlns:p="http://schemas.openxmlformats.org/presentationml/2006/main">
+  <p:cSld>
+    <p:spTree>
+      <p:nvGrpSpPr>
+        <p:cNvPr id="1" name=""/>
+        <p:cNvGrpSpPr/>
+        <p:nvPr/>
+      </p:nvGrpSpPr>
+      <p:grpSpPr>
+        <a:xfrm>
+          <a:off x="0" y="0"/>
+          <a:ext cx="0" cy="0"/>
+          <a:chOff x="0" y="0"/>
+          <a:chExt cx="0" cy="0"/>
+        </a:xfrm>
+      </p:grpSpPr>
+    </p:spTree>
+    <p:extLst>
+      <p:ext uri="{BB962C8B-B14F-4D97-AF65-F5344CB8AC3E}">
+        <p14:creationId xmlns:p14="http://schemas.microsoft.com/office/powerpoint/2010/main" val="2450036938"/>
+      </p:ext>
+    </p:extLst>
+  </p:cSld>
+  <p:clrMapOvr>
+    <a:masterClrMapping/>
+  </p:clrMapOvr>
+</p:sld>
+</file>
+
+<file path=ppt/slides/slide4.xml><?xml version="1.0" encoding="utf-8"?>
+<p:sld xmlns:a="http://schemas.openxmlformats.org/drawingml/2006/main" xmlns:r="http://schemas.openxmlformats.org/officeDocument/2006/relationships" xmlns:p="http://schemas.openxmlformats.org/presentationml/2006/main">
+  <p:cSld>
+    <p:spTree>
+      <p:nvGrpSpPr>
+        <p:cNvPr id="1" name=""/>
+        <p:cNvGrpSpPr/>
+        <p:nvPr/>
+      </p:nvGrpSpPr>
+      <p:grpSpPr>
+        <a:xfrm>
+          <a:off x="0" y="0"/>
+          <a:ext cx="0" cy="0"/>
+          <a:chOff x="0" y="0"/>
+          <a:chExt cx="0" cy="0"/>
+        </a:xfrm>
+      </p:grpSpPr>
+      <p:graphicFrame>
+        <p:nvGraphicFramePr>
+          <p:cNvPr id="2" name="Table 1">
+            <a:extLst>
+              <a:ext uri="{FF2B5EF4-FFF2-40B4-BE49-F238E27FC236}">
+                <a16:creationId xmlns:a16="http://schemas.microsoft.com/office/drawing/2014/main" id="{550A4976-D85D-1D42-8610-2D102F07104D}"/>
+              </a:ext>
+            </a:extLst>
+          </p:cNvPr>
+          <p:cNvGraphicFramePr>
+            <a:graphicFrameLocks noGrp="1"/>
+          </p:cNvGraphicFramePr>
+          <p:nvPr>
+            <p:extLst>
+              <p:ext uri="{D42A27DB-BD31-4B8C-83A1-F6EECF244321}">
+                <p14:modId xmlns:p14="http://schemas.microsoft.com/office/powerpoint/2010/main" val="1134143647"/>
+              </p:ext>
+            </p:extLst>
+          </p:nvPr>
+        </p:nvGraphicFramePr>
+        <p:xfrm>
+          <a:off x="516925" y="232484"/>
+          <a:ext cx="10515600" cy="6370320"/>
+        </p:xfrm>
+        <a:graphic>
+          <a:graphicData uri="http://schemas.openxmlformats.org/drawingml/2006/table">
+            <a:tbl>
+              <a:tblPr>
+                <a:tableStyleId>{BC89EF96-8CEA-46FF-86C4-4CE0E7609802}</a:tableStyleId>
+              </a:tblPr>
+              <a:tblGrid>
+                <a:gridCol w="2628900">
+                  <a:extLst>
+                    <a:ext uri="{9D8B030D-6E8A-4147-A177-3AD203B41FA5}">
+                      <a16:colId xmlns:a16="http://schemas.microsoft.com/office/drawing/2014/main" val="1122333552"/>
+                    </a:ext>
+                  </a:extLst>
+                </a:gridCol>
+                <a:gridCol w="2628900">
+                  <a:extLst>
+                    <a:ext uri="{9D8B030D-6E8A-4147-A177-3AD203B41FA5}">
+                      <a16:colId xmlns:a16="http://schemas.microsoft.com/office/drawing/2014/main" val="3563258716"/>
+                    </a:ext>
+                  </a:extLst>
+                </a:gridCol>
+                <a:gridCol w="2628900">
+                  <a:extLst>
+                    <a:ext uri="{9D8B030D-6E8A-4147-A177-3AD203B41FA5}">
+                      <a16:colId xmlns:a16="http://schemas.microsoft.com/office/drawing/2014/main" val="788944646"/>
+                    </a:ext>
+                  </a:extLst>
+                </a:gridCol>
+                <a:gridCol w="2628900">
+                  <a:extLst>
+                    <a:ext uri="{9D8B030D-6E8A-4147-A177-3AD203B41FA5}">
+                      <a16:colId xmlns:a16="http://schemas.microsoft.com/office/drawing/2014/main" val="1457253348"/>
+                    </a:ext>
+                  </a:extLst>
+                </a:gridCol>
+              </a:tblGrid>
+              <a:tr h="0">
+                <a:tc>
+                  <a:txBody>
+                    <a:bodyPr/>
+                    <a:lstStyle/>
+                    <a:p>
+                      <a:r>
+                        <a:rPr lang="es-ES" dirty="0"/>
+                        <a:t>Aspecto</a:t>
+                      </a:r>
+                    </a:p>
+                  </a:txBody>
+                  <a:tcPr anchor="ctr">
+                    <a:solidFill>
+                      <a:schemeClr val="accent1">
+                        <a:lumMod val="60000"/>
+                        <a:lumOff val="40000"/>
+                      </a:schemeClr>
+                    </a:solidFill>
+                  </a:tcPr>
+                </a:tc>
+                <a:tc>
+                  <a:txBody>
+                    <a:bodyPr/>
+                    <a:lstStyle/>
+                    <a:p>
+                      <a:r>
+                        <a:rPr lang="es-ES" dirty="0" err="1"/>
+                        <a:t>Platform</a:t>
+                      </a:r>
+                      <a:r>
+                        <a:rPr lang="es-ES" dirty="0"/>
+                        <a:t> </a:t>
+                      </a:r>
+                      <a:r>
+                        <a:rPr lang="es-ES" dirty="0" err="1"/>
+                        <a:t>Threads</a:t>
+                      </a:r>
+                      <a:endParaRPr lang="es-ES" dirty="0"/>
+                    </a:p>
+                  </a:txBody>
+                  <a:tcPr anchor="ctr">
+                    <a:solidFill>
+                      <a:schemeClr val="accent1">
+                        <a:lumMod val="60000"/>
+                        <a:lumOff val="40000"/>
+                      </a:schemeClr>
+                    </a:solidFill>
+                  </a:tcPr>
+                </a:tc>
+                <a:tc>
+                  <a:txBody>
+                    <a:bodyPr/>
+                    <a:lstStyle/>
+                    <a:p>
+                      <a:r>
+                        <a:rPr lang="es-ES" dirty="0"/>
+                        <a:t>Reactive</a:t>
+                      </a:r>
+                    </a:p>
+                  </a:txBody>
+                  <a:tcPr anchor="ctr">
+                    <a:solidFill>
+                      <a:schemeClr val="accent1">
+                        <a:lumMod val="60000"/>
+                        <a:lumOff val="40000"/>
+                      </a:schemeClr>
+                    </a:solidFill>
+                  </a:tcPr>
+                </a:tc>
+                <a:tc>
+                  <a:txBody>
+                    <a:bodyPr/>
+                    <a:lstStyle/>
+                    <a:p>
+                      <a:r>
+                        <a:rPr lang="es-ES" dirty="0"/>
+                        <a:t>Virtual </a:t>
+                      </a:r>
+                      <a:r>
+                        <a:rPr lang="es-ES" dirty="0" err="1"/>
+                        <a:t>Threads</a:t>
+                      </a:r>
+                      <a:endParaRPr lang="es-ES" dirty="0"/>
+                    </a:p>
+                  </a:txBody>
+                  <a:tcPr anchor="ctr">
+                    <a:solidFill>
+                      <a:schemeClr val="accent1">
+                        <a:lumMod val="60000"/>
+                        <a:lumOff val="40000"/>
+                      </a:schemeClr>
+                    </a:solidFill>
+                  </a:tcPr>
+                </a:tc>
+                <a:extLst>
+                  <a:ext uri="{0D108BD9-81ED-4DB2-BD59-A6C34878D82A}">
+                    <a16:rowId xmlns:a16="http://schemas.microsoft.com/office/drawing/2014/main" val="387169904"/>
+                  </a:ext>
+                </a:extLst>
+              </a:tr>
+              <a:tr h="0">
+                <a:tc>
+                  <a:txBody>
+                    <a:bodyPr/>
+                    <a:lstStyle/>
+                    <a:p>
+                      <a:r>
+                        <a:rPr lang="es-ES"/>
+                        <a:t>Executor</a:t>
+                      </a:r>
+                    </a:p>
+                  </a:txBody>
+                  <a:tcPr anchor="ctr"/>
+                </a:tc>
+                <a:tc>
+                  <a:txBody>
+                    <a:bodyPr/>
+                    <a:lstStyle/>
+                    <a:p>
+                      <a:r>
+                        <a:rPr lang="es-ES" dirty="0" err="1"/>
+                        <a:t>newFixedThreadPool</a:t>
+                      </a:r>
+                      <a:r>
+                        <a:rPr lang="es-ES" dirty="0"/>
+                        <a:t>(n)</a:t>
+                      </a:r>
+                    </a:p>
+                  </a:txBody>
+                  <a:tcPr anchor="ctr"/>
+                </a:tc>
+                <a:tc>
+                  <a:txBody>
+                    <a:bodyPr/>
+                    <a:lstStyle/>
+                    <a:p>
+                      <a:r>
+                        <a:rPr lang="es-ES"/>
+                        <a:t>Event loop (Netty)</a:t>
+                      </a:r>
+                    </a:p>
+                  </a:txBody>
+                  <a:tcPr anchor="ctr"/>
+                </a:tc>
+                <a:tc>
+                  <a:txBody>
+                    <a:bodyPr/>
+                    <a:lstStyle/>
+                    <a:p>
+                      <a:r>
+                        <a:rPr lang="es-ES"/>
+                        <a:t>newVirtualThreadPerTaskExecutor()</a:t>
+                      </a:r>
+                    </a:p>
+                  </a:txBody>
+                  <a:tcPr anchor="ctr"/>
+                </a:tc>
+                <a:extLst>
+                  <a:ext uri="{0D108BD9-81ED-4DB2-BD59-A6C34878D82A}">
+                    <a16:rowId xmlns:a16="http://schemas.microsoft.com/office/drawing/2014/main" val="2536320424"/>
+                  </a:ext>
+                </a:extLst>
+              </a:tr>
+              <a:tr h="0">
+                <a:tc>
+                  <a:txBody>
+                    <a:bodyPr/>
+                    <a:lstStyle/>
+                    <a:p>
+                      <a:r>
+                        <a:rPr lang="es-ES"/>
+                        <a:t>HTTP Client</a:t>
+                      </a:r>
+                    </a:p>
+                  </a:txBody>
+                  <a:tcPr anchor="ctr"/>
+                </a:tc>
+                <a:tc>
+                  <a:txBody>
+                    <a:bodyPr/>
+                    <a:lstStyle/>
+                    <a:p>
+                      <a:r>
+                        <a:rPr lang="es-ES" dirty="0" err="1"/>
+                        <a:t>RestTemplate</a:t>
+                      </a:r>
+                      <a:r>
+                        <a:rPr lang="es-ES" dirty="0"/>
+                        <a:t> (</a:t>
+                      </a:r>
+                      <a:r>
+                        <a:rPr lang="es-ES" dirty="0" err="1"/>
+                        <a:t>blocking</a:t>
+                      </a:r>
+                      <a:r>
+                        <a:rPr lang="es-ES" dirty="0"/>
+                        <a:t>)</a:t>
+                      </a:r>
+                    </a:p>
+                  </a:txBody>
+                  <a:tcPr anchor="ctr"/>
+                </a:tc>
+                <a:tc>
+                  <a:txBody>
+                    <a:bodyPr/>
+                    <a:lstStyle/>
+                    <a:p>
+                      <a:r>
+                        <a:rPr lang="es-ES"/>
+                        <a:t>WebClient (non-blocking)</a:t>
+                      </a:r>
+                    </a:p>
+                  </a:txBody>
+                  <a:tcPr anchor="ctr"/>
+                </a:tc>
+                <a:tc>
+                  <a:txBody>
+                    <a:bodyPr/>
+                    <a:lstStyle/>
+                    <a:p>
+                      <a:r>
+                        <a:rPr lang="es-ES"/>
+                        <a:t>RestTemplate (blocking)</a:t>
+                      </a:r>
+                    </a:p>
+                  </a:txBody>
+                  <a:tcPr anchor="ctr"/>
+                </a:tc>
+                <a:extLst>
+                  <a:ext uri="{0D108BD9-81ED-4DB2-BD59-A6C34878D82A}">
+                    <a16:rowId xmlns:a16="http://schemas.microsoft.com/office/drawing/2014/main" val="608383884"/>
+                  </a:ext>
+                </a:extLst>
+              </a:tr>
+              <a:tr h="0">
+                <a:tc>
+                  <a:txBody>
+                    <a:bodyPr/>
+                    <a:lstStyle/>
+                    <a:p>
+                      <a:r>
+                        <a:rPr lang="es-ES"/>
+                        <a:t>Firma del método</a:t>
+                      </a:r>
+                    </a:p>
+                  </a:txBody>
+                  <a:tcPr anchor="ctr"/>
+                </a:tc>
+                <a:tc>
+                  <a:txBody>
+                    <a:bodyPr/>
+                    <a:lstStyle/>
+                    <a:p>
+                      <a:r>
+                        <a:rPr lang="es-ES" dirty="0" err="1"/>
+                        <a:t>LoadResponse</a:t>
+                      </a:r>
+                      <a:r>
+                        <a:rPr lang="es-ES" dirty="0"/>
+                        <a:t> </a:t>
+                      </a:r>
+                      <a:r>
+                        <a:rPr lang="es-ES" dirty="0" err="1"/>
+                        <a:t>executeLoad</a:t>
+                      </a:r>
+                      <a:r>
+                        <a:rPr lang="es-ES" dirty="0"/>
+                        <a:t>()</a:t>
+                      </a:r>
+                    </a:p>
+                  </a:txBody>
+                  <a:tcPr anchor="ctr"/>
+                </a:tc>
+                <a:tc>
+                  <a:txBody>
+                    <a:bodyPr/>
+                    <a:lstStyle/>
+                    <a:p>
+                      <a:r>
+                        <a:rPr lang="es-ES"/>
+                        <a:t>Mono&lt;LoadResponse&gt; executeLoad()</a:t>
+                      </a:r>
+                    </a:p>
+                  </a:txBody>
+                  <a:tcPr anchor="ctr"/>
+                </a:tc>
+                <a:tc>
+                  <a:txBody>
+                    <a:bodyPr/>
+                    <a:lstStyle/>
+                    <a:p>
+                      <a:r>
+                        <a:rPr lang="es-ES"/>
+                        <a:t>LoadResponse executeLoad()</a:t>
+                      </a:r>
+                    </a:p>
+                  </a:txBody>
+                  <a:tcPr anchor="ctr"/>
+                </a:tc>
+                <a:extLst>
+                  <a:ext uri="{0D108BD9-81ED-4DB2-BD59-A6C34878D82A}">
+                    <a16:rowId xmlns:a16="http://schemas.microsoft.com/office/drawing/2014/main" val="1765074837"/>
+                  </a:ext>
+                </a:extLst>
+              </a:tr>
+              <a:tr h="0">
+                <a:tc>
+                  <a:txBody>
+                    <a:bodyPr/>
+                    <a:lstStyle/>
+                    <a:p>
+                      <a:r>
+                        <a:rPr lang="es-ES"/>
+                        <a:t>Modelo de código</a:t>
+                      </a:r>
+                    </a:p>
+                  </a:txBody>
+                  <a:tcPr anchor="ctr"/>
+                </a:tc>
+                <a:tc>
+                  <a:txBody>
+                    <a:bodyPr/>
+                    <a:lstStyle/>
+                    <a:p>
+                      <a:r>
+                        <a:rPr lang="es-ES" dirty="0"/>
+                        <a:t>Imperativo</a:t>
+                      </a:r>
+                    </a:p>
+                  </a:txBody>
+                  <a:tcPr anchor="ctr"/>
+                </a:tc>
+                <a:tc>
+                  <a:txBody>
+                    <a:bodyPr/>
+                    <a:lstStyle/>
+                    <a:p>
+                      <a:r>
+                        <a:rPr lang="es-ES"/>
+                        <a:t>Funcional/reactivo</a:t>
+                      </a:r>
+                    </a:p>
+                  </a:txBody>
+                  <a:tcPr anchor="ctr"/>
+                </a:tc>
+                <a:tc>
+                  <a:txBody>
+                    <a:bodyPr/>
+                    <a:lstStyle/>
+                    <a:p>
+                      <a:r>
+                        <a:rPr lang="es-ES"/>
+                        <a:t>Imperativo (igual que blocking)</a:t>
+                      </a:r>
+                    </a:p>
+                  </a:txBody>
+                  <a:tcPr anchor="ctr"/>
+                </a:tc>
+                <a:extLst>
+                  <a:ext uri="{0D108BD9-81ED-4DB2-BD59-A6C34878D82A}">
+                    <a16:rowId xmlns:a16="http://schemas.microsoft.com/office/drawing/2014/main" val="1368803966"/>
+                  </a:ext>
+                </a:extLst>
+              </a:tr>
+              <a:tr h="0">
+                <a:tc>
+                  <a:txBody>
+                    <a:bodyPr/>
+                    <a:lstStyle/>
+                    <a:p>
+                      <a:r>
+                        <a:rPr lang="es-ES"/>
+                        <a:t>Cambios respecto al anterior</a:t>
+                      </a:r>
+                    </a:p>
+                  </a:txBody>
+                  <a:tcPr anchor="ctr"/>
+                </a:tc>
+                <a:tc>
+                  <a:txBody>
+                    <a:bodyPr/>
+                    <a:lstStyle/>
+                    <a:p>
+                      <a:endParaRPr lang="es-ES" dirty="0"/>
+                    </a:p>
+                  </a:txBody>
+                  <a:tcPr anchor="ctr"/>
+                </a:tc>
+                <a:tc>
+                  <a:txBody>
+                    <a:bodyPr/>
+                    <a:lstStyle/>
+                    <a:p>
+                      <a:r>
+                        <a:rPr lang="es-ES" dirty="0"/>
+                        <a:t>Todo cambia: dependencias, cliente, paradigma</a:t>
+                      </a:r>
+                    </a:p>
+                  </a:txBody>
+                  <a:tcPr anchor="ctr"/>
+                </a:tc>
+                <a:tc>
+                  <a:txBody>
+                    <a:bodyPr/>
+                    <a:lstStyle/>
+                    <a:p>
+                      <a:r>
+                        <a:rPr lang="es-ES"/>
+                        <a:t>Solo 1 línea (el executor)</a:t>
+                      </a:r>
+                    </a:p>
+                  </a:txBody>
+                  <a:tcPr anchor="ctr"/>
+                </a:tc>
+                <a:extLst>
+                  <a:ext uri="{0D108BD9-81ED-4DB2-BD59-A6C34878D82A}">
+                    <a16:rowId xmlns:a16="http://schemas.microsoft.com/office/drawing/2014/main" val="2017879492"/>
+                  </a:ext>
+                </a:extLst>
+              </a:tr>
+              <a:tr h="0">
+                <a:tc>
+                  <a:txBody>
+                    <a:bodyPr/>
+                    <a:lstStyle/>
+                    <a:p>
+                      <a:r>
+                        <a:rPr lang="es-ES" dirty="0"/>
+                        <a:t>Complejidad del cambio</a:t>
+                      </a:r>
+                    </a:p>
+                  </a:txBody>
+                  <a:tcPr anchor="ctr"/>
+                </a:tc>
+                <a:tc>
+                  <a:txBody>
+                    <a:bodyPr/>
+                    <a:lstStyle/>
+                    <a:p>
+                      <a:endParaRPr lang="es-ES" dirty="0"/>
+                    </a:p>
+                  </a:txBody>
+                  <a:tcPr anchor="ctr"/>
+                </a:tc>
+                <a:tc>
+                  <a:txBody>
+                    <a:bodyPr/>
+                    <a:lstStyle/>
+                    <a:p>
+                      <a:r>
+                        <a:rPr lang="es-ES"/>
+                        <a:t>Alta</a:t>
+                      </a:r>
+                    </a:p>
+                  </a:txBody>
+                  <a:tcPr anchor="ctr"/>
+                </a:tc>
+                <a:tc>
+                  <a:txBody>
+                    <a:bodyPr/>
+                    <a:lstStyle/>
+                    <a:p>
+                      <a:r>
+                        <a:rPr lang="es-ES" dirty="0"/>
+                        <a:t>Mínima</a:t>
+                      </a:r>
+                    </a:p>
+                  </a:txBody>
+                  <a:tcPr anchor="ctr"/>
+                </a:tc>
+                <a:extLst>
+                  <a:ext uri="{0D108BD9-81ED-4DB2-BD59-A6C34878D82A}">
+                    <a16:rowId xmlns:a16="http://schemas.microsoft.com/office/drawing/2014/main" val="2216882747"/>
+                  </a:ext>
+                </a:extLst>
+              </a:tr>
+              <a:tr h="0">
+                <a:tc>
+                  <a:txBody>
+                    <a:bodyPr/>
+                    <a:lstStyle/>
+                    <a:p>
+                      <a:r>
+                        <a:rPr lang="en-GB" sz="1800" kern="1200" dirty="0" err="1">
+                          <a:solidFill>
+                            <a:schemeClr val="tx1"/>
+                          </a:solidFill>
+                          <a:latin typeface="+mn-lt"/>
+                          <a:ea typeface="+mn-ea"/>
+                          <a:cs typeface="+mn-cs"/>
+                        </a:rPr>
+                        <a:t>Modelo</a:t>
+                      </a:r>
+                      <a:endParaRPr lang="en-GB" sz="1800" kern="1200" dirty="0">
+                        <a:solidFill>
+                          <a:schemeClr val="tx1"/>
+                        </a:solidFill>
+                        <a:latin typeface="+mn-lt"/>
+                        <a:ea typeface="+mn-ea"/>
+                        <a:cs typeface="+mn-cs"/>
+                      </a:endParaRPr>
+                    </a:p>
+                  </a:txBody>
+                  <a:tcPr/>
+                </a:tc>
+                <a:tc>
+                  <a:txBody>
+                    <a:bodyPr/>
+                    <a:lstStyle/>
+                    <a:p>
+                      <a:r>
+                        <a:rPr lang="en-GB" sz="1800" kern="1200" dirty="0" err="1">
+                          <a:solidFill>
+                            <a:schemeClr val="tx1"/>
+                          </a:solidFill>
+                          <a:latin typeface="+mn-lt"/>
+                          <a:ea typeface="+mn-ea"/>
+                          <a:cs typeface="+mn-cs"/>
+                        </a:rPr>
+                        <a:t>Plataforma</a:t>
+                      </a:r>
+                      <a:r>
+                        <a:rPr lang="en-GB" sz="1800" kern="1200" dirty="0">
+                          <a:solidFill>
+                            <a:schemeClr val="tx1"/>
+                          </a:solidFill>
+                          <a:latin typeface="+mn-lt"/>
+                          <a:ea typeface="+mn-ea"/>
+                          <a:cs typeface="+mn-cs"/>
+                        </a:rPr>
+                        <a:t> (</a:t>
+                      </a:r>
+                      <a:r>
+                        <a:rPr lang="en-GB" sz="1800" kern="1200" dirty="0" err="1">
+                          <a:solidFill>
+                            <a:schemeClr val="tx1"/>
+                          </a:solidFill>
+                          <a:latin typeface="+mn-lt"/>
+                          <a:ea typeface="+mn-ea"/>
+                          <a:cs typeface="+mn-cs"/>
+                        </a:rPr>
+                        <a:t>pesados</a:t>
+                      </a:r>
+                      <a:r>
+                        <a:rPr lang="en-GB" sz="1800" kern="1200" dirty="0">
+                          <a:solidFill>
+                            <a:schemeClr val="tx1"/>
+                          </a:solidFill>
+                          <a:latin typeface="+mn-lt"/>
+                          <a:ea typeface="+mn-ea"/>
+                          <a:cs typeface="+mn-cs"/>
+                        </a:rPr>
+                        <a:t>) </a:t>
+                      </a:r>
+                    </a:p>
+                  </a:txBody>
+                  <a:tcPr/>
+                </a:tc>
+                <a:tc>
+                  <a:txBody>
+                    <a:bodyPr/>
+                    <a:lstStyle/>
+                    <a:p>
+                      <a:r>
+                        <a:rPr lang="en-GB" sz="1400" kern="1200" dirty="0" err="1">
+                          <a:solidFill>
+                            <a:schemeClr val="tx1"/>
+                          </a:solidFill>
+                          <a:latin typeface="+mn-lt"/>
+                          <a:ea typeface="+mn-ea"/>
+                          <a:cs typeface="+mn-cs"/>
+                        </a:rPr>
+                        <a:t>Bucle</a:t>
+                      </a:r>
+                      <a:r>
+                        <a:rPr lang="en-GB" sz="1400" kern="1200" dirty="0">
+                          <a:solidFill>
+                            <a:schemeClr val="tx1"/>
+                          </a:solidFill>
+                          <a:latin typeface="+mn-lt"/>
+                          <a:ea typeface="+mn-ea"/>
+                          <a:cs typeface="+mn-cs"/>
+                        </a:rPr>
+                        <a:t> de </a:t>
+                      </a:r>
+                      <a:r>
+                        <a:rPr lang="en-GB" sz="1400" kern="1200" dirty="0" err="1">
+                          <a:solidFill>
+                            <a:schemeClr val="tx1"/>
+                          </a:solidFill>
+                          <a:latin typeface="+mn-lt"/>
+                          <a:ea typeface="+mn-ea"/>
+                          <a:cs typeface="+mn-cs"/>
+                        </a:rPr>
+                        <a:t>eventos</a:t>
+                      </a:r>
+                      <a:r>
+                        <a:rPr lang="en-GB" sz="1400" kern="1200" dirty="0">
+                          <a:solidFill>
+                            <a:schemeClr val="tx1"/>
+                          </a:solidFill>
+                          <a:latin typeface="+mn-lt"/>
+                          <a:ea typeface="+mn-ea"/>
+                          <a:cs typeface="+mn-cs"/>
+                        </a:rPr>
+                        <a:t> no </a:t>
+                      </a:r>
+                      <a:r>
+                        <a:rPr lang="en-GB" sz="1400" kern="1200" dirty="0" err="1">
+                          <a:solidFill>
+                            <a:schemeClr val="tx1"/>
+                          </a:solidFill>
+                          <a:latin typeface="+mn-lt"/>
+                          <a:ea typeface="+mn-ea"/>
+                          <a:cs typeface="+mn-cs"/>
+                        </a:rPr>
+                        <a:t>bloqueantes</a:t>
+                      </a:r>
+                      <a:endParaRPr lang="en-GB" sz="1400" kern="1200" dirty="0">
+                        <a:solidFill>
+                          <a:schemeClr val="tx1"/>
+                        </a:solidFill>
+                        <a:latin typeface="+mn-lt"/>
+                        <a:ea typeface="+mn-ea"/>
+                        <a:cs typeface="+mn-cs"/>
+                      </a:endParaRPr>
+                    </a:p>
+                    <a:p>
+                      <a:r>
+                        <a:rPr lang="en-GB" sz="1400" kern="1200" dirty="0">
+                          <a:solidFill>
+                            <a:schemeClr val="tx1"/>
+                          </a:solidFill>
+                          <a:latin typeface="+mn-lt"/>
+                          <a:ea typeface="+mn-ea"/>
+                          <a:cs typeface="+mn-cs"/>
+                        </a:rPr>
+                        <a:t>(</a:t>
+                      </a:r>
+                      <a:r>
+                        <a:rPr lang="en-GB" sz="1400" kern="1200" dirty="0" err="1">
+                          <a:solidFill>
+                            <a:schemeClr val="tx1"/>
+                          </a:solidFill>
+                          <a:latin typeface="+mn-lt"/>
+                          <a:ea typeface="+mn-ea"/>
+                          <a:cs typeface="+mn-cs"/>
+                        </a:rPr>
+                        <a:t>pocos</a:t>
+                      </a:r>
+                      <a:r>
+                        <a:rPr lang="en-GB" sz="1400" kern="1200" dirty="0">
+                          <a:solidFill>
+                            <a:schemeClr val="tx1"/>
+                          </a:solidFill>
+                          <a:latin typeface="+mn-lt"/>
+                          <a:ea typeface="+mn-ea"/>
+                          <a:cs typeface="+mn-cs"/>
+                        </a:rPr>
+                        <a:t> </a:t>
+                      </a:r>
+                      <a:r>
+                        <a:rPr lang="en-GB" sz="1400" kern="1200" dirty="0" err="1">
+                          <a:solidFill>
+                            <a:schemeClr val="tx1"/>
+                          </a:solidFill>
+                          <a:latin typeface="+mn-lt"/>
+                          <a:ea typeface="+mn-ea"/>
+                          <a:cs typeface="+mn-cs"/>
+                        </a:rPr>
+                        <a:t>hilos</a:t>
+                      </a:r>
+                      <a:r>
+                        <a:rPr lang="en-GB" sz="1400" kern="1200" dirty="0">
+                          <a:solidFill>
+                            <a:schemeClr val="tx1"/>
+                          </a:solidFill>
+                          <a:latin typeface="+mn-lt"/>
+                          <a:ea typeface="+mn-ea"/>
+                          <a:cs typeface="+mn-cs"/>
+                        </a:rPr>
+                        <a:t>) </a:t>
+                      </a:r>
+                    </a:p>
+                  </a:txBody>
+                  <a:tcPr/>
+                </a:tc>
+                <a:tc>
+                  <a:txBody>
+                    <a:bodyPr/>
+                    <a:lstStyle/>
+                    <a:p>
+                      <a:pPr marL="0" marR="0" lvl="0" indent="0" algn="l" defTabSz="914400" rtl="0" eaLnBrk="1" fontAlgn="auto" latinLnBrk="0" hangingPunct="1">
+                        <a:lnSpc>
+                          <a:spcPct val="100000"/>
+                        </a:lnSpc>
+                        <a:spcBef>
+                          <a:spcPts val="0"/>
+                        </a:spcBef>
+                        <a:spcAft>
+                          <a:spcPts val="0"/>
+                        </a:spcAft>
+                        <a:buClrTx/>
+                        <a:buSzTx/>
+                        <a:buFontTx/>
+                        <a:buNone/>
+                        <a:tabLst/>
+                        <a:defRPr/>
+                      </a:pPr>
+                      <a:r>
+                        <a:rPr lang="en-GB" sz="1800" kern="1200" dirty="0" err="1">
+                          <a:solidFill>
+                            <a:schemeClr val="tx1"/>
+                          </a:solidFill>
+                          <a:latin typeface="+mn-lt"/>
+                          <a:ea typeface="+mn-ea"/>
+                          <a:cs typeface="+mn-cs"/>
+                        </a:rPr>
+                        <a:t>Ligeros</a:t>
+                      </a:r>
+                      <a:r>
+                        <a:rPr lang="en-GB" sz="1800" kern="1200" dirty="0">
+                          <a:solidFill>
+                            <a:schemeClr val="tx1"/>
+                          </a:solidFill>
+                          <a:latin typeface="+mn-lt"/>
+                          <a:ea typeface="+mn-ea"/>
+                          <a:cs typeface="+mn-cs"/>
+                        </a:rPr>
+                        <a:t> 1KB</a:t>
+                      </a:r>
+                    </a:p>
+                  </a:txBody>
+                  <a:tcPr/>
+                </a:tc>
+                <a:extLst>
+                  <a:ext uri="{0D108BD9-81ED-4DB2-BD59-A6C34878D82A}">
+                    <a16:rowId xmlns:a16="http://schemas.microsoft.com/office/drawing/2014/main" val="3608364609"/>
+                  </a:ext>
+                </a:extLst>
+              </a:tr>
+              <a:tr h="0">
+                <a:tc>
+                  <a:txBody>
+                    <a:bodyPr/>
+                    <a:lstStyle/>
+                    <a:p>
+                      <a:r>
+                        <a:rPr lang="en-GB" sz="1800" kern="1200" dirty="0" err="1">
+                          <a:solidFill>
+                            <a:schemeClr val="tx1"/>
+                          </a:solidFill>
+                          <a:latin typeface="+mn-lt"/>
+                          <a:ea typeface="+mn-ea"/>
+                          <a:cs typeface="+mn-cs"/>
+                        </a:rPr>
+                        <a:t>Peticiones</a:t>
+                      </a:r>
+                      <a:r>
+                        <a:rPr lang="en-GB" sz="1800" kern="1200" dirty="0">
+                          <a:solidFill>
+                            <a:schemeClr val="tx1"/>
+                          </a:solidFill>
+                          <a:latin typeface="+mn-lt"/>
+                          <a:ea typeface="+mn-ea"/>
+                          <a:cs typeface="+mn-cs"/>
+                        </a:rPr>
+                        <a:t> </a:t>
+                      </a:r>
+                      <a:r>
+                        <a:rPr lang="en-GB" sz="1800" kern="1200" dirty="0" err="1">
+                          <a:solidFill>
+                            <a:schemeClr val="tx1"/>
+                          </a:solidFill>
+                          <a:latin typeface="+mn-lt"/>
+                          <a:ea typeface="+mn-ea"/>
+                          <a:cs typeface="+mn-cs"/>
+                        </a:rPr>
+                        <a:t>concurrentes</a:t>
+                      </a:r>
+                      <a:r>
+                        <a:rPr lang="en-GB" sz="1800" kern="1200" dirty="0">
+                          <a:solidFill>
+                            <a:schemeClr val="tx1"/>
+                          </a:solidFill>
+                          <a:latin typeface="+mn-lt"/>
+                          <a:ea typeface="+mn-ea"/>
+                          <a:cs typeface="+mn-cs"/>
+                        </a:rPr>
+                        <a:t> </a:t>
+                      </a:r>
+                      <a:r>
+                        <a:rPr lang="en-GB" sz="1800" kern="1200" dirty="0" err="1">
+                          <a:solidFill>
+                            <a:schemeClr val="tx1"/>
+                          </a:solidFill>
+                          <a:latin typeface="+mn-lt"/>
+                          <a:ea typeface="+mn-ea"/>
+                          <a:cs typeface="+mn-cs"/>
+                        </a:rPr>
+                        <a:t>máx</a:t>
+                      </a:r>
+                      <a:r>
+                        <a:rPr lang="en-GB" sz="1800" kern="1200" dirty="0">
+                          <a:solidFill>
+                            <a:schemeClr val="tx1"/>
+                          </a:solidFill>
+                          <a:latin typeface="+mn-lt"/>
+                          <a:ea typeface="+mn-ea"/>
+                          <a:cs typeface="+mn-cs"/>
+                        </a:rPr>
+                        <a:t> (by default)</a:t>
+                      </a:r>
+                    </a:p>
+                  </a:txBody>
+                  <a:tcPr/>
+                </a:tc>
+                <a:tc>
+                  <a:txBody>
+                    <a:bodyPr/>
+                    <a:lstStyle/>
+                    <a:p>
+                      <a:r>
+                        <a:rPr lang="en-GB" sz="1800" kern="1200" dirty="0">
+                          <a:solidFill>
+                            <a:schemeClr val="tx1"/>
+                          </a:solidFill>
+                          <a:latin typeface="+mn-lt"/>
+                          <a:ea typeface="+mn-ea"/>
+                          <a:cs typeface="+mn-cs"/>
+                        </a:rPr>
+                        <a:t>200 by default</a:t>
+                      </a:r>
+                      <a:br>
+                        <a:rPr lang="en-GB" sz="1800" kern="1200" dirty="0">
+                          <a:solidFill>
+                            <a:schemeClr val="tx1"/>
+                          </a:solidFill>
+                          <a:latin typeface="+mn-lt"/>
+                          <a:ea typeface="+mn-ea"/>
+                          <a:cs typeface="+mn-cs"/>
+                        </a:rPr>
+                      </a:br>
+                      <a:r>
+                        <a:rPr lang="en-GB" sz="1800" kern="1200" dirty="0" err="1">
+                          <a:solidFill>
+                            <a:schemeClr val="tx1"/>
+                          </a:solidFill>
+                          <a:latin typeface="+mn-lt"/>
+                          <a:ea typeface="+mn-ea"/>
+                          <a:cs typeface="+mn-cs"/>
+                        </a:rPr>
+                        <a:t>server.tomcat.threads.max</a:t>
+                      </a:r>
+                      <a:endParaRPr lang="en-GB" sz="1800" kern="1200" dirty="0">
+                        <a:solidFill>
+                          <a:schemeClr val="tx1"/>
+                        </a:solidFill>
+                        <a:latin typeface="+mn-lt"/>
+                        <a:ea typeface="+mn-ea"/>
+                        <a:cs typeface="+mn-cs"/>
+                      </a:endParaRPr>
+                    </a:p>
+                  </a:txBody>
+                  <a:tcPr/>
+                </a:tc>
+                <a:tc>
+                  <a:txBody>
+                    <a:bodyPr/>
+                    <a:lstStyle/>
+                    <a:p>
+                      <a:r>
+                        <a:rPr lang="en-GB" sz="1800" kern="1200" dirty="0" err="1">
+                          <a:solidFill>
+                            <a:schemeClr val="tx1"/>
+                          </a:solidFill>
+                          <a:latin typeface="+mn-lt"/>
+                          <a:ea typeface="+mn-ea"/>
+                          <a:cs typeface="+mn-cs"/>
+                        </a:rPr>
+                        <a:t>Muy</a:t>
+                      </a:r>
+                      <a:r>
+                        <a:rPr lang="en-GB" sz="1800" kern="1200" dirty="0">
+                          <a:solidFill>
+                            <a:schemeClr val="tx1"/>
+                          </a:solidFill>
+                          <a:latin typeface="+mn-lt"/>
+                          <a:ea typeface="+mn-ea"/>
+                          <a:cs typeface="+mn-cs"/>
+                        </a:rPr>
+                        <a:t> alto</a:t>
+                      </a:r>
+                    </a:p>
+                  </a:txBody>
+                  <a:tcPr/>
+                </a:tc>
+                <a:tc>
+                  <a:txBody>
+                    <a:bodyPr/>
+                    <a:lstStyle/>
+                    <a:p>
+                      <a:r>
+                        <a:rPr lang="en-GB" sz="1800" kern="1200">
+                          <a:solidFill>
+                            <a:schemeClr val="tx1"/>
+                          </a:solidFill>
+                          <a:latin typeface="+mn-lt"/>
+                          <a:ea typeface="+mn-ea"/>
+                          <a:cs typeface="+mn-cs"/>
+                        </a:rPr>
+                        <a:t>+10.000</a:t>
+                      </a:r>
+                      <a:endParaRPr lang="en-GB" sz="1800" kern="1200" dirty="0">
+                        <a:solidFill>
+                          <a:schemeClr val="tx1"/>
+                        </a:solidFill>
+                        <a:latin typeface="+mn-lt"/>
+                        <a:ea typeface="+mn-ea"/>
+                        <a:cs typeface="+mn-cs"/>
+                      </a:endParaRPr>
+                    </a:p>
+                  </a:txBody>
+                  <a:tcPr/>
+                </a:tc>
+                <a:extLst>
+                  <a:ext uri="{0D108BD9-81ED-4DB2-BD59-A6C34878D82A}">
+                    <a16:rowId xmlns:a16="http://schemas.microsoft.com/office/drawing/2014/main" val="3666212560"/>
+                  </a:ext>
+                </a:extLst>
+              </a:tr>
+              <a:tr h="0">
+                <a:tc>
+                  <a:txBody>
+                    <a:bodyPr/>
+                    <a:lstStyle/>
+                    <a:p>
+                      <a:r>
+                        <a:rPr lang="en-GB" sz="1800" kern="1200" dirty="0">
+                          <a:solidFill>
+                            <a:schemeClr val="tx1"/>
+                          </a:solidFill>
+                          <a:latin typeface="+mn-lt"/>
+                          <a:ea typeface="+mn-ea"/>
+                          <a:cs typeface="+mn-cs"/>
+                        </a:rPr>
+                        <a:t>Spring config</a:t>
+                      </a:r>
+                    </a:p>
+                  </a:txBody>
+                  <a:tcPr/>
+                </a:tc>
+                <a:tc>
+                  <a:txBody>
+                    <a:bodyPr/>
+                    <a:lstStyle/>
+                    <a:p>
+                      <a:r>
+                        <a:rPr lang="en-GB" sz="1800" kern="1200" dirty="0">
+                          <a:solidFill>
+                            <a:schemeClr val="tx1"/>
+                          </a:solidFill>
+                          <a:latin typeface="+mn-lt"/>
+                          <a:ea typeface="+mn-ea"/>
+                          <a:cs typeface="+mn-cs"/>
+                        </a:rPr>
+                        <a:t>default</a:t>
+                      </a:r>
+                    </a:p>
+                  </a:txBody>
+                  <a:tcPr/>
+                </a:tc>
+                <a:tc>
+                  <a:txBody>
+                    <a:bodyPr/>
+                    <a:lstStyle/>
+                    <a:p>
+                      <a:r>
+                        <a:rPr lang="en-GB" sz="1800" kern="1200" dirty="0" err="1">
+                          <a:solidFill>
+                            <a:schemeClr val="tx1"/>
+                          </a:solidFill>
+                          <a:latin typeface="+mn-lt"/>
+                          <a:ea typeface="+mn-ea"/>
+                          <a:cs typeface="+mn-cs"/>
+                        </a:rPr>
+                        <a:t>spring.threads.virtual.enabled</a:t>
+                      </a:r>
+                      <a:r>
+                        <a:rPr lang="en-GB" sz="1800" kern="1200" dirty="0">
+                          <a:solidFill>
+                            <a:schemeClr val="tx1"/>
+                          </a:solidFill>
+                          <a:latin typeface="+mn-lt"/>
+                          <a:ea typeface="+mn-ea"/>
+                          <a:cs typeface="+mn-cs"/>
+                        </a:rPr>
+                        <a:t>: true</a:t>
+                      </a:r>
+                    </a:p>
+                  </a:txBody>
+                  <a:tcPr/>
+                </a:tc>
+                <a:tc>
+                  <a:txBody>
+                    <a:bodyPr/>
+                    <a:lstStyle/>
+                    <a:p>
+                      <a:pPr marL="0" marR="0" lvl="0" indent="0" algn="l" defTabSz="914400" rtl="0" eaLnBrk="1" fontAlgn="auto" latinLnBrk="0" hangingPunct="1">
+                        <a:lnSpc>
+                          <a:spcPct val="100000"/>
+                        </a:lnSpc>
+                        <a:spcBef>
+                          <a:spcPts val="0"/>
+                        </a:spcBef>
+                        <a:spcAft>
+                          <a:spcPts val="0"/>
+                        </a:spcAft>
+                        <a:buClrTx/>
+                        <a:buSzTx/>
+                        <a:buFontTx/>
+                        <a:buNone/>
+                        <a:tabLst/>
+                        <a:defRPr/>
+                      </a:pPr>
+                      <a:r>
+                        <a:rPr lang="en-GB" sz="1800" kern="1200" dirty="0">
+                          <a:solidFill>
+                            <a:schemeClr val="tx1"/>
+                          </a:solidFill>
+                          <a:latin typeface="+mn-lt"/>
+                          <a:ea typeface="+mn-ea"/>
+                          <a:cs typeface="+mn-cs"/>
+                        </a:rPr>
+                        <a:t>spring-boot-starter-</a:t>
+                      </a:r>
+                      <a:r>
+                        <a:rPr lang="en-GB" sz="1800" kern="1200" dirty="0" err="1">
+                          <a:solidFill>
+                            <a:schemeClr val="tx1"/>
+                          </a:solidFill>
+                          <a:latin typeface="+mn-lt"/>
+                          <a:ea typeface="+mn-ea"/>
+                          <a:cs typeface="+mn-cs"/>
+                        </a:rPr>
+                        <a:t>webflux</a:t>
+                      </a:r>
+                      <a:endParaRPr lang="en-GB" sz="1800" kern="1200" dirty="0">
+                        <a:solidFill>
+                          <a:schemeClr val="tx1"/>
+                        </a:solidFill>
+                        <a:latin typeface="+mn-lt"/>
+                        <a:ea typeface="+mn-ea"/>
+                        <a:cs typeface="+mn-cs"/>
+                      </a:endParaRPr>
+                    </a:p>
+                  </a:txBody>
+                  <a:tcPr/>
+                </a:tc>
+                <a:extLst>
+                  <a:ext uri="{0D108BD9-81ED-4DB2-BD59-A6C34878D82A}">
+                    <a16:rowId xmlns:a16="http://schemas.microsoft.com/office/drawing/2014/main" val="2605827817"/>
+                  </a:ext>
+                </a:extLst>
+              </a:tr>
+              <a:tr h="0">
+                <a:tc>
+                  <a:txBody>
+                    <a:bodyPr/>
+                    <a:lstStyle/>
+                    <a:p>
+                      <a:r>
+                        <a:rPr lang="en-GB" sz="1800" kern="1200" dirty="0" err="1">
+                          <a:solidFill>
+                            <a:schemeClr val="tx1"/>
+                          </a:solidFill>
+                          <a:latin typeface="+mn-lt"/>
+                          <a:ea typeface="+mn-ea"/>
+                          <a:cs typeface="+mn-cs"/>
+                        </a:rPr>
+                        <a:t>Estilo</a:t>
+                      </a:r>
+                      <a:r>
+                        <a:rPr lang="en-GB" sz="1800" kern="1200" dirty="0">
+                          <a:solidFill>
+                            <a:schemeClr val="tx1"/>
+                          </a:solidFill>
+                          <a:latin typeface="+mn-lt"/>
+                          <a:ea typeface="+mn-ea"/>
+                          <a:cs typeface="+mn-cs"/>
+                        </a:rPr>
+                        <a:t> de </a:t>
+                      </a:r>
+                      <a:r>
+                        <a:rPr lang="en-GB" sz="1800" kern="1200" dirty="0" err="1">
+                          <a:solidFill>
+                            <a:schemeClr val="tx1"/>
+                          </a:solidFill>
+                          <a:latin typeface="+mn-lt"/>
+                          <a:ea typeface="+mn-ea"/>
+                          <a:cs typeface="+mn-cs"/>
+                        </a:rPr>
+                        <a:t>codificación</a:t>
+                      </a:r>
+                      <a:endParaRPr lang="en-GB" sz="1800" kern="1200" dirty="0">
+                        <a:solidFill>
+                          <a:schemeClr val="tx1"/>
+                        </a:solidFill>
+                        <a:latin typeface="+mn-lt"/>
+                        <a:ea typeface="+mn-ea"/>
+                        <a:cs typeface="+mn-cs"/>
+                      </a:endParaRPr>
+                    </a:p>
+                  </a:txBody>
+                  <a:tcPr/>
+                </a:tc>
+                <a:tc>
+                  <a:txBody>
+                    <a:bodyPr/>
+                    <a:lstStyle/>
+                    <a:p>
+                      <a:endParaRPr lang="en-GB" sz="1800" kern="1200" dirty="0">
+                        <a:solidFill>
+                          <a:schemeClr val="tx1"/>
+                        </a:solidFill>
+                        <a:latin typeface="+mn-lt"/>
+                        <a:ea typeface="+mn-ea"/>
+                        <a:cs typeface="+mn-cs"/>
+                      </a:endParaRPr>
+                    </a:p>
+                  </a:txBody>
+                  <a:tcPr/>
+                </a:tc>
+                <a:tc>
+                  <a:txBody>
+                    <a:bodyPr/>
+                    <a:lstStyle/>
+                    <a:p>
+                      <a:r>
+                        <a:rPr lang="en-GB" sz="1800" kern="1200" dirty="0" err="1">
+                          <a:solidFill>
+                            <a:schemeClr val="tx1"/>
+                          </a:solidFill>
+                          <a:latin typeface="+mn-lt"/>
+                          <a:ea typeface="+mn-ea"/>
+                          <a:cs typeface="+mn-cs"/>
+                        </a:rPr>
+                        <a:t>Reactiva</a:t>
+                      </a:r>
+                      <a:r>
+                        <a:rPr lang="en-GB" sz="1800" kern="1200" dirty="0">
+                          <a:solidFill>
+                            <a:schemeClr val="tx1"/>
+                          </a:solidFill>
+                          <a:latin typeface="+mn-lt"/>
+                          <a:ea typeface="+mn-ea"/>
+                          <a:cs typeface="+mn-cs"/>
+                        </a:rPr>
+                        <a:t> (Mono / flux) </a:t>
+                      </a:r>
+                    </a:p>
+                  </a:txBody>
+                  <a:tcPr/>
+                </a:tc>
+                <a:tc>
+                  <a:txBody>
+                    <a:bodyPr/>
+                    <a:lstStyle/>
+                    <a:p>
+                      <a:r>
+                        <a:rPr lang="en-GB" sz="1800" kern="1200" dirty="0">
+                          <a:solidFill>
+                            <a:schemeClr val="tx1"/>
+                          </a:solidFill>
+                          <a:latin typeface="+mn-lt"/>
+                          <a:ea typeface="+mn-ea"/>
+                          <a:cs typeface="+mn-cs"/>
+                        </a:rPr>
+                        <a:t>Idem to Platform Threads</a:t>
+                      </a:r>
+                    </a:p>
+                  </a:txBody>
+                  <a:tcPr/>
+                </a:tc>
+                <a:extLst>
+                  <a:ext uri="{0D108BD9-81ED-4DB2-BD59-A6C34878D82A}">
+                    <a16:rowId xmlns:a16="http://schemas.microsoft.com/office/drawing/2014/main" val="1237937234"/>
+                  </a:ext>
+                </a:extLst>
+              </a:tr>
+            </a:tbl>
+          </a:graphicData>
+        </a:graphic>
+      </p:graphicFrame>
+    </p:spTree>
+    <p:extLst>
+      <p:ext uri="{BB962C8B-B14F-4D97-AF65-F5344CB8AC3E}">
+        <p14:creationId xmlns:p14="http://schemas.microsoft.com/office/powerpoint/2010/main" val="3397801922"/>
+      </p:ext>
+    </p:extLst>
+  </p:cSld>
+  <p:clrMapOvr>
+    <a:masterClrMapping/>
+  </p:clrMapOvr>
+</p:sld>
+</file>
+
+<file path=ppt/slides/slide5.xml><?xml version="1.0" encoding="utf-8"?>
+<p:sld xmlns:a="http://schemas.openxmlformats.org/drawingml/2006/main" xmlns:r="http://schemas.openxmlformats.org/officeDocument/2006/relationships" xmlns:p="http://schemas.openxmlformats.org/presentationml/2006/main">
+  <p:cSld>
+    <p:spTree>
+      <p:nvGrpSpPr>
+        <p:cNvPr id="1" name=""/>
+        <p:cNvGrpSpPr/>
+        <p:nvPr/>
+      </p:nvGrpSpPr>
+      <p:grpSpPr>
+        <a:xfrm>
+          <a:off x="0" y="0"/>
+          <a:ext cx="0" cy="0"/>
+          <a:chOff x="0" y="0"/>
+          <a:chExt cx="0" cy="0"/>
+        </a:xfrm>
+      </p:grpSpPr>
+      <p:graphicFrame>
+        <p:nvGraphicFramePr>
+          <p:cNvPr id="2" name="Table 1">
+            <a:extLst>
+              <a:ext uri="{FF2B5EF4-FFF2-40B4-BE49-F238E27FC236}">
+                <a16:creationId xmlns:a16="http://schemas.microsoft.com/office/drawing/2014/main" id="{1F49BF1B-102F-E941-B531-70A333F19E68}"/>
+              </a:ext>
+            </a:extLst>
+          </p:cNvPr>
+          <p:cNvGraphicFramePr>
+            <a:graphicFrameLocks noGrp="1"/>
+          </p:cNvGraphicFramePr>
+          <p:nvPr>
+            <p:extLst>
+              <p:ext uri="{D42A27DB-BD31-4B8C-83A1-F6EECF244321}">
+                <p14:modId xmlns:p14="http://schemas.microsoft.com/office/powerpoint/2010/main" val="900880739"/>
+              </p:ext>
+            </p:extLst>
+          </p:nvPr>
+        </p:nvGraphicFramePr>
+        <p:xfrm>
+          <a:off x="393538" y="296984"/>
+          <a:ext cx="11528387" cy="6342877"/>
+        </p:xfrm>
+        <a:graphic>
+          <a:graphicData uri="http://schemas.openxmlformats.org/drawingml/2006/table">
+            <a:tbl>
+              <a:tblPr/>
+              <a:tblGrid>
+                <a:gridCol w="2108224">
+                  <a:extLst>
+                    <a:ext uri="{9D8B030D-6E8A-4147-A177-3AD203B41FA5}">
+                      <a16:colId xmlns:a16="http://schemas.microsoft.com/office/drawing/2014/main" val="1605800137"/>
+                    </a:ext>
+                  </a:extLst>
+                </a:gridCol>
+                <a:gridCol w="1734571">
+                  <a:extLst>
+                    <a:ext uri="{9D8B030D-6E8A-4147-A177-3AD203B41FA5}">
+                      <a16:colId xmlns:a16="http://schemas.microsoft.com/office/drawing/2014/main" val="3187434922"/>
+                    </a:ext>
+                  </a:extLst>
+                </a:gridCol>
+                <a:gridCol w="1921398">
+                  <a:extLst>
+                    <a:ext uri="{9D8B030D-6E8A-4147-A177-3AD203B41FA5}">
+                      <a16:colId xmlns:a16="http://schemas.microsoft.com/office/drawing/2014/main" val="3881011170"/>
+                    </a:ext>
+                  </a:extLst>
+                </a:gridCol>
+                <a:gridCol w="1921398">
+                  <a:extLst>
+                    <a:ext uri="{9D8B030D-6E8A-4147-A177-3AD203B41FA5}">
+                      <a16:colId xmlns:a16="http://schemas.microsoft.com/office/drawing/2014/main" val="1225338171"/>
+                    </a:ext>
+                  </a:extLst>
+                </a:gridCol>
+                <a:gridCol w="1921398">
+                  <a:extLst>
+                    <a:ext uri="{9D8B030D-6E8A-4147-A177-3AD203B41FA5}">
+                      <a16:colId xmlns:a16="http://schemas.microsoft.com/office/drawing/2014/main" val="35211570"/>
+                    </a:ext>
+                  </a:extLst>
+                </a:gridCol>
+                <a:gridCol w="1921398">
+                  <a:extLst>
+                    <a:ext uri="{9D8B030D-6E8A-4147-A177-3AD203B41FA5}">
+                      <a16:colId xmlns:a16="http://schemas.microsoft.com/office/drawing/2014/main" val="2602136704"/>
+                    </a:ext>
+                  </a:extLst>
+                </a:gridCol>
+              </a:tblGrid>
+              <a:tr h="324298">
+                <a:tc>
+                  <a:txBody>
+                    <a:bodyPr/>
+                    <a:lstStyle/>
+                    <a:p>
+                      <a:r>
+                        <a:rPr lang="es-ES" sz="1400" b="1" dirty="0"/>
+                        <a:t>Métrica</a:t>
+                      </a:r>
+                    </a:p>
+                  </a:txBody>
+                  <a:tcPr marL="32473" marR="32473" marT="16236" marB="16236" anchor="ctr">
+                    <a:lnL>
+                      <a:noFill/>
+                    </a:lnL>
+                    <a:lnR>
+                      <a:noFill/>
+                    </a:lnR>
+                    <a:lnT>
+                      <a:noFill/>
+                    </a:lnT>
+                    <a:lnB>
+                      <a:noFill/>
+                    </a:lnB>
+                  </a:tcPr>
+                </a:tc>
+                <a:tc>
+                  <a:txBody>
+                    <a:bodyPr/>
+                    <a:lstStyle/>
+                    <a:p>
+                      <a:r>
+                        <a:rPr lang="es-ES" sz="1400" b="1" dirty="0"/>
+                        <a:t>Significado</a:t>
+                      </a:r>
+                    </a:p>
+                  </a:txBody>
+                  <a:tcPr marL="32473" marR="32473" marT="16236" marB="16236" anchor="ctr">
+                    <a:lnL>
+                      <a:noFill/>
+                    </a:lnL>
+                    <a:lnR>
+                      <a:noFill/>
+                    </a:lnR>
+                    <a:lnT>
+                      <a:noFill/>
+                    </a:lnT>
+                    <a:lnB>
+                      <a:noFill/>
+                    </a:lnB>
+                  </a:tcPr>
+                </a:tc>
+                <a:tc>
+                  <a:txBody>
+                    <a:bodyPr/>
+                    <a:lstStyle/>
+                    <a:p>
+                      <a:r>
+                        <a:rPr lang="es-ES" sz="1400" b="1" dirty="0" err="1"/>
+                        <a:t>Platform</a:t>
+                      </a:r>
+                      <a:r>
+                        <a:rPr lang="es-ES" sz="1400" b="1" dirty="0"/>
+                        <a:t> </a:t>
+                      </a:r>
+                      <a:r>
+                        <a:rPr lang="es-ES" sz="1400" b="1" dirty="0" err="1"/>
+                        <a:t>Threads</a:t>
+                      </a:r>
+                      <a:endParaRPr lang="es-ES" sz="1400" b="1" dirty="0"/>
+                    </a:p>
+                  </a:txBody>
+                  <a:tcPr marL="32473" marR="32473" marT="16236" marB="16236" anchor="ctr">
+                    <a:lnL>
+                      <a:noFill/>
+                    </a:lnL>
+                    <a:lnR>
+                      <a:noFill/>
+                    </a:lnR>
+                    <a:lnT>
+                      <a:noFill/>
+                    </a:lnT>
+                    <a:lnB>
+                      <a:noFill/>
+                    </a:lnB>
+                  </a:tcPr>
+                </a:tc>
+                <a:tc>
+                  <a:txBody>
+                    <a:bodyPr/>
+                    <a:lstStyle/>
+                    <a:p>
+                      <a:r>
+                        <a:rPr lang="es-ES" sz="1400" b="1" dirty="0"/>
+                        <a:t>Reactive</a:t>
+                      </a:r>
+                    </a:p>
+                  </a:txBody>
+                  <a:tcPr marL="32473" marR="32473" marT="16236" marB="16236" anchor="ctr">
+                    <a:lnL>
+                      <a:noFill/>
+                    </a:lnL>
+                    <a:lnR>
+                      <a:noFill/>
+                    </a:lnR>
+                    <a:lnT>
+                      <a:noFill/>
+                    </a:lnT>
+                    <a:lnB>
+                      <a:noFill/>
+                    </a:lnB>
+                  </a:tcPr>
+                </a:tc>
+                <a:tc>
+                  <a:txBody>
+                    <a:bodyPr/>
+                    <a:lstStyle/>
+                    <a:p>
+                      <a:r>
+                        <a:rPr lang="es-ES" sz="1400" b="1" dirty="0"/>
+                        <a:t>Virtual </a:t>
+                      </a:r>
+                      <a:r>
+                        <a:rPr lang="es-ES" sz="1400" b="1" dirty="0" err="1"/>
+                        <a:t>Threads</a:t>
+                      </a:r>
+                      <a:endParaRPr lang="es-ES" sz="1400" b="1" dirty="0"/>
+                    </a:p>
+                  </a:txBody>
+                  <a:tcPr marL="32473" marR="32473" marT="16236" marB="16236" anchor="ctr">
+                    <a:lnL>
+                      <a:noFill/>
+                    </a:lnL>
+                    <a:lnR>
+                      <a:noFill/>
+                    </a:lnR>
+                    <a:lnT>
+                      <a:noFill/>
+                    </a:lnT>
+                    <a:lnB>
+                      <a:noFill/>
+                    </a:lnB>
+                  </a:tcPr>
+                </a:tc>
+                <a:tc>
+                  <a:txBody>
+                    <a:bodyPr/>
+                    <a:lstStyle/>
+                    <a:p>
+                      <a:r>
+                        <a:rPr lang="es-ES" sz="1400" b="1" dirty="0"/>
+                        <a:t>¿Por qué es clave mostrarlo?</a:t>
+                      </a:r>
+                    </a:p>
+                  </a:txBody>
+                  <a:tcPr marL="32473" marR="32473" marT="16236" marB="16236" anchor="ctr">
+                    <a:lnL>
+                      <a:noFill/>
+                    </a:lnL>
+                    <a:lnR>
+                      <a:noFill/>
+                    </a:lnR>
+                    <a:lnT>
+                      <a:noFill/>
+                    </a:lnT>
+                    <a:lnB>
+                      <a:noFill/>
+                    </a:lnB>
+                  </a:tcPr>
+                </a:tc>
+                <a:extLst>
+                  <a:ext uri="{0D108BD9-81ED-4DB2-BD59-A6C34878D82A}">
+                    <a16:rowId xmlns:a16="http://schemas.microsoft.com/office/drawing/2014/main" val="3588695786"/>
+                  </a:ext>
+                </a:extLst>
+              </a:tr>
+              <a:tr h="602267">
+                <a:tc>
+                  <a:txBody>
+                    <a:bodyPr/>
+                    <a:lstStyle/>
+                    <a:p>
+                      <a:r>
+                        <a:rPr lang="es-ES" sz="1100" dirty="0" err="1"/>
+                        <a:t>jvm_threads_live_threads</a:t>
+                      </a:r>
+                      <a:endParaRPr lang="es-ES" sz="1100" dirty="0"/>
+                    </a:p>
+                  </a:txBody>
+                  <a:tcPr marL="32473" marR="32473" marT="16236" marB="16236" anchor="ctr">
+                    <a:lnL>
+                      <a:noFill/>
+                    </a:lnL>
+                    <a:lnR>
+                      <a:noFill/>
+                    </a:lnR>
+                    <a:lnT>
+                      <a:noFill/>
+                    </a:lnT>
+                    <a:lnB>
+                      <a:noFill/>
+                    </a:lnB>
+                  </a:tcPr>
+                </a:tc>
+                <a:tc>
+                  <a:txBody>
+                    <a:bodyPr/>
+                    <a:lstStyle/>
+                    <a:p>
+                      <a:r>
+                        <a:rPr lang="es-ES" sz="1100"/>
+                        <a:t>Hilos OS vivos</a:t>
+                      </a:r>
+                    </a:p>
+                  </a:txBody>
+                  <a:tcPr marL="32473" marR="32473" marT="16236" marB="16236" anchor="ctr">
+                    <a:lnL>
+                      <a:noFill/>
+                    </a:lnL>
+                    <a:lnR>
+                      <a:noFill/>
+                    </a:lnR>
+                    <a:lnT>
+                      <a:noFill/>
+                    </a:lnT>
+                    <a:lnB>
+                      <a:noFill/>
+                    </a:lnB>
+                  </a:tcPr>
+                </a:tc>
+                <a:tc>
+                  <a:txBody>
+                    <a:bodyPr/>
+                    <a:lstStyle/>
+                    <a:p>
+                      <a:r>
+                        <a:rPr lang="es-ES" sz="1100" dirty="0"/>
+                        <a:t>200 (pool fijo)</a:t>
+                      </a:r>
+                    </a:p>
+                  </a:txBody>
+                  <a:tcPr marL="32473" marR="32473" marT="16236" marB="16236" anchor="ctr">
+                    <a:lnL>
+                      <a:noFill/>
+                    </a:lnL>
+                    <a:lnR>
+                      <a:noFill/>
+                    </a:lnR>
+                    <a:lnT>
+                      <a:noFill/>
+                    </a:lnT>
+                    <a:lnB>
+                      <a:noFill/>
+                    </a:lnB>
+                  </a:tcPr>
+                </a:tc>
+                <a:tc>
+                  <a:txBody>
+                    <a:bodyPr/>
+                    <a:lstStyle/>
+                    <a:p>
+                      <a:r>
+                        <a:rPr lang="es-ES" sz="1100"/>
+                        <a:t>4-8 (event loop)</a:t>
+                      </a:r>
+                    </a:p>
+                  </a:txBody>
+                  <a:tcPr marL="32473" marR="32473" marT="16236" marB="16236" anchor="ctr">
+                    <a:lnL>
+                      <a:noFill/>
+                    </a:lnL>
+                    <a:lnR>
+                      <a:noFill/>
+                    </a:lnR>
+                    <a:lnT>
+                      <a:noFill/>
+                    </a:lnT>
+                    <a:lnB>
+                      <a:noFill/>
+                    </a:lnB>
+                  </a:tcPr>
+                </a:tc>
+                <a:tc>
+                  <a:txBody>
+                    <a:bodyPr/>
+                    <a:lstStyle/>
+                    <a:p>
+                      <a:r>
+                        <a:rPr lang="es-ES" sz="1100"/>
+                        <a:t>Miles (1 por tarea)</a:t>
+                      </a:r>
+                    </a:p>
+                  </a:txBody>
+                  <a:tcPr marL="32473" marR="32473" marT="16236" marB="16236" anchor="ctr">
+                    <a:lnL>
+                      <a:noFill/>
+                    </a:lnL>
+                    <a:lnR>
+                      <a:noFill/>
+                    </a:lnR>
+                    <a:lnT>
+                      <a:noFill/>
+                    </a:lnT>
+                    <a:lnB>
+                      <a:noFill/>
+                    </a:lnB>
+                  </a:tcPr>
+                </a:tc>
+                <a:tc>
+                  <a:txBody>
+                    <a:bodyPr/>
+                    <a:lstStyle/>
+                    <a:p>
+                      <a:r>
+                        <a:rPr lang="es-ES" sz="1100"/>
+                        <a:t>Los VT son baratos: crear miles no paraliza el OS</a:t>
+                      </a:r>
+                    </a:p>
+                  </a:txBody>
+                  <a:tcPr marL="32473" marR="32473" marT="16236" marB="16236" anchor="ctr">
+                    <a:lnL>
+                      <a:noFill/>
+                    </a:lnL>
+                    <a:lnR>
+                      <a:noFill/>
+                    </a:lnR>
+                    <a:lnT>
+                      <a:noFill/>
+                    </a:lnT>
+                    <a:lnB>
+                      <a:noFill/>
+                    </a:lnB>
+                  </a:tcPr>
+                </a:tc>
+                <a:extLst>
+                  <a:ext uri="{0D108BD9-81ED-4DB2-BD59-A6C34878D82A}">
+                    <a16:rowId xmlns:a16="http://schemas.microsoft.com/office/drawing/2014/main" val="2538288124"/>
+                  </a:ext>
+                </a:extLst>
+              </a:tr>
+              <a:tr h="602267">
+                <a:tc>
+                  <a:txBody>
+                    <a:bodyPr/>
+                    <a:lstStyle/>
+                    <a:p>
+                      <a:r>
+                        <a:rPr lang="es-ES" sz="1100"/>
+                        <a:t>jvm_threads_states_threads{state="blocked"}</a:t>
+                      </a:r>
+                    </a:p>
+                  </a:txBody>
+                  <a:tcPr marL="32473" marR="32473" marT="16236" marB="16236" anchor="ctr">
+                    <a:lnL>
+                      <a:noFill/>
+                    </a:lnL>
+                    <a:lnR>
+                      <a:noFill/>
+                    </a:lnR>
+                    <a:lnT>
+                      <a:noFill/>
+                    </a:lnT>
+                    <a:lnB>
+                      <a:noFill/>
+                    </a:lnB>
+                  </a:tcPr>
+                </a:tc>
+                <a:tc>
+                  <a:txBody>
+                    <a:bodyPr/>
+                    <a:lstStyle/>
+                    <a:p>
+                      <a:r>
+                        <a:rPr lang="es-ES" sz="1100"/>
+                        <a:t>Hilos bloqueados en I/O</a:t>
+                      </a:r>
+                    </a:p>
+                  </a:txBody>
+                  <a:tcPr marL="32473" marR="32473" marT="16236" marB="16236" anchor="ctr">
+                    <a:lnL>
+                      <a:noFill/>
+                    </a:lnL>
+                    <a:lnR>
+                      <a:noFill/>
+                    </a:lnR>
+                    <a:lnT>
+                      <a:noFill/>
+                    </a:lnT>
+                    <a:lnB>
+                      <a:noFill/>
+                    </a:lnB>
+                  </a:tcPr>
+                </a:tc>
+                <a:tc>
+                  <a:txBody>
+                    <a:bodyPr/>
+                    <a:lstStyle/>
+                    <a:p>
+                      <a:r>
+                        <a:rPr lang="es-ES" sz="1100"/>
+                        <a:t>MUCHOS</a:t>
+                      </a:r>
+                    </a:p>
+                  </a:txBody>
+                  <a:tcPr marL="32473" marR="32473" marT="16236" marB="16236" anchor="ctr">
+                    <a:lnL>
+                      <a:noFill/>
+                    </a:lnL>
+                    <a:lnR>
+                      <a:noFill/>
+                    </a:lnR>
+                    <a:lnT>
+                      <a:noFill/>
+                    </a:lnT>
+                    <a:lnB>
+                      <a:noFill/>
+                    </a:lnB>
+                  </a:tcPr>
+                </a:tc>
+                <a:tc>
+                  <a:txBody>
+                    <a:bodyPr/>
+                    <a:lstStyle/>
+                    <a:p>
+                      <a:r>
+                        <a:rPr lang="es-ES" sz="1100"/>
+                        <a:t>~0</a:t>
+                      </a:r>
+                    </a:p>
+                  </a:txBody>
+                  <a:tcPr marL="32473" marR="32473" marT="16236" marB="16236" anchor="ctr">
+                    <a:lnL>
+                      <a:noFill/>
+                    </a:lnL>
+                    <a:lnR>
+                      <a:noFill/>
+                    </a:lnR>
+                    <a:lnT>
+                      <a:noFill/>
+                    </a:lnT>
+                    <a:lnB>
+                      <a:noFill/>
+                    </a:lnB>
+                  </a:tcPr>
+                </a:tc>
+                <a:tc>
+                  <a:txBody>
+                    <a:bodyPr/>
+                    <a:lstStyle/>
+                    <a:p>
+                      <a:r>
+                        <a:rPr lang="es-ES" sz="1100"/>
+                        <a:t>~0 (se desmontan del carrier)</a:t>
+                      </a:r>
+                    </a:p>
+                  </a:txBody>
+                  <a:tcPr marL="32473" marR="32473" marT="16236" marB="16236" anchor="ctr">
+                    <a:lnL>
+                      <a:noFill/>
+                    </a:lnL>
+                    <a:lnR>
+                      <a:noFill/>
+                    </a:lnR>
+                    <a:lnT>
+                      <a:noFill/>
+                    </a:lnT>
+                    <a:lnB>
+                      <a:noFill/>
+                    </a:lnB>
+                  </a:tcPr>
+                </a:tc>
+                <a:tc>
+                  <a:txBody>
+                    <a:bodyPr/>
+                    <a:lstStyle/>
+                    <a:p>
+                      <a:r>
+                        <a:rPr lang="es-ES" sz="1100"/>
+                        <a:t>VT liberan el hilo OS al bloquearse (park), platform threads no</a:t>
+                      </a:r>
+                    </a:p>
+                  </a:txBody>
+                  <a:tcPr marL="32473" marR="32473" marT="16236" marB="16236" anchor="ctr">
+                    <a:lnL>
+                      <a:noFill/>
+                    </a:lnL>
+                    <a:lnR>
+                      <a:noFill/>
+                    </a:lnR>
+                    <a:lnT>
+                      <a:noFill/>
+                    </a:lnT>
+                    <a:lnB>
+                      <a:noFill/>
+                    </a:lnB>
+                  </a:tcPr>
+                </a:tc>
+                <a:extLst>
+                  <a:ext uri="{0D108BD9-81ED-4DB2-BD59-A6C34878D82A}">
+                    <a16:rowId xmlns:a16="http://schemas.microsoft.com/office/drawing/2014/main" val="1872458917"/>
+                  </a:ext>
+                </a:extLst>
+              </a:tr>
+              <a:tr h="602267">
+                <a:tc>
+                  <a:txBody>
+                    <a:bodyPr/>
+                    <a:lstStyle/>
+                    <a:p>
+                      <a:r>
+                        <a:rPr lang="es-ES" sz="1100"/>
+                        <a:t>jvm_threads_states_threads{state="waiting"}</a:t>
+                      </a:r>
+                    </a:p>
+                  </a:txBody>
+                  <a:tcPr marL="32473" marR="32473" marT="16236" marB="16236" anchor="ctr">
+                    <a:lnL>
+                      <a:noFill/>
+                    </a:lnL>
+                    <a:lnR>
+                      <a:noFill/>
+                    </a:lnR>
+                    <a:lnT>
+                      <a:noFill/>
+                    </a:lnT>
+                    <a:lnB>
+                      <a:noFill/>
+                    </a:lnB>
+                  </a:tcPr>
+                </a:tc>
+                <a:tc>
+                  <a:txBody>
+                    <a:bodyPr/>
+                    <a:lstStyle/>
+                    <a:p>
+                      <a:r>
+                        <a:rPr lang="es-ES" sz="1100"/>
+                        <a:t>Hilos esperando</a:t>
+                      </a:r>
+                    </a:p>
+                  </a:txBody>
+                  <a:tcPr marL="32473" marR="32473" marT="16236" marB="16236" anchor="ctr">
+                    <a:lnL>
+                      <a:noFill/>
+                    </a:lnL>
+                    <a:lnR>
+                      <a:noFill/>
+                    </a:lnR>
+                    <a:lnT>
+                      <a:noFill/>
+                    </a:lnT>
+                    <a:lnB>
+                      <a:noFill/>
+                    </a:lnB>
+                  </a:tcPr>
+                </a:tc>
+                <a:tc>
+                  <a:txBody>
+                    <a:bodyPr/>
+                    <a:lstStyle/>
+                    <a:p>
+                      <a:r>
+                        <a:rPr lang="es-ES" sz="1100"/>
+                        <a:t>Altos en saturación</a:t>
+                      </a:r>
+                    </a:p>
+                  </a:txBody>
+                  <a:tcPr marL="32473" marR="32473" marT="16236" marB="16236" anchor="ctr">
+                    <a:lnL>
+                      <a:noFill/>
+                    </a:lnL>
+                    <a:lnR>
+                      <a:noFill/>
+                    </a:lnR>
+                    <a:lnT>
+                      <a:noFill/>
+                    </a:lnT>
+                    <a:lnB>
+                      <a:noFill/>
+                    </a:lnB>
+                  </a:tcPr>
+                </a:tc>
+                <a:tc>
+                  <a:txBody>
+                    <a:bodyPr/>
+                    <a:lstStyle/>
+                    <a:p>
+                      <a:r>
+                        <a:rPr lang="es-ES" sz="1100"/>
+                        <a:t>Bajos</a:t>
+                      </a:r>
+                    </a:p>
+                  </a:txBody>
+                  <a:tcPr marL="32473" marR="32473" marT="16236" marB="16236" anchor="ctr">
+                    <a:lnL>
+                      <a:noFill/>
+                    </a:lnL>
+                    <a:lnR>
+                      <a:noFill/>
+                    </a:lnR>
+                    <a:lnT>
+                      <a:noFill/>
+                    </a:lnT>
+                    <a:lnB>
+                      <a:noFill/>
+                    </a:lnB>
+                  </a:tcPr>
+                </a:tc>
+                <a:tc>
+                  <a:txBody>
+                    <a:bodyPr/>
+                    <a:lstStyle/>
+                    <a:p>
+                      <a:r>
+                        <a:rPr lang="es-ES" sz="1100"/>
+                        <a:t>Bajos</a:t>
+                      </a:r>
+                    </a:p>
+                  </a:txBody>
+                  <a:tcPr marL="32473" marR="32473" marT="16236" marB="16236" anchor="ctr">
+                    <a:lnL>
+                      <a:noFill/>
+                    </a:lnL>
+                    <a:lnR>
+                      <a:noFill/>
+                    </a:lnR>
+                    <a:lnT>
+                      <a:noFill/>
+                    </a:lnT>
+                    <a:lnB>
+                      <a:noFill/>
+                    </a:lnB>
+                  </a:tcPr>
+                </a:tc>
+                <a:tc>
+                  <a:txBody>
+                    <a:bodyPr/>
+                    <a:lstStyle/>
+                    <a:p>
+                      <a:r>
+                        <a:rPr lang="es-ES" sz="1100"/>
+                        <a:t>Muestra el "thread starvation" de platform</a:t>
+                      </a:r>
+                    </a:p>
+                  </a:txBody>
+                  <a:tcPr marL="32473" marR="32473" marT="16236" marB="16236" anchor="ctr">
+                    <a:lnL>
+                      <a:noFill/>
+                    </a:lnL>
+                    <a:lnR>
+                      <a:noFill/>
+                    </a:lnR>
+                    <a:lnT>
+                      <a:noFill/>
+                    </a:lnT>
+                    <a:lnB>
+                      <a:noFill/>
+                    </a:lnB>
+                  </a:tcPr>
+                </a:tc>
+                <a:extLst>
+                  <a:ext uri="{0D108BD9-81ED-4DB2-BD59-A6C34878D82A}">
+                    <a16:rowId xmlns:a16="http://schemas.microsoft.com/office/drawing/2014/main" val="2812012445"/>
+                  </a:ext>
+                </a:extLst>
+              </a:tr>
+              <a:tr h="602267">
+                <a:tc>
+                  <a:txBody>
+                    <a:bodyPr/>
+                    <a:lstStyle/>
+                    <a:p>
+                      <a:r>
+                        <a:rPr lang="es-ES" sz="1100"/>
+                        <a:t>rate(http_server_requests_seconds_count[5m])</a:t>
+                      </a:r>
+                    </a:p>
+                  </a:txBody>
+                  <a:tcPr marL="32473" marR="32473" marT="16236" marB="16236" anchor="ctr">
+                    <a:lnL>
+                      <a:noFill/>
+                    </a:lnL>
+                    <a:lnR>
+                      <a:noFill/>
+                    </a:lnR>
+                    <a:lnT>
+                      <a:noFill/>
+                    </a:lnT>
+                    <a:lnB>
+                      <a:noFill/>
+                    </a:lnB>
+                  </a:tcPr>
+                </a:tc>
+                <a:tc>
+                  <a:txBody>
+                    <a:bodyPr/>
+                    <a:lstStyle/>
+                    <a:p>
+                      <a:r>
+                        <a:rPr lang="es-ES" sz="1100"/>
+                        <a:t>Throughput (reqs/s)</a:t>
+                      </a:r>
+                    </a:p>
+                  </a:txBody>
+                  <a:tcPr marL="32473" marR="32473" marT="16236" marB="16236" anchor="ctr">
+                    <a:lnL>
+                      <a:noFill/>
+                    </a:lnL>
+                    <a:lnR>
+                      <a:noFill/>
+                    </a:lnR>
+                    <a:lnT>
+                      <a:noFill/>
+                    </a:lnT>
+                    <a:lnB>
+                      <a:noFill/>
+                    </a:lnB>
+                  </a:tcPr>
+                </a:tc>
+                <a:tc>
+                  <a:txBody>
+                    <a:bodyPr/>
+                    <a:lstStyle/>
+                    <a:p>
+                      <a:r>
+                        <a:rPr lang="es-ES" sz="1100"/>
+                        <a:t>Limitado por pool</a:t>
+                      </a:r>
+                    </a:p>
+                  </a:txBody>
+                  <a:tcPr marL="32473" marR="32473" marT="16236" marB="16236" anchor="ctr">
+                    <a:lnL>
+                      <a:noFill/>
+                    </a:lnL>
+                    <a:lnR>
+                      <a:noFill/>
+                    </a:lnR>
+                    <a:lnT>
+                      <a:noFill/>
+                    </a:lnT>
+                    <a:lnB>
+                      <a:noFill/>
+                    </a:lnB>
+                  </a:tcPr>
+                </a:tc>
+                <a:tc>
+                  <a:txBody>
+                    <a:bodyPr/>
+                    <a:lstStyle/>
+                    <a:p>
+                      <a:r>
+                        <a:rPr lang="es-ES" sz="1100"/>
+                        <a:t>Alto</a:t>
+                      </a:r>
+                    </a:p>
+                  </a:txBody>
+                  <a:tcPr marL="32473" marR="32473" marT="16236" marB="16236" anchor="ctr">
+                    <a:lnL>
+                      <a:noFill/>
+                    </a:lnL>
+                    <a:lnR>
+                      <a:noFill/>
+                    </a:lnR>
+                    <a:lnT>
+                      <a:noFill/>
+                    </a:lnT>
+                    <a:lnB>
+                      <a:noFill/>
+                    </a:lnB>
+                  </a:tcPr>
+                </a:tc>
+                <a:tc>
+                  <a:txBody>
+                    <a:bodyPr/>
+                    <a:lstStyle/>
+                    <a:p>
+                      <a:r>
+                        <a:rPr lang="es-ES" sz="1100"/>
+                        <a:t>Alto (comparable)</a:t>
+                      </a:r>
+                    </a:p>
+                  </a:txBody>
+                  <a:tcPr marL="32473" marR="32473" marT="16236" marB="16236" anchor="ctr">
+                    <a:lnL>
+                      <a:noFill/>
+                    </a:lnL>
+                    <a:lnR>
+                      <a:noFill/>
+                    </a:lnR>
+                    <a:lnT>
+                      <a:noFill/>
+                    </a:lnT>
+                    <a:lnB>
+                      <a:noFill/>
+                    </a:lnB>
+                  </a:tcPr>
+                </a:tc>
+                <a:tc>
+                  <a:txBody>
+                    <a:bodyPr/>
+                    <a:lstStyle/>
+                    <a:p>
+                      <a:r>
+                        <a:rPr lang="es-ES" sz="1100"/>
+                        <a:t>VT iguala a reactive en rendimiento con código simple</a:t>
+                      </a:r>
+                    </a:p>
+                  </a:txBody>
+                  <a:tcPr marL="32473" marR="32473" marT="16236" marB="16236" anchor="ctr">
+                    <a:lnL>
+                      <a:noFill/>
+                    </a:lnL>
+                    <a:lnR>
+                      <a:noFill/>
+                    </a:lnR>
+                    <a:lnT>
+                      <a:noFill/>
+                    </a:lnT>
+                    <a:lnB>
+                      <a:noFill/>
+                    </a:lnB>
+                  </a:tcPr>
+                </a:tc>
+                <a:extLst>
+                  <a:ext uri="{0D108BD9-81ED-4DB2-BD59-A6C34878D82A}">
+                    <a16:rowId xmlns:a16="http://schemas.microsoft.com/office/drawing/2014/main" val="2503108651"/>
+                  </a:ext>
+                </a:extLst>
+              </a:tr>
+              <a:tr h="602267">
+                <a:tc>
+                  <a:txBody>
+                    <a:bodyPr/>
+                    <a:lstStyle/>
+                    <a:p>
+                      <a:r>
+                        <a:rPr lang="es-ES" sz="1100"/>
+                        <a:t>Latencia P95 / P99 (histogram_quantile)</a:t>
+                      </a:r>
+                    </a:p>
+                  </a:txBody>
+                  <a:tcPr marL="32473" marR="32473" marT="16236" marB="16236" anchor="ctr">
+                    <a:lnL>
+                      <a:noFill/>
+                    </a:lnL>
+                    <a:lnR>
+                      <a:noFill/>
+                    </a:lnR>
+                    <a:lnT>
+                      <a:noFill/>
+                    </a:lnT>
+                    <a:lnB>
+                      <a:noFill/>
+                    </a:lnB>
+                  </a:tcPr>
+                </a:tc>
+                <a:tc>
+                  <a:txBody>
+                    <a:bodyPr/>
+                    <a:lstStyle/>
+                    <a:p>
+                      <a:r>
+                        <a:rPr lang="es-ES" sz="1100"/>
+                        <a:t>Colas de espera bajo carga</a:t>
+                      </a:r>
+                    </a:p>
+                  </a:txBody>
+                  <a:tcPr marL="32473" marR="32473" marT="16236" marB="16236" anchor="ctr">
+                    <a:lnL>
+                      <a:noFill/>
+                    </a:lnL>
+                    <a:lnR>
+                      <a:noFill/>
+                    </a:lnR>
+                    <a:lnT>
+                      <a:noFill/>
+                    </a:lnT>
+                    <a:lnB>
+                      <a:noFill/>
+                    </a:lnB>
+                  </a:tcPr>
+                </a:tc>
+                <a:tc>
+                  <a:txBody>
+                    <a:bodyPr/>
+                    <a:lstStyle/>
+                    <a:p>
+                      <a:r>
+                        <a:rPr lang="es-ES" sz="1100"/>
+                        <a:t>Alta cuando pool lleno</a:t>
+                      </a:r>
+                    </a:p>
+                  </a:txBody>
+                  <a:tcPr marL="32473" marR="32473" marT="16236" marB="16236" anchor="ctr">
+                    <a:lnL>
+                      <a:noFill/>
+                    </a:lnL>
+                    <a:lnR>
+                      <a:noFill/>
+                    </a:lnR>
+                    <a:lnT>
+                      <a:noFill/>
+                    </a:lnT>
+                    <a:lnB>
+                      <a:noFill/>
+                    </a:lnB>
+                  </a:tcPr>
+                </a:tc>
+                <a:tc>
+                  <a:txBody>
+                    <a:bodyPr/>
+                    <a:lstStyle/>
+                    <a:p>
+                      <a:r>
+                        <a:rPr lang="es-ES" sz="1100"/>
+                        <a:t>Baja</a:t>
+                      </a:r>
+                    </a:p>
+                  </a:txBody>
+                  <a:tcPr marL="32473" marR="32473" marT="16236" marB="16236" anchor="ctr">
+                    <a:lnL>
+                      <a:noFill/>
+                    </a:lnL>
+                    <a:lnR>
+                      <a:noFill/>
+                    </a:lnR>
+                    <a:lnT>
+                      <a:noFill/>
+                    </a:lnT>
+                    <a:lnB>
+                      <a:noFill/>
+                    </a:lnB>
+                  </a:tcPr>
+                </a:tc>
+                <a:tc>
+                  <a:txBody>
+                    <a:bodyPr/>
+                    <a:lstStyle/>
+                    <a:p>
+                      <a:r>
+                        <a:rPr lang="es-ES" sz="1100"/>
+                        <a:t>Baja</a:t>
+                      </a:r>
+                    </a:p>
+                  </a:txBody>
+                  <a:tcPr marL="32473" marR="32473" marT="16236" marB="16236" anchor="ctr">
+                    <a:lnL>
+                      <a:noFill/>
+                    </a:lnL>
+                    <a:lnR>
+                      <a:noFill/>
+                    </a:lnR>
+                    <a:lnT>
+                      <a:noFill/>
+                    </a:lnT>
+                    <a:lnB>
+                      <a:noFill/>
+                    </a:lnB>
+                  </a:tcPr>
+                </a:tc>
+                <a:tc>
+                  <a:txBody>
+                    <a:bodyPr/>
+                    <a:lstStyle/>
+                    <a:p>
+                      <a:r>
+                        <a:rPr lang="es-ES" sz="1100"/>
+                        <a:t>VT no sufre queue buildup del thread pool</a:t>
+                      </a:r>
+                    </a:p>
+                  </a:txBody>
+                  <a:tcPr marL="32473" marR="32473" marT="16236" marB="16236" anchor="ctr">
+                    <a:lnL>
+                      <a:noFill/>
+                    </a:lnL>
+                    <a:lnR>
+                      <a:noFill/>
+                    </a:lnR>
+                    <a:lnT>
+                      <a:noFill/>
+                    </a:lnT>
+                    <a:lnB>
+                      <a:noFill/>
+                    </a:lnB>
+                  </a:tcPr>
+                </a:tc>
+                <a:extLst>
+                  <a:ext uri="{0D108BD9-81ED-4DB2-BD59-A6C34878D82A}">
+                    <a16:rowId xmlns:a16="http://schemas.microsoft.com/office/drawing/2014/main" val="712546720"/>
+                  </a:ext>
+                </a:extLst>
+              </a:tr>
+              <a:tr h="463282">
+                <a:tc>
+                  <a:txBody>
+                    <a:bodyPr/>
+                    <a:lstStyle/>
+                    <a:p>
+                      <a:r>
+                        <a:rPr lang="es-ES" sz="1100"/>
+                        <a:t>load.requests.failure rate</a:t>
+                      </a:r>
+                    </a:p>
+                  </a:txBody>
+                  <a:tcPr marL="32473" marR="32473" marT="16236" marB="16236" anchor="ctr">
+                    <a:lnL>
+                      <a:noFill/>
+                    </a:lnL>
+                    <a:lnR>
+                      <a:noFill/>
+                    </a:lnR>
+                    <a:lnT>
+                      <a:noFill/>
+                    </a:lnT>
+                    <a:lnB>
+                      <a:noFill/>
+                    </a:lnB>
+                  </a:tcPr>
+                </a:tc>
+                <a:tc>
+                  <a:txBody>
+                    <a:bodyPr/>
+                    <a:lstStyle/>
+                    <a:p>
+                      <a:r>
+                        <a:rPr lang="es-ES" sz="1100"/>
+                        <a:t>Tasa de errores/rechazos</a:t>
+                      </a:r>
+                    </a:p>
+                  </a:txBody>
+                  <a:tcPr marL="32473" marR="32473" marT="16236" marB="16236" anchor="ctr">
+                    <a:lnL>
+                      <a:noFill/>
+                    </a:lnL>
+                    <a:lnR>
+                      <a:noFill/>
+                    </a:lnR>
+                    <a:lnT>
+                      <a:noFill/>
+                    </a:lnT>
+                    <a:lnB>
+                      <a:noFill/>
+                    </a:lnB>
+                  </a:tcPr>
+                </a:tc>
+                <a:tc>
+                  <a:txBody>
+                    <a:bodyPr/>
+                    <a:lstStyle/>
+                    <a:p>
+                      <a:r>
+                        <a:rPr lang="es-ES" sz="1100"/>
+                        <a:t>Sube al saturar</a:t>
+                      </a:r>
+                    </a:p>
+                  </a:txBody>
+                  <a:tcPr marL="32473" marR="32473" marT="16236" marB="16236" anchor="ctr">
+                    <a:lnL>
+                      <a:noFill/>
+                    </a:lnL>
+                    <a:lnR>
+                      <a:noFill/>
+                    </a:lnR>
+                    <a:lnT>
+                      <a:noFill/>
+                    </a:lnT>
+                    <a:lnB>
+                      <a:noFill/>
+                    </a:lnB>
+                  </a:tcPr>
+                </a:tc>
+                <a:tc>
+                  <a:txBody>
+                    <a:bodyPr/>
+                    <a:lstStyle/>
+                    <a:p>
+                      <a:r>
+                        <a:rPr lang="es-ES" sz="1100"/>
+                        <a:t>Muy baja</a:t>
+                      </a:r>
+                    </a:p>
+                  </a:txBody>
+                  <a:tcPr marL="32473" marR="32473" marT="16236" marB="16236" anchor="ctr">
+                    <a:lnL>
+                      <a:noFill/>
+                    </a:lnL>
+                    <a:lnR>
+                      <a:noFill/>
+                    </a:lnR>
+                    <a:lnT>
+                      <a:noFill/>
+                    </a:lnT>
+                    <a:lnB>
+                      <a:noFill/>
+                    </a:lnB>
+                  </a:tcPr>
+                </a:tc>
+                <a:tc>
+                  <a:txBody>
+                    <a:bodyPr/>
+                    <a:lstStyle/>
+                    <a:p>
+                      <a:r>
+                        <a:rPr lang="es-ES" sz="1100"/>
+                        <a:t>Muy baja</a:t>
+                      </a:r>
+                    </a:p>
+                  </a:txBody>
+                  <a:tcPr marL="32473" marR="32473" marT="16236" marB="16236" anchor="ctr">
+                    <a:lnL>
+                      <a:noFill/>
+                    </a:lnL>
+                    <a:lnR>
+                      <a:noFill/>
+                    </a:lnR>
+                    <a:lnT>
+                      <a:noFill/>
+                    </a:lnT>
+                    <a:lnB>
+                      <a:noFill/>
+                    </a:lnB>
+                  </a:tcPr>
+                </a:tc>
+                <a:tc>
+                  <a:txBody>
+                    <a:bodyPr/>
+                    <a:lstStyle/>
+                    <a:p>
+                      <a:r>
+                        <a:rPr lang="es-ES" sz="1100"/>
+                        <a:t>Platform falla cuando el pool está lleno</a:t>
+                      </a:r>
+                    </a:p>
+                  </a:txBody>
+                  <a:tcPr marL="32473" marR="32473" marT="16236" marB="16236" anchor="ctr">
+                    <a:lnL>
+                      <a:noFill/>
+                    </a:lnL>
+                    <a:lnR>
+                      <a:noFill/>
+                    </a:lnR>
+                    <a:lnT>
+                      <a:noFill/>
+                    </a:lnT>
+                    <a:lnB>
+                      <a:noFill/>
+                    </a:lnB>
+                  </a:tcPr>
+                </a:tc>
+                <a:extLst>
+                  <a:ext uri="{0D108BD9-81ED-4DB2-BD59-A6C34878D82A}">
+                    <a16:rowId xmlns:a16="http://schemas.microsoft.com/office/drawing/2014/main" val="3273360243"/>
+                  </a:ext>
+                </a:extLst>
+              </a:tr>
+              <a:tr h="602267">
+                <a:tc>
+                  <a:txBody>
+                    <a:bodyPr/>
+                    <a:lstStyle/>
+                    <a:p>
+                      <a:r>
+                        <a:rPr lang="es-ES" sz="1100"/>
+                        <a:t>process_resident_memory_bytes</a:t>
+                      </a:r>
+                    </a:p>
+                  </a:txBody>
+                  <a:tcPr marL="32473" marR="32473" marT="16236" marB="16236" anchor="ctr">
+                    <a:lnL>
+                      <a:noFill/>
+                    </a:lnL>
+                    <a:lnR>
+                      <a:noFill/>
+                    </a:lnR>
+                    <a:lnT>
+                      <a:noFill/>
+                    </a:lnT>
+                    <a:lnB>
+                      <a:noFill/>
+                    </a:lnB>
+                  </a:tcPr>
+                </a:tc>
+                <a:tc>
+                  <a:txBody>
+                    <a:bodyPr/>
+                    <a:lstStyle/>
+                    <a:p>
+                      <a:r>
+                        <a:rPr lang="es-ES" sz="1100"/>
+                        <a:t>Memoria OS real consumida</a:t>
+                      </a:r>
+                    </a:p>
+                  </a:txBody>
+                  <a:tcPr marL="32473" marR="32473" marT="16236" marB="16236" anchor="ctr">
+                    <a:lnL>
+                      <a:noFill/>
+                    </a:lnL>
+                    <a:lnR>
+                      <a:noFill/>
+                    </a:lnR>
+                    <a:lnT>
+                      <a:noFill/>
+                    </a:lnT>
+                    <a:lnB>
+                      <a:noFill/>
+                    </a:lnB>
+                  </a:tcPr>
+                </a:tc>
+                <a:tc>
+                  <a:txBody>
+                    <a:bodyPr/>
+                    <a:lstStyle/>
+                    <a:p>
+                      <a:r>
+                        <a:rPr lang="es-ES" sz="1100"/>
+                        <a:t>Alta (~1MB/hilo OS)</a:t>
+                      </a:r>
+                    </a:p>
+                  </a:txBody>
+                  <a:tcPr marL="32473" marR="32473" marT="16236" marB="16236" anchor="ctr">
+                    <a:lnL>
+                      <a:noFill/>
+                    </a:lnL>
+                    <a:lnR>
+                      <a:noFill/>
+                    </a:lnR>
+                    <a:lnT>
+                      <a:noFill/>
+                    </a:lnT>
+                    <a:lnB>
+                      <a:noFill/>
+                    </a:lnB>
+                  </a:tcPr>
+                </a:tc>
+                <a:tc>
+                  <a:txBody>
+                    <a:bodyPr/>
+                    <a:lstStyle/>
+                    <a:p>
+                      <a:r>
+                        <a:rPr lang="es-ES" sz="1100"/>
+                        <a:t>Media</a:t>
+                      </a:r>
+                    </a:p>
+                  </a:txBody>
+                  <a:tcPr marL="32473" marR="32473" marT="16236" marB="16236" anchor="ctr">
+                    <a:lnL>
+                      <a:noFill/>
+                    </a:lnL>
+                    <a:lnR>
+                      <a:noFill/>
+                    </a:lnR>
+                    <a:lnT>
+                      <a:noFill/>
+                    </a:lnT>
+                    <a:lnB>
+                      <a:noFill/>
+                    </a:lnB>
+                  </a:tcPr>
+                </a:tc>
+                <a:tc>
+                  <a:txBody>
+                    <a:bodyPr/>
+                    <a:lstStyle/>
+                    <a:p>
+                      <a:r>
+                        <a:rPr lang="es-ES" sz="1100"/>
+                        <a:t>Media-alta (VT tienen stack pequeño ~KB)</a:t>
+                      </a:r>
+                    </a:p>
+                  </a:txBody>
+                  <a:tcPr marL="32473" marR="32473" marT="16236" marB="16236" anchor="ctr">
+                    <a:lnL>
+                      <a:noFill/>
+                    </a:lnL>
+                    <a:lnR>
+                      <a:noFill/>
+                    </a:lnR>
+                    <a:lnT>
+                      <a:noFill/>
+                    </a:lnT>
+                    <a:lnB>
+                      <a:noFill/>
+                    </a:lnB>
+                  </a:tcPr>
+                </a:tc>
+                <a:tc>
+                  <a:txBody>
+                    <a:bodyPr/>
+                    <a:lstStyle/>
+                    <a:p>
+                      <a:r>
+                        <a:rPr lang="es-ES" sz="1100"/>
+                        <a:t>VT son más ligeros en memoria que platform</a:t>
+                      </a:r>
+                    </a:p>
+                  </a:txBody>
+                  <a:tcPr marL="32473" marR="32473" marT="16236" marB="16236" anchor="ctr">
+                    <a:lnL>
+                      <a:noFill/>
+                    </a:lnL>
+                    <a:lnR>
+                      <a:noFill/>
+                    </a:lnR>
+                    <a:lnT>
+                      <a:noFill/>
+                    </a:lnT>
+                    <a:lnB>
+                      <a:noFill/>
+                    </a:lnB>
+                  </a:tcPr>
+                </a:tc>
+                <a:extLst>
+                  <a:ext uri="{0D108BD9-81ED-4DB2-BD59-A6C34878D82A}">
+                    <a16:rowId xmlns:a16="http://schemas.microsoft.com/office/drawing/2014/main" val="2221991945"/>
+                  </a:ext>
+                </a:extLst>
+              </a:tr>
+              <a:tr h="602267">
+                <a:tc>
+                  <a:txBody>
+                    <a:bodyPr/>
+                    <a:lstStyle/>
+                    <a:p>
+                      <a:r>
+                        <a:rPr lang="es-ES" sz="1100"/>
+                        <a:t>process_cpu_usage</a:t>
+                      </a:r>
+                    </a:p>
+                  </a:txBody>
+                  <a:tcPr marL="32473" marR="32473" marT="16236" marB="16236" anchor="ctr">
+                    <a:lnL>
+                      <a:noFill/>
+                    </a:lnL>
+                    <a:lnR>
+                      <a:noFill/>
+                    </a:lnR>
+                    <a:lnT>
+                      <a:noFill/>
+                    </a:lnT>
+                    <a:lnB>
+                      <a:noFill/>
+                    </a:lnB>
+                  </a:tcPr>
+                </a:tc>
+                <a:tc>
+                  <a:txBody>
+                    <a:bodyPr/>
+                    <a:lstStyle/>
+                    <a:p>
+                      <a:r>
+                        <a:rPr lang="es-ES" sz="1100"/>
+                        <a:t>CPU consumida</a:t>
+                      </a:r>
+                    </a:p>
+                  </a:txBody>
+                  <a:tcPr marL="32473" marR="32473" marT="16236" marB="16236" anchor="ctr">
+                    <a:lnL>
+                      <a:noFill/>
+                    </a:lnL>
+                    <a:lnR>
+                      <a:noFill/>
+                    </a:lnR>
+                    <a:lnT>
+                      <a:noFill/>
+                    </a:lnT>
+                    <a:lnB>
+                      <a:noFill/>
+                    </a:lnB>
+                  </a:tcPr>
+                </a:tc>
+                <a:tc>
+                  <a:txBody>
+                    <a:bodyPr/>
+                    <a:lstStyle/>
+                    <a:p>
+                      <a:r>
+                        <a:rPr lang="es-ES" sz="1100"/>
+                        <a:t>Media-Alta (context switch)</a:t>
+                      </a:r>
+                    </a:p>
+                  </a:txBody>
+                  <a:tcPr marL="32473" marR="32473" marT="16236" marB="16236" anchor="ctr">
+                    <a:lnL>
+                      <a:noFill/>
+                    </a:lnL>
+                    <a:lnR>
+                      <a:noFill/>
+                    </a:lnR>
+                    <a:lnT>
+                      <a:noFill/>
+                    </a:lnT>
+                    <a:lnB>
+                      <a:noFill/>
+                    </a:lnB>
+                  </a:tcPr>
+                </a:tc>
+                <a:tc>
+                  <a:txBody>
+                    <a:bodyPr/>
+                    <a:lstStyle/>
+                    <a:p>
+                      <a:r>
+                        <a:rPr lang="es-ES" sz="1100"/>
+                        <a:t>Eficiente</a:t>
+                      </a:r>
+                    </a:p>
+                  </a:txBody>
+                  <a:tcPr marL="32473" marR="32473" marT="16236" marB="16236" anchor="ctr">
+                    <a:lnL>
+                      <a:noFill/>
+                    </a:lnL>
+                    <a:lnR>
+                      <a:noFill/>
+                    </a:lnR>
+                    <a:lnT>
+                      <a:noFill/>
+                    </a:lnT>
+                    <a:lnB>
+                      <a:noFill/>
+                    </a:lnB>
+                  </a:tcPr>
+                </a:tc>
+                <a:tc>
+                  <a:txBody>
+                    <a:bodyPr/>
+                    <a:lstStyle/>
+                    <a:p>
+                      <a:r>
+                        <a:rPr lang="es-ES" sz="1100"/>
+                        <a:t>Eficiente</a:t>
+                      </a:r>
+                    </a:p>
+                  </a:txBody>
+                  <a:tcPr marL="32473" marR="32473" marT="16236" marB="16236" anchor="ctr">
+                    <a:lnL>
+                      <a:noFill/>
+                    </a:lnL>
+                    <a:lnR>
+                      <a:noFill/>
+                    </a:lnR>
+                    <a:lnT>
+                      <a:noFill/>
+                    </a:lnT>
+                    <a:lnB>
+                      <a:noFill/>
+                    </a:lnB>
+                  </a:tcPr>
+                </a:tc>
+                <a:tc>
+                  <a:txBody>
+                    <a:bodyPr/>
+                    <a:lstStyle/>
+                    <a:p>
+                      <a:r>
+                        <a:rPr lang="es-ES" sz="1100"/>
+                        <a:t>Platform sufre context switching en saturación</a:t>
+                      </a:r>
+                    </a:p>
+                  </a:txBody>
+                  <a:tcPr marL="32473" marR="32473" marT="16236" marB="16236" anchor="ctr">
+                    <a:lnL>
+                      <a:noFill/>
+                    </a:lnL>
+                    <a:lnR>
+                      <a:noFill/>
+                    </a:lnR>
+                    <a:lnT>
+                      <a:noFill/>
+                    </a:lnT>
+                    <a:lnB>
+                      <a:noFill/>
+                    </a:lnB>
+                  </a:tcPr>
+                </a:tc>
+                <a:extLst>
+                  <a:ext uri="{0D108BD9-81ED-4DB2-BD59-A6C34878D82A}">
+                    <a16:rowId xmlns:a16="http://schemas.microsoft.com/office/drawing/2014/main" val="2379444920"/>
+                  </a:ext>
+                </a:extLst>
+              </a:tr>
+              <a:tr h="741252">
+                <a:tc>
+                  <a:txBody>
+                    <a:bodyPr/>
+                    <a:lstStyle/>
+                    <a:p>
+                      <a:r>
+                        <a:rPr lang="es-ES" sz="1100"/>
+                        <a:t>rate(jvm_gc_pause_seconds_sum[1m])</a:t>
+                      </a:r>
+                    </a:p>
+                  </a:txBody>
+                  <a:tcPr marL="32473" marR="32473" marT="16236" marB="16236" anchor="ctr">
+                    <a:lnL>
+                      <a:noFill/>
+                    </a:lnL>
+                    <a:lnR>
+                      <a:noFill/>
+                    </a:lnR>
+                    <a:lnT>
+                      <a:noFill/>
+                    </a:lnT>
+                    <a:lnB>
+                      <a:noFill/>
+                    </a:lnB>
+                  </a:tcPr>
+                </a:tc>
+                <a:tc>
+                  <a:txBody>
+                    <a:bodyPr/>
+                    <a:lstStyle/>
+                    <a:p>
+                      <a:r>
+                        <a:rPr lang="es-ES" sz="1100"/>
+                        <a:t>Tiempo perdido en GC</a:t>
+                      </a:r>
+                    </a:p>
+                  </a:txBody>
+                  <a:tcPr marL="32473" marR="32473" marT="16236" marB="16236" anchor="ctr">
+                    <a:lnL>
+                      <a:noFill/>
+                    </a:lnL>
+                    <a:lnR>
+                      <a:noFill/>
+                    </a:lnR>
+                    <a:lnT>
+                      <a:noFill/>
+                    </a:lnT>
+                    <a:lnB>
+                      <a:noFill/>
+                    </a:lnB>
+                  </a:tcPr>
+                </a:tc>
+                <a:tc>
+                  <a:txBody>
+                    <a:bodyPr/>
+                    <a:lstStyle/>
+                    <a:p>
+                      <a:r>
+                        <a:rPr lang="es-ES" sz="1100"/>
+                        <a:t>Moderado</a:t>
+                      </a:r>
+                    </a:p>
+                  </a:txBody>
+                  <a:tcPr marL="32473" marR="32473" marT="16236" marB="16236" anchor="ctr">
+                    <a:lnL>
+                      <a:noFill/>
+                    </a:lnL>
+                    <a:lnR>
+                      <a:noFill/>
+                    </a:lnR>
+                    <a:lnT>
+                      <a:noFill/>
+                    </a:lnT>
+                    <a:lnB>
+                      <a:noFill/>
+                    </a:lnB>
+                  </a:tcPr>
+                </a:tc>
+                <a:tc>
+                  <a:txBody>
+                    <a:bodyPr/>
+                    <a:lstStyle/>
+                    <a:p>
+                      <a:r>
+                        <a:rPr lang="es-ES" sz="1100"/>
+                        <a:t>ALTO (muchos objetos reactivos)</a:t>
+                      </a:r>
+                    </a:p>
+                  </a:txBody>
+                  <a:tcPr marL="32473" marR="32473" marT="16236" marB="16236" anchor="ctr">
+                    <a:lnL>
+                      <a:noFill/>
+                    </a:lnL>
+                    <a:lnR>
+                      <a:noFill/>
+                    </a:lnR>
+                    <a:lnT>
+                      <a:noFill/>
+                    </a:lnT>
+                    <a:lnB>
+                      <a:noFill/>
+                    </a:lnB>
+                  </a:tcPr>
+                </a:tc>
+                <a:tc>
+                  <a:txBody>
+                    <a:bodyPr/>
+                    <a:lstStyle/>
+                    <a:p>
+                      <a:r>
+                        <a:rPr lang="es-ES" sz="1100"/>
+                        <a:t>Moderado</a:t>
+                      </a:r>
+                    </a:p>
+                  </a:txBody>
+                  <a:tcPr marL="32473" marR="32473" marT="16236" marB="16236" anchor="ctr">
+                    <a:lnL>
+                      <a:noFill/>
+                    </a:lnL>
+                    <a:lnR>
+                      <a:noFill/>
+                    </a:lnR>
+                    <a:lnT>
+                      <a:noFill/>
+                    </a:lnT>
+                    <a:lnB>
+                      <a:noFill/>
+                    </a:lnB>
+                  </a:tcPr>
+                </a:tc>
+                <a:tc>
+                  <a:txBody>
+                    <a:bodyPr/>
+                    <a:lstStyle/>
+                    <a:p>
+                      <a:r>
+                        <a:rPr lang="es-ES" sz="1100"/>
+                        <a:t>Reactive genera más garbage por la lambda/MonoFlux</a:t>
+                      </a:r>
+                    </a:p>
+                  </a:txBody>
+                  <a:tcPr marL="32473" marR="32473" marT="16236" marB="16236" anchor="ctr">
+                    <a:lnL>
+                      <a:noFill/>
+                    </a:lnL>
+                    <a:lnR>
+                      <a:noFill/>
+                    </a:lnR>
+                    <a:lnT>
+                      <a:noFill/>
+                    </a:lnT>
+                    <a:lnB>
+                      <a:noFill/>
+                    </a:lnB>
+                  </a:tcPr>
+                </a:tc>
+                <a:extLst>
+                  <a:ext uri="{0D108BD9-81ED-4DB2-BD59-A6C34878D82A}">
+                    <a16:rowId xmlns:a16="http://schemas.microsoft.com/office/drawing/2014/main" val="3151790826"/>
+                  </a:ext>
+                </a:extLst>
+              </a:tr>
+              <a:tr h="463282">
+                <a:tc>
+                  <a:txBody>
+                    <a:bodyPr/>
+                    <a:lstStyle/>
+                    <a:p>
+                      <a:r>
+                        <a:rPr lang="es-ES" sz="1100"/>
+                        <a:t>jvm_memory_used_bytes{area="heap"}</a:t>
+                      </a:r>
+                    </a:p>
+                  </a:txBody>
+                  <a:tcPr marL="32473" marR="32473" marT="16236" marB="16236" anchor="ctr">
+                    <a:lnL>
+                      <a:noFill/>
+                    </a:lnL>
+                    <a:lnR>
+                      <a:noFill/>
+                    </a:lnR>
+                    <a:lnT>
+                      <a:noFill/>
+                    </a:lnT>
+                    <a:lnB>
+                      <a:noFill/>
+                    </a:lnB>
+                  </a:tcPr>
+                </a:tc>
+                <a:tc>
+                  <a:txBody>
+                    <a:bodyPr/>
+                    <a:lstStyle/>
+                    <a:p>
+                      <a:r>
+                        <a:rPr lang="es-ES" sz="1100"/>
+                        <a:t>Heap JVM usado</a:t>
+                      </a:r>
+                    </a:p>
+                  </a:txBody>
+                  <a:tcPr marL="32473" marR="32473" marT="16236" marB="16236" anchor="ctr">
+                    <a:lnL>
+                      <a:noFill/>
+                    </a:lnL>
+                    <a:lnR>
+                      <a:noFill/>
+                    </a:lnR>
+                    <a:lnT>
+                      <a:noFill/>
+                    </a:lnT>
+                    <a:lnB>
+                      <a:noFill/>
+                    </a:lnB>
+                  </a:tcPr>
+                </a:tc>
+                <a:tc>
+                  <a:txBody>
+                    <a:bodyPr/>
+                    <a:lstStyle/>
+                    <a:p>
+                      <a:r>
+                        <a:rPr lang="es-ES" sz="1100"/>
+                        <a:t>Medio</a:t>
+                      </a:r>
+                    </a:p>
+                  </a:txBody>
+                  <a:tcPr marL="32473" marR="32473" marT="16236" marB="16236" anchor="ctr">
+                    <a:lnL>
+                      <a:noFill/>
+                    </a:lnL>
+                    <a:lnR>
+                      <a:noFill/>
+                    </a:lnR>
+                    <a:lnT>
+                      <a:noFill/>
+                    </a:lnT>
+                    <a:lnB>
+                      <a:noFill/>
+                    </a:lnB>
+                  </a:tcPr>
+                </a:tc>
+                <a:tc>
+                  <a:txBody>
+                    <a:bodyPr/>
+                    <a:lstStyle/>
+                    <a:p>
+                      <a:r>
+                        <a:rPr lang="es-ES" sz="1100"/>
+                        <a:t>Medio-alto</a:t>
+                      </a:r>
+                    </a:p>
+                  </a:txBody>
+                  <a:tcPr marL="32473" marR="32473" marT="16236" marB="16236" anchor="ctr">
+                    <a:lnL>
+                      <a:noFill/>
+                    </a:lnL>
+                    <a:lnR>
+                      <a:noFill/>
+                    </a:lnR>
+                    <a:lnT>
+                      <a:noFill/>
+                    </a:lnT>
+                    <a:lnB>
+                      <a:noFill/>
+                    </a:lnB>
+                  </a:tcPr>
+                </a:tc>
+                <a:tc>
+                  <a:txBody>
+                    <a:bodyPr/>
+                    <a:lstStyle/>
+                    <a:p>
+                      <a:r>
+                        <a:rPr lang="es-ES" sz="1100"/>
+                        <a:t>Medio</a:t>
+                      </a:r>
+                    </a:p>
+                  </a:txBody>
+                  <a:tcPr marL="32473" marR="32473" marT="16236" marB="16236" anchor="ctr">
+                    <a:lnL>
+                      <a:noFill/>
+                    </a:lnL>
+                    <a:lnR>
+                      <a:noFill/>
+                    </a:lnR>
+                    <a:lnT>
+                      <a:noFill/>
+                    </a:lnT>
+                    <a:lnB>
+                      <a:noFill/>
+                    </a:lnB>
+                  </a:tcPr>
+                </a:tc>
+                <a:tc>
+                  <a:txBody>
+                    <a:bodyPr/>
+                    <a:lstStyle/>
+                    <a:p>
+                      <a:r>
+                        <a:rPr lang="es-ES" sz="1100" dirty="0"/>
+                        <a:t>GC </a:t>
+                      </a:r>
+                      <a:r>
+                        <a:rPr lang="es-ES" sz="1100" dirty="0" err="1"/>
+                        <a:t>pressure</a:t>
+                      </a:r>
+                      <a:r>
+                        <a:rPr lang="es-ES" sz="1100" dirty="0"/>
+                        <a:t> visible en </a:t>
+                      </a:r>
+                      <a:r>
+                        <a:rPr lang="es-ES" sz="1100" dirty="0" err="1"/>
+                        <a:t>Heap</a:t>
+                      </a:r>
+                      <a:endParaRPr lang="es-ES" sz="1100" dirty="0"/>
+                    </a:p>
+                  </a:txBody>
+                  <a:tcPr marL="32473" marR="32473" marT="16236" marB="16236" anchor="ctr">
+                    <a:lnL>
+                      <a:noFill/>
+                    </a:lnL>
+                    <a:lnR>
+                      <a:noFill/>
+                    </a:lnR>
+                    <a:lnT>
+                      <a:noFill/>
+                    </a:lnT>
+                    <a:lnB>
+                      <a:noFill/>
+                    </a:lnB>
+                  </a:tcPr>
+                </a:tc>
+                <a:extLst>
+                  <a:ext uri="{0D108BD9-81ED-4DB2-BD59-A6C34878D82A}">
+                    <a16:rowId xmlns:a16="http://schemas.microsoft.com/office/drawing/2014/main" val="1396838262"/>
+                  </a:ext>
+                </a:extLst>
+              </a:tr>
+            </a:tbl>
+          </a:graphicData>
+        </a:graphic>
+      </p:graphicFrame>
+    </p:spTree>
+    <p:extLst>
+      <p:ext uri="{BB962C8B-B14F-4D97-AF65-F5344CB8AC3E}">
+        <p14:creationId xmlns:p14="http://schemas.microsoft.com/office/powerpoint/2010/main" val="2622259384"/>
+      </p:ext>
+    </p:extLst>
+  </p:cSld>
+  <p:clrMapOvr>
+    <a:masterClrMapping/>
+  </p:clrMapOvr>
+</p:sld>
+</file>
+
+<file path=ppt/slides/slide6.xml><?xml version="1.0" encoding="utf-8"?>
+<p:sld xmlns:a="http://schemas.openxmlformats.org/drawingml/2006/main" xmlns:r="http://schemas.openxmlformats.org/officeDocument/2006/relationships" xmlns:p="http://schemas.openxmlformats.org/presentationml/2006/main">
+  <p:cSld>
+    <p:spTree>
+      <p:nvGrpSpPr>
+        <p:cNvPr id="1" name=""/>
+        <p:cNvGrpSpPr/>
+        <p:nvPr/>
+      </p:nvGrpSpPr>
+      <p:grpSpPr>
+        <a:xfrm>
+          <a:off x="0" y="0"/>
+          <a:ext cx="0" cy="0"/>
+          <a:chOff x="0" y="0"/>
+          <a:chExt cx="0" cy="0"/>
+        </a:xfrm>
+      </p:grpSpPr>
+      <p:pic>
+        <p:nvPicPr>
+          <p:cNvPr id="2" name="Picture 1">
+            <a:extLst>
+              <a:ext uri="{FF2B5EF4-FFF2-40B4-BE49-F238E27FC236}">
+                <a16:creationId xmlns:a16="http://schemas.microsoft.com/office/drawing/2014/main" id="{C89BD7CF-E2BD-5546-B0AB-6258D9C407E6}"/>
+              </a:ext>
+            </a:extLst>
+          </p:cNvPr>
+          <p:cNvPicPr>
+            <a:picLocks noChangeAspect="1"/>
+          </p:cNvPicPr>
+          <p:nvPr/>
+        </p:nvPicPr>
+        <p:blipFill>
+          <a:blip r:embed="rId2"/>
+          <a:stretch>
+            <a:fillRect/>
+          </a:stretch>
+        </p:blipFill>
+        <p:spPr>
+          <a:xfrm>
+            <a:off x="2623033" y="164859"/>
+            <a:ext cx="6413500" cy="393700"/>
+          </a:xfrm>
+          <a:prstGeom prst="rect">
+            <a:avLst/>
+          </a:prstGeom>
+        </p:spPr>
+      </p:pic>
+      <p:pic>
+        <p:nvPicPr>
+          <p:cNvPr id="15" name="Picture 14">
+            <a:extLst>
+              <a:ext uri="{FF2B5EF4-FFF2-40B4-BE49-F238E27FC236}">
+                <a16:creationId xmlns:a16="http://schemas.microsoft.com/office/drawing/2014/main" id="{E1813BA5-1943-7242-A19E-AA0B2A884048}"/>
+              </a:ext>
+            </a:extLst>
+          </p:cNvPr>
+          <p:cNvPicPr>
+            <a:picLocks noChangeAspect="1"/>
+          </p:cNvPicPr>
+          <p:nvPr/>
+        </p:nvPicPr>
+        <p:blipFill>
+          <a:blip r:embed="rId3"/>
+          <a:stretch>
+            <a:fillRect/>
+          </a:stretch>
+        </p:blipFill>
+        <p:spPr>
+          <a:xfrm>
+            <a:off x="51228" y="688157"/>
+            <a:ext cx="3675820" cy="3740687"/>
+          </a:xfrm>
+          <a:prstGeom prst="rect">
+            <a:avLst/>
+          </a:prstGeom>
+        </p:spPr>
+      </p:pic>
+      <p:pic>
+        <p:nvPicPr>
+          <p:cNvPr id="16" name="Picture 15">
+            <a:extLst>
+              <a:ext uri="{FF2B5EF4-FFF2-40B4-BE49-F238E27FC236}">
+                <a16:creationId xmlns:a16="http://schemas.microsoft.com/office/drawing/2014/main" id="{1A7A88E6-ECD2-5D4E-9301-9F7BB4CC6526}"/>
+              </a:ext>
+            </a:extLst>
+          </p:cNvPr>
+          <p:cNvPicPr>
+            <a:picLocks noChangeAspect="1"/>
+          </p:cNvPicPr>
+          <p:nvPr/>
+        </p:nvPicPr>
+        <p:blipFill>
+          <a:blip r:embed="rId4"/>
+          <a:stretch>
+            <a:fillRect/>
+          </a:stretch>
+        </p:blipFill>
+        <p:spPr>
+          <a:xfrm>
+            <a:off x="3860127" y="688157"/>
+            <a:ext cx="8528582" cy="2017960"/>
+          </a:xfrm>
+          <a:prstGeom prst="rect">
+            <a:avLst/>
+          </a:prstGeom>
+        </p:spPr>
+      </p:pic>
+      <p:pic>
+        <p:nvPicPr>
+          <p:cNvPr id="17" name="Picture 16">
+            <a:extLst>
+              <a:ext uri="{FF2B5EF4-FFF2-40B4-BE49-F238E27FC236}">
+                <a16:creationId xmlns:a16="http://schemas.microsoft.com/office/drawing/2014/main" id="{5B3FACD0-F622-0447-9289-B9E794F4FEAD}"/>
+              </a:ext>
+            </a:extLst>
+          </p:cNvPr>
+          <p:cNvPicPr>
+            <a:picLocks noChangeAspect="1"/>
+          </p:cNvPicPr>
+          <p:nvPr/>
+        </p:nvPicPr>
+        <p:blipFill>
+          <a:blip r:embed="rId5"/>
+          <a:stretch>
+            <a:fillRect/>
+          </a:stretch>
+        </p:blipFill>
+        <p:spPr>
+          <a:xfrm>
+            <a:off x="3860127" y="2775824"/>
+            <a:ext cx="4895127" cy="1731425"/>
+          </a:xfrm>
+          <a:prstGeom prst="rect">
+            <a:avLst/>
+          </a:prstGeom>
+        </p:spPr>
+      </p:pic>
+      <p:pic>
+        <p:nvPicPr>
+          <p:cNvPr id="18" name="Picture 17">
+            <a:extLst>
+              <a:ext uri="{FF2B5EF4-FFF2-40B4-BE49-F238E27FC236}">
+                <a16:creationId xmlns:a16="http://schemas.microsoft.com/office/drawing/2014/main" id="{C3F349AA-9D7E-8C44-BA1B-3F46DAC0EA10}"/>
+              </a:ext>
+            </a:extLst>
+          </p:cNvPr>
+          <p:cNvPicPr>
+            <a:picLocks noChangeAspect="1"/>
+          </p:cNvPicPr>
+          <p:nvPr/>
+        </p:nvPicPr>
+        <p:blipFill>
+          <a:blip r:embed="rId6"/>
+          <a:stretch>
+            <a:fillRect/>
+          </a:stretch>
+        </p:blipFill>
+        <p:spPr>
+          <a:xfrm>
+            <a:off x="5648445" y="3555260"/>
+            <a:ext cx="2702287" cy="360759"/>
+          </a:xfrm>
+          <a:prstGeom prst="rect">
+            <a:avLst/>
+          </a:prstGeom>
+        </p:spPr>
+      </p:pic>
+      <p:pic>
+        <p:nvPicPr>
+          <p:cNvPr id="19" name="Picture 18">
+            <a:extLst>
+              <a:ext uri="{FF2B5EF4-FFF2-40B4-BE49-F238E27FC236}">
+                <a16:creationId xmlns:a16="http://schemas.microsoft.com/office/drawing/2014/main" id="{F96DFE44-D4BA-374E-86C2-9DFF4A51A482}"/>
+              </a:ext>
+            </a:extLst>
+          </p:cNvPr>
+          <p:cNvPicPr>
+            <a:picLocks noChangeAspect="1"/>
+          </p:cNvPicPr>
+          <p:nvPr/>
+        </p:nvPicPr>
+        <p:blipFill>
+          <a:blip r:embed="rId7"/>
+          <a:stretch>
+            <a:fillRect/>
+          </a:stretch>
+        </p:blipFill>
+        <p:spPr>
+          <a:xfrm>
+            <a:off x="138896" y="4576957"/>
+            <a:ext cx="8321626" cy="2097506"/>
+          </a:xfrm>
+          <a:prstGeom prst="rect">
+            <a:avLst/>
+          </a:prstGeom>
+        </p:spPr>
+      </p:pic>
+      <p:pic>
+        <p:nvPicPr>
+          <p:cNvPr id="20" name="Picture 19">
+            <a:extLst>
+              <a:ext uri="{FF2B5EF4-FFF2-40B4-BE49-F238E27FC236}">
+                <a16:creationId xmlns:a16="http://schemas.microsoft.com/office/drawing/2014/main" id="{D6DEF4C7-BCDD-0043-9E96-139ADB4EEC37}"/>
+              </a:ext>
+            </a:extLst>
+          </p:cNvPr>
+          <p:cNvPicPr>
+            <a:picLocks noChangeAspect="1"/>
+          </p:cNvPicPr>
+          <p:nvPr/>
+        </p:nvPicPr>
+        <p:blipFill>
+          <a:blip r:embed="rId8"/>
+          <a:stretch>
+            <a:fillRect/>
+          </a:stretch>
+        </p:blipFill>
+        <p:spPr>
+          <a:xfrm>
+            <a:off x="5938536" y="5390935"/>
+            <a:ext cx="2412196" cy="469550"/>
+          </a:xfrm>
+          <a:prstGeom prst="rect">
+            <a:avLst/>
+          </a:prstGeom>
+        </p:spPr>
+      </p:pic>
+    </p:spTree>
+    <p:extLst>
+      <p:ext uri="{BB962C8B-B14F-4D97-AF65-F5344CB8AC3E}">
+        <p14:creationId xmlns:p14="http://schemas.microsoft.com/office/powerpoint/2010/main" val="1811275226"/>
+      </p:ext>
+    </p:extLst>
+  </p:cSld>
+  <p:clrMapOvr>
+    <a:masterClrMapping/>
+  </p:clrMapOvr>
+</p:sld>
+</file>
+
+<file path=ppt/slides/slide7.xml><?xml version="1.0" encoding="utf-8"?>
+<p:sld xmlns:a="http://schemas.openxmlformats.org/drawingml/2006/main" xmlns:r="http://schemas.openxmlformats.org/officeDocument/2006/relationships" xmlns:p="http://schemas.openxmlformats.org/presentationml/2006/main">
+  <p:cSld>
+    <p:spTree>
+      <p:nvGrpSpPr>
+        <p:cNvPr id="1" name=""/>
+        <p:cNvGrpSpPr/>
+        <p:nvPr/>
+      </p:nvGrpSpPr>
+      <p:grpSpPr>
+        <a:xfrm>
+          <a:off x="0" y="0"/>
+          <a:ext cx="0" cy="0"/>
+          <a:chOff x="0" y="0"/>
+          <a:chExt cx="0" cy="0"/>
+        </a:xfrm>
+      </p:grpSpPr>
+      <p:pic>
+        <p:nvPicPr>
+          <p:cNvPr id="4" name="Picture 3">
+            <a:extLst>
+              <a:ext uri="{FF2B5EF4-FFF2-40B4-BE49-F238E27FC236}">
+                <a16:creationId xmlns:a16="http://schemas.microsoft.com/office/drawing/2014/main" id="{C1A554C2-E7C6-DE40-BCF0-96A6860C194F}"/>
+              </a:ext>
+            </a:extLst>
+          </p:cNvPr>
+          <p:cNvPicPr>
+            <a:picLocks noChangeAspect="1"/>
+          </p:cNvPicPr>
+          <p:nvPr/>
+        </p:nvPicPr>
+        <p:blipFill>
+          <a:blip r:embed="rId2"/>
+          <a:stretch>
+            <a:fillRect/>
+          </a:stretch>
+        </p:blipFill>
+        <p:spPr>
+          <a:xfrm>
+            <a:off x="2908702" y="162608"/>
+            <a:ext cx="6235700" cy="444500"/>
+          </a:xfrm>
+          <a:prstGeom prst="rect">
+            <a:avLst/>
+          </a:prstGeom>
+        </p:spPr>
+      </p:pic>
+    </p:spTree>
+    <p:extLst>
+      <p:ext uri="{BB962C8B-B14F-4D97-AF65-F5344CB8AC3E}">
+        <p14:creationId xmlns:p14="http://schemas.microsoft.com/office/powerpoint/2010/main" val="1726459326"/>
+      </p:ext>
+    </p:extLst>
+  </p:cSld>
+  <p:clrMapOvr>
+    <a:masterClrMapping/>
+  </p:clrMapOvr>
+</p:sld>
+</file>
+
+<file path=ppt/slides/slide8.xml><?xml version="1.0" encoding="utf-8"?>
+<p:sld xmlns:a="http://schemas.openxmlformats.org/drawingml/2006/main" xmlns:r="http://schemas.openxmlformats.org/officeDocument/2006/relationships" xmlns:p="http://schemas.openxmlformats.org/presentationml/2006/main">
+  <p:cSld>
+    <p:spTree>
+      <p:nvGrpSpPr>
+        <p:cNvPr id="1" name=""/>
+        <p:cNvGrpSpPr/>
+        <p:nvPr/>
+      </p:nvGrpSpPr>
+      <p:grpSpPr>
+        <a:xfrm>
+          <a:off x="0" y="0"/>
+          <a:ext cx="0" cy="0"/>
+          <a:chOff x="0" y="0"/>
+          <a:chExt cx="0" cy="0"/>
+        </a:xfrm>
+      </p:grpSpPr>
+      <p:pic>
+        <p:nvPicPr>
+          <p:cNvPr id="4" name="Picture 3">
+            <a:extLst>
+              <a:ext uri="{FF2B5EF4-FFF2-40B4-BE49-F238E27FC236}">
+                <a16:creationId xmlns:a16="http://schemas.microsoft.com/office/drawing/2014/main" id="{2687DC37-B79F-E443-ADCB-DA19E91E1C11}"/>
+              </a:ext>
+            </a:extLst>
+          </p:cNvPr>
+          <p:cNvPicPr>
+            <a:picLocks noChangeAspect="1"/>
+          </p:cNvPicPr>
+          <p:nvPr/>
+        </p:nvPicPr>
+        <p:blipFill>
+          <a:blip r:embed="rId2"/>
+          <a:stretch>
+            <a:fillRect/>
+          </a:stretch>
+        </p:blipFill>
+        <p:spPr>
+          <a:xfrm>
+            <a:off x="2911756" y="158509"/>
+            <a:ext cx="5905500" cy="406400"/>
+          </a:xfrm>
+          <a:prstGeom prst="rect">
+            <a:avLst/>
+          </a:prstGeom>
+        </p:spPr>
+      </p:pic>
+      <p:pic>
+        <p:nvPicPr>
+          <p:cNvPr id="5" name="Picture 4">
+            <a:extLst>
+              <a:ext uri="{FF2B5EF4-FFF2-40B4-BE49-F238E27FC236}">
+                <a16:creationId xmlns:a16="http://schemas.microsoft.com/office/drawing/2014/main" id="{71266C9B-5F58-4441-8078-54B560307665}"/>
+              </a:ext>
+            </a:extLst>
+          </p:cNvPr>
+          <p:cNvPicPr>
+            <a:picLocks noChangeAspect="1"/>
+          </p:cNvPicPr>
+          <p:nvPr/>
+        </p:nvPicPr>
+        <p:blipFill>
+          <a:blip r:embed="rId3"/>
+          <a:stretch>
+            <a:fillRect/>
+          </a:stretch>
+        </p:blipFill>
+        <p:spPr>
+          <a:xfrm>
+            <a:off x="138895" y="825824"/>
+            <a:ext cx="3136740" cy="3483004"/>
+          </a:xfrm>
+          <a:prstGeom prst="rect">
+            <a:avLst/>
+          </a:prstGeom>
+        </p:spPr>
+      </p:pic>
+    </p:spTree>
+    <p:extLst>
+      <p:ext uri="{BB962C8B-B14F-4D97-AF65-F5344CB8AC3E}">
+        <p14:creationId xmlns:p14="http://schemas.microsoft.com/office/powerpoint/2010/main" val="4113780271"/>
+      </p:ext>
+    </p:extLst>
+  </p:cSld>
+  <p:clrMapOvr>
+    <a:masterClrMapping/>
+  </p:clrMapOvr>
+</p:sld>
+</file>
+
+<file path=ppt/slides/slide9.xml><?xml version="1.0" encoding="utf-8"?>
+<p:sld xmlns:a="http://schemas.openxmlformats.org/drawingml/2006/main" xmlns:r="http://schemas.openxmlformats.org/officeDocument/2006/relationships" xmlns:p="http://schemas.openxmlformats.org/presentationml/2006/main">
+  <p:cSld>
+    <p:spTree>
+      <p:nvGrpSpPr>
+        <p:cNvPr id="1" name=""/>
+        <p:cNvGrpSpPr/>
+        <p:nvPr/>
+      </p:nvGrpSpPr>
+      <p:grpSpPr>
+        <a:xfrm>
+          <a:off x="0" y="0"/>
+          <a:ext cx="0" cy="0"/>
+          <a:chOff x="0" y="0"/>
+          <a:chExt cx="0" cy="0"/>
+        </a:xfrm>
+      </p:grpSpPr>
+      <p:sp>
+        <p:nvSpPr>
+          <p:cNvPr id="2" name="TextBox 1">
+            <a:extLst>
+              <a:ext uri="{FF2B5EF4-FFF2-40B4-BE49-F238E27FC236}">
+                <a16:creationId xmlns:a16="http://schemas.microsoft.com/office/drawing/2014/main" id="{27039B50-FC3E-1B49-A3EB-FE6A2DD22EED}"/>
+              </a:ext>
+            </a:extLst>
+          </p:cNvPr>
+          <p:cNvSpPr txBox="1"/>
+          <p:nvPr/>
+        </p:nvSpPr>
+        <p:spPr>
+          <a:xfrm>
+            <a:off x="639837" y="635489"/>
+            <a:ext cx="9952020" cy="2123658"/>
+          </a:xfrm>
+          <a:prstGeom prst="rect">
+            <a:avLst/>
+          </a:prstGeom>
+          <a:noFill/>
+        </p:spPr>
+        <p:txBody>
+          <a:bodyPr wrap="none" rtlCol="0">
+            <a:spAutoFit/>
+          </a:bodyPr>
+          <a:lstStyle/>
+          <a:p>
+            <a:r>
+              <a:rPr lang="es-ES" sz="2400" u="sng" dirty="0"/>
+              <a:t>Ventajas de Virtual </a:t>
+            </a:r>
+            <a:r>
+              <a:rPr lang="es-ES" sz="2400" u="sng" dirty="0" err="1"/>
+              <a:t>Threads</a:t>
+            </a:r>
+            <a:r>
+              <a:rPr lang="es-ES" sz="2400" u="sng" dirty="0"/>
+              <a:t> en el servidor</a:t>
+            </a:r>
+          </a:p>
+          <a:p>
+            <a:pPr marL="319088" indent="-131763">
+              <a:buFont typeface="Arial" panose="020B0604020202020204" pitchFamily="34" charset="0"/>
+              <a:buChar char="•"/>
+            </a:pPr>
+            <a:r>
+              <a:rPr lang="es-ES" dirty="0"/>
+              <a:t>Escalabilidad: </a:t>
+            </a:r>
+            <a:r>
+              <a:rPr lang="es-ES" dirty="0" err="1"/>
+              <a:t>Tomcat</a:t>
+            </a:r>
+            <a:r>
+              <a:rPr lang="es-ES" dirty="0"/>
+              <a:t> puede manejar miles de </a:t>
+            </a:r>
+            <a:r>
+              <a:rPr lang="es-ES" dirty="0" err="1"/>
+              <a:t>requests</a:t>
+            </a:r>
+            <a:r>
+              <a:rPr lang="es-ES" dirty="0"/>
+              <a:t> concurrentes (vs ~200 con </a:t>
+            </a:r>
+            <a:r>
+              <a:rPr lang="es-ES" dirty="0" err="1"/>
+              <a:t>platform</a:t>
+            </a:r>
+            <a:r>
+              <a:rPr lang="es-ES" dirty="0"/>
+              <a:t> </a:t>
+            </a:r>
+            <a:r>
+              <a:rPr lang="es-ES" dirty="0" err="1"/>
+              <a:t>threads</a:t>
+            </a:r>
+            <a:r>
+              <a:rPr lang="es-ES" dirty="0"/>
+              <a:t>) </a:t>
+            </a:r>
+          </a:p>
+          <a:p>
+            <a:pPr marL="319088" indent="-131763">
+              <a:buFont typeface="Arial" panose="020B0604020202020204" pitchFamily="34" charset="0"/>
+              <a:buChar char="•"/>
+            </a:pPr>
+            <a:r>
+              <a:rPr lang="es-ES" dirty="0"/>
+              <a:t>Memoria eficiente: Cada virtual </a:t>
+            </a:r>
+            <a:r>
+              <a:rPr lang="es-ES" dirty="0" err="1"/>
+              <a:t>thread</a:t>
+            </a:r>
+            <a:r>
+              <a:rPr lang="es-ES" dirty="0"/>
+              <a:t> consume ~1KB (vs ~1MB de </a:t>
+            </a:r>
+            <a:r>
+              <a:rPr lang="es-ES" dirty="0" err="1"/>
+              <a:t>platform</a:t>
+            </a:r>
+            <a:r>
+              <a:rPr lang="es-ES" dirty="0"/>
+              <a:t> </a:t>
+            </a:r>
+            <a:r>
+              <a:rPr lang="es-ES" dirty="0" err="1"/>
+              <a:t>threads</a:t>
+            </a:r>
+            <a:r>
+              <a:rPr lang="es-ES" dirty="0"/>
+              <a:t>) </a:t>
+            </a:r>
+          </a:p>
+          <a:p>
+            <a:pPr marL="319088" indent="-131763">
+              <a:buFont typeface="Arial" panose="020B0604020202020204" pitchFamily="34" charset="0"/>
+              <a:buChar char="•"/>
+            </a:pPr>
+            <a:r>
+              <a:rPr lang="es-ES" dirty="0"/>
+              <a:t>Sin límite de </a:t>
+            </a:r>
+            <a:r>
+              <a:rPr lang="es-ES" dirty="0" err="1"/>
+              <a:t>threads</a:t>
+            </a:r>
+            <a:r>
+              <a:rPr lang="es-ES" dirty="0"/>
+              <a:t>: No hay pool </a:t>
+            </a:r>
+            <a:r>
+              <a:rPr lang="es-ES" dirty="0" err="1"/>
+              <a:t>size</a:t>
+            </a:r>
+            <a:r>
+              <a:rPr lang="es-ES" dirty="0"/>
+              <a:t> que configurar </a:t>
+            </a:r>
+          </a:p>
+          <a:p>
+            <a:pPr marL="319088" indent="-131763">
+              <a:buFont typeface="Arial" panose="020B0604020202020204" pitchFamily="34" charset="0"/>
+              <a:buChar char="•"/>
+            </a:pPr>
+            <a:r>
+              <a:rPr lang="es-ES" dirty="0"/>
+              <a:t>CPU eficiente: Mejor utilización en escenarios I/O-</a:t>
+            </a:r>
+            <a:r>
+              <a:rPr lang="es-ES" dirty="0" err="1"/>
+              <a:t>bound</a:t>
+            </a:r>
+            <a:r>
+              <a:rPr lang="es-ES" dirty="0"/>
+              <a:t> </a:t>
+            </a:r>
+          </a:p>
+          <a:p>
+            <a:pPr marL="319088" indent="-131763">
+              <a:buFont typeface="Arial" panose="020B0604020202020204" pitchFamily="34" charset="0"/>
+              <a:buChar char="•"/>
+            </a:pPr>
+            <a:r>
+              <a:rPr lang="es-ES" dirty="0"/>
+              <a:t>Código simple: Sin cambios en el código del servicio</a:t>
+            </a:r>
+          </a:p>
+          <a:p>
+            <a:endParaRPr lang="en-GB" dirty="0"/>
+          </a:p>
+        </p:txBody>
+      </p:sp>
+    </p:spTree>
+    <p:extLst>
+      <p:ext uri="{BB962C8B-B14F-4D97-AF65-F5344CB8AC3E}">
+        <p14:creationId xmlns:p14="http://schemas.microsoft.com/office/powerpoint/2010/main" val="2757578057"/>
       </p:ext>
     </p:extLst>
   </p:cSld>
@@ -5735,4 +8483,299 @@
     </a:ext>
   </a:extLst>
 </a:theme>
+</file>
+
+<file path=ppt/theme/theme2.xml><?xml version="1.0" encoding="utf-8"?>
+<a:theme xmlns:a="http://schemas.openxmlformats.org/drawingml/2006/main" name="Office Theme">
+  <a:themeElements>
+    <a:clrScheme name="Office">
+      <a:dk1>
+        <a:sysClr val="windowText" lastClr="000000"/>
+      </a:dk1>
+      <a:lt1>
+        <a:sysClr val="window" lastClr="FFFFFF"/>
+      </a:lt1>
+      <a:dk2>
+        <a:srgbClr val="44546A"/>
+      </a:dk2>
+      <a:lt2>
+        <a:srgbClr val="E7E6E6"/>
+      </a:lt2>
+      <a:accent1>
+        <a:srgbClr val="4472C4"/>
+      </a:accent1>
+      <a:accent2>
+        <a:srgbClr val="ED7D31"/>
+      </a:accent2>
+      <a:accent3>
+        <a:srgbClr val="A5A5A5"/>
+      </a:accent3>
+      <a:accent4>
+        <a:srgbClr val="FFC000"/>
+      </a:accent4>
+      <a:accent5>
+        <a:srgbClr val="5B9BD5"/>
+      </a:accent5>
+      <a:accent6>
+        <a:srgbClr val="70AD47"/>
+      </a:accent6>
+      <a:hlink>
+        <a:srgbClr val="0563C1"/>
+      </a:hlink>
+      <a:folHlink>
+        <a:srgbClr val="954F72"/>
+      </a:folHlink>
+    </a:clrScheme>
+    <a:fontScheme name="Office">
+      <a:majorFont>
+        <a:latin typeface="Calibri Light" panose="020F0302020204030204"/>
+        <a:ea typeface=""/>
+        <a:cs typeface=""/>
+        <a:font script="Jpan" typeface="游ゴシック Light"/>
+        <a:font script="Hang" typeface="맑은 고딕"/>
+        <a:font script="Hans" typeface="等线 Light"/>
+        <a:font script="Hant" typeface="新細明體"/>
+        <a:font script="Arab" typeface="Times New Roman"/>
+        <a:font script="Hebr" typeface="Times New Roman"/>
+        <a:font script="Thai" typeface="Angsana New"/>
+        <a:font script="Ethi" typeface="Nyala"/>
+        <a:font script="Beng" typeface="Vrinda"/>
+        <a:font script="Gujr" typeface="Shruti"/>
+        <a:font script="Khmr" typeface="MoolBoran"/>
+        <a:font script="Knda" typeface="Tunga"/>
+        <a:font script="Guru" typeface="Raavi"/>
+        <a:font script="Cans" typeface="Euphemia"/>
+        <a:font script="Cher" typeface="Plantagenet Cherokee"/>
+        <a:font script="Yiii" typeface="Microsoft Yi Baiti"/>
+        <a:font script="Tibt" typeface="Microsoft Himalaya"/>
+        <a:font script="Thaa" typeface="MV Boli"/>
+        <a:font script="Deva" typeface="Mangal"/>
+        <a:font script="Telu" typeface="Gautami"/>
+        <a:font script="Taml" typeface="Latha"/>
+        <a:font script="Syrc" typeface="Estrangelo Edessa"/>
+        <a:font script="Orya" typeface="Kalinga"/>
+        <a:font script="Mlym" typeface="Kartika"/>
+        <a:font script="Laoo" typeface="DokChampa"/>
+        <a:font script="Sinh" typeface="Iskoola Pota"/>
+        <a:font script="Mong" typeface="Mongolian Baiti"/>
+        <a:font script="Viet" typeface="Times New Roman"/>
+        <a:font script="Uigh" typeface="Microsoft Uighur"/>
+        <a:font script="Geor" typeface="Sylfaen"/>
+        <a:font script="Armn" typeface="Arial"/>
+        <a:font script="Bugi" typeface="Leelawadee UI"/>
+        <a:font script="Bopo" typeface="Microsoft JhengHei"/>
+        <a:font script="Java" typeface="Javanese Text"/>
+        <a:font script="Lisu" typeface="Segoe UI"/>
+        <a:font script="Mymr" typeface="Myanmar Text"/>
+        <a:font script="Nkoo" typeface="Ebrima"/>
+        <a:font script="Olck" typeface="Nirmala UI"/>
+        <a:font script="Osma" typeface="Ebrima"/>
+        <a:font script="Phag" typeface="Phagspa"/>
+        <a:font script="Syrn" typeface="Estrangelo Edessa"/>
+        <a:font script="Syrj" typeface="Estrangelo Edessa"/>
+        <a:font script="Syre" typeface="Estrangelo Edessa"/>
+        <a:font script="Sora" typeface="Nirmala UI"/>
+        <a:font script="Tale" typeface="Microsoft Tai Le"/>
+        <a:font script="Talu" typeface="Microsoft New Tai Lue"/>
+        <a:font script="Tfng" typeface="Ebrima"/>
+      </a:majorFont>
+      <a:minorFont>
+        <a:latin typeface="Calibri" panose="020F0502020204030204"/>
+        <a:ea typeface=""/>
+        <a:cs typeface=""/>
+        <a:font script="Jpan" typeface="游ゴシック"/>
+        <a:font script="Hang" typeface="맑은 고딕"/>
+        <a:font script="Hans" typeface="等线"/>
+        <a:font script="Hant" typeface="新細明體"/>
+        <a:font script="Arab" typeface="Arial"/>
+        <a:font script="Hebr" typeface="Arial"/>
+        <a:font script="Thai" typeface="Cordia New"/>
+        <a:font script="Ethi" typeface="Nyala"/>
+        <a:font script="Beng" typeface="Vrinda"/>
+        <a:font script="Gujr" typeface="Shruti"/>
+        <a:font script="Khmr" typeface="DaunPenh"/>
+        <a:font script="Knda" typeface="Tunga"/>
+        <a:font script="Guru" typeface="Raavi"/>
+        <a:font script="Cans" typeface="Euphemia"/>
+        <a:font script="Cher" typeface="Plantagenet Cherokee"/>
+        <a:font script="Yiii" typeface="Microsoft Yi Baiti"/>
+        <a:font script="Tibt" typeface="Microsoft Himalaya"/>
+        <a:font script="Thaa" typeface="MV Boli"/>
+        <a:font script="Deva" typeface="Mangal"/>
+        <a:font script="Telu" typeface="Gautami"/>
+        <a:font script="Taml" typeface="Latha"/>
+        <a:font script="Syrc" typeface="Estrangelo Edessa"/>
+        <a:font script="Orya" typeface="Kalinga"/>
+        <a:font script="Mlym" typeface="Kartika"/>
+        <a:font script="Laoo" typeface="DokChampa"/>
+        <a:font script="Sinh" typeface="Iskoola Pota"/>
+        <a:font script="Mong" typeface="Mongolian Baiti"/>
+        <a:font script="Viet" typeface="Arial"/>
+        <a:font script="Uigh" typeface="Microsoft Uighur"/>
+        <a:font script="Geor" typeface="Sylfaen"/>
+        <a:font script="Armn" typeface="Arial"/>
+        <a:font script="Bugi" typeface="Leelawadee UI"/>
+        <a:font script="Bopo" typeface="Microsoft JhengHei"/>
+        <a:font script="Java" typeface="Javanese Text"/>
+        <a:font script="Lisu" typeface="Segoe UI"/>
+        <a:font script="Mymr" typeface="Myanmar Text"/>
+        <a:font script="Nkoo" typeface="Ebrima"/>
+        <a:font script="Olck" typeface="Nirmala UI"/>
+        <a:font script="Osma" typeface="Ebrima"/>
+        <a:font script="Phag" typeface="Phagspa"/>
+        <a:font script="Syrn" typeface="Estrangelo Edessa"/>
+        <a:font script="Syrj" typeface="Estrangelo Edessa"/>
+        <a:font script="Syre" typeface="Estrangelo Edessa"/>
+        <a:font script="Sora" typeface="Nirmala UI"/>
+        <a:font script="Tale" typeface="Microsoft Tai Le"/>
+        <a:font script="Talu" typeface="Microsoft New Tai Lue"/>
+        <a:font script="Tfng" typeface="Ebrima"/>
+      </a:minorFont>
+    </a:fontScheme>
+    <a:fmtScheme name="Office">
+      <a:fillStyleLst>
+        <a:solidFill>
+          <a:schemeClr val="phClr"/>
+        </a:solidFill>
+        <a:gradFill rotWithShape="1">
+          <a:gsLst>
+            <a:gs pos="0">
+              <a:schemeClr val="phClr">
+                <a:lumMod val="110000"/>
+                <a:satMod val="105000"/>
+                <a:tint val="67000"/>
+              </a:schemeClr>
+            </a:gs>
+            <a:gs pos="50000">
+              <a:schemeClr val="phClr">
+                <a:lumMod val="105000"/>
+                <a:satMod val="103000"/>
+                <a:tint val="73000"/>
+              </a:schemeClr>
+            </a:gs>
+            <a:gs pos="100000">
+              <a:schemeClr val="phClr">
+                <a:lumMod val="105000"/>
+                <a:satMod val="109000"/>
+                <a:tint val="81000"/>
+              </a:schemeClr>
+            </a:gs>
+          </a:gsLst>
+          <a:lin ang="5400000" scaled="0"/>
+        </a:gradFill>
+        <a:gradFill rotWithShape="1">
+          <a:gsLst>
+            <a:gs pos="0">
+              <a:schemeClr val="phClr">
+                <a:satMod val="103000"/>
+                <a:lumMod val="102000"/>
+                <a:tint val="94000"/>
+              </a:schemeClr>
+            </a:gs>
+            <a:gs pos="50000">
+              <a:schemeClr val="phClr">
+                <a:satMod val="110000"/>
+                <a:lumMod val="100000"/>
+                <a:shade val="100000"/>
+              </a:schemeClr>
+            </a:gs>
+            <a:gs pos="100000">
+              <a:schemeClr val="phClr">
+                <a:lumMod val="99000"/>
+                <a:satMod val="120000"/>
+                <a:shade val="78000"/>
+              </a:schemeClr>
+            </a:gs>
+          </a:gsLst>
+          <a:lin ang="5400000" scaled="0"/>
+        </a:gradFill>
+      </a:fillStyleLst>
+      <a:lnStyleLst>
+        <a:ln w="6350" cap="flat" cmpd="sng" algn="ctr">
+          <a:solidFill>
+            <a:schemeClr val="phClr"/>
+          </a:solidFill>
+          <a:prstDash val="solid"/>
+          <a:miter lim="800000"/>
+        </a:ln>
+        <a:ln w="12700" cap="flat" cmpd="sng" algn="ctr">
+          <a:solidFill>
+            <a:schemeClr val="phClr"/>
+          </a:solidFill>
+          <a:prstDash val="solid"/>
+          <a:miter lim="800000"/>
+        </a:ln>
+        <a:ln w="19050" cap="flat" cmpd="sng" algn="ctr">
+          <a:solidFill>
+            <a:schemeClr val="phClr"/>
+          </a:solidFill>
+          <a:prstDash val="solid"/>
+          <a:miter lim="800000"/>
+        </a:ln>
+      </a:lnStyleLst>
+      <a:effectStyleLst>
+        <a:effectStyle>
+          <a:effectLst/>
+        </a:effectStyle>
+        <a:effectStyle>
+          <a:effectLst/>
+        </a:effectStyle>
+        <a:effectStyle>
+          <a:effectLst>
+            <a:outerShdw blurRad="57150" dist="19050" dir="5400000" algn="ctr" rotWithShape="0">
+              <a:srgbClr val="000000">
+                <a:alpha val="63000"/>
+              </a:srgbClr>
+            </a:outerShdw>
+          </a:effectLst>
+        </a:effectStyle>
+      </a:effectStyleLst>
+      <a:bgFillStyleLst>
+        <a:solidFill>
+          <a:schemeClr val="phClr"/>
+        </a:solidFill>
+        <a:solidFill>
+          <a:schemeClr val="phClr">
+            <a:tint val="95000"/>
+            <a:satMod val="170000"/>
+          </a:schemeClr>
+        </a:solidFill>
+        <a:gradFill rotWithShape="1">
+          <a:gsLst>
+            <a:gs pos="0">
+              <a:schemeClr val="phClr">
+                <a:tint val="93000"/>
+                <a:satMod val="150000"/>
+                <a:shade val="98000"/>
+                <a:lumMod val="102000"/>
+              </a:schemeClr>
+            </a:gs>
+            <a:gs pos="50000">
+              <a:schemeClr val="phClr">
+                <a:tint val="98000"/>
+                <a:satMod val="130000"/>
+                <a:shade val="90000"/>
+                <a:lumMod val="103000"/>
+              </a:schemeClr>
+            </a:gs>
+            <a:gs pos="100000">
+              <a:schemeClr val="phClr">
+                <a:shade val="63000"/>
+                <a:satMod val="120000"/>
+              </a:schemeClr>
+            </a:gs>
+          </a:gsLst>
+          <a:lin ang="5400000" scaled="0"/>
+        </a:gradFill>
+      </a:bgFillStyleLst>
+    </a:fmtScheme>
+  </a:themeElements>
+  <a:objectDefaults/>
+  <a:extraClrSchemeLst/>
+  <a:extLst>
+    <a:ext uri="{05A4C25C-085E-4340-85A3-A5531E510DB2}">
+      <thm15:themeFamily xmlns:thm15="http://schemas.microsoft.com/office/thememl/2012/main" name="Office Theme" id="{62F939B6-93AF-4DB8-9C6B-D6C7DFDC589F}" vid="{4A3C46E8-61CC-4603-A589-7422A47A8E4A}"/>
+    </a:ext>
+  </a:extLst>
+</a:theme>
 </file>
--- a/Presentation1.pptx
+++ b/Presentation1.pptx
@@ -9,9 +9,9 @@
   </p:notesMasterIdLst>
   <p:sldIdLst>
     <p:sldId id="264" r:id="rId2"/>
-    <p:sldId id="263" r:id="rId3"/>
-    <p:sldId id="265" r:id="rId4"/>
-    <p:sldId id="259" r:id="rId5"/>
+    <p:sldId id="259" r:id="rId3"/>
+    <p:sldId id="263" r:id="rId4"/>
+    <p:sldId id="265" r:id="rId5"/>
     <p:sldId id="257" r:id="rId6"/>
     <p:sldId id="262" r:id="rId7"/>
     <p:sldId id="266" r:id="rId8"/>
@@ -608,7 +608,7 @@
           <a:p>
             <a:fld id="{40EDBA48-FC82-C141-A3E2-4707AEA1C46D}" type="slidenum">
               <a:rPr lang="en-GB" smtClean="0"/>
-              <a:t>4</a:t>
+              <a:t>2</a:t>
             </a:fld>
             <a:endParaRPr lang="en-GB"/>
           </a:p>
@@ -3884,8 +3884,8 @@
         </p:blipFill>
         <p:spPr>
           <a:xfrm>
-            <a:off x="1016000" y="1149350"/>
-            <a:ext cx="10160000" cy="4559300"/>
+            <a:off x="422875" y="630366"/>
+            <a:ext cx="11427035" cy="5127882"/>
           </a:xfrm>
           <a:prstGeom prst="rect">
             <a:avLst/>
@@ -4142,263 +4142,6 @@
           <a:chExt cx="0" cy="0"/>
         </a:xfrm>
       </p:grpSpPr>
-      <p:pic>
-        <p:nvPicPr>
-          <p:cNvPr id="4" name="Picture 3">
-            <a:extLst>
-              <a:ext uri="{FF2B5EF4-FFF2-40B4-BE49-F238E27FC236}">
-                <a16:creationId xmlns:a16="http://schemas.microsoft.com/office/drawing/2014/main" id="{C8AFA5A4-138F-4A46-BA0C-4D57D3EE4C25}"/>
-              </a:ext>
-            </a:extLst>
-          </p:cNvPr>
-          <p:cNvPicPr>
-            <a:picLocks noChangeAspect="1"/>
-          </p:cNvPicPr>
-          <p:nvPr/>
-        </p:nvPicPr>
-        <p:blipFill>
-          <a:blip r:embed="rId2"/>
-          <a:stretch>
-            <a:fillRect/>
-          </a:stretch>
-        </p:blipFill>
-        <p:spPr>
-          <a:xfrm>
-            <a:off x="728363" y="479339"/>
-            <a:ext cx="10414000" cy="2019300"/>
-          </a:xfrm>
-          <a:prstGeom prst="rect">
-            <a:avLst/>
-          </a:prstGeom>
-        </p:spPr>
-      </p:pic>
-      <p:pic>
-        <p:nvPicPr>
-          <p:cNvPr id="5" name="Picture 4">
-            <a:extLst>
-              <a:ext uri="{FF2B5EF4-FFF2-40B4-BE49-F238E27FC236}">
-                <a16:creationId xmlns:a16="http://schemas.microsoft.com/office/drawing/2014/main" id="{5AB36F07-7C9B-014C-AB3F-B032DC0ADE1B}"/>
-              </a:ext>
-            </a:extLst>
-          </p:cNvPr>
-          <p:cNvPicPr>
-            <a:picLocks noChangeAspect="1"/>
-          </p:cNvPicPr>
-          <p:nvPr/>
-        </p:nvPicPr>
-        <p:blipFill>
-          <a:blip r:embed="rId3"/>
-          <a:stretch>
-            <a:fillRect/>
-          </a:stretch>
-        </p:blipFill>
-        <p:spPr>
-          <a:xfrm>
-            <a:off x="728363" y="4253128"/>
-            <a:ext cx="8775700" cy="2108200"/>
-          </a:xfrm>
-          <a:prstGeom prst="rect">
-            <a:avLst/>
-          </a:prstGeom>
-        </p:spPr>
-      </p:pic>
-      <p:sp>
-        <p:nvSpPr>
-          <p:cNvPr id="6" name="TextBox 5">
-            <a:extLst>
-              <a:ext uri="{FF2B5EF4-FFF2-40B4-BE49-F238E27FC236}">
-                <a16:creationId xmlns:a16="http://schemas.microsoft.com/office/drawing/2014/main" id="{E2EDDC79-8B5E-9644-88FA-3C768D3B9CBD}"/>
-              </a:ext>
-            </a:extLst>
-          </p:cNvPr>
-          <p:cNvSpPr txBox="1"/>
-          <p:nvPr/>
-        </p:nvSpPr>
-        <p:spPr>
-          <a:xfrm>
-            <a:off x="728363" y="3064475"/>
-            <a:ext cx="1909625" cy="369332"/>
-          </a:xfrm>
-          <a:prstGeom prst="rect">
-            <a:avLst/>
-          </a:prstGeom>
-          <a:noFill/>
-        </p:spPr>
-        <p:txBody>
-          <a:bodyPr wrap="none" rtlCol="0">
-            <a:spAutoFit/>
-          </a:bodyPr>
-          <a:lstStyle>
-            <a:defPPr>
-              <a:defRPr lang="es-ES"/>
-            </a:defPPr>
-            <a:lvl1pPr>
-              <a:defRPr sz="2400"/>
-            </a:lvl1pPr>
-          </a:lstStyle>
-          <a:p>
-            <a:r>
-              <a:rPr lang="en-GB" dirty="0"/>
-              <a:t>Reactive Style ;) ;) </a:t>
-            </a:r>
-          </a:p>
-        </p:txBody>
-      </p:sp>
-      <p:sp>
-        <p:nvSpPr>
-          <p:cNvPr id="7" name="TextBox 6">
-            <a:extLst>
-              <a:ext uri="{FF2B5EF4-FFF2-40B4-BE49-F238E27FC236}">
-                <a16:creationId xmlns:a16="http://schemas.microsoft.com/office/drawing/2014/main" id="{6CC465C3-2C00-024B-87BE-E8995813F92A}"/>
-              </a:ext>
-            </a:extLst>
-          </p:cNvPr>
-          <p:cNvSpPr txBox="1"/>
-          <p:nvPr/>
-        </p:nvSpPr>
-        <p:spPr>
-          <a:xfrm>
-            <a:off x="610479" y="47719"/>
-            <a:ext cx="3050259" cy="461665"/>
-          </a:xfrm>
-          <a:prstGeom prst="rect">
-            <a:avLst/>
-          </a:prstGeom>
-          <a:noFill/>
-        </p:spPr>
-        <p:txBody>
-          <a:bodyPr wrap="none" rtlCol="0">
-            <a:spAutoFit/>
-          </a:bodyPr>
-          <a:lstStyle/>
-          <a:p>
-            <a:r>
-              <a:rPr lang="en-GB" sz="2400" dirty="0"/>
-              <a:t>Using platform threads</a:t>
-            </a:r>
-          </a:p>
-        </p:txBody>
-      </p:sp>
-      <p:pic>
-        <p:nvPicPr>
-          <p:cNvPr id="8" name="Picture 7">
-            <a:extLst>
-              <a:ext uri="{FF2B5EF4-FFF2-40B4-BE49-F238E27FC236}">
-                <a16:creationId xmlns:a16="http://schemas.microsoft.com/office/drawing/2014/main" id="{946A13D5-D299-F144-BAFE-33FE869F7417}"/>
-              </a:ext>
-            </a:extLst>
-          </p:cNvPr>
-          <p:cNvPicPr>
-            <a:picLocks noChangeAspect="1"/>
-          </p:cNvPicPr>
-          <p:nvPr/>
-        </p:nvPicPr>
-        <p:blipFill>
-          <a:blip r:embed="rId4"/>
-          <a:stretch>
-            <a:fillRect/>
-          </a:stretch>
-        </p:blipFill>
-        <p:spPr>
-          <a:xfrm>
-            <a:off x="728363" y="3488899"/>
-            <a:ext cx="9575800" cy="558800"/>
-          </a:xfrm>
-          <a:prstGeom prst="rect">
-            <a:avLst/>
-          </a:prstGeom>
-        </p:spPr>
-      </p:pic>
-      <p:pic>
-        <p:nvPicPr>
-          <p:cNvPr id="9" name="Picture 8">
-            <a:extLst>
-              <a:ext uri="{FF2B5EF4-FFF2-40B4-BE49-F238E27FC236}">
-                <a16:creationId xmlns:a16="http://schemas.microsoft.com/office/drawing/2014/main" id="{24146B7A-2CD1-1C44-AA7A-956959DCB856}"/>
-              </a:ext>
-            </a:extLst>
-          </p:cNvPr>
-          <p:cNvPicPr>
-            <a:picLocks noChangeAspect="1"/>
-          </p:cNvPicPr>
-          <p:nvPr/>
-        </p:nvPicPr>
-        <p:blipFill>
-          <a:blip r:embed="rId5"/>
-          <a:stretch>
-            <a:fillRect/>
-          </a:stretch>
-        </p:blipFill>
-        <p:spPr>
-          <a:xfrm>
-            <a:off x="10905699" y="5421228"/>
-            <a:ext cx="1286301" cy="1286301"/>
-          </a:xfrm>
-          <a:prstGeom prst="rect">
-            <a:avLst/>
-          </a:prstGeom>
-        </p:spPr>
-      </p:pic>
-    </p:spTree>
-    <p:extLst>
-      <p:ext uri="{BB962C8B-B14F-4D97-AF65-F5344CB8AC3E}">
-        <p14:creationId xmlns:p14="http://schemas.microsoft.com/office/powerpoint/2010/main" val="2167579309"/>
-      </p:ext>
-    </p:extLst>
-  </p:cSld>
-  <p:clrMapOvr>
-    <a:masterClrMapping/>
-  </p:clrMapOvr>
-</p:sld>
-</file>
-
-<file path=ppt/slides/slide3.xml><?xml version="1.0" encoding="utf-8"?>
-<p:sld xmlns:a="http://schemas.openxmlformats.org/drawingml/2006/main" xmlns:r="http://schemas.openxmlformats.org/officeDocument/2006/relationships" xmlns:p="http://schemas.openxmlformats.org/presentationml/2006/main">
-  <p:cSld>
-    <p:spTree>
-      <p:nvGrpSpPr>
-        <p:cNvPr id="1" name=""/>
-        <p:cNvGrpSpPr/>
-        <p:nvPr/>
-      </p:nvGrpSpPr>
-      <p:grpSpPr>
-        <a:xfrm>
-          <a:off x="0" y="0"/>
-          <a:ext cx="0" cy="0"/>
-          <a:chOff x="0" y="0"/>
-          <a:chExt cx="0" cy="0"/>
-        </a:xfrm>
-      </p:grpSpPr>
-    </p:spTree>
-    <p:extLst>
-      <p:ext uri="{BB962C8B-B14F-4D97-AF65-F5344CB8AC3E}">
-        <p14:creationId xmlns:p14="http://schemas.microsoft.com/office/powerpoint/2010/main" val="2450036938"/>
-      </p:ext>
-    </p:extLst>
-  </p:cSld>
-  <p:clrMapOvr>
-    <a:masterClrMapping/>
-  </p:clrMapOvr>
-</p:sld>
-</file>
-
-<file path=ppt/slides/slide4.xml><?xml version="1.0" encoding="utf-8"?>
-<p:sld xmlns:a="http://schemas.openxmlformats.org/drawingml/2006/main" xmlns:r="http://schemas.openxmlformats.org/officeDocument/2006/relationships" xmlns:p="http://schemas.openxmlformats.org/presentationml/2006/main">
-  <p:cSld>
-    <p:spTree>
-      <p:nvGrpSpPr>
-        <p:cNvPr id="1" name=""/>
-        <p:cNvGrpSpPr/>
-        <p:nvPr/>
-      </p:nvGrpSpPr>
-      <p:grpSpPr>
-        <a:xfrm>
-          <a:off x="0" y="0"/>
-          <a:ext cx="0" cy="0"/>
-          <a:chOff x="0" y="0"/>
-          <a:chExt cx="0" cy="0"/>
-        </a:xfrm>
-      </p:grpSpPr>
       <p:graphicFrame>
         <p:nvGraphicFramePr>
           <p:cNvPr id="2" name="Table 1">
@@ -4414,14 +4157,14 @@
           <p:nvPr>
             <p:extLst>
               <p:ext uri="{D42A27DB-BD31-4B8C-83A1-F6EECF244321}">
-                <p14:modId xmlns:p14="http://schemas.microsoft.com/office/powerpoint/2010/main" val="1134143647"/>
+                <p14:modId xmlns:p14="http://schemas.microsoft.com/office/powerpoint/2010/main" val="3100079147"/>
               </p:ext>
             </p:extLst>
           </p:nvPr>
         </p:nvGraphicFramePr>
         <p:xfrm>
           <a:off x="516925" y="232484"/>
-          <a:ext cx="10515600" cy="6370320"/>
+          <a:ext cx="10515600" cy="5730240"/>
         </p:xfrm>
         <a:graphic>
           <a:graphicData uri="http://schemas.openxmlformats.org/drawingml/2006/table">
@@ -4681,8 +4424,20 @@
                     <a:lstStyle/>
                     <a:p>
                       <a:r>
-                        <a:rPr lang="es-ES"/>
-                        <a:t>RestTemplate (blocking)</a:t>
+                        <a:rPr lang="es-ES" dirty="0" err="1"/>
+                        <a:t>RestTemplate</a:t>
+                      </a:r>
+                      <a:r>
+                        <a:rPr lang="es-ES" dirty="0"/>
+                        <a:t> (</a:t>
+                      </a:r>
+                      <a:r>
+                        <a:rPr lang="es-ES" dirty="0" err="1"/>
+                        <a:t>blocking</a:t>
+                      </a:r>
+                      <a:r>
+                        <a:rPr lang="es-ES" dirty="0"/>
+                        <a:t>)</a:t>
                       </a:r>
                     </a:p>
                   </a:txBody>
@@ -4714,19 +4469,19 @@
                     <a:lstStyle/>
                     <a:p>
                       <a:r>
-                        <a:rPr lang="es-ES" dirty="0" err="1"/>
+                        <a:rPr lang="es-ES" sz="1600" dirty="0" err="1"/>
                         <a:t>LoadResponse</a:t>
                       </a:r>
                       <a:r>
-                        <a:rPr lang="es-ES" dirty="0"/>
+                        <a:rPr lang="es-ES" sz="1600" dirty="0"/>
                         <a:t> </a:t>
                       </a:r>
                       <a:r>
-                        <a:rPr lang="es-ES" dirty="0" err="1"/>
+                        <a:rPr lang="es-ES" sz="1600" dirty="0" err="1"/>
                         <a:t>executeLoad</a:t>
                       </a:r>
                       <a:r>
-                        <a:rPr lang="es-ES" dirty="0"/>
+                        <a:rPr lang="es-ES" sz="1600" dirty="0"/>
                         <a:t>()</a:t>
                       </a:r>
                     </a:p>
@@ -4739,8 +4494,24 @@
                     <a:lstStyle/>
                     <a:p>
                       <a:r>
-                        <a:rPr lang="es-ES"/>
-                        <a:t>Mono&lt;LoadResponse&gt; executeLoad()</a:t>
+                        <a:rPr lang="es-ES" sz="1200" dirty="0"/>
+                        <a:t>Mono&lt;</a:t>
+                      </a:r>
+                      <a:r>
+                        <a:rPr lang="es-ES" sz="1200" dirty="0" err="1"/>
+                        <a:t>LoadResponse</a:t>
+                      </a:r>
+                      <a:r>
+                        <a:rPr lang="es-ES" sz="1200" dirty="0"/>
+                        <a:t>&gt; </a:t>
+                      </a:r>
+                      <a:r>
+                        <a:rPr lang="es-ES" sz="1200" dirty="0" err="1"/>
+                        <a:t>executeLoad</a:t>
+                      </a:r>
+                      <a:r>
+                        <a:rPr lang="es-ES" sz="1200" dirty="0"/>
+                        <a:t>()</a:t>
                       </a:r>
                     </a:p>
                   </a:txBody>
@@ -4752,8 +4523,20 @@
                     <a:lstStyle/>
                     <a:p>
                       <a:r>
-                        <a:rPr lang="es-ES"/>
-                        <a:t>LoadResponse executeLoad()</a:t>
+                        <a:rPr lang="es-ES" sz="1600" dirty="0" err="1"/>
+                        <a:t>LoadResponse</a:t>
+                      </a:r>
+                      <a:r>
+                        <a:rPr lang="es-ES" sz="1600" dirty="0"/>
+                        <a:t> </a:t>
+                      </a:r>
+                      <a:r>
+                        <a:rPr lang="es-ES" sz="1600" dirty="0" err="1"/>
+                        <a:t>executeLoad</a:t>
+                      </a:r>
+                      <a:r>
+                        <a:rPr lang="es-ES" sz="1600" dirty="0"/>
+                        <a:t>()</a:t>
                       </a:r>
                     </a:p>
                   </a:txBody>
@@ -4798,7 +4581,7 @@
                     <a:lstStyle/>
                     <a:p>
                       <a:r>
-                        <a:rPr lang="es-ES"/>
+                        <a:rPr lang="es-ES" dirty="0"/>
                         <a:t>Funcional/reactivo</a:t>
                       </a:r>
                     </a:p>
@@ -5304,7 +5087,7 @@
                         </a:rPr>
                       </a:br>
                       <a:r>
-                        <a:rPr lang="en-GB" sz="1800" kern="1200" dirty="0" err="1">
+                        <a:rPr lang="en-GB" sz="1600" kern="1200" dirty="0" err="1">
                           <a:solidFill>
                             <a:schemeClr val="tx1"/>
                           </a:solidFill>
@@ -5418,7 +5201,7 @@
                     <a:lstStyle/>
                     <a:p>
                       <a:r>
-                        <a:rPr lang="en-GB" sz="1800" kern="1200" dirty="0">
+                        <a:rPr lang="en-GB" sz="1600" kern="1200" dirty="0">
                           <a:solidFill>
                             <a:schemeClr val="tx1"/>
                           </a:solidFill>
@@ -5428,37 +5211,14 @@
                         </a:rPr>
                         <a:t>default</a:t>
                       </a:r>
-                    </a:p>
-                  </a:txBody>
-                  <a:tcPr/>
-                </a:tc>
-                <a:tc>
-                  <a:txBody>
-                    <a:bodyPr/>
-                    <a:lstStyle/>
-                    <a:p>
-                      <a:r>
-                        <a:rPr lang="en-GB" sz="1800" kern="1200" dirty="0" err="1">
-                          <a:solidFill>
-                            <a:schemeClr val="tx1"/>
-                          </a:solidFill>
-                          <a:latin typeface="+mn-lt"/>
-                          <a:ea typeface="+mn-ea"/>
-                          <a:cs typeface="+mn-cs"/>
-                        </a:rPr>
-                        <a:t>spring.threads.virtual.enabled</a:t>
-                      </a:r>
-                      <a:r>
-                        <a:rPr lang="en-GB" sz="1800" kern="1200" dirty="0">
-                          <a:solidFill>
-                            <a:schemeClr val="tx1"/>
-                          </a:solidFill>
-                          <a:latin typeface="+mn-lt"/>
-                          <a:ea typeface="+mn-ea"/>
-                          <a:cs typeface="+mn-cs"/>
-                        </a:rPr>
-                        <a:t>: true</a:t>
-                      </a:r>
+                      <a:endParaRPr lang="en-GB" sz="2000" kern="1200" dirty="0">
+                        <a:solidFill>
+                          <a:schemeClr val="tx1"/>
+                        </a:solidFill>
+                        <a:latin typeface="+mn-lt"/>
+                        <a:ea typeface="+mn-ea"/>
+                        <a:cs typeface="+mn-cs"/>
+                      </a:endParaRPr>
                     </a:p>
                   </a:txBody>
                   <a:tcPr/>
@@ -5486,7 +5246,7 @@
                         <a:defRPr/>
                       </a:pPr>
                       <a:r>
-                        <a:rPr lang="en-GB" sz="1800" kern="1200" dirty="0">
+                        <a:rPr lang="en-GB" sz="1600" kern="1200" dirty="0">
                           <a:solidFill>
                             <a:schemeClr val="tx1"/>
                           </a:solidFill>
@@ -5497,7 +5257,7 @@
                         <a:t>spring-boot-starter-</a:t>
                       </a:r>
                       <a:r>
-                        <a:rPr lang="en-GB" sz="1800" kern="1200" dirty="0" err="1">
+                        <a:rPr lang="en-GB" sz="1600" kern="1200" dirty="0" err="1">
                           <a:solidFill>
                             <a:schemeClr val="tx1"/>
                           </a:solidFill>
@@ -5507,7 +5267,92 @@
                         </a:rPr>
                         <a:t>webflux</a:t>
                       </a:r>
-                      <a:endParaRPr lang="en-GB" sz="1800" kern="1200" dirty="0">
+                      <a:endParaRPr lang="en-GB" sz="1600" kern="1200" dirty="0">
+                        <a:solidFill>
+                          <a:schemeClr val="tx1"/>
+                        </a:solidFill>
+                        <a:latin typeface="+mn-lt"/>
+                        <a:ea typeface="+mn-ea"/>
+                        <a:cs typeface="+mn-cs"/>
+                      </a:endParaRPr>
+                    </a:p>
+                    <a:p>
+                      <a:endParaRPr lang="en-GB" sz="1400" kern="1200" dirty="0">
+                        <a:solidFill>
+                          <a:schemeClr val="tx1"/>
+                        </a:solidFill>
+                        <a:latin typeface="+mn-lt"/>
+                        <a:ea typeface="+mn-ea"/>
+                        <a:cs typeface="+mn-cs"/>
+                      </a:endParaRPr>
+                    </a:p>
+                  </a:txBody>
+                  <a:tcPr/>
+                </a:tc>
+                <a:tc>
+                  <a:txBody>
+                    <a:bodyPr/>
+                    <a:lstStyle/>
+                    <a:p>
+                      <a:pPr marL="0" marR="0" lvl="0" indent="0" algn="l" defTabSz="914400" rtl="0" eaLnBrk="1" fontAlgn="auto" latinLnBrk="0" hangingPunct="1">
+                        <a:lnSpc>
+                          <a:spcPct val="100000"/>
+                        </a:lnSpc>
+                        <a:spcBef>
+                          <a:spcPts val="0"/>
+                        </a:spcBef>
+                        <a:spcAft>
+                          <a:spcPts val="0"/>
+                        </a:spcAft>
+                        <a:buClrTx/>
+                        <a:buSzTx/>
+                        <a:buFontTx/>
+                        <a:buNone/>
+                        <a:tabLst/>
+                        <a:defRPr/>
+                      </a:pPr>
+                      <a:r>
+                        <a:rPr lang="en-GB" sz="1200" kern="1200" dirty="0" err="1">
+                          <a:solidFill>
+                            <a:schemeClr val="tx1"/>
+                          </a:solidFill>
+                          <a:latin typeface="+mn-lt"/>
+                          <a:ea typeface="+mn-ea"/>
+                          <a:cs typeface="+mn-cs"/>
+                        </a:rPr>
+                        <a:t>spring.threads.virtual.enabled</a:t>
+                      </a:r>
+                      <a:r>
+                        <a:rPr lang="en-GB" sz="1200" kern="1200" dirty="0">
+                          <a:solidFill>
+                            <a:schemeClr val="tx1"/>
+                          </a:solidFill>
+                          <a:latin typeface="+mn-lt"/>
+                          <a:ea typeface="+mn-ea"/>
+                          <a:cs typeface="+mn-cs"/>
+                        </a:rPr>
+                        <a:t>: true</a:t>
+                      </a:r>
+                    </a:p>
+                    <a:p>
+                      <a:pPr marL="0" marR="0" lvl="0" indent="0" algn="l" defTabSz="914400" rtl="0" eaLnBrk="1" fontAlgn="auto" latinLnBrk="0" hangingPunct="1">
+                        <a:lnSpc>
+                          <a:spcPct val="100000"/>
+                        </a:lnSpc>
+                        <a:spcBef>
+                          <a:spcPts val="0"/>
+                        </a:spcBef>
+                        <a:spcAft>
+                          <a:spcPts val="0"/>
+                        </a:spcAft>
+                        <a:buClrTx/>
+                        <a:buSzTx/>
+                        <a:buFontTx/>
+                        <a:buNone/>
+                        <a:tabLst/>
+                        <a:defRPr/>
+                      </a:pPr>
+                      <a:endParaRPr lang="en-GB" sz="1600" kern="1200" dirty="0">
                         <a:solidFill>
                           <a:schemeClr val="tx1"/>
                         </a:solidFill>
@@ -5658,6 +5503,388 @@
     <p:extLst>
       <p:ext uri="{BB962C8B-B14F-4D97-AF65-F5344CB8AC3E}">
         <p14:creationId xmlns:p14="http://schemas.microsoft.com/office/powerpoint/2010/main" val="3397801922"/>
+      </p:ext>
+    </p:extLst>
+  </p:cSld>
+  <p:clrMapOvr>
+    <a:masterClrMapping/>
+  </p:clrMapOvr>
+</p:sld>
+</file>
+
+<file path=ppt/slides/slide3.xml><?xml version="1.0" encoding="utf-8"?>
+<p:sld xmlns:a="http://schemas.openxmlformats.org/drawingml/2006/main" xmlns:r="http://schemas.openxmlformats.org/officeDocument/2006/relationships" xmlns:p="http://schemas.openxmlformats.org/presentationml/2006/main">
+  <p:cSld>
+    <p:spTree>
+      <p:nvGrpSpPr>
+        <p:cNvPr id="1" name=""/>
+        <p:cNvGrpSpPr/>
+        <p:nvPr/>
+      </p:nvGrpSpPr>
+      <p:grpSpPr>
+        <a:xfrm>
+          <a:off x="0" y="0"/>
+          <a:ext cx="0" cy="0"/>
+          <a:chOff x="0" y="0"/>
+          <a:chExt cx="0" cy="0"/>
+        </a:xfrm>
+      </p:grpSpPr>
+      <p:pic>
+        <p:nvPicPr>
+          <p:cNvPr id="4" name="Picture 3">
+            <a:extLst>
+              <a:ext uri="{FF2B5EF4-FFF2-40B4-BE49-F238E27FC236}">
+                <a16:creationId xmlns:a16="http://schemas.microsoft.com/office/drawing/2014/main" id="{C8AFA5A4-138F-4A46-BA0C-4D57D3EE4C25}"/>
+              </a:ext>
+            </a:extLst>
+          </p:cNvPr>
+          <p:cNvPicPr>
+            <a:picLocks noChangeAspect="1"/>
+          </p:cNvPicPr>
+          <p:nvPr/>
+        </p:nvPicPr>
+        <p:blipFill>
+          <a:blip r:embed="rId2"/>
+          <a:stretch>
+            <a:fillRect/>
+          </a:stretch>
+        </p:blipFill>
+        <p:spPr>
+          <a:xfrm>
+            <a:off x="728363" y="1330089"/>
+            <a:ext cx="10414000" cy="2019300"/>
+          </a:xfrm>
+          <a:prstGeom prst="rect">
+            <a:avLst/>
+          </a:prstGeom>
+        </p:spPr>
+      </p:pic>
+      <p:pic>
+        <p:nvPicPr>
+          <p:cNvPr id="5" name="Picture 4">
+            <a:extLst>
+              <a:ext uri="{FF2B5EF4-FFF2-40B4-BE49-F238E27FC236}">
+                <a16:creationId xmlns:a16="http://schemas.microsoft.com/office/drawing/2014/main" id="{5AB36F07-7C9B-014C-AB3F-B032DC0ADE1B}"/>
+              </a:ext>
+            </a:extLst>
+          </p:cNvPr>
+          <p:cNvPicPr>
+            <a:picLocks noChangeAspect="1"/>
+          </p:cNvPicPr>
+          <p:nvPr/>
+        </p:nvPicPr>
+        <p:blipFill>
+          <a:blip r:embed="rId3"/>
+          <a:stretch>
+            <a:fillRect/>
+          </a:stretch>
+        </p:blipFill>
+        <p:spPr>
+          <a:xfrm>
+            <a:off x="728363" y="4599117"/>
+            <a:ext cx="8775700" cy="2108200"/>
+          </a:xfrm>
+          <a:prstGeom prst="rect">
+            <a:avLst/>
+          </a:prstGeom>
+        </p:spPr>
+      </p:pic>
+      <p:sp>
+        <p:nvSpPr>
+          <p:cNvPr id="6" name="TextBox 5">
+            <a:extLst>
+              <a:ext uri="{FF2B5EF4-FFF2-40B4-BE49-F238E27FC236}">
+                <a16:creationId xmlns:a16="http://schemas.microsoft.com/office/drawing/2014/main" id="{E2EDDC79-8B5E-9644-88FA-3C768D3B9CBD}"/>
+              </a:ext>
+            </a:extLst>
+          </p:cNvPr>
+          <p:cNvSpPr txBox="1"/>
+          <p:nvPr/>
+        </p:nvSpPr>
+        <p:spPr>
+          <a:xfrm>
+            <a:off x="728363" y="3491121"/>
+            <a:ext cx="3176372" cy="461665"/>
+          </a:xfrm>
+          <a:prstGeom prst="rect">
+            <a:avLst/>
+          </a:prstGeom>
+          <a:noFill/>
+        </p:spPr>
+        <p:txBody>
+          <a:bodyPr wrap="square" rtlCol="0">
+            <a:spAutoFit/>
+          </a:bodyPr>
+          <a:lstStyle>
+            <a:defPPr>
+              <a:defRPr lang="es-ES"/>
+            </a:defPPr>
+            <a:lvl1pPr>
+              <a:defRPr sz="2400"/>
+            </a:lvl1pPr>
+          </a:lstStyle>
+          <a:p>
+            <a:r>
+              <a:rPr lang="en-GB" dirty="0"/>
+              <a:t>Reactive Style ;) ;) </a:t>
+            </a:r>
+          </a:p>
+        </p:txBody>
+      </p:sp>
+      <p:sp>
+        <p:nvSpPr>
+          <p:cNvPr id="7" name="TextBox 6">
+            <a:extLst>
+              <a:ext uri="{FF2B5EF4-FFF2-40B4-BE49-F238E27FC236}">
+                <a16:creationId xmlns:a16="http://schemas.microsoft.com/office/drawing/2014/main" id="{6CC465C3-2C00-024B-87BE-E8995813F92A}"/>
+              </a:ext>
+            </a:extLst>
+          </p:cNvPr>
+          <p:cNvSpPr txBox="1"/>
+          <p:nvPr/>
+        </p:nvSpPr>
+        <p:spPr>
+          <a:xfrm>
+            <a:off x="728363" y="0"/>
+            <a:ext cx="3050259" cy="461665"/>
+          </a:xfrm>
+          <a:prstGeom prst="rect">
+            <a:avLst/>
+          </a:prstGeom>
+          <a:noFill/>
+        </p:spPr>
+        <p:txBody>
+          <a:bodyPr wrap="none" rtlCol="0">
+            <a:spAutoFit/>
+          </a:bodyPr>
+          <a:lstStyle/>
+          <a:p>
+            <a:r>
+              <a:rPr lang="en-GB" sz="2400" dirty="0"/>
+              <a:t>Using platform threads</a:t>
+            </a:r>
+          </a:p>
+        </p:txBody>
+      </p:sp>
+      <p:pic>
+        <p:nvPicPr>
+          <p:cNvPr id="8" name="Picture 7">
+            <a:extLst>
+              <a:ext uri="{FF2B5EF4-FFF2-40B4-BE49-F238E27FC236}">
+                <a16:creationId xmlns:a16="http://schemas.microsoft.com/office/drawing/2014/main" id="{946A13D5-D299-F144-BAFE-33FE869F7417}"/>
+              </a:ext>
+            </a:extLst>
+          </p:cNvPr>
+          <p:cNvPicPr>
+            <a:picLocks noChangeAspect="1"/>
+          </p:cNvPicPr>
+          <p:nvPr/>
+        </p:nvPicPr>
+        <p:blipFill>
+          <a:blip r:embed="rId4"/>
+          <a:stretch>
+            <a:fillRect/>
+          </a:stretch>
+        </p:blipFill>
+        <p:spPr>
+          <a:xfrm>
+            <a:off x="728363" y="3950385"/>
+            <a:ext cx="9575800" cy="558800"/>
+          </a:xfrm>
+          <a:prstGeom prst="rect">
+            <a:avLst/>
+          </a:prstGeom>
+        </p:spPr>
+      </p:pic>
+      <p:pic>
+        <p:nvPicPr>
+          <p:cNvPr id="9" name="Picture 8">
+            <a:extLst>
+              <a:ext uri="{FF2B5EF4-FFF2-40B4-BE49-F238E27FC236}">
+                <a16:creationId xmlns:a16="http://schemas.microsoft.com/office/drawing/2014/main" id="{24146B7A-2CD1-1C44-AA7A-956959DCB856}"/>
+              </a:ext>
+            </a:extLst>
+          </p:cNvPr>
+          <p:cNvPicPr>
+            <a:picLocks noChangeAspect="1"/>
+          </p:cNvPicPr>
+          <p:nvPr/>
+        </p:nvPicPr>
+        <p:blipFill>
+          <a:blip r:embed="rId5"/>
+          <a:stretch>
+            <a:fillRect/>
+          </a:stretch>
+        </p:blipFill>
+        <p:spPr>
+          <a:xfrm>
+            <a:off x="11142363" y="5797509"/>
+            <a:ext cx="1060491" cy="1060491"/>
+          </a:xfrm>
+          <a:prstGeom prst="rect">
+            <a:avLst/>
+          </a:prstGeom>
+        </p:spPr>
+      </p:pic>
+      <p:pic>
+        <p:nvPicPr>
+          <p:cNvPr id="2" name="Picture 1">
+            <a:extLst>
+              <a:ext uri="{FF2B5EF4-FFF2-40B4-BE49-F238E27FC236}">
+                <a16:creationId xmlns:a16="http://schemas.microsoft.com/office/drawing/2014/main" id="{B9D21B0A-C26B-514E-A656-27A5AA6EB820}"/>
+              </a:ext>
+            </a:extLst>
+          </p:cNvPr>
+          <p:cNvPicPr>
+            <a:picLocks noChangeAspect="1"/>
+          </p:cNvPicPr>
+          <p:nvPr/>
+        </p:nvPicPr>
+        <p:blipFill>
+          <a:blip r:embed="rId6"/>
+          <a:stretch>
+            <a:fillRect/>
+          </a:stretch>
+        </p:blipFill>
+        <p:spPr>
+          <a:xfrm>
+            <a:off x="728363" y="461665"/>
+            <a:ext cx="7375096" cy="818319"/>
+          </a:xfrm>
+          <a:prstGeom prst="rect">
+            <a:avLst/>
+          </a:prstGeom>
+        </p:spPr>
+      </p:pic>
+    </p:spTree>
+    <p:extLst>
+      <p:ext uri="{BB962C8B-B14F-4D97-AF65-F5344CB8AC3E}">
+        <p14:creationId xmlns:p14="http://schemas.microsoft.com/office/powerpoint/2010/main" val="2167579309"/>
+      </p:ext>
+    </p:extLst>
+  </p:cSld>
+  <p:clrMapOvr>
+    <a:masterClrMapping/>
+  </p:clrMapOvr>
+</p:sld>
+</file>
+
+<file path=ppt/slides/slide4.xml><?xml version="1.0" encoding="utf-8"?>
+<p:sld xmlns:a="http://schemas.openxmlformats.org/drawingml/2006/main" xmlns:r="http://schemas.openxmlformats.org/officeDocument/2006/relationships" xmlns:p="http://schemas.openxmlformats.org/presentationml/2006/main">
+  <p:cSld>
+    <p:spTree>
+      <p:nvGrpSpPr>
+        <p:cNvPr id="1" name=""/>
+        <p:cNvGrpSpPr/>
+        <p:nvPr/>
+      </p:nvGrpSpPr>
+      <p:grpSpPr>
+        <a:xfrm>
+          <a:off x="0" y="0"/>
+          <a:ext cx="0" cy="0"/>
+          <a:chOff x="0" y="0"/>
+          <a:chExt cx="0" cy="0"/>
+        </a:xfrm>
+      </p:grpSpPr>
+      <p:sp>
+        <p:nvSpPr>
+          <p:cNvPr id="2" name="TextBox 1">
+            <a:extLst>
+              <a:ext uri="{FF2B5EF4-FFF2-40B4-BE49-F238E27FC236}">
+                <a16:creationId xmlns:a16="http://schemas.microsoft.com/office/drawing/2014/main" id="{C8AB7093-DC35-DF4A-93E0-D7F39DBE5872}"/>
+              </a:ext>
+            </a:extLst>
+          </p:cNvPr>
+          <p:cNvSpPr txBox="1"/>
+          <p:nvPr/>
+        </p:nvSpPr>
+        <p:spPr>
+          <a:xfrm>
+            <a:off x="610479" y="47719"/>
+            <a:ext cx="2767874" cy="461665"/>
+          </a:xfrm>
+          <a:prstGeom prst="rect">
+            <a:avLst/>
+          </a:prstGeom>
+          <a:noFill/>
+        </p:spPr>
+        <p:txBody>
+          <a:bodyPr wrap="none" rtlCol="0">
+            <a:spAutoFit/>
+          </a:bodyPr>
+          <a:lstStyle/>
+          <a:p>
+            <a:r>
+              <a:rPr lang="en-GB" sz="2400" dirty="0"/>
+              <a:t>Using virtual threads</a:t>
+            </a:r>
+          </a:p>
+        </p:txBody>
+      </p:sp>
+      <p:pic>
+        <p:nvPicPr>
+          <p:cNvPr id="3" name="Picture 2">
+            <a:extLst>
+              <a:ext uri="{FF2B5EF4-FFF2-40B4-BE49-F238E27FC236}">
+                <a16:creationId xmlns:a16="http://schemas.microsoft.com/office/drawing/2014/main" id="{23E76B4A-5FBE-1E45-AF4F-6499E91E356D}"/>
+              </a:ext>
+            </a:extLst>
+          </p:cNvPr>
+          <p:cNvPicPr>
+            <a:picLocks noChangeAspect="1"/>
+          </p:cNvPicPr>
+          <p:nvPr/>
+        </p:nvPicPr>
+        <p:blipFill>
+          <a:blip r:embed="rId2"/>
+          <a:stretch>
+            <a:fillRect/>
+          </a:stretch>
+        </p:blipFill>
+        <p:spPr>
+          <a:xfrm>
+            <a:off x="610479" y="610115"/>
+            <a:ext cx="7747000" cy="571500"/>
+          </a:xfrm>
+          <a:prstGeom prst="rect">
+            <a:avLst/>
+          </a:prstGeom>
+        </p:spPr>
+      </p:pic>
+      <p:pic>
+        <p:nvPicPr>
+          <p:cNvPr id="4" name="Picture 3">
+            <a:extLst>
+              <a:ext uri="{FF2B5EF4-FFF2-40B4-BE49-F238E27FC236}">
+                <a16:creationId xmlns:a16="http://schemas.microsoft.com/office/drawing/2014/main" id="{1E80925F-A862-7246-9721-69FB18B2938E}"/>
+              </a:ext>
+            </a:extLst>
+          </p:cNvPr>
+          <p:cNvPicPr>
+            <a:picLocks noChangeAspect="1"/>
+          </p:cNvPicPr>
+          <p:nvPr/>
+        </p:nvPicPr>
+        <p:blipFill>
+          <a:blip r:embed="rId3"/>
+          <a:stretch>
+            <a:fillRect/>
+          </a:stretch>
+        </p:blipFill>
+        <p:spPr>
+          <a:xfrm>
+            <a:off x="610479" y="1282346"/>
+            <a:ext cx="9004300" cy="1663700"/>
+          </a:xfrm>
+          <a:prstGeom prst="rect">
+            <a:avLst/>
+          </a:prstGeom>
+        </p:spPr>
+      </p:pic>
+    </p:spTree>
+    <p:extLst>
+      <p:ext uri="{BB962C8B-B14F-4D97-AF65-F5344CB8AC3E}">
+        <p14:creationId xmlns:p14="http://schemas.microsoft.com/office/powerpoint/2010/main" val="2450036938"/>
       </p:ext>
     </p:extLst>
   </p:cSld>
@@ -6430,8 +6657,20 @@
                     <a:lstStyle/>
                     <a:p>
                       <a:r>
-                        <a:rPr lang="es-ES" sz="1100"/>
-                        <a:t>rate(http_server_requests_seconds_count[5m])</a:t>
+                        <a:rPr lang="es-ES" sz="1100" dirty="0" err="1"/>
+                        <a:t>rate</a:t>
+                      </a:r>
+                      <a:r>
+                        <a:rPr lang="es-ES" sz="1100" dirty="0"/>
+                        <a:t>(</a:t>
+                      </a:r>
+                      <a:r>
+                        <a:rPr lang="es-ES" sz="1100" dirty="0" err="1"/>
+                        <a:t>http_server_requests_seconds_count</a:t>
+                      </a:r>
+                      <a:r>
+                        <a:rPr lang="es-ES" sz="1100" dirty="0"/>
+                        <a:t>[5m])</a:t>
                       </a:r>
                     </a:p>
                   </a:txBody>
@@ -6808,7 +7047,7 @@
                     <a:lstStyle/>
                     <a:p>
                       <a:r>
-                        <a:rPr lang="es-ES" sz="1100"/>
+                        <a:rPr lang="es-ES" sz="1100" dirty="0"/>
                         <a:t>Sube al saturar</a:t>
                       </a:r>
                     </a:p>
@@ -6834,7 +7073,7 @@
                     <a:lstStyle/>
                     <a:p>
                       <a:r>
-                        <a:rPr lang="es-ES" sz="1100"/>
+                        <a:rPr lang="es-ES" sz="1100" dirty="0"/>
                         <a:t>Muy baja</a:t>
                       </a:r>
                     </a:p>
@@ -7613,36 +7852,6 @@
       </p:grpSpPr>
       <p:pic>
         <p:nvPicPr>
-          <p:cNvPr id="2" name="Picture 1">
-            <a:extLst>
-              <a:ext uri="{FF2B5EF4-FFF2-40B4-BE49-F238E27FC236}">
-                <a16:creationId xmlns:a16="http://schemas.microsoft.com/office/drawing/2014/main" id="{C89BD7CF-E2BD-5546-B0AB-6258D9C407E6}"/>
-              </a:ext>
-            </a:extLst>
-          </p:cNvPr>
-          <p:cNvPicPr>
-            <a:picLocks noChangeAspect="1"/>
-          </p:cNvPicPr>
-          <p:nvPr/>
-        </p:nvPicPr>
-        <p:blipFill>
-          <a:blip r:embed="rId2"/>
-          <a:stretch>
-            <a:fillRect/>
-          </a:stretch>
-        </p:blipFill>
-        <p:spPr>
-          <a:xfrm>
-            <a:off x="2623033" y="164859"/>
-            <a:ext cx="6413500" cy="393700"/>
-          </a:xfrm>
-          <a:prstGeom prst="rect">
-            <a:avLst/>
-          </a:prstGeom>
-        </p:spPr>
-      </p:pic>
-      <p:pic>
-        <p:nvPicPr>
           <p:cNvPr id="15" name="Picture 14">
             <a:extLst>
               <a:ext uri="{FF2B5EF4-FFF2-40B4-BE49-F238E27FC236}">
@@ -7656,7 +7865,7 @@
           <p:nvPr/>
         </p:nvPicPr>
         <p:blipFill>
-          <a:blip r:embed="rId3"/>
+          <a:blip r:embed="rId2"/>
           <a:stretch>
             <a:fillRect/>
           </a:stretch>
@@ -7686,7 +7895,7 @@
           <p:nvPr/>
         </p:nvPicPr>
         <p:blipFill>
-          <a:blip r:embed="rId4"/>
+          <a:blip r:embed="rId3"/>
           <a:stretch>
             <a:fillRect/>
           </a:stretch>
@@ -7694,133 +7903,339 @@
         <p:spPr>
           <a:xfrm>
             <a:off x="3860127" y="688157"/>
-            <a:ext cx="8528582" cy="2017960"/>
+            <a:ext cx="8150641" cy="2017960"/>
           </a:xfrm>
           <a:prstGeom prst="rect">
             <a:avLst/>
           </a:prstGeom>
         </p:spPr>
       </p:pic>
-      <p:pic>
-        <p:nvPicPr>
-          <p:cNvPr id="17" name="Picture 16">
+      <p:grpSp>
+        <p:nvGrpSpPr>
+          <p:cNvPr id="4" name="Group 3">
             <a:extLst>
               <a:ext uri="{FF2B5EF4-FFF2-40B4-BE49-F238E27FC236}">
-                <a16:creationId xmlns:a16="http://schemas.microsoft.com/office/drawing/2014/main" id="{5B3FACD0-F622-0447-9289-B9E794F4FEAD}"/>
+                <a16:creationId xmlns:a16="http://schemas.microsoft.com/office/drawing/2014/main" id="{CE496FDB-825E-0C4C-B31C-82A9C997CB3E}"/>
               </a:ext>
             </a:extLst>
           </p:cNvPr>
-          <p:cNvPicPr>
-            <a:picLocks noChangeAspect="1"/>
-          </p:cNvPicPr>
+          <p:cNvGrpSpPr/>
           <p:nvPr/>
-        </p:nvPicPr>
-        <p:blipFill>
-          <a:blip r:embed="rId5"/>
-          <a:stretch>
-            <a:fillRect/>
-          </a:stretch>
-        </p:blipFill>
-        <p:spPr>
+        </p:nvGrpSpPr>
+        <p:grpSpPr>
           <a:xfrm>
             <a:off x="3860127" y="2775824"/>
             <a:ext cx="4895127" cy="1731425"/>
+            <a:chOff x="3860127" y="2775824"/>
+            <a:chExt cx="4895127" cy="1731425"/>
+          </a:xfrm>
+        </p:grpSpPr>
+        <p:pic>
+          <p:nvPicPr>
+            <p:cNvPr id="17" name="Picture 16">
+              <a:extLst>
+                <a:ext uri="{FF2B5EF4-FFF2-40B4-BE49-F238E27FC236}">
+                  <a16:creationId xmlns:a16="http://schemas.microsoft.com/office/drawing/2014/main" id="{5B3FACD0-F622-0447-9289-B9E794F4FEAD}"/>
+                </a:ext>
+              </a:extLst>
+            </p:cNvPr>
+            <p:cNvPicPr>
+              <a:picLocks noChangeAspect="1"/>
+            </p:cNvPicPr>
+            <p:nvPr/>
+          </p:nvPicPr>
+          <p:blipFill>
+            <a:blip r:embed="rId4"/>
+            <a:stretch>
+              <a:fillRect/>
+            </a:stretch>
+          </p:blipFill>
+          <p:spPr>
+            <a:xfrm>
+              <a:off x="3860127" y="2775824"/>
+              <a:ext cx="4895127" cy="1731425"/>
+            </a:xfrm>
+            <a:prstGeom prst="rect">
+              <a:avLst/>
+            </a:prstGeom>
+          </p:spPr>
+        </p:pic>
+        <p:pic>
+          <p:nvPicPr>
+            <p:cNvPr id="18" name="Picture 17">
+              <a:extLst>
+                <a:ext uri="{FF2B5EF4-FFF2-40B4-BE49-F238E27FC236}">
+                  <a16:creationId xmlns:a16="http://schemas.microsoft.com/office/drawing/2014/main" id="{C3F349AA-9D7E-8C44-BA1B-3F46DAC0EA10}"/>
+                </a:ext>
+              </a:extLst>
+            </p:cNvPr>
+            <p:cNvPicPr>
+              <a:picLocks noChangeAspect="1"/>
+            </p:cNvPicPr>
+            <p:nvPr/>
+          </p:nvPicPr>
+          <p:blipFill>
+            <a:blip r:embed="rId5"/>
+            <a:stretch>
+              <a:fillRect/>
+            </a:stretch>
+          </p:blipFill>
+          <p:spPr>
+            <a:xfrm>
+              <a:off x="5648445" y="3555260"/>
+              <a:ext cx="2702287" cy="360759"/>
+            </a:xfrm>
+            <a:prstGeom prst="rect">
+              <a:avLst/>
+            </a:prstGeom>
+          </p:spPr>
+        </p:pic>
+      </p:grpSp>
+      <p:grpSp>
+        <p:nvGrpSpPr>
+          <p:cNvPr id="5" name="Group 4">
+            <a:extLst>
+              <a:ext uri="{FF2B5EF4-FFF2-40B4-BE49-F238E27FC236}">
+                <a16:creationId xmlns:a16="http://schemas.microsoft.com/office/drawing/2014/main" id="{AFDD90E4-9365-344F-8FF6-BFA068758FAF}"/>
+              </a:ext>
+            </a:extLst>
+          </p:cNvPr>
+          <p:cNvGrpSpPr/>
+          <p:nvPr/>
+        </p:nvGrpSpPr>
+        <p:grpSpPr>
+          <a:xfrm>
+            <a:off x="138896" y="4576957"/>
+            <a:ext cx="8321626" cy="2097506"/>
+            <a:chOff x="138896" y="4576957"/>
+            <a:chExt cx="8321626" cy="2097506"/>
+          </a:xfrm>
+        </p:grpSpPr>
+        <p:pic>
+          <p:nvPicPr>
+            <p:cNvPr id="19" name="Picture 18">
+              <a:extLst>
+                <a:ext uri="{FF2B5EF4-FFF2-40B4-BE49-F238E27FC236}">
+                  <a16:creationId xmlns:a16="http://schemas.microsoft.com/office/drawing/2014/main" id="{F96DFE44-D4BA-374E-86C2-9DFF4A51A482}"/>
+                </a:ext>
+              </a:extLst>
+            </p:cNvPr>
+            <p:cNvPicPr>
+              <a:picLocks noChangeAspect="1"/>
+            </p:cNvPicPr>
+            <p:nvPr/>
+          </p:nvPicPr>
+          <p:blipFill>
+            <a:blip r:embed="rId6"/>
+            <a:stretch>
+              <a:fillRect/>
+            </a:stretch>
+          </p:blipFill>
+          <p:spPr>
+            <a:xfrm>
+              <a:off x="138896" y="4576957"/>
+              <a:ext cx="8321626" cy="2097506"/>
+            </a:xfrm>
+            <a:prstGeom prst="rect">
+              <a:avLst/>
+            </a:prstGeom>
+          </p:spPr>
+        </p:pic>
+        <p:pic>
+          <p:nvPicPr>
+            <p:cNvPr id="20" name="Picture 19">
+              <a:extLst>
+                <a:ext uri="{FF2B5EF4-FFF2-40B4-BE49-F238E27FC236}">
+                  <a16:creationId xmlns:a16="http://schemas.microsoft.com/office/drawing/2014/main" id="{D6DEF4C7-BCDD-0043-9E96-139ADB4EEC37}"/>
+                </a:ext>
+              </a:extLst>
+            </p:cNvPr>
+            <p:cNvPicPr>
+              <a:picLocks noChangeAspect="1"/>
+            </p:cNvPicPr>
+            <p:nvPr/>
+          </p:nvPicPr>
+          <p:blipFill>
+            <a:blip r:embed="rId7"/>
+            <a:stretch>
+              <a:fillRect/>
+            </a:stretch>
+          </p:blipFill>
+          <p:spPr>
+            <a:xfrm>
+              <a:off x="5938536" y="5390935"/>
+              <a:ext cx="2412196" cy="469550"/>
+            </a:xfrm>
+            <a:prstGeom prst="rect">
+              <a:avLst/>
+            </a:prstGeom>
+          </p:spPr>
+        </p:pic>
+      </p:grpSp>
+      <p:sp>
+        <p:nvSpPr>
+          <p:cNvPr id="3" name="Rectangle 2">
+            <a:extLst>
+              <a:ext uri="{FF2B5EF4-FFF2-40B4-BE49-F238E27FC236}">
+                <a16:creationId xmlns:a16="http://schemas.microsoft.com/office/drawing/2014/main" id="{360FBF26-4E27-B843-8FE4-CA977264ADE8}"/>
+              </a:ext>
+            </a:extLst>
+          </p:cNvPr>
+          <p:cNvSpPr/>
+          <p:nvPr/>
+        </p:nvSpPr>
+        <p:spPr>
+          <a:xfrm>
+            <a:off x="-140989" y="6972"/>
+            <a:ext cx="12159049" cy="646331"/>
           </a:xfrm>
           <a:prstGeom prst="rect">
             <a:avLst/>
           </a:prstGeom>
+          <a:noFill/>
         </p:spPr>
-      </p:pic>
-      <p:pic>
-        <p:nvPicPr>
-          <p:cNvPr id="18" name="Picture 17">
-            <a:extLst>
-              <a:ext uri="{FF2B5EF4-FFF2-40B4-BE49-F238E27FC236}">
-                <a16:creationId xmlns:a16="http://schemas.microsoft.com/office/drawing/2014/main" id="{C3F349AA-9D7E-8C44-BA1B-3F46DAC0EA10}"/>
-              </a:ext>
-            </a:extLst>
-          </p:cNvPr>
-          <p:cNvPicPr>
-            <a:picLocks noChangeAspect="1"/>
-          </p:cNvPicPr>
-          <p:nvPr/>
-        </p:nvPicPr>
-        <p:blipFill>
-          <a:blip r:embed="rId6"/>
-          <a:stretch>
-            <a:fillRect/>
-          </a:stretch>
-        </p:blipFill>
-        <p:spPr>
-          <a:xfrm>
-            <a:off x="5648445" y="3555260"/>
-            <a:ext cx="2702287" cy="360759"/>
-          </a:xfrm>
-          <a:prstGeom prst="rect">
-            <a:avLst/>
-          </a:prstGeom>
-        </p:spPr>
-      </p:pic>
-      <p:pic>
-        <p:nvPicPr>
-          <p:cNvPr id="19" name="Picture 18">
-            <a:extLst>
-              <a:ext uri="{FF2B5EF4-FFF2-40B4-BE49-F238E27FC236}">
-                <a16:creationId xmlns:a16="http://schemas.microsoft.com/office/drawing/2014/main" id="{F96DFE44-D4BA-374E-86C2-9DFF4A51A482}"/>
-              </a:ext>
-            </a:extLst>
-          </p:cNvPr>
-          <p:cNvPicPr>
-            <a:picLocks noChangeAspect="1"/>
-          </p:cNvPicPr>
-          <p:nvPr/>
-        </p:nvPicPr>
-        <p:blipFill>
-          <a:blip r:embed="rId7"/>
-          <a:stretch>
-            <a:fillRect/>
-          </a:stretch>
-        </p:blipFill>
-        <p:spPr>
-          <a:xfrm>
-            <a:off x="138896" y="4576957"/>
-            <a:ext cx="8321626" cy="2097506"/>
-          </a:xfrm>
-          <a:prstGeom prst="rect">
-            <a:avLst/>
-          </a:prstGeom>
-        </p:spPr>
-      </p:pic>
-      <p:pic>
-        <p:nvPicPr>
-          <p:cNvPr id="20" name="Picture 19">
-            <a:extLst>
-              <a:ext uri="{FF2B5EF4-FFF2-40B4-BE49-F238E27FC236}">
-                <a16:creationId xmlns:a16="http://schemas.microsoft.com/office/drawing/2014/main" id="{D6DEF4C7-BCDD-0043-9E96-139ADB4EEC37}"/>
-              </a:ext>
-            </a:extLst>
-          </p:cNvPr>
-          <p:cNvPicPr>
-            <a:picLocks noChangeAspect="1"/>
-          </p:cNvPicPr>
-          <p:nvPr/>
-        </p:nvPicPr>
-        <p:blipFill>
-          <a:blip r:embed="rId8"/>
-          <a:stretch>
-            <a:fillRect/>
-          </a:stretch>
-        </p:blipFill>
-        <p:spPr>
-          <a:xfrm>
-            <a:off x="5938536" y="5390935"/>
-            <a:ext cx="2412196" cy="469550"/>
-          </a:xfrm>
-          <a:prstGeom prst="rect">
-            <a:avLst/>
-          </a:prstGeom>
-        </p:spPr>
-      </p:pic>
+        <p:txBody>
+          <a:bodyPr wrap="square" lIns="91440" tIns="45720" rIns="91440" bIns="45720">
+            <a:spAutoFit/>
+          </a:bodyPr>
+          <a:lstStyle/>
+          <a:p>
+            <a:pPr algn="ctr"/>
+            <a:r>
+              <a:rPr lang="en-US" sz="3600" b="1" u="sng" dirty="0" err="1">
+                <a:ln w="13462">
+                  <a:solidFill>
+                    <a:schemeClr val="bg1"/>
+                  </a:solidFill>
+                  <a:prstDash val="solid"/>
+                </a:ln>
+                <a:solidFill>
+                  <a:schemeClr val="tx1">
+                    <a:lumMod val="85000"/>
+                    <a:lumOff val="15000"/>
+                  </a:schemeClr>
+                </a:solidFill>
+                <a:effectLst>
+                  <a:outerShdw dist="38100" dir="2700000" algn="bl" rotWithShape="0">
+                    <a:schemeClr val="accent5"/>
+                  </a:outerShdw>
+                </a:effectLst>
+              </a:rPr>
+              <a:t>Monitoreo</a:t>
+            </a:r>
+            <a:r>
+              <a:rPr lang="en-US" sz="3600" b="1" u="sng" dirty="0">
+                <a:ln w="13462">
+                  <a:solidFill>
+                    <a:schemeClr val="bg1"/>
+                  </a:solidFill>
+                  <a:prstDash val="solid"/>
+                </a:ln>
+                <a:solidFill>
+                  <a:schemeClr val="tx1">
+                    <a:lumMod val="85000"/>
+                    <a:lumOff val="15000"/>
+                  </a:schemeClr>
+                </a:solidFill>
+                <a:effectLst>
+                  <a:outerShdw dist="38100" dir="2700000" algn="bl" rotWithShape="0">
+                    <a:schemeClr val="accent5"/>
+                  </a:outerShdw>
+                </a:effectLst>
+              </a:rPr>
+              <a:t> JVM y </a:t>
+            </a:r>
+            <a:r>
+              <a:rPr lang="en-US" sz="3600" b="1" u="sng" dirty="0" err="1">
+                <a:ln w="13462">
+                  <a:solidFill>
+                    <a:schemeClr val="bg1"/>
+                  </a:solidFill>
+                  <a:prstDash val="solid"/>
+                </a:ln>
+                <a:solidFill>
+                  <a:schemeClr val="tx1">
+                    <a:lumMod val="85000"/>
+                    <a:lumOff val="15000"/>
+                  </a:schemeClr>
+                </a:solidFill>
+                <a:effectLst>
+                  <a:outerShdw dist="38100" dir="2700000" algn="bl" rotWithShape="0">
+                    <a:schemeClr val="accent5"/>
+                  </a:outerShdw>
+                </a:effectLst>
+              </a:rPr>
+              <a:t>Comparación</a:t>
+            </a:r>
+            <a:r>
+              <a:rPr lang="en-US" sz="3600" b="1" u="sng" dirty="0">
+                <a:ln w="13462">
+                  <a:solidFill>
+                    <a:schemeClr val="bg1"/>
+                  </a:solidFill>
+                  <a:prstDash val="solid"/>
+                </a:ln>
+                <a:solidFill>
+                  <a:schemeClr val="tx1">
+                    <a:lumMod val="85000"/>
+                    <a:lumOff val="15000"/>
+                  </a:schemeClr>
+                </a:solidFill>
+                <a:effectLst>
+                  <a:outerShdw dist="38100" dir="2700000" algn="bl" rotWithShape="0">
+                    <a:schemeClr val="accent5"/>
+                  </a:outerShdw>
+                </a:effectLst>
+              </a:rPr>
+              <a:t> de </a:t>
+            </a:r>
+            <a:r>
+              <a:rPr lang="en-US" sz="3600" b="1" u="sng" dirty="0" err="1">
+                <a:ln w="13462">
+                  <a:solidFill>
+                    <a:schemeClr val="bg1"/>
+                  </a:solidFill>
+                  <a:prstDash val="solid"/>
+                </a:ln>
+                <a:solidFill>
+                  <a:schemeClr val="tx1">
+                    <a:lumMod val="85000"/>
+                    <a:lumOff val="15000"/>
+                  </a:schemeClr>
+                </a:solidFill>
+                <a:effectLst>
+                  <a:outerShdw dist="38100" dir="2700000" algn="bl" rotWithShape="0">
+                    <a:schemeClr val="accent5"/>
+                  </a:outerShdw>
+                </a:effectLst>
+              </a:rPr>
+              <a:t>Hilos</a:t>
+            </a:r>
+            <a:r>
+              <a:rPr lang="en-US" sz="3600" b="1" u="sng" dirty="0">
+                <a:ln w="13462">
+                  <a:solidFill>
+                    <a:schemeClr val="bg1"/>
+                  </a:solidFill>
+                  <a:prstDash val="solid"/>
+                </a:ln>
+                <a:solidFill>
+                  <a:schemeClr val="tx1">
+                    <a:lumMod val="85000"/>
+                    <a:lumOff val="15000"/>
+                  </a:schemeClr>
+                </a:solidFill>
+                <a:effectLst>
+                  <a:outerShdw dist="38100" dir="2700000" algn="bl" rotWithShape="0">
+                    <a:schemeClr val="accent5"/>
+                  </a:outerShdw>
+                </a:effectLst>
+              </a:rPr>
+              <a:t> – Platform Threads</a:t>
+            </a:r>
+          </a:p>
+        </p:txBody>
+      </p:sp>
     </p:spTree>
     <p:extLst>
       <p:ext uri="{BB962C8B-B14F-4D97-AF65-F5344CB8AC3E}">
@@ -7851,12 +8266,261 @@
           <a:chExt cx="0" cy="0"/>
         </a:xfrm>
       </p:grpSpPr>
+      <p:sp>
+        <p:nvSpPr>
+          <p:cNvPr id="3" name="Rectangle 2">
+            <a:extLst>
+              <a:ext uri="{FF2B5EF4-FFF2-40B4-BE49-F238E27FC236}">
+                <a16:creationId xmlns:a16="http://schemas.microsoft.com/office/drawing/2014/main" id="{0001B270-FEBA-1543-AC96-828F37F472DF}"/>
+              </a:ext>
+            </a:extLst>
+          </p:cNvPr>
+          <p:cNvSpPr/>
+          <p:nvPr/>
+        </p:nvSpPr>
+        <p:spPr>
+          <a:xfrm>
+            <a:off x="-201255" y="0"/>
+            <a:ext cx="12159049" cy="646331"/>
+          </a:xfrm>
+          <a:prstGeom prst="rect">
+            <a:avLst/>
+          </a:prstGeom>
+          <a:noFill/>
+        </p:spPr>
+        <p:txBody>
+          <a:bodyPr wrap="square" lIns="91440" tIns="45720" rIns="91440" bIns="45720">
+            <a:spAutoFit/>
+          </a:bodyPr>
+          <a:lstStyle/>
+          <a:p>
+            <a:pPr algn="ctr"/>
+            <a:r>
+              <a:rPr lang="en-US" sz="3600" b="1" u="sng" dirty="0" err="1">
+                <a:ln w="13462">
+                  <a:solidFill>
+                    <a:schemeClr val="bg1"/>
+                  </a:solidFill>
+                  <a:prstDash val="solid"/>
+                </a:ln>
+                <a:solidFill>
+                  <a:schemeClr val="tx1">
+                    <a:lumMod val="85000"/>
+                    <a:lumOff val="15000"/>
+                  </a:schemeClr>
+                </a:solidFill>
+                <a:effectLst>
+                  <a:outerShdw dist="38100" dir="2700000" algn="bl" rotWithShape="0">
+                    <a:schemeClr val="accent5"/>
+                  </a:outerShdw>
+                </a:effectLst>
+              </a:rPr>
+              <a:t>Monitoreo</a:t>
+            </a:r>
+            <a:r>
+              <a:rPr lang="en-US" sz="3600" b="1" u="sng" dirty="0">
+                <a:ln w="13462">
+                  <a:solidFill>
+                    <a:schemeClr val="bg1"/>
+                  </a:solidFill>
+                  <a:prstDash val="solid"/>
+                </a:ln>
+                <a:solidFill>
+                  <a:schemeClr val="tx1">
+                    <a:lumMod val="85000"/>
+                    <a:lumOff val="15000"/>
+                  </a:schemeClr>
+                </a:solidFill>
+                <a:effectLst>
+                  <a:outerShdw dist="38100" dir="2700000" algn="bl" rotWithShape="0">
+                    <a:schemeClr val="accent5"/>
+                  </a:outerShdw>
+                </a:effectLst>
+              </a:rPr>
+              <a:t> JVM y </a:t>
+            </a:r>
+            <a:r>
+              <a:rPr lang="en-US" sz="3600" b="1" u="sng" dirty="0" err="1">
+                <a:ln w="13462">
+                  <a:solidFill>
+                    <a:schemeClr val="bg1"/>
+                  </a:solidFill>
+                  <a:prstDash val="solid"/>
+                </a:ln>
+                <a:solidFill>
+                  <a:schemeClr val="tx1">
+                    <a:lumMod val="85000"/>
+                    <a:lumOff val="15000"/>
+                  </a:schemeClr>
+                </a:solidFill>
+                <a:effectLst>
+                  <a:outerShdw dist="38100" dir="2700000" algn="bl" rotWithShape="0">
+                    <a:schemeClr val="accent5"/>
+                  </a:outerShdw>
+                </a:effectLst>
+              </a:rPr>
+              <a:t>Comparación</a:t>
+            </a:r>
+            <a:r>
+              <a:rPr lang="en-US" sz="3600" b="1" u="sng" dirty="0">
+                <a:ln w="13462">
+                  <a:solidFill>
+                    <a:schemeClr val="bg1"/>
+                  </a:solidFill>
+                  <a:prstDash val="solid"/>
+                </a:ln>
+                <a:solidFill>
+                  <a:schemeClr val="tx1">
+                    <a:lumMod val="85000"/>
+                    <a:lumOff val="15000"/>
+                  </a:schemeClr>
+                </a:solidFill>
+                <a:effectLst>
+                  <a:outerShdw dist="38100" dir="2700000" algn="bl" rotWithShape="0">
+                    <a:schemeClr val="accent5"/>
+                  </a:outerShdw>
+                </a:effectLst>
+              </a:rPr>
+              <a:t> de </a:t>
+            </a:r>
+            <a:r>
+              <a:rPr lang="en-US" sz="3600" b="1" u="sng" dirty="0" err="1">
+                <a:ln w="13462">
+                  <a:solidFill>
+                    <a:schemeClr val="bg1"/>
+                  </a:solidFill>
+                  <a:prstDash val="solid"/>
+                </a:ln>
+                <a:solidFill>
+                  <a:schemeClr val="tx1">
+                    <a:lumMod val="85000"/>
+                    <a:lumOff val="15000"/>
+                  </a:schemeClr>
+                </a:solidFill>
+                <a:effectLst>
+                  <a:outerShdw dist="38100" dir="2700000" algn="bl" rotWithShape="0">
+                    <a:schemeClr val="accent5"/>
+                  </a:outerShdw>
+                </a:effectLst>
+              </a:rPr>
+              <a:t>Hilos</a:t>
+            </a:r>
+            <a:r>
+              <a:rPr lang="en-US" sz="3600" b="1" u="sng" dirty="0">
+                <a:ln w="13462">
+                  <a:solidFill>
+                    <a:schemeClr val="bg1"/>
+                  </a:solidFill>
+                  <a:prstDash val="solid"/>
+                </a:ln>
+                <a:solidFill>
+                  <a:schemeClr val="tx1">
+                    <a:lumMod val="85000"/>
+                    <a:lumOff val="15000"/>
+                  </a:schemeClr>
+                </a:solidFill>
+                <a:effectLst>
+                  <a:outerShdw dist="38100" dir="2700000" algn="bl" rotWithShape="0">
+                    <a:schemeClr val="accent5"/>
+                  </a:outerShdw>
+                </a:effectLst>
+              </a:rPr>
+              <a:t> – </a:t>
+            </a:r>
+            <a:r>
+              <a:rPr lang="en-US" sz="3600" b="1" u="sng" dirty="0" err="1">
+                <a:ln w="13462">
+                  <a:solidFill>
+                    <a:schemeClr val="bg1"/>
+                  </a:solidFill>
+                  <a:prstDash val="solid"/>
+                </a:ln>
+                <a:solidFill>
+                  <a:schemeClr val="tx1">
+                    <a:lumMod val="85000"/>
+                    <a:lumOff val="15000"/>
+                  </a:schemeClr>
+                </a:solidFill>
+                <a:effectLst>
+                  <a:outerShdw dist="38100" dir="2700000" algn="bl" rotWithShape="0">
+                    <a:schemeClr val="accent5"/>
+                  </a:outerShdw>
+                </a:effectLst>
+              </a:rPr>
+              <a:t>Versión</a:t>
+            </a:r>
+            <a:r>
+              <a:rPr lang="en-US" sz="3600" b="1" u="sng" dirty="0">
+                <a:ln w="13462">
+                  <a:solidFill>
+                    <a:schemeClr val="bg1"/>
+                  </a:solidFill>
+                  <a:prstDash val="solid"/>
+                </a:ln>
+                <a:solidFill>
+                  <a:schemeClr val="tx1">
+                    <a:lumMod val="85000"/>
+                    <a:lumOff val="15000"/>
+                  </a:schemeClr>
+                </a:solidFill>
+                <a:effectLst>
+                  <a:outerShdw dist="38100" dir="2700000" algn="bl" rotWithShape="0">
+                    <a:schemeClr val="accent5"/>
+                  </a:outerShdw>
+                </a:effectLst>
+              </a:rPr>
+              <a:t> </a:t>
+            </a:r>
+            <a:r>
+              <a:rPr lang="en-US" sz="3600" b="1" u="sng" dirty="0" err="1">
+                <a:ln w="13462">
+                  <a:solidFill>
+                    <a:schemeClr val="bg1"/>
+                  </a:solidFill>
+                  <a:prstDash val="solid"/>
+                </a:ln>
+                <a:solidFill>
+                  <a:schemeClr val="tx1">
+                    <a:lumMod val="85000"/>
+                    <a:lumOff val="15000"/>
+                  </a:schemeClr>
+                </a:solidFill>
+                <a:effectLst>
+                  <a:outerShdw dist="38100" dir="2700000" algn="bl" rotWithShape="0">
+                    <a:schemeClr val="accent5"/>
+                  </a:outerShdw>
+                </a:effectLst>
+              </a:rPr>
+              <a:t>Reactiva</a:t>
+            </a:r>
+            <a:endParaRPr lang="en-US" sz="3600" b="1" u="sng" dirty="0">
+              <a:ln w="13462">
+                <a:solidFill>
+                  <a:schemeClr val="bg1"/>
+                </a:solidFill>
+                <a:prstDash val="solid"/>
+              </a:ln>
+              <a:solidFill>
+                <a:schemeClr val="tx1">
+                  <a:lumMod val="85000"/>
+                  <a:lumOff val="15000"/>
+                </a:schemeClr>
+              </a:solidFill>
+              <a:effectLst>
+                <a:outerShdw dist="38100" dir="2700000" algn="bl" rotWithShape="0">
+                  <a:schemeClr val="accent5"/>
+                </a:outerShdw>
+              </a:effectLst>
+            </a:endParaRPr>
+          </a:p>
+        </p:txBody>
+      </p:sp>
       <p:pic>
         <p:nvPicPr>
-          <p:cNvPr id="4" name="Picture 3">
+          <p:cNvPr id="2" name="Picture 1">
             <a:extLst>
               <a:ext uri="{FF2B5EF4-FFF2-40B4-BE49-F238E27FC236}">
-                <a16:creationId xmlns:a16="http://schemas.microsoft.com/office/drawing/2014/main" id="{C1A554C2-E7C6-DE40-BCF0-96A6860C194F}"/>
+                <a16:creationId xmlns:a16="http://schemas.microsoft.com/office/drawing/2014/main" id="{0B5BF49A-CF89-A949-BDD0-57190880F656}"/>
               </a:ext>
             </a:extLst>
           </p:cNvPr>
@@ -7873,8 +8537,158 @@
         </p:blipFill>
         <p:spPr>
           <a:xfrm>
-            <a:off x="2908702" y="162608"/>
-            <a:ext cx="6235700" cy="444500"/>
+            <a:off x="49428" y="743634"/>
+            <a:ext cx="3435177" cy="3895448"/>
+          </a:xfrm>
+          <a:prstGeom prst="rect">
+            <a:avLst/>
+          </a:prstGeom>
+        </p:spPr>
+      </p:pic>
+      <p:pic>
+        <p:nvPicPr>
+          <p:cNvPr id="6" name="Picture 5">
+            <a:extLst>
+              <a:ext uri="{FF2B5EF4-FFF2-40B4-BE49-F238E27FC236}">
+                <a16:creationId xmlns:a16="http://schemas.microsoft.com/office/drawing/2014/main" id="{5F3F8AA2-CED8-314C-9586-224870364044}"/>
+              </a:ext>
+            </a:extLst>
+          </p:cNvPr>
+          <p:cNvPicPr>
+            <a:picLocks noChangeAspect="1"/>
+          </p:cNvPicPr>
+          <p:nvPr/>
+        </p:nvPicPr>
+        <p:blipFill>
+          <a:blip r:embed="rId3"/>
+          <a:stretch>
+            <a:fillRect/>
+          </a:stretch>
+        </p:blipFill>
+        <p:spPr>
+          <a:xfrm>
+            <a:off x="3583458" y="998721"/>
+            <a:ext cx="8374335" cy="1890298"/>
+          </a:xfrm>
+          <a:prstGeom prst="rect">
+            <a:avLst/>
+          </a:prstGeom>
+        </p:spPr>
+      </p:pic>
+      <p:pic>
+        <p:nvPicPr>
+          <p:cNvPr id="7" name="Picture 6">
+            <a:extLst>
+              <a:ext uri="{FF2B5EF4-FFF2-40B4-BE49-F238E27FC236}">
+                <a16:creationId xmlns:a16="http://schemas.microsoft.com/office/drawing/2014/main" id="{E8A397A6-9C84-A047-AA29-AFC6A4FDADDC}"/>
+              </a:ext>
+            </a:extLst>
+          </p:cNvPr>
+          <p:cNvPicPr>
+            <a:picLocks noChangeAspect="1"/>
+          </p:cNvPicPr>
+          <p:nvPr/>
+        </p:nvPicPr>
+        <p:blipFill>
+          <a:blip r:embed="rId4"/>
+          <a:stretch>
+            <a:fillRect/>
+          </a:stretch>
+        </p:blipFill>
+        <p:spPr>
+          <a:xfrm>
+            <a:off x="3583458" y="2990751"/>
+            <a:ext cx="4018177" cy="1541947"/>
+          </a:xfrm>
+          <a:prstGeom prst="rect">
+            <a:avLst/>
+          </a:prstGeom>
+        </p:spPr>
+      </p:pic>
+      <p:pic>
+        <p:nvPicPr>
+          <p:cNvPr id="8" name="Picture 7">
+            <a:extLst>
+              <a:ext uri="{FF2B5EF4-FFF2-40B4-BE49-F238E27FC236}">
+                <a16:creationId xmlns:a16="http://schemas.microsoft.com/office/drawing/2014/main" id="{EB61F267-2819-544E-BBB5-3E036A95EC73}"/>
+              </a:ext>
+            </a:extLst>
+          </p:cNvPr>
+          <p:cNvPicPr>
+            <a:picLocks noChangeAspect="1"/>
+          </p:cNvPicPr>
+          <p:nvPr/>
+        </p:nvPicPr>
+        <p:blipFill>
+          <a:blip r:embed="rId5"/>
+          <a:stretch>
+            <a:fillRect/>
+          </a:stretch>
+        </p:blipFill>
+        <p:spPr>
+          <a:xfrm>
+            <a:off x="4400349" y="3872523"/>
+            <a:ext cx="2955839" cy="374254"/>
+          </a:xfrm>
+          <a:prstGeom prst="rect">
+            <a:avLst/>
+          </a:prstGeom>
+        </p:spPr>
+      </p:pic>
+      <p:pic>
+        <p:nvPicPr>
+          <p:cNvPr id="9" name="Picture 8">
+            <a:extLst>
+              <a:ext uri="{FF2B5EF4-FFF2-40B4-BE49-F238E27FC236}">
+                <a16:creationId xmlns:a16="http://schemas.microsoft.com/office/drawing/2014/main" id="{E84088DB-35AC-674A-82C0-66EBB6E89117}"/>
+              </a:ext>
+            </a:extLst>
+          </p:cNvPr>
+          <p:cNvPicPr>
+            <a:picLocks noChangeAspect="1"/>
+          </p:cNvPicPr>
+          <p:nvPr/>
+        </p:nvPicPr>
+        <p:blipFill>
+          <a:blip r:embed="rId6"/>
+          <a:stretch>
+            <a:fillRect/>
+          </a:stretch>
+        </p:blipFill>
+        <p:spPr>
+          <a:xfrm>
+            <a:off x="148280" y="4671995"/>
+            <a:ext cx="8031894" cy="1953500"/>
+          </a:xfrm>
+          <a:prstGeom prst="rect">
+            <a:avLst/>
+          </a:prstGeom>
+        </p:spPr>
+      </p:pic>
+      <p:pic>
+        <p:nvPicPr>
+          <p:cNvPr id="10" name="Picture 9">
+            <a:extLst>
+              <a:ext uri="{FF2B5EF4-FFF2-40B4-BE49-F238E27FC236}">
+                <a16:creationId xmlns:a16="http://schemas.microsoft.com/office/drawing/2014/main" id="{EB021FAC-2688-6049-B101-A58DB83F9AD3}"/>
+              </a:ext>
+            </a:extLst>
+          </p:cNvPr>
+          <p:cNvPicPr>
+            <a:picLocks noChangeAspect="1"/>
+          </p:cNvPicPr>
+          <p:nvPr/>
+        </p:nvPicPr>
+        <p:blipFill>
+          <a:blip r:embed="rId7"/>
+          <a:stretch>
+            <a:fillRect/>
+          </a:stretch>
+        </p:blipFill>
+        <p:spPr>
+          <a:xfrm>
+            <a:off x="1767016" y="5436804"/>
+            <a:ext cx="2269009" cy="423881"/>
           </a:xfrm>
           <a:prstGeom prst="rect">
             <a:avLst/>
@@ -7913,10 +8727,10 @@
       </p:grpSpPr>
       <p:pic>
         <p:nvPicPr>
-          <p:cNvPr id="4" name="Picture 3">
+          <p:cNvPr id="5" name="Picture 4">
             <a:extLst>
               <a:ext uri="{FF2B5EF4-FFF2-40B4-BE49-F238E27FC236}">
-                <a16:creationId xmlns:a16="http://schemas.microsoft.com/office/drawing/2014/main" id="{2687DC37-B79F-E443-ADCB-DA19E91E1C11}"/>
+                <a16:creationId xmlns:a16="http://schemas.microsoft.com/office/drawing/2014/main" id="{71266C9B-5F58-4441-8078-54B560307665}"/>
               </a:ext>
             </a:extLst>
           </p:cNvPr>
@@ -7933,20 +8747,346 @@
         </p:blipFill>
         <p:spPr>
           <a:xfrm>
-            <a:off x="2911756" y="158509"/>
-            <a:ext cx="5905500" cy="406400"/>
+            <a:off x="138895" y="825824"/>
+            <a:ext cx="3136740" cy="3483004"/>
           </a:xfrm>
           <a:prstGeom prst="rect">
             <a:avLst/>
           </a:prstGeom>
         </p:spPr>
       </p:pic>
+      <p:sp>
+        <p:nvSpPr>
+          <p:cNvPr id="6" name="Rectangle 5">
+            <a:extLst>
+              <a:ext uri="{FF2B5EF4-FFF2-40B4-BE49-F238E27FC236}">
+                <a16:creationId xmlns:a16="http://schemas.microsoft.com/office/drawing/2014/main" id="{5D6900BC-8962-0742-B83D-C2CBF0054EFC}"/>
+              </a:ext>
+            </a:extLst>
+          </p:cNvPr>
+          <p:cNvSpPr/>
+          <p:nvPr/>
+        </p:nvSpPr>
+        <p:spPr>
+          <a:xfrm>
+            <a:off x="0" y="0"/>
+            <a:ext cx="12159049" cy="646331"/>
+          </a:xfrm>
+          <a:prstGeom prst="rect">
+            <a:avLst/>
+          </a:prstGeom>
+          <a:noFill/>
+        </p:spPr>
+        <p:txBody>
+          <a:bodyPr wrap="square" lIns="91440" tIns="45720" rIns="91440" bIns="45720">
+            <a:spAutoFit/>
+          </a:bodyPr>
+          <a:lstStyle/>
+          <a:p>
+            <a:pPr algn="ctr"/>
+            <a:r>
+              <a:rPr lang="en-US" sz="3600" b="1" u="sng" dirty="0" err="1">
+                <a:ln w="13462">
+                  <a:solidFill>
+                    <a:schemeClr val="bg1"/>
+                  </a:solidFill>
+                  <a:prstDash val="solid"/>
+                </a:ln>
+                <a:solidFill>
+                  <a:schemeClr val="tx1">
+                    <a:lumMod val="85000"/>
+                    <a:lumOff val="15000"/>
+                  </a:schemeClr>
+                </a:solidFill>
+                <a:effectLst>
+                  <a:outerShdw dist="38100" dir="2700000" algn="bl" rotWithShape="0">
+                    <a:schemeClr val="accent5"/>
+                  </a:outerShdw>
+                </a:effectLst>
+              </a:rPr>
+              <a:t>Monitoreo</a:t>
+            </a:r>
+            <a:r>
+              <a:rPr lang="en-US" sz="3600" b="1" u="sng" dirty="0">
+                <a:ln w="13462">
+                  <a:solidFill>
+                    <a:schemeClr val="bg1"/>
+                  </a:solidFill>
+                  <a:prstDash val="solid"/>
+                </a:ln>
+                <a:solidFill>
+                  <a:schemeClr val="tx1">
+                    <a:lumMod val="85000"/>
+                    <a:lumOff val="15000"/>
+                  </a:schemeClr>
+                </a:solidFill>
+                <a:effectLst>
+                  <a:outerShdw dist="38100" dir="2700000" algn="bl" rotWithShape="0">
+                    <a:schemeClr val="accent5"/>
+                  </a:outerShdw>
+                </a:effectLst>
+              </a:rPr>
+              <a:t> JVM y </a:t>
+            </a:r>
+            <a:r>
+              <a:rPr lang="en-US" sz="3600" b="1" u="sng" dirty="0" err="1">
+                <a:ln w="13462">
+                  <a:solidFill>
+                    <a:schemeClr val="bg1"/>
+                  </a:solidFill>
+                  <a:prstDash val="solid"/>
+                </a:ln>
+                <a:solidFill>
+                  <a:schemeClr val="tx1">
+                    <a:lumMod val="85000"/>
+                    <a:lumOff val="15000"/>
+                  </a:schemeClr>
+                </a:solidFill>
+                <a:effectLst>
+                  <a:outerShdw dist="38100" dir="2700000" algn="bl" rotWithShape="0">
+                    <a:schemeClr val="accent5"/>
+                  </a:outerShdw>
+                </a:effectLst>
+              </a:rPr>
+              <a:t>Comparación</a:t>
+            </a:r>
+            <a:r>
+              <a:rPr lang="en-US" sz="3600" b="1" u="sng" dirty="0">
+                <a:ln w="13462">
+                  <a:solidFill>
+                    <a:schemeClr val="bg1"/>
+                  </a:solidFill>
+                  <a:prstDash val="solid"/>
+                </a:ln>
+                <a:solidFill>
+                  <a:schemeClr val="tx1">
+                    <a:lumMod val="85000"/>
+                    <a:lumOff val="15000"/>
+                  </a:schemeClr>
+                </a:solidFill>
+                <a:effectLst>
+                  <a:outerShdw dist="38100" dir="2700000" algn="bl" rotWithShape="0">
+                    <a:schemeClr val="accent5"/>
+                  </a:outerShdw>
+                </a:effectLst>
+              </a:rPr>
+              <a:t> de </a:t>
+            </a:r>
+            <a:r>
+              <a:rPr lang="en-US" sz="3600" b="1" u="sng" dirty="0" err="1">
+                <a:ln w="13462">
+                  <a:solidFill>
+                    <a:schemeClr val="bg1"/>
+                  </a:solidFill>
+                  <a:prstDash val="solid"/>
+                </a:ln>
+                <a:solidFill>
+                  <a:schemeClr val="tx1">
+                    <a:lumMod val="85000"/>
+                    <a:lumOff val="15000"/>
+                  </a:schemeClr>
+                </a:solidFill>
+                <a:effectLst>
+                  <a:outerShdw dist="38100" dir="2700000" algn="bl" rotWithShape="0">
+                    <a:schemeClr val="accent5"/>
+                  </a:outerShdw>
+                </a:effectLst>
+              </a:rPr>
+              <a:t>Hilos</a:t>
+            </a:r>
+            <a:r>
+              <a:rPr lang="en-US" sz="3600" b="1" u="sng" dirty="0">
+                <a:ln w="13462">
+                  <a:solidFill>
+                    <a:schemeClr val="bg1"/>
+                  </a:solidFill>
+                  <a:prstDash val="solid"/>
+                </a:ln>
+                <a:solidFill>
+                  <a:schemeClr val="tx1">
+                    <a:lumMod val="85000"/>
+                    <a:lumOff val="15000"/>
+                  </a:schemeClr>
+                </a:solidFill>
+                <a:effectLst>
+                  <a:outerShdw dist="38100" dir="2700000" algn="bl" rotWithShape="0">
+                    <a:schemeClr val="accent5"/>
+                  </a:outerShdw>
+                </a:effectLst>
+              </a:rPr>
+              <a:t> – Virtual Threads</a:t>
+            </a:r>
+          </a:p>
+        </p:txBody>
+      </p:sp>
+      <p:grpSp>
+        <p:nvGrpSpPr>
+          <p:cNvPr id="7" name="Group 6">
+            <a:extLst>
+              <a:ext uri="{FF2B5EF4-FFF2-40B4-BE49-F238E27FC236}">
+                <a16:creationId xmlns:a16="http://schemas.microsoft.com/office/drawing/2014/main" id="{22F13F22-C4DC-F742-B1AD-7221499C4C5B}"/>
+              </a:ext>
+            </a:extLst>
+          </p:cNvPr>
+          <p:cNvGrpSpPr/>
+          <p:nvPr/>
+        </p:nvGrpSpPr>
+        <p:grpSpPr>
+          <a:xfrm>
+            <a:off x="3337419" y="1048062"/>
+            <a:ext cx="8623922" cy="1877208"/>
+            <a:chOff x="3337419" y="1048062"/>
+            <a:chExt cx="8623922" cy="1877208"/>
+          </a:xfrm>
+        </p:grpSpPr>
+        <p:pic>
+          <p:nvPicPr>
+            <p:cNvPr id="2" name="Picture 1">
+              <a:extLst>
+                <a:ext uri="{FF2B5EF4-FFF2-40B4-BE49-F238E27FC236}">
+                  <a16:creationId xmlns:a16="http://schemas.microsoft.com/office/drawing/2014/main" id="{7C89453E-6FFD-B64E-A591-33CA57086B48}"/>
+                </a:ext>
+              </a:extLst>
+            </p:cNvPr>
+            <p:cNvPicPr>
+              <a:picLocks noChangeAspect="1"/>
+            </p:cNvPicPr>
+            <p:nvPr/>
+          </p:nvPicPr>
+          <p:blipFill>
+            <a:blip r:embed="rId3"/>
+            <a:stretch>
+              <a:fillRect/>
+            </a:stretch>
+          </p:blipFill>
+          <p:spPr>
+            <a:xfrm>
+              <a:off x="3337419" y="1048062"/>
+              <a:ext cx="8623922" cy="1877208"/>
+            </a:xfrm>
+            <a:prstGeom prst="rect">
+              <a:avLst/>
+            </a:prstGeom>
+          </p:spPr>
+        </p:pic>
+        <p:pic>
+          <p:nvPicPr>
+            <p:cNvPr id="3" name="Picture 2">
+              <a:extLst>
+                <a:ext uri="{FF2B5EF4-FFF2-40B4-BE49-F238E27FC236}">
+                  <a16:creationId xmlns:a16="http://schemas.microsoft.com/office/drawing/2014/main" id="{A9B67EF0-BD18-224F-BB4C-7634311068FB}"/>
+                </a:ext>
+              </a:extLst>
+            </p:cNvPr>
+            <p:cNvPicPr>
+              <a:picLocks noChangeAspect="1"/>
+            </p:cNvPicPr>
+            <p:nvPr/>
+          </p:nvPicPr>
+          <p:blipFill>
+            <a:blip r:embed="rId4"/>
+            <a:stretch>
+              <a:fillRect/>
+            </a:stretch>
+          </p:blipFill>
+          <p:spPr>
+            <a:xfrm>
+              <a:off x="7537620" y="1793977"/>
+              <a:ext cx="2057915" cy="385377"/>
+            </a:xfrm>
+            <a:prstGeom prst="rect">
+              <a:avLst/>
+            </a:prstGeom>
+          </p:spPr>
+        </p:pic>
+      </p:grpSp>
+      <p:grpSp>
+        <p:nvGrpSpPr>
+          <p:cNvPr id="10" name="Group 9">
+            <a:extLst>
+              <a:ext uri="{FF2B5EF4-FFF2-40B4-BE49-F238E27FC236}">
+                <a16:creationId xmlns:a16="http://schemas.microsoft.com/office/drawing/2014/main" id="{B2435F63-839D-C44B-8399-37D33AA2FCE8}"/>
+              </a:ext>
+            </a:extLst>
+          </p:cNvPr>
+          <p:cNvGrpSpPr/>
+          <p:nvPr/>
+        </p:nvGrpSpPr>
+        <p:grpSpPr>
+          <a:xfrm>
+            <a:off x="3337419" y="2951212"/>
+            <a:ext cx="3833169" cy="1494286"/>
+            <a:chOff x="3337419" y="2951212"/>
+            <a:chExt cx="3833169" cy="1494286"/>
+          </a:xfrm>
+        </p:grpSpPr>
+        <p:pic>
+          <p:nvPicPr>
+            <p:cNvPr id="8" name="Picture 7">
+              <a:extLst>
+                <a:ext uri="{FF2B5EF4-FFF2-40B4-BE49-F238E27FC236}">
+                  <a16:creationId xmlns:a16="http://schemas.microsoft.com/office/drawing/2014/main" id="{14D49BA7-EF9A-8441-82E4-0D2EA41748C0}"/>
+                </a:ext>
+              </a:extLst>
+            </p:cNvPr>
+            <p:cNvPicPr>
+              <a:picLocks noChangeAspect="1"/>
+            </p:cNvPicPr>
+            <p:nvPr/>
+          </p:nvPicPr>
+          <p:blipFill>
+            <a:blip r:embed="rId5"/>
+            <a:stretch>
+              <a:fillRect/>
+            </a:stretch>
+          </p:blipFill>
+          <p:spPr>
+            <a:xfrm>
+              <a:off x="3337419" y="2951212"/>
+              <a:ext cx="3833169" cy="1494286"/>
+            </a:xfrm>
+            <a:prstGeom prst="rect">
+              <a:avLst/>
+            </a:prstGeom>
+          </p:spPr>
+        </p:pic>
+        <p:pic>
+          <p:nvPicPr>
+            <p:cNvPr id="9" name="Picture 8">
+              <a:extLst>
+                <a:ext uri="{FF2B5EF4-FFF2-40B4-BE49-F238E27FC236}">
+                  <a16:creationId xmlns:a16="http://schemas.microsoft.com/office/drawing/2014/main" id="{3C20CEEC-D1BF-8C4B-B77A-250B7AF8AC7A}"/>
+                </a:ext>
+              </a:extLst>
+            </p:cNvPr>
+            <p:cNvPicPr>
+              <a:picLocks noChangeAspect="1"/>
+            </p:cNvPicPr>
+            <p:nvPr/>
+          </p:nvPicPr>
+          <p:blipFill>
+            <a:blip r:embed="rId6"/>
+            <a:stretch>
+              <a:fillRect/>
+            </a:stretch>
+          </p:blipFill>
+          <p:spPr>
+            <a:xfrm>
+              <a:off x="4473146" y="3525192"/>
+              <a:ext cx="2473754" cy="346326"/>
+            </a:xfrm>
+            <a:prstGeom prst="rect">
+              <a:avLst/>
+            </a:prstGeom>
+          </p:spPr>
+        </p:pic>
+      </p:grpSp>
       <p:pic>
         <p:nvPicPr>
-          <p:cNvPr id="5" name="Picture 4">
+          <p:cNvPr id="11" name="Picture 10">
             <a:extLst>
               <a:ext uri="{FF2B5EF4-FFF2-40B4-BE49-F238E27FC236}">
-                <a16:creationId xmlns:a16="http://schemas.microsoft.com/office/drawing/2014/main" id="{71266C9B-5F58-4441-8078-54B560307665}"/>
+                <a16:creationId xmlns:a16="http://schemas.microsoft.com/office/drawing/2014/main" id="{63305E37-5A83-7C4F-B31D-8D1F182E15E2}"/>
               </a:ext>
             </a:extLst>
           </p:cNvPr>
@@ -7956,15 +9096,45 @@
           <p:nvPr/>
         </p:nvPicPr>
         <p:blipFill>
-          <a:blip r:embed="rId3"/>
+          <a:blip r:embed="rId7"/>
           <a:stretch>
             <a:fillRect/>
           </a:stretch>
         </p:blipFill>
         <p:spPr>
           <a:xfrm>
-            <a:off x="138895" y="825824"/>
-            <a:ext cx="3136740" cy="3483004"/>
+            <a:off x="138895" y="4488322"/>
+            <a:ext cx="9810494" cy="2288508"/>
+          </a:xfrm>
+          <a:prstGeom prst="rect">
+            <a:avLst/>
+          </a:prstGeom>
+        </p:spPr>
+      </p:pic>
+      <p:pic>
+        <p:nvPicPr>
+          <p:cNvPr id="12" name="Picture 11">
+            <a:extLst>
+              <a:ext uri="{FF2B5EF4-FFF2-40B4-BE49-F238E27FC236}">
+                <a16:creationId xmlns:a16="http://schemas.microsoft.com/office/drawing/2014/main" id="{46E71878-354C-694D-86EC-E9E977AC48EF}"/>
+              </a:ext>
+            </a:extLst>
+          </p:cNvPr>
+          <p:cNvPicPr>
+            <a:picLocks noChangeAspect="1"/>
+          </p:cNvPicPr>
+          <p:nvPr/>
+        </p:nvPicPr>
+        <p:blipFill>
+          <a:blip r:embed="rId8"/>
+          <a:stretch>
+            <a:fillRect/>
+          </a:stretch>
+        </p:blipFill>
+        <p:spPr>
+          <a:xfrm>
+            <a:off x="7278129" y="4876238"/>
+            <a:ext cx="2056027" cy="457933"/>
           </a:xfrm>
           <a:prstGeom prst="rect">
             <a:avLst/>
@@ -8015,8 +9185,8 @@
         </p:nvSpPr>
         <p:spPr>
           <a:xfrm>
-            <a:off x="639837" y="635489"/>
-            <a:ext cx="9952020" cy="2123658"/>
+            <a:off x="639838" y="635489"/>
+            <a:ext cx="10617168" cy="5293757"/>
           </a:xfrm>
           <a:prstGeom prst="rect">
             <a:avLst/>
@@ -8024,23 +9194,23 @@
           <a:noFill/>
         </p:spPr>
         <p:txBody>
-          <a:bodyPr wrap="none" rtlCol="0">
+          <a:bodyPr wrap="square" rtlCol="0">
             <a:spAutoFit/>
           </a:bodyPr>
           <a:lstStyle/>
           <a:p>
             <a:r>
-              <a:rPr lang="es-ES" sz="2400" u="sng" dirty="0"/>
+              <a:rPr lang="es-ES" sz="3200" b="1" u="sng" dirty="0"/>
               <a:t>Ventajas de Virtual </a:t>
             </a:r>
             <a:r>
-              <a:rPr lang="es-ES" sz="2400" u="sng" dirty="0" err="1"/>
+              <a:rPr lang="es-ES" sz="3200" b="1" u="sng" dirty="0" err="1"/>
               <a:t>Threads</a:t>
             </a:r>
-            <a:r>
-              <a:rPr lang="es-ES" sz="2400" u="sng" dirty="0"/>
-              <a:t> en el servidor</a:t>
-            </a:r>
+            <a:endParaRPr lang="es-ES" sz="3200" b="1" u="sng" dirty="0"/>
+          </a:p>
+          <a:p>
+            <a:endParaRPr lang="es-ES" sz="2400" u="sng" dirty="0"/>
           </a:p>
           <a:p>
             <a:pPr marL="319088" indent="-131763">
@@ -8048,39 +9218,39 @@
               <a:buChar char="•"/>
             </a:pPr>
             <a:r>
-              <a:rPr lang="es-ES" dirty="0"/>
+              <a:rPr lang="es-ES" sz="2400" dirty="0"/>
               <a:t>Escalabilidad: </a:t>
             </a:r>
             <a:r>
-              <a:rPr lang="es-ES" dirty="0" err="1"/>
+              <a:rPr lang="es-ES" sz="2400" dirty="0" err="1"/>
               <a:t>Tomcat</a:t>
             </a:r>
             <a:r>
-              <a:rPr lang="es-ES" dirty="0"/>
+              <a:rPr lang="es-ES" sz="2400" dirty="0"/>
               <a:t> puede manejar miles de </a:t>
             </a:r>
             <a:r>
-              <a:rPr lang="es-ES" dirty="0" err="1"/>
+              <a:rPr lang="es-ES" sz="2400" dirty="0" err="1"/>
               <a:t>requests</a:t>
             </a:r>
             <a:r>
-              <a:rPr lang="es-ES" dirty="0"/>
+              <a:rPr lang="es-ES" sz="2400" dirty="0"/>
               <a:t> concurrentes (vs ~200 con </a:t>
             </a:r>
             <a:r>
-              <a:rPr lang="es-ES" dirty="0" err="1"/>
+              <a:rPr lang="es-ES" sz="2400" dirty="0" err="1"/>
               <a:t>platform</a:t>
             </a:r>
             <a:r>
-              <a:rPr lang="es-ES" dirty="0"/>
+              <a:rPr lang="es-ES" sz="2400" dirty="0"/>
               <a:t> </a:t>
             </a:r>
             <a:r>
-              <a:rPr lang="es-ES" dirty="0" err="1"/>
+              <a:rPr lang="es-ES" sz="2400" dirty="0" err="1"/>
               <a:t>threads</a:t>
             </a:r>
             <a:r>
-              <a:rPr lang="es-ES" dirty="0"/>
+              <a:rPr lang="es-ES" sz="2400" dirty="0"/>
               <a:t>) </a:t>
             </a:r>
           </a:p>
@@ -8089,34 +9259,7 @@
               <a:buFont typeface="Arial" panose="020B0604020202020204" pitchFamily="34" charset="0"/>
               <a:buChar char="•"/>
             </a:pPr>
-            <a:r>
-              <a:rPr lang="es-ES" dirty="0"/>
-              <a:t>Memoria eficiente: Cada virtual </a:t>
-            </a:r>
-            <a:r>
-              <a:rPr lang="es-ES" dirty="0" err="1"/>
-              <a:t>thread</a:t>
-            </a:r>
-            <a:r>
-              <a:rPr lang="es-ES" dirty="0"/>
-              <a:t> consume ~1KB (vs ~1MB de </a:t>
-            </a:r>
-            <a:r>
-              <a:rPr lang="es-ES" dirty="0" err="1"/>
-              <a:t>platform</a:t>
-            </a:r>
-            <a:r>
-              <a:rPr lang="es-ES" dirty="0"/>
-              <a:t> </a:t>
-            </a:r>
-            <a:r>
-              <a:rPr lang="es-ES" dirty="0" err="1"/>
-              <a:t>threads</a:t>
-            </a:r>
-            <a:r>
-              <a:rPr lang="es-ES" dirty="0"/>
-              <a:t>) </a:t>
-            </a:r>
+            <a:endParaRPr lang="es-ES" sz="2400" dirty="0"/>
           </a:p>
           <a:p>
             <a:pPr marL="319088" indent="-131763">
@@ -8124,24 +9267,32 @@
               <a:buChar char="•"/>
             </a:pPr>
             <a:r>
-              <a:rPr lang="es-ES" dirty="0"/>
-              <a:t>Sin límite de </a:t>
-            </a:r>
-            <a:r>
-              <a:rPr lang="es-ES" dirty="0" err="1"/>
+              <a:rPr lang="es-ES" sz="2400" dirty="0"/>
+              <a:t>Memoria eficiente: Cada virtual </a:t>
+            </a:r>
+            <a:r>
+              <a:rPr lang="es-ES" sz="2400" dirty="0" err="1"/>
+              <a:t>thread</a:t>
+            </a:r>
+            <a:r>
+              <a:rPr lang="es-ES" sz="2400" dirty="0"/>
+              <a:t> consume ~1KB (vs ~1MB de </a:t>
+            </a:r>
+            <a:r>
+              <a:rPr lang="es-ES" sz="2400" dirty="0" err="1"/>
+              <a:t>platform</a:t>
+            </a:r>
+            <a:r>
+              <a:rPr lang="es-ES" sz="2400" dirty="0"/>
+              <a:t> </a:t>
+            </a:r>
+            <a:r>
+              <a:rPr lang="es-ES" sz="2400" dirty="0" err="1"/>
               <a:t>threads</a:t>
             </a:r>
             <a:r>
-              <a:rPr lang="es-ES" dirty="0"/>
-              <a:t>: No hay pool </a:t>
-            </a:r>
-            <a:r>
-              <a:rPr lang="es-ES" dirty="0" err="1"/>
-              <a:t>size</a:t>
-            </a:r>
-            <a:r>
-              <a:rPr lang="es-ES" dirty="0"/>
-              <a:t> que configurar </a:t>
+              <a:rPr lang="es-ES" sz="2400" dirty="0"/>
+              <a:t>) </a:t>
             </a:r>
           </a:p>
           <a:p>
@@ -8149,18 +9300,7 @@
               <a:buFont typeface="Arial" panose="020B0604020202020204" pitchFamily="34" charset="0"/>
               <a:buChar char="•"/>
             </a:pPr>
-            <a:r>
-              <a:rPr lang="es-ES" dirty="0"/>
-              <a:t>CPU eficiente: Mejor utilización en escenarios I/O-</a:t>
-            </a:r>
-            <a:r>
-              <a:rPr lang="es-ES" dirty="0" err="1"/>
-              <a:t>bound</a:t>
-            </a:r>
-            <a:r>
-              <a:rPr lang="es-ES" dirty="0"/>
-              <a:t> </a:t>
-            </a:r>
+            <a:endParaRPr lang="es-ES" sz="2400" dirty="0"/>
           </a:p>
           <a:p>
             <a:pPr marL="319088" indent="-131763">
@@ -8168,7 +9308,57 @@
               <a:buChar char="•"/>
             </a:pPr>
             <a:r>
-              <a:rPr lang="es-ES" dirty="0"/>
+              <a:rPr lang="es-ES" sz="2400" dirty="0"/>
+              <a:t>No hay pool </a:t>
+            </a:r>
+            <a:r>
+              <a:rPr lang="es-ES" sz="2400" dirty="0" err="1"/>
+              <a:t>size</a:t>
+            </a:r>
+            <a:r>
+              <a:rPr lang="es-ES" sz="2400" dirty="0"/>
+              <a:t> que configurar </a:t>
+            </a:r>
+          </a:p>
+          <a:p>
+            <a:pPr marL="319088" indent="-131763">
+              <a:buFont typeface="Arial" panose="020B0604020202020204" pitchFamily="34" charset="0"/>
+              <a:buChar char="•"/>
+            </a:pPr>
+            <a:endParaRPr lang="es-ES" sz="2400" dirty="0"/>
+          </a:p>
+          <a:p>
+            <a:pPr marL="319088" indent="-131763">
+              <a:buFont typeface="Arial" panose="020B0604020202020204" pitchFamily="34" charset="0"/>
+              <a:buChar char="•"/>
+            </a:pPr>
+            <a:r>
+              <a:rPr lang="es-ES" sz="2400" dirty="0"/>
+              <a:t>CPU eficiente: Mejor utilización en escenarios I/O-</a:t>
+            </a:r>
+            <a:r>
+              <a:rPr lang="es-ES" sz="2400" dirty="0" err="1"/>
+              <a:t>bound</a:t>
+            </a:r>
+            <a:r>
+              <a:rPr lang="es-ES" sz="2400" dirty="0"/>
+              <a:t> </a:t>
+            </a:r>
+          </a:p>
+          <a:p>
+            <a:pPr marL="319088" indent="-131763">
+              <a:buFont typeface="Arial" panose="020B0604020202020204" pitchFamily="34" charset="0"/>
+              <a:buChar char="•"/>
+            </a:pPr>
+            <a:endParaRPr lang="es-ES" sz="2400" dirty="0"/>
+          </a:p>
+          <a:p>
+            <a:pPr marL="319088" indent="-131763">
+              <a:buFont typeface="Arial" panose="020B0604020202020204" pitchFamily="34" charset="0"/>
+              <a:buChar char="•"/>
+            </a:pPr>
+            <a:r>
+              <a:rPr lang="es-ES" sz="2400" dirty="0"/>
               <a:t>Código simple: Sin cambios en el código del servicio</a:t>
             </a:r>
           </a:p>

--- a/Presentation1.pptx
+++ b/Presentation1.pptx
@@ -4157,14 +4157,14 @@
           <p:nvPr>
             <p:extLst>
               <p:ext uri="{D42A27DB-BD31-4B8C-83A1-F6EECF244321}">
-                <p14:modId xmlns:p14="http://schemas.microsoft.com/office/powerpoint/2010/main" val="3100079147"/>
+                <p14:modId xmlns:p14="http://schemas.microsoft.com/office/powerpoint/2010/main" val="234230381"/>
               </p:ext>
             </p:extLst>
           </p:nvPr>
         </p:nvGraphicFramePr>
         <p:xfrm>
           <a:off x="516925" y="232484"/>
-          <a:ext cx="10515600" cy="5730240"/>
+          <a:ext cx="10515600" cy="5181600"/>
         </p:xfrm>
         <a:graphic>
           <a:graphicData uri="http://schemas.openxmlformats.org/drawingml/2006/table">
@@ -4353,8 +4353,12 @@
                     <a:lstStyle/>
                     <a:p>
                       <a:r>
-                        <a:rPr lang="es-ES"/>
-                        <a:t>newVirtualThreadPerTaskExecutor()</a:t>
+                        <a:rPr lang="es-ES" sz="1200" dirty="0" err="1"/>
+                        <a:t>newVirtualThreadPerTaskExecutor</a:t>
+                      </a:r>
+                      <a:r>
+                        <a:rPr lang="es-ES" sz="1200" dirty="0"/>
+                        <a:t>()</a:t>
                       </a:r>
                     </a:p>
                   </a:txBody>
@@ -4594,9 +4598,22 @@
                     <a:lstStyle/>
                     <a:p>
                       <a:r>
-                        <a:rPr lang="es-ES"/>
-                        <a:t>Imperativo (igual que blocking)</a:t>
-                      </a:r>
+                        <a:rPr lang="es-ES" dirty="0"/>
+                        <a:t>Imperativo </a:t>
+                      </a:r>
+                      <a:r>
+                        <a:rPr lang="es-ES" sz="1200" dirty="0"/>
+                        <a:t>(igual que </a:t>
+                      </a:r>
+                      <a:r>
+                        <a:rPr lang="es-ES" sz="1200" dirty="0" err="1"/>
+                        <a:t>blocking</a:t>
+                      </a:r>
+                      <a:r>
+                        <a:rPr lang="es-ES" sz="1200" dirty="0"/>
+                        <a:t>)</a:t>
+                      </a:r>
+                      <a:endParaRPr lang="es-ES" dirty="0"/>
                     </a:p>
                   </a:txBody>
                   <a:tcPr anchor="ctr"/>
@@ -4614,8 +4631,8 @@
                     <a:lstStyle/>
                     <a:p>
                       <a:r>
-                        <a:rPr lang="es-ES"/>
-                        <a:t>Cambios respecto al anterior</a:t>
+                        <a:rPr lang="es-ES" dirty="0"/>
+                        <a:t>Cambios respecto a otro anterior</a:t>
                       </a:r>
                     </a:p>
                   </a:txBody>
@@ -5123,7 +5140,7 @@
                           <a:ea typeface="+mn-ea"/>
                           <a:cs typeface="+mn-cs"/>
                         </a:rPr>
-                        <a:t>Muy</a:t>
+                        <a:t>Concurrencia</a:t>
                       </a:r>
                       <a:r>
                         <a:rPr lang="en-GB" sz="1800" kern="1200" dirty="0">
@@ -5134,7 +5151,7 @@
                           <a:ea typeface="+mn-ea"/>
                           <a:cs typeface="+mn-cs"/>
                         </a:rPr>
-                        <a:t> alto</a:t>
+                        <a:t> x10</a:t>
                       </a:r>
                     </a:p>
                   </a:txBody>
@@ -7880,36 +7897,6 @@
           </a:prstGeom>
         </p:spPr>
       </p:pic>
-      <p:pic>
-        <p:nvPicPr>
-          <p:cNvPr id="16" name="Picture 15">
-            <a:extLst>
-              <a:ext uri="{FF2B5EF4-FFF2-40B4-BE49-F238E27FC236}">
-                <a16:creationId xmlns:a16="http://schemas.microsoft.com/office/drawing/2014/main" id="{1A7A88E6-ECD2-5D4E-9301-9F7BB4CC6526}"/>
-              </a:ext>
-            </a:extLst>
-          </p:cNvPr>
-          <p:cNvPicPr>
-            <a:picLocks noChangeAspect="1"/>
-          </p:cNvPicPr>
-          <p:nvPr/>
-        </p:nvPicPr>
-        <p:blipFill>
-          <a:blip r:embed="rId3"/>
-          <a:stretch>
-            <a:fillRect/>
-          </a:stretch>
-        </p:blipFill>
-        <p:spPr>
-          <a:xfrm>
-            <a:off x="3860127" y="688157"/>
-            <a:ext cx="8150641" cy="2017960"/>
-          </a:xfrm>
-          <a:prstGeom prst="rect">
-            <a:avLst/>
-          </a:prstGeom>
-        </p:spPr>
-      </p:pic>
       <p:grpSp>
         <p:nvGrpSpPr>
           <p:cNvPr id="4" name="Group 3">
@@ -7945,7 +7932,7 @@
             <p:nvPr/>
           </p:nvPicPr>
           <p:blipFill>
-            <a:blip r:embed="rId4"/>
+            <a:blip r:embed="rId3"/>
             <a:stretch>
               <a:fillRect/>
             </a:stretch>
@@ -7975,7 +7962,7 @@
             <p:nvPr/>
           </p:nvPicPr>
           <p:blipFill>
-            <a:blip r:embed="rId5"/>
+            <a:blip r:embed="rId4"/>
             <a:stretch>
               <a:fillRect/>
             </a:stretch>
@@ -8026,7 +8013,7 @@
             <p:nvPr/>
           </p:nvPicPr>
           <p:blipFill>
-            <a:blip r:embed="rId6"/>
+            <a:blip r:embed="rId5"/>
             <a:stretch>
               <a:fillRect/>
             </a:stretch>
@@ -8056,7 +8043,7 @@
             <p:nvPr/>
           </p:nvPicPr>
           <p:blipFill>
-            <a:blip r:embed="rId7"/>
+            <a:blip r:embed="rId6"/>
             <a:stretch>
               <a:fillRect/>
             </a:stretch>
@@ -8236,6 +8223,87 @@
           </a:p>
         </p:txBody>
       </p:sp>
+      <p:grpSp>
+        <p:nvGrpSpPr>
+          <p:cNvPr id="6" name="Group 5">
+            <a:extLst>
+              <a:ext uri="{FF2B5EF4-FFF2-40B4-BE49-F238E27FC236}">
+                <a16:creationId xmlns:a16="http://schemas.microsoft.com/office/drawing/2014/main" id="{07AD2752-BD9A-5742-BADC-9255861BBF77}"/>
+              </a:ext>
+            </a:extLst>
+          </p:cNvPr>
+          <p:cNvGrpSpPr/>
+          <p:nvPr/>
+        </p:nvGrpSpPr>
+        <p:grpSpPr>
+          <a:xfrm>
+            <a:off x="3860127" y="688157"/>
+            <a:ext cx="8150641" cy="2017960"/>
+            <a:chOff x="3860127" y="688157"/>
+            <a:chExt cx="8150641" cy="2017960"/>
+          </a:xfrm>
+        </p:grpSpPr>
+        <p:pic>
+          <p:nvPicPr>
+            <p:cNvPr id="16" name="Picture 15">
+              <a:extLst>
+                <a:ext uri="{FF2B5EF4-FFF2-40B4-BE49-F238E27FC236}">
+                  <a16:creationId xmlns:a16="http://schemas.microsoft.com/office/drawing/2014/main" id="{1A7A88E6-ECD2-5D4E-9301-9F7BB4CC6526}"/>
+                </a:ext>
+              </a:extLst>
+            </p:cNvPr>
+            <p:cNvPicPr>
+              <a:picLocks noChangeAspect="1"/>
+            </p:cNvPicPr>
+            <p:nvPr/>
+          </p:nvPicPr>
+          <p:blipFill>
+            <a:blip r:embed="rId7"/>
+            <a:stretch>
+              <a:fillRect/>
+            </a:stretch>
+          </p:blipFill>
+          <p:spPr>
+            <a:xfrm>
+              <a:off x="3860127" y="688157"/>
+              <a:ext cx="8150641" cy="2017960"/>
+            </a:xfrm>
+            <a:prstGeom prst="rect">
+              <a:avLst/>
+            </a:prstGeom>
+          </p:spPr>
+        </p:pic>
+        <p:pic>
+          <p:nvPicPr>
+            <p:cNvPr id="2" name="Picture 1">
+              <a:extLst>
+                <a:ext uri="{FF2B5EF4-FFF2-40B4-BE49-F238E27FC236}">
+                  <a16:creationId xmlns:a16="http://schemas.microsoft.com/office/drawing/2014/main" id="{62C226F1-11A4-2C4D-9425-0F9E4085B094}"/>
+                </a:ext>
+              </a:extLst>
+            </p:cNvPr>
+            <p:cNvPicPr>
+              <a:picLocks noChangeAspect="1"/>
+            </p:cNvPicPr>
+            <p:nvPr/>
+          </p:nvPicPr>
+          <p:blipFill>
+            <a:blip r:embed="rId8"/>
+            <a:stretch>
+              <a:fillRect/>
+            </a:stretch>
+          </p:blipFill>
+          <p:spPr>
+            <a:xfrm>
+              <a:off x="8460522" y="1334403"/>
+              <a:ext cx="2341864" cy="326772"/>
+            </a:xfrm>
+            <a:prstGeom prst="rect">
+              <a:avLst/>
+            </a:prstGeom>
+          </p:spPr>
+        </p:pic>
+      </p:grpSp>
     </p:spTree>
     <p:extLst>
       <p:ext uri="{BB962C8B-B14F-4D97-AF65-F5344CB8AC3E}">
@@ -8637,10 +8705,10 @@
       </p:pic>
       <p:pic>
         <p:nvPicPr>
-          <p:cNvPr id="9" name="Picture 8">
+          <p:cNvPr id="4" name="Picture 3">
             <a:extLst>
               <a:ext uri="{FF2B5EF4-FFF2-40B4-BE49-F238E27FC236}">
-                <a16:creationId xmlns:a16="http://schemas.microsoft.com/office/drawing/2014/main" id="{E84088DB-35AC-674A-82C0-66EBB6E89117}"/>
+                <a16:creationId xmlns:a16="http://schemas.microsoft.com/office/drawing/2014/main" id="{B6CACC89-DF50-6C4D-B9CC-371D1AED31D0}"/>
               </a:ext>
             </a:extLst>
           </p:cNvPr>
@@ -8657,38 +8725,8 @@
         </p:blipFill>
         <p:spPr>
           <a:xfrm>
-            <a:off x="148280" y="4671995"/>
-            <a:ext cx="8031894" cy="1953500"/>
-          </a:xfrm>
-          <a:prstGeom prst="rect">
-            <a:avLst/>
-          </a:prstGeom>
-        </p:spPr>
-      </p:pic>
-      <p:pic>
-        <p:nvPicPr>
-          <p:cNvPr id="10" name="Picture 9">
-            <a:extLst>
-              <a:ext uri="{FF2B5EF4-FFF2-40B4-BE49-F238E27FC236}">
-                <a16:creationId xmlns:a16="http://schemas.microsoft.com/office/drawing/2014/main" id="{EB021FAC-2688-6049-B101-A58DB83F9AD3}"/>
-              </a:ext>
-            </a:extLst>
-          </p:cNvPr>
-          <p:cNvPicPr>
-            <a:picLocks noChangeAspect="1"/>
-          </p:cNvPicPr>
-          <p:nvPr/>
-        </p:nvPicPr>
-        <p:blipFill>
-          <a:blip r:embed="rId7"/>
-          <a:stretch>
-            <a:fillRect/>
-          </a:stretch>
-        </p:blipFill>
-        <p:spPr>
-          <a:xfrm>
-            <a:off x="1767016" y="5436804"/>
-            <a:ext cx="2269009" cy="423881"/>
+            <a:off x="172994" y="4634430"/>
+            <a:ext cx="8788102" cy="2141011"/>
           </a:xfrm>
           <a:prstGeom prst="rect">
             <a:avLst/>
@@ -9141,6 +9179,36 @@
           </a:prstGeom>
         </p:spPr>
       </p:pic>
+      <p:pic>
+        <p:nvPicPr>
+          <p:cNvPr id="4" name="Picture 3">
+            <a:extLst>
+              <a:ext uri="{FF2B5EF4-FFF2-40B4-BE49-F238E27FC236}">
+                <a16:creationId xmlns:a16="http://schemas.microsoft.com/office/drawing/2014/main" id="{8D6A1889-9C25-3C4A-9DB4-A57997657751}"/>
+              </a:ext>
+            </a:extLst>
+          </p:cNvPr>
+          <p:cNvPicPr>
+            <a:picLocks noChangeAspect="1"/>
+          </p:cNvPicPr>
+          <p:nvPr/>
+        </p:nvPicPr>
+        <p:blipFill>
+          <a:blip r:embed="rId9"/>
+          <a:stretch>
+            <a:fillRect/>
+          </a:stretch>
+        </p:blipFill>
+        <p:spPr>
+          <a:xfrm>
+            <a:off x="502131" y="4710559"/>
+            <a:ext cx="2835288" cy="527736"/>
+          </a:xfrm>
+          <a:prstGeom prst="rect">
+            <a:avLst/>
+          </a:prstGeom>
+        </p:spPr>
+      </p:pic>
     </p:spTree>
     <p:extLst>
       <p:ext uri="{BB962C8B-B14F-4D97-AF65-F5344CB8AC3E}">
@@ -9219,15 +9287,7 @@
             </a:pPr>
             <a:r>
               <a:rPr lang="es-ES" sz="2400" dirty="0"/>
-              <a:t>Escalabilidad: </a:t>
-            </a:r>
-            <a:r>
-              <a:rPr lang="es-ES" sz="2400" dirty="0" err="1"/>
-              <a:t>Tomcat</a:t>
-            </a:r>
-            <a:r>
-              <a:rPr lang="es-ES" sz="2400" dirty="0"/>
-              <a:t> puede manejar miles de </a:t>
+              <a:t>Escalabilidad: Los servidores pueden manejar miles de </a:t>
             </a:r>
             <a:r>
               <a:rPr lang="es-ES" sz="2400" dirty="0" err="1"/>
